--- a/REPORTS/06_thesis_defense_presentation/Plekhanov_thesis_defense_ECM_parameter_optimization_polytech.pptx
+++ b/REPORTS/06_thesis_defense_presentation/Plekhanov_thesis_defense_ECM_parameter_optimization_polytech.pptx
@@ -5,7 +5,7 @@
     <p:sldMasterId id="2147483648" r:id="rId1"/>
   </p:sldMasterIdLst>
   <p:notesMasterIdLst>
-    <p:notesMasterId r:id="rId21"/>
+    <p:notesMasterId r:id="rId20"/>
   </p:notesMasterIdLst>
   <p:sldIdLst>
     <p:sldId id="256" r:id="rId2"/>
@@ -26,7 +26,6 @@
     <p:sldId id="271" r:id="rId17"/>
     <p:sldId id="272" r:id="rId18"/>
     <p:sldId id="273" r:id="rId19"/>
-    <p:sldId id="274" r:id="rId20"/>
   </p:sldIdLst>
   <p:sldSz cx="12192000" cy="6858000"/>
   <p:notesSz cx="6858000" cy="9144000"/>
@@ -348,7 +347,7 @@
           <a:bodyPr/>
           <a:lstStyle/>
           <a:p>
-            <a:endParaRPr/>
+            <a:endParaRPr dirty="0"/>
           </a:p>
         </p:txBody>
       </p:sp>
@@ -1054,81 +1053,6 @@
 </p:notes>
 </file>
 
-<file path=ppt/notesSlides/notesSlide19.xml><?xml version="1.0" encoding="utf-8"?>
-<p:notes xmlns:a="http://schemas.openxmlformats.org/drawingml/2006/main" xmlns:r="http://schemas.openxmlformats.org/officeDocument/2006/relationships" xmlns:p="http://schemas.openxmlformats.org/presentationml/2006/main">
-  <p:cSld>
-    <p:spTree>
-      <p:nvGrpSpPr>
-        <p:cNvPr id="1" name=""/>
-        <p:cNvGrpSpPr/>
-        <p:nvPr/>
-      </p:nvGrpSpPr>
-      <p:grpSpPr>
-        <a:xfrm>
-          <a:off x="0" y="0"/>
-          <a:ext cx="0" cy="0"/>
-          <a:chOff x="0" y="0"/>
-          <a:chExt cx="0" cy="0"/>
-        </a:xfrm>
-      </p:grpSpPr>
-      <p:sp>
-        <p:nvSpPr>
-          <p:cNvPr id="2" name="Slide Image Placeholder 1"/>
-          <p:cNvSpPr>
-            <a:spLocks noGrp="1" noRot="1" noChangeAspect="1"/>
-          </p:cNvSpPr>
-          <p:nvPr>
-            <p:ph type="sldImg"/>
-          </p:nvPr>
-        </p:nvSpPr>
-        <p:spPr/>
-      </p:sp>
-      <p:sp>
-        <p:nvSpPr>
-          <p:cNvPr id="3" name="Notes Placeholder 2"/>
-          <p:cNvSpPr>
-            <a:spLocks noGrp="1"/>
-          </p:cNvSpPr>
-          <p:nvPr>
-            <p:ph type="body" idx="1"/>
-          </p:nvPr>
-        </p:nvSpPr>
-        <p:spPr/>
-        <p:txBody>
-          <a:bodyPr/>
-          <a:lstStyle/>
-          <a:p>
-            <a:endParaRPr dirty="0"/>
-          </a:p>
-        </p:txBody>
-      </p:sp>
-      <p:sp>
-        <p:nvSpPr>
-          <p:cNvPr id="4" name="Slide Number Placeholder 3"/>
-          <p:cNvSpPr>
-            <a:spLocks noGrp="1"/>
-          </p:cNvSpPr>
-          <p:nvPr>
-            <p:ph type="sldNum" idx="5"/>
-          </p:nvPr>
-        </p:nvSpPr>
-        <p:spPr/>
-        <p:txBody>
-          <a:bodyPr/>
-          <a:lstStyle/>
-          <a:p>
-            <a:endParaRPr/>
-          </a:p>
-        </p:txBody>
-      </p:sp>
-    </p:spTree>
-  </p:cSld>
-  <p:clrMapOvr>
-    <a:masterClrMapping/>
-  </p:clrMapOvr>
-</p:notes>
-</file>
-
 <file path=ppt/notesSlides/notesSlide2.xml><?xml version="1.0" encoding="utf-8"?>
 <p:notes xmlns:a="http://schemas.openxmlformats.org/drawingml/2006/main" xmlns:r="http://schemas.openxmlformats.org/officeDocument/2006/relationships" xmlns:p="http://schemas.openxmlformats.org/presentationml/2006/main">
   <p:cSld>
@@ -1248,7 +1172,7 @@
           <a:bodyPr/>
           <a:lstStyle/>
           <a:p>
-            <a:endParaRPr/>
+            <a:endParaRPr dirty="0"/>
           </a:p>
         </p:txBody>
       </p:sp>
@@ -2159,8 +2083,8 @@
         </p:blipFill>
         <p:spPr>
           <a:xfrm>
-            <a:off x="8239125" y="439103"/>
-            <a:ext cx="2857500" cy="1074420"/>
+            <a:off x="7905750" y="381000"/>
+            <a:ext cx="4029795" cy="1515203"/>
           </a:xfrm>
           <a:prstGeom prst="rect">
             <a:avLst/>
@@ -2563,7 +2487,7 @@
         </p:nvSpPr>
         <p:spPr>
           <a:xfrm>
-            <a:off x="1047750" y="4875502"/>
+            <a:off x="1047749" y="5338762"/>
             <a:ext cx="3429000" cy="66675"/>
           </a:xfrm>
           <a:prstGeom prst="rect">
@@ -2596,7 +2520,7 @@
         </p:nvSpPr>
         <p:spPr>
           <a:xfrm>
-            <a:off x="4476750" y="4875502"/>
+            <a:off x="4476749" y="5386388"/>
             <a:ext cx="2047875" cy="66675"/>
           </a:xfrm>
           <a:prstGeom prst="rect">
@@ -2629,7 +2553,7 @@
         </p:nvSpPr>
         <p:spPr>
           <a:xfrm>
-            <a:off x="6524625" y="4875502"/>
+            <a:off x="6524624" y="5338762"/>
             <a:ext cx="1381125" cy="66675"/>
           </a:xfrm>
           <a:prstGeom prst="rect">
@@ -2802,7 +2726,29 @@
                 <a:ea typeface="Onest"/>
                 <a:cs typeface="Onest"/>
               </a:rPr>
-              <a:t>: </a:t>
+              <a:t>:</a:t>
+            </a:r>
+            <a:r>
+              <a:rPr lang="ru-RU" sz="1800" b="0" dirty="0">
+                <a:solidFill>
+                  <a:srgbClr val="15181F"/>
+                </a:solidFill>
+                <a:latin typeface="Onest"/>
+                <a:ea typeface="Onest"/>
+                <a:cs typeface="Onest"/>
+              </a:rPr>
+              <a:t> к.ф.-м.н.</a:t>
+            </a:r>
+            <a:r>
+              <a:rPr sz="1800" b="0" dirty="0">
+                <a:solidFill>
+                  <a:srgbClr val="15181F"/>
+                </a:solidFill>
+                <a:latin typeface="Onest"/>
+                <a:ea typeface="Onest"/>
+                <a:cs typeface="Onest"/>
+              </a:rPr>
+              <a:t> </a:t>
             </a:r>
             <a:r>
               <a:rPr sz="1800" b="0" dirty="0" err="1">
@@ -4584,21 +4530,126 @@
       </p:sp>
       <p:sp>
         <p:nvSpPr>
-          <p:cNvPr id="31" name="Прямоугольник 30">
-            <a:extLst>
-              <a:ext uri="{FF2B5EF4-FFF2-40B4-BE49-F238E27FC236}">
-                <a16:creationId xmlns:a16="http://schemas.microsoft.com/office/drawing/2014/main" id="{B4A5FD79-4B20-4C21-80D7-0DBACBD80680}"/>
-              </a:ext>
-            </a:extLst>
-          </p:cNvPr>
-          <p:cNvSpPr>
-            <a:spLocks noGrp="1"/>
-          </p:cNvSpPr>
-          <p:nvPr/>
-        </p:nvSpPr>
-        <p:spPr>
-          <a:xfrm>
-            <a:off x="514350" y="6248400"/>
+          <p:cNvPr id="32" name="Прямоугольник 31">
+            <a:extLst>
+              <a:ext uri="{FF2B5EF4-FFF2-40B4-BE49-F238E27FC236}">
+                <a16:creationId xmlns:a16="http://schemas.microsoft.com/office/drawing/2014/main" id="{51A7169A-68F7-4BBE-A15A-13A8F4797787}"/>
+              </a:ext>
+            </a:extLst>
+          </p:cNvPr>
+          <p:cNvSpPr>
+            <a:spLocks noGrp="1"/>
+          </p:cNvSpPr>
+          <p:nvPr/>
+        </p:nvSpPr>
+        <p:spPr>
+          <a:xfrm>
+            <a:off x="10763250" y="6419850"/>
+            <a:ext cx="914400" cy="266700"/>
+          </a:xfrm>
+          <a:prstGeom prst="rect">
+            <a:avLst/>
+          </a:prstGeom>
+          <a:solidFill>
+            <a:srgbClr val="000000">
+              <a:alpha val="0"/>
+            </a:srgbClr>
+          </a:solidFill>
+          <a:ln w="0">
+            <a:solidFill>
+              <a:srgbClr val="000000">
+                <a:alpha val="0"/>
+              </a:srgbClr>
+            </a:solidFill>
+            <a:prstDash val="solid"/>
+          </a:ln>
+        </p:spPr>
+        <p:txBody>
+          <a:bodyPr lIns="0" tIns="0" rIns="0" bIns="0" anchor="t"/>
+          <a:lstStyle/>
+          <a:p>
+            <a:pPr algn="r">
+              <a:defRPr sz="1800" b="1">
+                <a:solidFill>
+                  <a:srgbClr val="15181F"/>
+                </a:solidFill>
+                <a:latin typeface="Onest"/>
+                <a:ea typeface="Onest"/>
+                <a:cs typeface="Onest"/>
+              </a:defRPr>
+            </a:pPr>
+            <a:r>
+              <a:rPr sz="1800" b="1" dirty="0">
+                <a:solidFill>
+                  <a:srgbClr val="15181F"/>
+                </a:solidFill>
+                <a:latin typeface="Onest"/>
+                <a:ea typeface="Onest"/>
+                <a:cs typeface="Onest"/>
+              </a:rPr>
+              <a:t>10/1</a:t>
+            </a:r>
+            <a:r>
+              <a:rPr lang="ru-RU" sz="1800" b="1" dirty="0">
+                <a:solidFill>
+                  <a:srgbClr val="15181F"/>
+                </a:solidFill>
+                <a:latin typeface="Onest"/>
+                <a:ea typeface="Onest"/>
+                <a:cs typeface="Onest"/>
+              </a:rPr>
+              <a:t>8</a:t>
+            </a:r>
+            <a:endParaRPr sz="1800" b="1" dirty="0">
+              <a:solidFill>
+                <a:srgbClr val="15181F"/>
+              </a:solidFill>
+              <a:latin typeface="Onest"/>
+              <a:ea typeface="Onest"/>
+              <a:cs typeface="Onest"/>
+            </a:endParaRPr>
+          </a:p>
+        </p:txBody>
+      </p:sp>
+      <p:pic>
+        <p:nvPicPr>
+          <p:cNvPr id="33" name="Рисунок 32"/>
+          <p:cNvPicPr>
+            <a:picLocks noChangeAspect="1"/>
+          </p:cNvPicPr>
+          <p:nvPr/>
+        </p:nvPicPr>
+        <p:blipFill>
+          <a:blip r:embed="rId3"/>
+          <a:stretch/>
+        </p:blipFill>
+        <p:spPr>
+          <a:xfrm>
+            <a:off x="9572625" y="248984"/>
+            <a:ext cx="2095500" cy="787908"/>
+          </a:xfrm>
+          <a:prstGeom prst="rect">
+            <a:avLst/>
+          </a:prstGeom>
+        </p:spPr>
+      </p:pic>
+      <p:sp>
+        <p:nvSpPr>
+          <p:cNvPr id="34" name="Прямоугольник 33">
+            <a:extLst>
+              <a:ext uri="{FF2B5EF4-FFF2-40B4-BE49-F238E27FC236}">
+                <a16:creationId xmlns:a16="http://schemas.microsoft.com/office/drawing/2014/main" id="{1926F1AE-E08A-4244-B8E8-33DB8091521E}"/>
+              </a:ext>
+            </a:extLst>
+          </p:cNvPr>
+          <p:cNvSpPr>
+            <a:spLocks noGrp="1"/>
+          </p:cNvSpPr>
+          <p:nvPr/>
+        </p:nvSpPr>
+        <p:spPr>
+          <a:xfrm>
+            <a:off x="514350" y="6304429"/>
             <a:ext cx="9810750" cy="457200"/>
           </a:xfrm>
           <a:prstGeom prst="rect">
@@ -4633,16 +4684,178 @@
               </a:defRPr>
             </a:pPr>
             <a:r>
-              <a:rPr sz="1800" b="0">
-                <a:solidFill>
-                  <a:srgbClr val="58606B"/>
-                </a:solidFill>
-                <a:latin typeface="Onest"/>
-                <a:ea typeface="Onest"/>
-                <a:cs typeface="Onest"/>
-              </a:rPr>
-              <a:t>Автоматизация подбора параметров алгоритма факторизации больших чисел с применением</a:t>
-            </a:r>
+              <a:rPr sz="1600" b="0" dirty="0" err="1">
+                <a:solidFill>
+                  <a:srgbClr val="58606B"/>
+                </a:solidFill>
+                <a:latin typeface="Onest"/>
+                <a:ea typeface="Onest"/>
+                <a:cs typeface="Onest"/>
+              </a:rPr>
+              <a:t>Автоматизация</a:t>
+            </a:r>
+            <a:r>
+              <a:rPr sz="1600" b="0" dirty="0">
+                <a:solidFill>
+                  <a:srgbClr val="58606B"/>
+                </a:solidFill>
+                <a:latin typeface="Onest"/>
+                <a:ea typeface="Onest"/>
+                <a:cs typeface="Onest"/>
+              </a:rPr>
+              <a:t> </a:t>
+            </a:r>
+            <a:r>
+              <a:rPr sz="1600" b="0" dirty="0" err="1">
+                <a:solidFill>
+                  <a:srgbClr val="58606B"/>
+                </a:solidFill>
+                <a:latin typeface="Onest"/>
+                <a:ea typeface="Onest"/>
+                <a:cs typeface="Onest"/>
+              </a:rPr>
+              <a:t>подбора</a:t>
+            </a:r>
+            <a:r>
+              <a:rPr sz="1600" b="0" dirty="0">
+                <a:solidFill>
+                  <a:srgbClr val="58606B"/>
+                </a:solidFill>
+                <a:latin typeface="Onest"/>
+                <a:ea typeface="Onest"/>
+                <a:cs typeface="Onest"/>
+              </a:rPr>
+              <a:t> </a:t>
+            </a:r>
+            <a:r>
+              <a:rPr sz="1600" b="0" dirty="0" err="1">
+                <a:solidFill>
+                  <a:srgbClr val="58606B"/>
+                </a:solidFill>
+                <a:latin typeface="Onest"/>
+                <a:ea typeface="Onest"/>
+                <a:cs typeface="Onest"/>
+              </a:rPr>
+              <a:t>параметров</a:t>
+            </a:r>
+            <a:r>
+              <a:rPr sz="1600" b="0" dirty="0">
+                <a:solidFill>
+                  <a:srgbClr val="58606B"/>
+                </a:solidFill>
+                <a:latin typeface="Onest"/>
+                <a:ea typeface="Onest"/>
+                <a:cs typeface="Onest"/>
+              </a:rPr>
+              <a:t> </a:t>
+            </a:r>
+            <a:r>
+              <a:rPr sz="1600" b="0" dirty="0" err="1">
+                <a:solidFill>
+                  <a:srgbClr val="58606B"/>
+                </a:solidFill>
+                <a:latin typeface="Onest"/>
+                <a:ea typeface="Onest"/>
+                <a:cs typeface="Onest"/>
+              </a:rPr>
+              <a:t>алгоритма</a:t>
+            </a:r>
+            <a:r>
+              <a:rPr sz="1600" b="0" dirty="0">
+                <a:solidFill>
+                  <a:srgbClr val="58606B"/>
+                </a:solidFill>
+                <a:latin typeface="Onest"/>
+                <a:ea typeface="Onest"/>
+                <a:cs typeface="Onest"/>
+              </a:rPr>
+              <a:t> </a:t>
+            </a:r>
+            <a:r>
+              <a:rPr sz="1600" b="0" dirty="0" err="1">
+                <a:solidFill>
+                  <a:srgbClr val="58606B"/>
+                </a:solidFill>
+                <a:latin typeface="Onest"/>
+                <a:ea typeface="Onest"/>
+                <a:cs typeface="Onest"/>
+              </a:rPr>
+              <a:t>факторизации</a:t>
+            </a:r>
+            <a:r>
+              <a:rPr sz="1600" b="0" dirty="0">
+                <a:solidFill>
+                  <a:srgbClr val="58606B"/>
+                </a:solidFill>
+                <a:latin typeface="Onest"/>
+                <a:ea typeface="Onest"/>
+                <a:cs typeface="Onest"/>
+              </a:rPr>
+              <a:t> </a:t>
+            </a:r>
+            <a:r>
+              <a:rPr sz="1600" b="0" dirty="0" err="1">
+                <a:solidFill>
+                  <a:srgbClr val="58606B"/>
+                </a:solidFill>
+                <a:latin typeface="Onest"/>
+                <a:ea typeface="Onest"/>
+                <a:cs typeface="Onest"/>
+              </a:rPr>
+              <a:t>больших</a:t>
+            </a:r>
+            <a:r>
+              <a:rPr sz="1600" b="0" dirty="0">
+                <a:solidFill>
+                  <a:srgbClr val="58606B"/>
+                </a:solidFill>
+                <a:latin typeface="Onest"/>
+                <a:ea typeface="Onest"/>
+                <a:cs typeface="Onest"/>
+              </a:rPr>
+              <a:t> </a:t>
+            </a:r>
+            <a:r>
+              <a:rPr sz="1600" b="0" dirty="0" err="1">
+                <a:solidFill>
+                  <a:srgbClr val="58606B"/>
+                </a:solidFill>
+                <a:latin typeface="Onest"/>
+                <a:ea typeface="Onest"/>
+                <a:cs typeface="Onest"/>
+              </a:rPr>
+              <a:t>чисел</a:t>
+            </a:r>
+            <a:r>
+              <a:rPr sz="1600" b="0" dirty="0">
+                <a:solidFill>
+                  <a:srgbClr val="58606B"/>
+                </a:solidFill>
+                <a:latin typeface="Onest"/>
+                <a:ea typeface="Onest"/>
+                <a:cs typeface="Onest"/>
+              </a:rPr>
+              <a:t> с </a:t>
+            </a:r>
+            <a:r>
+              <a:rPr sz="1600" b="0" dirty="0" err="1">
+                <a:solidFill>
+                  <a:srgbClr val="58606B"/>
+                </a:solidFill>
+                <a:latin typeface="Onest"/>
+                <a:ea typeface="Onest"/>
+                <a:cs typeface="Onest"/>
+              </a:rPr>
+              <a:t>применением</a:t>
+            </a:r>
+            <a:endParaRPr sz="1600" b="0" dirty="0">
+              <a:solidFill>
+                <a:srgbClr val="58606B"/>
+              </a:solidFill>
+              <a:latin typeface="Onest"/>
+              <a:ea typeface="Onest"/>
+              <a:cs typeface="Onest"/>
+            </a:endParaRPr>
           </a:p>
           <a:p>
             <a:pPr algn="l">
@@ -4656,105 +4869,159 @@
               </a:defRPr>
             </a:pPr>
             <a:r>
-              <a:rPr sz="1800" b="0">
-                <a:solidFill>
-                  <a:srgbClr val="58606B"/>
-                </a:solidFill>
-                <a:latin typeface="Onest"/>
-                <a:ea typeface="Onest"/>
-                <a:cs typeface="Onest"/>
-              </a:rPr>
-              <a:t>эллиптических кривых на основе эвристических методов оптимизации</a:t>
-            </a:r>
+              <a:rPr sz="1600" b="0" dirty="0" err="1">
+                <a:solidFill>
+                  <a:srgbClr val="58606B"/>
+                </a:solidFill>
+                <a:latin typeface="Onest"/>
+                <a:ea typeface="Onest"/>
+                <a:cs typeface="Onest"/>
+              </a:rPr>
+              <a:t>эллиптических</a:t>
+            </a:r>
+            <a:r>
+              <a:rPr sz="1600" b="0" dirty="0">
+                <a:solidFill>
+                  <a:srgbClr val="58606B"/>
+                </a:solidFill>
+                <a:latin typeface="Onest"/>
+                <a:ea typeface="Onest"/>
+                <a:cs typeface="Onest"/>
+              </a:rPr>
+              <a:t> </a:t>
+            </a:r>
+            <a:r>
+              <a:rPr sz="1600" b="0" dirty="0" err="1">
+                <a:solidFill>
+                  <a:srgbClr val="58606B"/>
+                </a:solidFill>
+                <a:latin typeface="Onest"/>
+                <a:ea typeface="Onest"/>
+                <a:cs typeface="Onest"/>
+              </a:rPr>
+              <a:t>кривых</a:t>
+            </a:r>
+            <a:r>
+              <a:rPr sz="1600" b="0" dirty="0">
+                <a:solidFill>
+                  <a:srgbClr val="58606B"/>
+                </a:solidFill>
+                <a:latin typeface="Onest"/>
+                <a:ea typeface="Onest"/>
+                <a:cs typeface="Onest"/>
+              </a:rPr>
+              <a:t> </a:t>
+            </a:r>
+            <a:r>
+              <a:rPr sz="1600" b="0" dirty="0" err="1">
+                <a:solidFill>
+                  <a:srgbClr val="58606B"/>
+                </a:solidFill>
+                <a:latin typeface="Onest"/>
+                <a:ea typeface="Onest"/>
+                <a:cs typeface="Onest"/>
+              </a:rPr>
+              <a:t>на</a:t>
+            </a:r>
+            <a:r>
+              <a:rPr sz="1600" b="0" dirty="0">
+                <a:solidFill>
+                  <a:srgbClr val="58606B"/>
+                </a:solidFill>
+                <a:latin typeface="Onest"/>
+                <a:ea typeface="Onest"/>
+                <a:cs typeface="Onest"/>
+              </a:rPr>
+              <a:t> </a:t>
+            </a:r>
+            <a:r>
+              <a:rPr sz="1600" b="0" dirty="0" err="1">
+                <a:solidFill>
+                  <a:srgbClr val="58606B"/>
+                </a:solidFill>
+                <a:latin typeface="Onest"/>
+                <a:ea typeface="Onest"/>
+                <a:cs typeface="Onest"/>
+              </a:rPr>
+              <a:t>основе</a:t>
+            </a:r>
+            <a:r>
+              <a:rPr sz="1600" b="0" dirty="0">
+                <a:solidFill>
+                  <a:srgbClr val="58606B"/>
+                </a:solidFill>
+                <a:latin typeface="Onest"/>
+                <a:ea typeface="Onest"/>
+                <a:cs typeface="Onest"/>
+              </a:rPr>
+              <a:t> </a:t>
+            </a:r>
+            <a:r>
+              <a:rPr sz="1600" b="0" dirty="0" err="1">
+                <a:solidFill>
+                  <a:srgbClr val="58606B"/>
+                </a:solidFill>
+                <a:latin typeface="Onest"/>
+                <a:ea typeface="Onest"/>
+                <a:cs typeface="Onest"/>
+              </a:rPr>
+              <a:t>эвристических</a:t>
+            </a:r>
+            <a:r>
+              <a:rPr sz="1600" b="0" dirty="0">
+                <a:solidFill>
+                  <a:srgbClr val="58606B"/>
+                </a:solidFill>
+                <a:latin typeface="Onest"/>
+                <a:ea typeface="Onest"/>
+                <a:cs typeface="Onest"/>
+              </a:rPr>
+              <a:t> </a:t>
+            </a:r>
+            <a:r>
+              <a:rPr sz="1600" b="0" dirty="0" err="1">
+                <a:solidFill>
+                  <a:srgbClr val="58606B"/>
+                </a:solidFill>
+                <a:latin typeface="Onest"/>
+                <a:ea typeface="Onest"/>
+                <a:cs typeface="Onest"/>
+              </a:rPr>
+              <a:t>методов</a:t>
+            </a:r>
+            <a:r>
+              <a:rPr sz="1600" b="0" dirty="0">
+                <a:solidFill>
+                  <a:srgbClr val="58606B"/>
+                </a:solidFill>
+                <a:latin typeface="Onest"/>
+                <a:ea typeface="Onest"/>
+                <a:cs typeface="Onest"/>
+              </a:rPr>
+              <a:t> </a:t>
+            </a:r>
+            <a:r>
+              <a:rPr sz="1600" b="0" dirty="0" err="1">
+                <a:solidFill>
+                  <a:srgbClr val="58606B"/>
+                </a:solidFill>
+                <a:latin typeface="Onest"/>
+                <a:ea typeface="Onest"/>
+                <a:cs typeface="Onest"/>
+              </a:rPr>
+              <a:t>оптимизации</a:t>
+            </a:r>
+            <a:endParaRPr sz="1600" b="0" dirty="0">
+              <a:solidFill>
+                <a:srgbClr val="58606B"/>
+              </a:solidFill>
+              <a:latin typeface="Onest"/>
+              <a:ea typeface="Onest"/>
+              <a:cs typeface="Onest"/>
+            </a:endParaRPr>
           </a:p>
         </p:txBody>
       </p:sp>
-      <p:sp>
-        <p:nvSpPr>
-          <p:cNvPr id="32" name="Прямоугольник 31">
-            <a:extLst>
-              <a:ext uri="{FF2B5EF4-FFF2-40B4-BE49-F238E27FC236}">
-                <a16:creationId xmlns:a16="http://schemas.microsoft.com/office/drawing/2014/main" id="{51A7169A-68F7-4BBE-A15A-13A8F4797787}"/>
-              </a:ext>
-            </a:extLst>
-          </p:cNvPr>
-          <p:cNvSpPr>
-            <a:spLocks noGrp="1"/>
-          </p:cNvSpPr>
-          <p:nvPr/>
-        </p:nvSpPr>
-        <p:spPr>
-          <a:xfrm>
-            <a:off x="10763250" y="6419850"/>
-            <a:ext cx="914400" cy="266700"/>
-          </a:xfrm>
-          <a:prstGeom prst="rect">
-            <a:avLst/>
-          </a:prstGeom>
-          <a:solidFill>
-            <a:srgbClr val="000000">
-              <a:alpha val="0"/>
-            </a:srgbClr>
-          </a:solidFill>
-          <a:ln w="0">
-            <a:solidFill>
-              <a:srgbClr val="000000">
-                <a:alpha val="0"/>
-              </a:srgbClr>
-            </a:solidFill>
-            <a:prstDash val="solid"/>
-          </a:ln>
-        </p:spPr>
-        <p:txBody>
-          <a:bodyPr lIns="0" tIns="0" rIns="0" bIns="0" anchor="t"/>
-          <a:lstStyle/>
-          <a:p>
-            <a:pPr algn="r">
-              <a:defRPr sz="1800" b="1">
-                <a:solidFill>
-                  <a:srgbClr val="15181F"/>
-                </a:solidFill>
-                <a:latin typeface="Onest"/>
-                <a:ea typeface="Onest"/>
-                <a:cs typeface="Onest"/>
-              </a:defRPr>
-            </a:pPr>
-            <a:r>
-              <a:rPr sz="1800" b="1">
-                <a:solidFill>
-                  <a:srgbClr val="15181F"/>
-                </a:solidFill>
-                <a:latin typeface="Onest"/>
-                <a:ea typeface="Onest"/>
-                <a:cs typeface="Onest"/>
-              </a:rPr>
-              <a:t>10/19</a:t>
-            </a:r>
-          </a:p>
-        </p:txBody>
-      </p:sp>
-      <p:pic>
-        <p:nvPicPr>
-          <p:cNvPr id="33" name="Рисунок 32"/>
-          <p:cNvPicPr>
-            <a:picLocks noChangeAspect="1"/>
-          </p:cNvPicPr>
-          <p:nvPr/>
-        </p:nvPicPr>
-        <p:blipFill>
-          <a:blip r:embed="rId3"/>
-          <a:stretch/>
-        </p:blipFill>
-        <p:spPr>
-          <a:xfrm>
-            <a:off x="9572625" y="248984"/>
-            <a:ext cx="2095500" cy="787908"/>
-          </a:xfrm>
-          <a:prstGeom prst="rect">
-            <a:avLst/>
-          </a:prstGeom>
-        </p:spPr>
-      </p:pic>
     </p:spTree>
     <p:extLst>
       <p:ext uri="{BB962C8B-B14F-4D97-AF65-F5344CB8AC3E}">
@@ -5799,21 +6066,126 @@
       </p:sp>
       <p:sp>
         <p:nvSpPr>
-          <p:cNvPr id="23" name="Прямоугольник 22">
-            <a:extLst>
-              <a:ext uri="{FF2B5EF4-FFF2-40B4-BE49-F238E27FC236}">
-                <a16:creationId xmlns:a16="http://schemas.microsoft.com/office/drawing/2014/main" id="{62400EED-CB6E-4960-B2E7-5AE4B9B349BA}"/>
-              </a:ext>
-            </a:extLst>
-          </p:cNvPr>
-          <p:cNvSpPr>
-            <a:spLocks noGrp="1"/>
-          </p:cNvSpPr>
-          <p:nvPr/>
-        </p:nvSpPr>
-        <p:spPr>
-          <a:xfrm>
-            <a:off x="514350" y="6248400"/>
+          <p:cNvPr id="24" name="Прямоугольник 23">
+            <a:extLst>
+              <a:ext uri="{FF2B5EF4-FFF2-40B4-BE49-F238E27FC236}">
+                <a16:creationId xmlns:a16="http://schemas.microsoft.com/office/drawing/2014/main" id="{119A7D16-E9A0-4B3E-9972-815B026BE0FF}"/>
+              </a:ext>
+            </a:extLst>
+          </p:cNvPr>
+          <p:cNvSpPr>
+            <a:spLocks noGrp="1"/>
+          </p:cNvSpPr>
+          <p:nvPr/>
+        </p:nvSpPr>
+        <p:spPr>
+          <a:xfrm>
+            <a:off x="10763250" y="6419850"/>
+            <a:ext cx="914400" cy="266700"/>
+          </a:xfrm>
+          <a:prstGeom prst="rect">
+            <a:avLst/>
+          </a:prstGeom>
+          <a:solidFill>
+            <a:srgbClr val="000000">
+              <a:alpha val="0"/>
+            </a:srgbClr>
+          </a:solidFill>
+          <a:ln w="0">
+            <a:solidFill>
+              <a:srgbClr val="000000">
+                <a:alpha val="0"/>
+              </a:srgbClr>
+            </a:solidFill>
+            <a:prstDash val="solid"/>
+          </a:ln>
+        </p:spPr>
+        <p:txBody>
+          <a:bodyPr lIns="0" tIns="0" rIns="0" bIns="0" anchor="t"/>
+          <a:lstStyle/>
+          <a:p>
+            <a:pPr algn="r">
+              <a:defRPr sz="1800" b="1">
+                <a:solidFill>
+                  <a:srgbClr val="15181F"/>
+                </a:solidFill>
+                <a:latin typeface="Onest"/>
+                <a:ea typeface="Onest"/>
+                <a:cs typeface="Onest"/>
+              </a:defRPr>
+            </a:pPr>
+            <a:r>
+              <a:rPr sz="1800" b="1" dirty="0">
+                <a:solidFill>
+                  <a:srgbClr val="15181F"/>
+                </a:solidFill>
+                <a:latin typeface="Onest"/>
+                <a:ea typeface="Onest"/>
+                <a:cs typeface="Onest"/>
+              </a:rPr>
+              <a:t>11/1</a:t>
+            </a:r>
+            <a:r>
+              <a:rPr lang="ru-RU" sz="1800" b="1" dirty="0">
+                <a:solidFill>
+                  <a:srgbClr val="15181F"/>
+                </a:solidFill>
+                <a:latin typeface="Onest"/>
+                <a:ea typeface="Onest"/>
+                <a:cs typeface="Onest"/>
+              </a:rPr>
+              <a:t>8</a:t>
+            </a:r>
+            <a:endParaRPr sz="1800" b="1" dirty="0">
+              <a:solidFill>
+                <a:srgbClr val="15181F"/>
+              </a:solidFill>
+              <a:latin typeface="Onest"/>
+              <a:ea typeface="Onest"/>
+              <a:cs typeface="Onest"/>
+            </a:endParaRPr>
+          </a:p>
+        </p:txBody>
+      </p:sp>
+      <p:pic>
+        <p:nvPicPr>
+          <p:cNvPr id="25" name="Рисунок 24"/>
+          <p:cNvPicPr>
+            <a:picLocks noChangeAspect="1"/>
+          </p:cNvPicPr>
+          <p:nvPr/>
+        </p:nvPicPr>
+        <p:blipFill>
+          <a:blip r:embed="rId5"/>
+          <a:stretch/>
+        </p:blipFill>
+        <p:spPr>
+          <a:xfrm>
+            <a:off x="9572625" y="248984"/>
+            <a:ext cx="2095500" cy="787908"/>
+          </a:xfrm>
+          <a:prstGeom prst="rect">
+            <a:avLst/>
+          </a:prstGeom>
+        </p:spPr>
+      </p:pic>
+      <p:sp>
+        <p:nvSpPr>
+          <p:cNvPr id="26" name="Прямоугольник 25">
+            <a:extLst>
+              <a:ext uri="{FF2B5EF4-FFF2-40B4-BE49-F238E27FC236}">
+                <a16:creationId xmlns:a16="http://schemas.microsoft.com/office/drawing/2014/main" id="{167F8375-0E36-4562-978D-DC7915526099}"/>
+              </a:ext>
+            </a:extLst>
+          </p:cNvPr>
+          <p:cNvSpPr>
+            <a:spLocks noGrp="1"/>
+          </p:cNvSpPr>
+          <p:nvPr/>
+        </p:nvSpPr>
+        <p:spPr>
+          <a:xfrm>
+            <a:off x="514350" y="6304429"/>
             <a:ext cx="9810750" cy="457200"/>
           </a:xfrm>
           <a:prstGeom prst="rect">
@@ -5848,16 +6220,178 @@
               </a:defRPr>
             </a:pPr>
             <a:r>
-              <a:rPr sz="1800" b="0">
-                <a:solidFill>
-                  <a:srgbClr val="58606B"/>
-                </a:solidFill>
-                <a:latin typeface="Onest"/>
-                <a:ea typeface="Onest"/>
-                <a:cs typeface="Onest"/>
-              </a:rPr>
-              <a:t>Автоматизация подбора параметров алгоритма факторизации больших чисел с применением</a:t>
-            </a:r>
+              <a:rPr sz="1600" b="0" dirty="0" err="1">
+                <a:solidFill>
+                  <a:srgbClr val="58606B"/>
+                </a:solidFill>
+                <a:latin typeface="Onest"/>
+                <a:ea typeface="Onest"/>
+                <a:cs typeface="Onest"/>
+              </a:rPr>
+              <a:t>Автоматизация</a:t>
+            </a:r>
+            <a:r>
+              <a:rPr sz="1600" b="0" dirty="0">
+                <a:solidFill>
+                  <a:srgbClr val="58606B"/>
+                </a:solidFill>
+                <a:latin typeface="Onest"/>
+                <a:ea typeface="Onest"/>
+                <a:cs typeface="Onest"/>
+              </a:rPr>
+              <a:t> </a:t>
+            </a:r>
+            <a:r>
+              <a:rPr sz="1600" b="0" dirty="0" err="1">
+                <a:solidFill>
+                  <a:srgbClr val="58606B"/>
+                </a:solidFill>
+                <a:latin typeface="Onest"/>
+                <a:ea typeface="Onest"/>
+                <a:cs typeface="Onest"/>
+              </a:rPr>
+              <a:t>подбора</a:t>
+            </a:r>
+            <a:r>
+              <a:rPr sz="1600" b="0" dirty="0">
+                <a:solidFill>
+                  <a:srgbClr val="58606B"/>
+                </a:solidFill>
+                <a:latin typeface="Onest"/>
+                <a:ea typeface="Onest"/>
+                <a:cs typeface="Onest"/>
+              </a:rPr>
+              <a:t> </a:t>
+            </a:r>
+            <a:r>
+              <a:rPr sz="1600" b="0" dirty="0" err="1">
+                <a:solidFill>
+                  <a:srgbClr val="58606B"/>
+                </a:solidFill>
+                <a:latin typeface="Onest"/>
+                <a:ea typeface="Onest"/>
+                <a:cs typeface="Onest"/>
+              </a:rPr>
+              <a:t>параметров</a:t>
+            </a:r>
+            <a:r>
+              <a:rPr sz="1600" b="0" dirty="0">
+                <a:solidFill>
+                  <a:srgbClr val="58606B"/>
+                </a:solidFill>
+                <a:latin typeface="Onest"/>
+                <a:ea typeface="Onest"/>
+                <a:cs typeface="Onest"/>
+              </a:rPr>
+              <a:t> </a:t>
+            </a:r>
+            <a:r>
+              <a:rPr sz="1600" b="0" dirty="0" err="1">
+                <a:solidFill>
+                  <a:srgbClr val="58606B"/>
+                </a:solidFill>
+                <a:latin typeface="Onest"/>
+                <a:ea typeface="Onest"/>
+                <a:cs typeface="Onest"/>
+              </a:rPr>
+              <a:t>алгоритма</a:t>
+            </a:r>
+            <a:r>
+              <a:rPr sz="1600" b="0" dirty="0">
+                <a:solidFill>
+                  <a:srgbClr val="58606B"/>
+                </a:solidFill>
+                <a:latin typeface="Onest"/>
+                <a:ea typeface="Onest"/>
+                <a:cs typeface="Onest"/>
+              </a:rPr>
+              <a:t> </a:t>
+            </a:r>
+            <a:r>
+              <a:rPr sz="1600" b="0" dirty="0" err="1">
+                <a:solidFill>
+                  <a:srgbClr val="58606B"/>
+                </a:solidFill>
+                <a:latin typeface="Onest"/>
+                <a:ea typeface="Onest"/>
+                <a:cs typeface="Onest"/>
+              </a:rPr>
+              <a:t>факторизации</a:t>
+            </a:r>
+            <a:r>
+              <a:rPr sz="1600" b="0" dirty="0">
+                <a:solidFill>
+                  <a:srgbClr val="58606B"/>
+                </a:solidFill>
+                <a:latin typeface="Onest"/>
+                <a:ea typeface="Onest"/>
+                <a:cs typeface="Onest"/>
+              </a:rPr>
+              <a:t> </a:t>
+            </a:r>
+            <a:r>
+              <a:rPr sz="1600" b="0" dirty="0" err="1">
+                <a:solidFill>
+                  <a:srgbClr val="58606B"/>
+                </a:solidFill>
+                <a:latin typeface="Onest"/>
+                <a:ea typeface="Onest"/>
+                <a:cs typeface="Onest"/>
+              </a:rPr>
+              <a:t>больших</a:t>
+            </a:r>
+            <a:r>
+              <a:rPr sz="1600" b="0" dirty="0">
+                <a:solidFill>
+                  <a:srgbClr val="58606B"/>
+                </a:solidFill>
+                <a:latin typeface="Onest"/>
+                <a:ea typeface="Onest"/>
+                <a:cs typeface="Onest"/>
+              </a:rPr>
+              <a:t> </a:t>
+            </a:r>
+            <a:r>
+              <a:rPr sz="1600" b="0" dirty="0" err="1">
+                <a:solidFill>
+                  <a:srgbClr val="58606B"/>
+                </a:solidFill>
+                <a:latin typeface="Onest"/>
+                <a:ea typeface="Onest"/>
+                <a:cs typeface="Onest"/>
+              </a:rPr>
+              <a:t>чисел</a:t>
+            </a:r>
+            <a:r>
+              <a:rPr sz="1600" b="0" dirty="0">
+                <a:solidFill>
+                  <a:srgbClr val="58606B"/>
+                </a:solidFill>
+                <a:latin typeface="Onest"/>
+                <a:ea typeface="Onest"/>
+                <a:cs typeface="Onest"/>
+              </a:rPr>
+              <a:t> с </a:t>
+            </a:r>
+            <a:r>
+              <a:rPr sz="1600" b="0" dirty="0" err="1">
+                <a:solidFill>
+                  <a:srgbClr val="58606B"/>
+                </a:solidFill>
+                <a:latin typeface="Onest"/>
+                <a:ea typeface="Onest"/>
+                <a:cs typeface="Onest"/>
+              </a:rPr>
+              <a:t>применением</a:t>
+            </a:r>
+            <a:endParaRPr sz="1600" b="0" dirty="0">
+              <a:solidFill>
+                <a:srgbClr val="58606B"/>
+              </a:solidFill>
+              <a:latin typeface="Onest"/>
+              <a:ea typeface="Onest"/>
+              <a:cs typeface="Onest"/>
+            </a:endParaRPr>
           </a:p>
           <a:p>
             <a:pPr algn="l">
@@ -5871,105 +6405,159 @@
               </a:defRPr>
             </a:pPr>
             <a:r>
-              <a:rPr sz="1800" b="0">
-                <a:solidFill>
-                  <a:srgbClr val="58606B"/>
-                </a:solidFill>
-                <a:latin typeface="Onest"/>
-                <a:ea typeface="Onest"/>
-                <a:cs typeface="Onest"/>
-              </a:rPr>
-              <a:t>эллиптических кривых на основе эвристических методов оптимизации</a:t>
-            </a:r>
+              <a:rPr sz="1600" b="0" dirty="0" err="1">
+                <a:solidFill>
+                  <a:srgbClr val="58606B"/>
+                </a:solidFill>
+                <a:latin typeface="Onest"/>
+                <a:ea typeface="Onest"/>
+                <a:cs typeface="Onest"/>
+              </a:rPr>
+              <a:t>эллиптических</a:t>
+            </a:r>
+            <a:r>
+              <a:rPr sz="1600" b="0" dirty="0">
+                <a:solidFill>
+                  <a:srgbClr val="58606B"/>
+                </a:solidFill>
+                <a:latin typeface="Onest"/>
+                <a:ea typeface="Onest"/>
+                <a:cs typeface="Onest"/>
+              </a:rPr>
+              <a:t> </a:t>
+            </a:r>
+            <a:r>
+              <a:rPr sz="1600" b="0" dirty="0" err="1">
+                <a:solidFill>
+                  <a:srgbClr val="58606B"/>
+                </a:solidFill>
+                <a:latin typeface="Onest"/>
+                <a:ea typeface="Onest"/>
+                <a:cs typeface="Onest"/>
+              </a:rPr>
+              <a:t>кривых</a:t>
+            </a:r>
+            <a:r>
+              <a:rPr sz="1600" b="0" dirty="0">
+                <a:solidFill>
+                  <a:srgbClr val="58606B"/>
+                </a:solidFill>
+                <a:latin typeface="Onest"/>
+                <a:ea typeface="Onest"/>
+                <a:cs typeface="Onest"/>
+              </a:rPr>
+              <a:t> </a:t>
+            </a:r>
+            <a:r>
+              <a:rPr sz="1600" b="0" dirty="0" err="1">
+                <a:solidFill>
+                  <a:srgbClr val="58606B"/>
+                </a:solidFill>
+                <a:latin typeface="Onest"/>
+                <a:ea typeface="Onest"/>
+                <a:cs typeface="Onest"/>
+              </a:rPr>
+              <a:t>на</a:t>
+            </a:r>
+            <a:r>
+              <a:rPr sz="1600" b="0" dirty="0">
+                <a:solidFill>
+                  <a:srgbClr val="58606B"/>
+                </a:solidFill>
+                <a:latin typeface="Onest"/>
+                <a:ea typeface="Onest"/>
+                <a:cs typeface="Onest"/>
+              </a:rPr>
+              <a:t> </a:t>
+            </a:r>
+            <a:r>
+              <a:rPr sz="1600" b="0" dirty="0" err="1">
+                <a:solidFill>
+                  <a:srgbClr val="58606B"/>
+                </a:solidFill>
+                <a:latin typeface="Onest"/>
+                <a:ea typeface="Onest"/>
+                <a:cs typeface="Onest"/>
+              </a:rPr>
+              <a:t>основе</a:t>
+            </a:r>
+            <a:r>
+              <a:rPr sz="1600" b="0" dirty="0">
+                <a:solidFill>
+                  <a:srgbClr val="58606B"/>
+                </a:solidFill>
+                <a:latin typeface="Onest"/>
+                <a:ea typeface="Onest"/>
+                <a:cs typeface="Onest"/>
+              </a:rPr>
+              <a:t> </a:t>
+            </a:r>
+            <a:r>
+              <a:rPr sz="1600" b="0" dirty="0" err="1">
+                <a:solidFill>
+                  <a:srgbClr val="58606B"/>
+                </a:solidFill>
+                <a:latin typeface="Onest"/>
+                <a:ea typeface="Onest"/>
+                <a:cs typeface="Onest"/>
+              </a:rPr>
+              <a:t>эвристических</a:t>
+            </a:r>
+            <a:r>
+              <a:rPr sz="1600" b="0" dirty="0">
+                <a:solidFill>
+                  <a:srgbClr val="58606B"/>
+                </a:solidFill>
+                <a:latin typeface="Onest"/>
+                <a:ea typeface="Onest"/>
+                <a:cs typeface="Onest"/>
+              </a:rPr>
+              <a:t> </a:t>
+            </a:r>
+            <a:r>
+              <a:rPr sz="1600" b="0" dirty="0" err="1">
+                <a:solidFill>
+                  <a:srgbClr val="58606B"/>
+                </a:solidFill>
+                <a:latin typeface="Onest"/>
+                <a:ea typeface="Onest"/>
+                <a:cs typeface="Onest"/>
+              </a:rPr>
+              <a:t>методов</a:t>
+            </a:r>
+            <a:r>
+              <a:rPr sz="1600" b="0" dirty="0">
+                <a:solidFill>
+                  <a:srgbClr val="58606B"/>
+                </a:solidFill>
+                <a:latin typeface="Onest"/>
+                <a:ea typeface="Onest"/>
+                <a:cs typeface="Onest"/>
+              </a:rPr>
+              <a:t> </a:t>
+            </a:r>
+            <a:r>
+              <a:rPr sz="1600" b="0" dirty="0" err="1">
+                <a:solidFill>
+                  <a:srgbClr val="58606B"/>
+                </a:solidFill>
+                <a:latin typeface="Onest"/>
+                <a:ea typeface="Onest"/>
+                <a:cs typeface="Onest"/>
+              </a:rPr>
+              <a:t>оптимизации</a:t>
+            </a:r>
+            <a:endParaRPr sz="1600" b="0" dirty="0">
+              <a:solidFill>
+                <a:srgbClr val="58606B"/>
+              </a:solidFill>
+              <a:latin typeface="Onest"/>
+              <a:ea typeface="Onest"/>
+              <a:cs typeface="Onest"/>
+            </a:endParaRPr>
           </a:p>
         </p:txBody>
       </p:sp>
-      <p:sp>
-        <p:nvSpPr>
-          <p:cNvPr id="24" name="Прямоугольник 23">
-            <a:extLst>
-              <a:ext uri="{FF2B5EF4-FFF2-40B4-BE49-F238E27FC236}">
-                <a16:creationId xmlns:a16="http://schemas.microsoft.com/office/drawing/2014/main" id="{119A7D16-E9A0-4B3E-9972-815B026BE0FF}"/>
-              </a:ext>
-            </a:extLst>
-          </p:cNvPr>
-          <p:cNvSpPr>
-            <a:spLocks noGrp="1"/>
-          </p:cNvSpPr>
-          <p:nvPr/>
-        </p:nvSpPr>
-        <p:spPr>
-          <a:xfrm>
-            <a:off x="10763250" y="6419850"/>
-            <a:ext cx="914400" cy="266700"/>
-          </a:xfrm>
-          <a:prstGeom prst="rect">
-            <a:avLst/>
-          </a:prstGeom>
-          <a:solidFill>
-            <a:srgbClr val="000000">
-              <a:alpha val="0"/>
-            </a:srgbClr>
-          </a:solidFill>
-          <a:ln w="0">
-            <a:solidFill>
-              <a:srgbClr val="000000">
-                <a:alpha val="0"/>
-              </a:srgbClr>
-            </a:solidFill>
-            <a:prstDash val="solid"/>
-          </a:ln>
-        </p:spPr>
-        <p:txBody>
-          <a:bodyPr lIns="0" tIns="0" rIns="0" bIns="0" anchor="t"/>
-          <a:lstStyle/>
-          <a:p>
-            <a:pPr algn="r">
-              <a:defRPr sz="1800" b="1">
-                <a:solidFill>
-                  <a:srgbClr val="15181F"/>
-                </a:solidFill>
-                <a:latin typeface="Onest"/>
-                <a:ea typeface="Onest"/>
-                <a:cs typeface="Onest"/>
-              </a:defRPr>
-            </a:pPr>
-            <a:r>
-              <a:rPr sz="1800" b="1">
-                <a:solidFill>
-                  <a:srgbClr val="15181F"/>
-                </a:solidFill>
-                <a:latin typeface="Onest"/>
-                <a:ea typeface="Onest"/>
-                <a:cs typeface="Onest"/>
-              </a:rPr>
-              <a:t>11/19</a:t>
-            </a:r>
-          </a:p>
-        </p:txBody>
-      </p:sp>
-      <p:pic>
-        <p:nvPicPr>
-          <p:cNvPr id="25" name="Рисунок 24"/>
-          <p:cNvPicPr>
-            <a:picLocks noChangeAspect="1"/>
-          </p:cNvPicPr>
-          <p:nvPr/>
-        </p:nvPicPr>
-        <p:blipFill>
-          <a:blip r:embed="rId5"/>
-          <a:stretch/>
-        </p:blipFill>
-        <p:spPr>
-          <a:xfrm>
-            <a:off x="9572625" y="248984"/>
-            <a:ext cx="2095500" cy="787908"/>
-          </a:xfrm>
-          <a:prstGeom prst="rect">
-            <a:avLst/>
-          </a:prstGeom>
-        </p:spPr>
-      </p:pic>
     </p:spTree>
     <p:extLst>
       <p:ext uri="{BB962C8B-B14F-4D97-AF65-F5344CB8AC3E}">
@@ -9613,21 +10201,126 @@
       </p:sp>
       <p:sp>
         <p:nvSpPr>
-          <p:cNvPr id="77" name="Прямоугольник 76">
-            <a:extLst>
-              <a:ext uri="{FF2B5EF4-FFF2-40B4-BE49-F238E27FC236}">
-                <a16:creationId xmlns:a16="http://schemas.microsoft.com/office/drawing/2014/main" id="{E2E759EF-B7A5-4330-AAAF-8C1E1A58B561}"/>
-              </a:ext>
-            </a:extLst>
-          </p:cNvPr>
-          <p:cNvSpPr>
-            <a:spLocks noGrp="1"/>
-          </p:cNvSpPr>
-          <p:nvPr/>
-        </p:nvSpPr>
-        <p:spPr>
-          <a:xfrm>
-            <a:off x="514350" y="6248400"/>
+          <p:cNvPr id="78" name="Прямоугольник 77">
+            <a:extLst>
+              <a:ext uri="{FF2B5EF4-FFF2-40B4-BE49-F238E27FC236}">
+                <a16:creationId xmlns:a16="http://schemas.microsoft.com/office/drawing/2014/main" id="{3F705C1C-5BE2-419A-845A-1687343841C7}"/>
+              </a:ext>
+            </a:extLst>
+          </p:cNvPr>
+          <p:cNvSpPr>
+            <a:spLocks noGrp="1"/>
+          </p:cNvSpPr>
+          <p:nvPr/>
+        </p:nvSpPr>
+        <p:spPr>
+          <a:xfrm>
+            <a:off x="10763250" y="6419850"/>
+            <a:ext cx="914400" cy="266700"/>
+          </a:xfrm>
+          <a:prstGeom prst="rect">
+            <a:avLst/>
+          </a:prstGeom>
+          <a:solidFill>
+            <a:srgbClr val="000000">
+              <a:alpha val="0"/>
+            </a:srgbClr>
+          </a:solidFill>
+          <a:ln w="0">
+            <a:solidFill>
+              <a:srgbClr val="000000">
+                <a:alpha val="0"/>
+              </a:srgbClr>
+            </a:solidFill>
+            <a:prstDash val="solid"/>
+          </a:ln>
+        </p:spPr>
+        <p:txBody>
+          <a:bodyPr lIns="0" tIns="0" rIns="0" bIns="0" anchor="t"/>
+          <a:lstStyle/>
+          <a:p>
+            <a:pPr algn="r">
+              <a:defRPr sz="1800" b="1">
+                <a:solidFill>
+                  <a:srgbClr val="15181F"/>
+                </a:solidFill>
+                <a:latin typeface="Onest"/>
+                <a:ea typeface="Onest"/>
+                <a:cs typeface="Onest"/>
+              </a:defRPr>
+            </a:pPr>
+            <a:r>
+              <a:rPr sz="1800" b="1" dirty="0">
+                <a:solidFill>
+                  <a:srgbClr val="15181F"/>
+                </a:solidFill>
+                <a:latin typeface="Onest"/>
+                <a:ea typeface="Onest"/>
+                <a:cs typeface="Onest"/>
+              </a:rPr>
+              <a:t>12/1</a:t>
+            </a:r>
+            <a:r>
+              <a:rPr lang="ru-RU" sz="1800" b="1" dirty="0">
+                <a:solidFill>
+                  <a:srgbClr val="15181F"/>
+                </a:solidFill>
+                <a:latin typeface="Onest"/>
+                <a:ea typeface="Onest"/>
+                <a:cs typeface="Onest"/>
+              </a:rPr>
+              <a:t>8</a:t>
+            </a:r>
+            <a:endParaRPr sz="1800" b="1" dirty="0">
+              <a:solidFill>
+                <a:srgbClr val="15181F"/>
+              </a:solidFill>
+              <a:latin typeface="Onest"/>
+              <a:ea typeface="Onest"/>
+              <a:cs typeface="Onest"/>
+            </a:endParaRPr>
+          </a:p>
+        </p:txBody>
+      </p:sp>
+      <p:pic>
+        <p:nvPicPr>
+          <p:cNvPr id="79" name="Рисунок 78"/>
+          <p:cNvPicPr>
+            <a:picLocks noChangeAspect="1"/>
+          </p:cNvPicPr>
+          <p:nvPr/>
+        </p:nvPicPr>
+        <p:blipFill>
+          <a:blip r:embed="rId4"/>
+          <a:stretch/>
+        </p:blipFill>
+        <p:spPr>
+          <a:xfrm>
+            <a:off x="9572625" y="248984"/>
+            <a:ext cx="2095500" cy="787908"/>
+          </a:xfrm>
+          <a:prstGeom prst="rect">
+            <a:avLst/>
+          </a:prstGeom>
+        </p:spPr>
+      </p:pic>
+      <p:sp>
+        <p:nvSpPr>
+          <p:cNvPr id="80" name="Прямоугольник 79">
+            <a:extLst>
+              <a:ext uri="{FF2B5EF4-FFF2-40B4-BE49-F238E27FC236}">
+                <a16:creationId xmlns:a16="http://schemas.microsoft.com/office/drawing/2014/main" id="{8757D7D6-4A21-4E93-A88A-A29A63C5D0C4}"/>
+              </a:ext>
+            </a:extLst>
+          </p:cNvPr>
+          <p:cNvSpPr>
+            <a:spLocks noGrp="1"/>
+          </p:cNvSpPr>
+          <p:nvPr/>
+        </p:nvSpPr>
+        <p:spPr>
+          <a:xfrm>
+            <a:off x="514350" y="6304429"/>
             <a:ext cx="9810750" cy="457200"/>
           </a:xfrm>
           <a:prstGeom prst="rect">
@@ -9662,16 +10355,178 @@
               </a:defRPr>
             </a:pPr>
             <a:r>
-              <a:rPr sz="1800" b="0">
-                <a:solidFill>
-                  <a:srgbClr val="58606B"/>
-                </a:solidFill>
-                <a:latin typeface="Onest"/>
-                <a:ea typeface="Onest"/>
-                <a:cs typeface="Onest"/>
-              </a:rPr>
-              <a:t>Автоматизация подбора параметров алгоритма факторизации больших чисел с применением</a:t>
-            </a:r>
+              <a:rPr sz="1600" b="0" dirty="0" err="1">
+                <a:solidFill>
+                  <a:srgbClr val="58606B"/>
+                </a:solidFill>
+                <a:latin typeface="Onest"/>
+                <a:ea typeface="Onest"/>
+                <a:cs typeface="Onest"/>
+              </a:rPr>
+              <a:t>Автоматизация</a:t>
+            </a:r>
+            <a:r>
+              <a:rPr sz="1600" b="0" dirty="0">
+                <a:solidFill>
+                  <a:srgbClr val="58606B"/>
+                </a:solidFill>
+                <a:latin typeface="Onest"/>
+                <a:ea typeface="Onest"/>
+                <a:cs typeface="Onest"/>
+              </a:rPr>
+              <a:t> </a:t>
+            </a:r>
+            <a:r>
+              <a:rPr sz="1600" b="0" dirty="0" err="1">
+                <a:solidFill>
+                  <a:srgbClr val="58606B"/>
+                </a:solidFill>
+                <a:latin typeface="Onest"/>
+                <a:ea typeface="Onest"/>
+                <a:cs typeface="Onest"/>
+              </a:rPr>
+              <a:t>подбора</a:t>
+            </a:r>
+            <a:r>
+              <a:rPr sz="1600" b="0" dirty="0">
+                <a:solidFill>
+                  <a:srgbClr val="58606B"/>
+                </a:solidFill>
+                <a:latin typeface="Onest"/>
+                <a:ea typeface="Onest"/>
+                <a:cs typeface="Onest"/>
+              </a:rPr>
+              <a:t> </a:t>
+            </a:r>
+            <a:r>
+              <a:rPr sz="1600" b="0" dirty="0" err="1">
+                <a:solidFill>
+                  <a:srgbClr val="58606B"/>
+                </a:solidFill>
+                <a:latin typeface="Onest"/>
+                <a:ea typeface="Onest"/>
+                <a:cs typeface="Onest"/>
+              </a:rPr>
+              <a:t>параметров</a:t>
+            </a:r>
+            <a:r>
+              <a:rPr sz="1600" b="0" dirty="0">
+                <a:solidFill>
+                  <a:srgbClr val="58606B"/>
+                </a:solidFill>
+                <a:latin typeface="Onest"/>
+                <a:ea typeface="Onest"/>
+                <a:cs typeface="Onest"/>
+              </a:rPr>
+              <a:t> </a:t>
+            </a:r>
+            <a:r>
+              <a:rPr sz="1600" b="0" dirty="0" err="1">
+                <a:solidFill>
+                  <a:srgbClr val="58606B"/>
+                </a:solidFill>
+                <a:latin typeface="Onest"/>
+                <a:ea typeface="Onest"/>
+                <a:cs typeface="Onest"/>
+              </a:rPr>
+              <a:t>алгоритма</a:t>
+            </a:r>
+            <a:r>
+              <a:rPr sz="1600" b="0" dirty="0">
+                <a:solidFill>
+                  <a:srgbClr val="58606B"/>
+                </a:solidFill>
+                <a:latin typeface="Onest"/>
+                <a:ea typeface="Onest"/>
+                <a:cs typeface="Onest"/>
+              </a:rPr>
+              <a:t> </a:t>
+            </a:r>
+            <a:r>
+              <a:rPr sz="1600" b="0" dirty="0" err="1">
+                <a:solidFill>
+                  <a:srgbClr val="58606B"/>
+                </a:solidFill>
+                <a:latin typeface="Onest"/>
+                <a:ea typeface="Onest"/>
+                <a:cs typeface="Onest"/>
+              </a:rPr>
+              <a:t>факторизации</a:t>
+            </a:r>
+            <a:r>
+              <a:rPr sz="1600" b="0" dirty="0">
+                <a:solidFill>
+                  <a:srgbClr val="58606B"/>
+                </a:solidFill>
+                <a:latin typeface="Onest"/>
+                <a:ea typeface="Onest"/>
+                <a:cs typeface="Onest"/>
+              </a:rPr>
+              <a:t> </a:t>
+            </a:r>
+            <a:r>
+              <a:rPr sz="1600" b="0" dirty="0" err="1">
+                <a:solidFill>
+                  <a:srgbClr val="58606B"/>
+                </a:solidFill>
+                <a:latin typeface="Onest"/>
+                <a:ea typeface="Onest"/>
+                <a:cs typeface="Onest"/>
+              </a:rPr>
+              <a:t>больших</a:t>
+            </a:r>
+            <a:r>
+              <a:rPr sz="1600" b="0" dirty="0">
+                <a:solidFill>
+                  <a:srgbClr val="58606B"/>
+                </a:solidFill>
+                <a:latin typeface="Onest"/>
+                <a:ea typeface="Onest"/>
+                <a:cs typeface="Onest"/>
+              </a:rPr>
+              <a:t> </a:t>
+            </a:r>
+            <a:r>
+              <a:rPr sz="1600" b="0" dirty="0" err="1">
+                <a:solidFill>
+                  <a:srgbClr val="58606B"/>
+                </a:solidFill>
+                <a:latin typeface="Onest"/>
+                <a:ea typeface="Onest"/>
+                <a:cs typeface="Onest"/>
+              </a:rPr>
+              <a:t>чисел</a:t>
+            </a:r>
+            <a:r>
+              <a:rPr sz="1600" b="0" dirty="0">
+                <a:solidFill>
+                  <a:srgbClr val="58606B"/>
+                </a:solidFill>
+                <a:latin typeface="Onest"/>
+                <a:ea typeface="Onest"/>
+                <a:cs typeface="Onest"/>
+              </a:rPr>
+              <a:t> с </a:t>
+            </a:r>
+            <a:r>
+              <a:rPr sz="1600" b="0" dirty="0" err="1">
+                <a:solidFill>
+                  <a:srgbClr val="58606B"/>
+                </a:solidFill>
+                <a:latin typeface="Onest"/>
+                <a:ea typeface="Onest"/>
+                <a:cs typeface="Onest"/>
+              </a:rPr>
+              <a:t>применением</a:t>
+            </a:r>
+            <a:endParaRPr sz="1600" b="0" dirty="0">
+              <a:solidFill>
+                <a:srgbClr val="58606B"/>
+              </a:solidFill>
+              <a:latin typeface="Onest"/>
+              <a:ea typeface="Onest"/>
+              <a:cs typeface="Onest"/>
+            </a:endParaRPr>
           </a:p>
           <a:p>
             <a:pPr algn="l">
@@ -9685,105 +10540,159 @@
               </a:defRPr>
             </a:pPr>
             <a:r>
-              <a:rPr sz="1800" b="0">
-                <a:solidFill>
-                  <a:srgbClr val="58606B"/>
-                </a:solidFill>
-                <a:latin typeface="Onest"/>
-                <a:ea typeface="Onest"/>
-                <a:cs typeface="Onest"/>
-              </a:rPr>
-              <a:t>эллиптических кривых на основе эвристических методов оптимизации</a:t>
-            </a:r>
+              <a:rPr sz="1600" b="0" dirty="0" err="1">
+                <a:solidFill>
+                  <a:srgbClr val="58606B"/>
+                </a:solidFill>
+                <a:latin typeface="Onest"/>
+                <a:ea typeface="Onest"/>
+                <a:cs typeface="Onest"/>
+              </a:rPr>
+              <a:t>эллиптических</a:t>
+            </a:r>
+            <a:r>
+              <a:rPr sz="1600" b="0" dirty="0">
+                <a:solidFill>
+                  <a:srgbClr val="58606B"/>
+                </a:solidFill>
+                <a:latin typeface="Onest"/>
+                <a:ea typeface="Onest"/>
+                <a:cs typeface="Onest"/>
+              </a:rPr>
+              <a:t> </a:t>
+            </a:r>
+            <a:r>
+              <a:rPr sz="1600" b="0" dirty="0" err="1">
+                <a:solidFill>
+                  <a:srgbClr val="58606B"/>
+                </a:solidFill>
+                <a:latin typeface="Onest"/>
+                <a:ea typeface="Onest"/>
+                <a:cs typeface="Onest"/>
+              </a:rPr>
+              <a:t>кривых</a:t>
+            </a:r>
+            <a:r>
+              <a:rPr sz="1600" b="0" dirty="0">
+                <a:solidFill>
+                  <a:srgbClr val="58606B"/>
+                </a:solidFill>
+                <a:latin typeface="Onest"/>
+                <a:ea typeface="Onest"/>
+                <a:cs typeface="Onest"/>
+              </a:rPr>
+              <a:t> </a:t>
+            </a:r>
+            <a:r>
+              <a:rPr sz="1600" b="0" dirty="0" err="1">
+                <a:solidFill>
+                  <a:srgbClr val="58606B"/>
+                </a:solidFill>
+                <a:latin typeface="Onest"/>
+                <a:ea typeface="Onest"/>
+                <a:cs typeface="Onest"/>
+              </a:rPr>
+              <a:t>на</a:t>
+            </a:r>
+            <a:r>
+              <a:rPr sz="1600" b="0" dirty="0">
+                <a:solidFill>
+                  <a:srgbClr val="58606B"/>
+                </a:solidFill>
+                <a:latin typeface="Onest"/>
+                <a:ea typeface="Onest"/>
+                <a:cs typeface="Onest"/>
+              </a:rPr>
+              <a:t> </a:t>
+            </a:r>
+            <a:r>
+              <a:rPr sz="1600" b="0" dirty="0" err="1">
+                <a:solidFill>
+                  <a:srgbClr val="58606B"/>
+                </a:solidFill>
+                <a:latin typeface="Onest"/>
+                <a:ea typeface="Onest"/>
+                <a:cs typeface="Onest"/>
+              </a:rPr>
+              <a:t>основе</a:t>
+            </a:r>
+            <a:r>
+              <a:rPr sz="1600" b="0" dirty="0">
+                <a:solidFill>
+                  <a:srgbClr val="58606B"/>
+                </a:solidFill>
+                <a:latin typeface="Onest"/>
+                <a:ea typeface="Onest"/>
+                <a:cs typeface="Onest"/>
+              </a:rPr>
+              <a:t> </a:t>
+            </a:r>
+            <a:r>
+              <a:rPr sz="1600" b="0" dirty="0" err="1">
+                <a:solidFill>
+                  <a:srgbClr val="58606B"/>
+                </a:solidFill>
+                <a:latin typeface="Onest"/>
+                <a:ea typeface="Onest"/>
+                <a:cs typeface="Onest"/>
+              </a:rPr>
+              <a:t>эвристических</a:t>
+            </a:r>
+            <a:r>
+              <a:rPr sz="1600" b="0" dirty="0">
+                <a:solidFill>
+                  <a:srgbClr val="58606B"/>
+                </a:solidFill>
+                <a:latin typeface="Onest"/>
+                <a:ea typeface="Onest"/>
+                <a:cs typeface="Onest"/>
+              </a:rPr>
+              <a:t> </a:t>
+            </a:r>
+            <a:r>
+              <a:rPr sz="1600" b="0" dirty="0" err="1">
+                <a:solidFill>
+                  <a:srgbClr val="58606B"/>
+                </a:solidFill>
+                <a:latin typeface="Onest"/>
+                <a:ea typeface="Onest"/>
+                <a:cs typeface="Onest"/>
+              </a:rPr>
+              <a:t>методов</a:t>
+            </a:r>
+            <a:r>
+              <a:rPr sz="1600" b="0" dirty="0">
+                <a:solidFill>
+                  <a:srgbClr val="58606B"/>
+                </a:solidFill>
+                <a:latin typeface="Onest"/>
+                <a:ea typeface="Onest"/>
+                <a:cs typeface="Onest"/>
+              </a:rPr>
+              <a:t> </a:t>
+            </a:r>
+            <a:r>
+              <a:rPr sz="1600" b="0" dirty="0" err="1">
+                <a:solidFill>
+                  <a:srgbClr val="58606B"/>
+                </a:solidFill>
+                <a:latin typeface="Onest"/>
+                <a:ea typeface="Onest"/>
+                <a:cs typeface="Onest"/>
+              </a:rPr>
+              <a:t>оптимизации</a:t>
+            </a:r>
+            <a:endParaRPr sz="1600" b="0" dirty="0">
+              <a:solidFill>
+                <a:srgbClr val="58606B"/>
+              </a:solidFill>
+              <a:latin typeface="Onest"/>
+              <a:ea typeface="Onest"/>
+              <a:cs typeface="Onest"/>
+            </a:endParaRPr>
           </a:p>
         </p:txBody>
       </p:sp>
-      <p:sp>
-        <p:nvSpPr>
-          <p:cNvPr id="78" name="Прямоугольник 77">
-            <a:extLst>
-              <a:ext uri="{FF2B5EF4-FFF2-40B4-BE49-F238E27FC236}">
-                <a16:creationId xmlns:a16="http://schemas.microsoft.com/office/drawing/2014/main" id="{3F705C1C-5BE2-419A-845A-1687343841C7}"/>
-              </a:ext>
-            </a:extLst>
-          </p:cNvPr>
-          <p:cNvSpPr>
-            <a:spLocks noGrp="1"/>
-          </p:cNvSpPr>
-          <p:nvPr/>
-        </p:nvSpPr>
-        <p:spPr>
-          <a:xfrm>
-            <a:off x="10763250" y="6419850"/>
-            <a:ext cx="914400" cy="266700"/>
-          </a:xfrm>
-          <a:prstGeom prst="rect">
-            <a:avLst/>
-          </a:prstGeom>
-          <a:solidFill>
-            <a:srgbClr val="000000">
-              <a:alpha val="0"/>
-            </a:srgbClr>
-          </a:solidFill>
-          <a:ln w="0">
-            <a:solidFill>
-              <a:srgbClr val="000000">
-                <a:alpha val="0"/>
-              </a:srgbClr>
-            </a:solidFill>
-            <a:prstDash val="solid"/>
-          </a:ln>
-        </p:spPr>
-        <p:txBody>
-          <a:bodyPr lIns="0" tIns="0" rIns="0" bIns="0" anchor="t"/>
-          <a:lstStyle/>
-          <a:p>
-            <a:pPr algn="r">
-              <a:defRPr sz="1800" b="1">
-                <a:solidFill>
-                  <a:srgbClr val="15181F"/>
-                </a:solidFill>
-                <a:latin typeface="Onest"/>
-                <a:ea typeface="Onest"/>
-                <a:cs typeface="Onest"/>
-              </a:defRPr>
-            </a:pPr>
-            <a:r>
-              <a:rPr sz="1800" b="1">
-                <a:solidFill>
-                  <a:srgbClr val="15181F"/>
-                </a:solidFill>
-                <a:latin typeface="Onest"/>
-                <a:ea typeface="Onest"/>
-                <a:cs typeface="Onest"/>
-              </a:rPr>
-              <a:t>12/19</a:t>
-            </a:r>
-          </a:p>
-        </p:txBody>
-      </p:sp>
-      <p:pic>
-        <p:nvPicPr>
-          <p:cNvPr id="79" name="Рисунок 78"/>
-          <p:cNvPicPr>
-            <a:picLocks noChangeAspect="1"/>
-          </p:cNvPicPr>
-          <p:nvPr/>
-        </p:nvPicPr>
-        <p:blipFill>
-          <a:blip r:embed="rId4"/>
-          <a:stretch/>
-        </p:blipFill>
-        <p:spPr>
-          <a:xfrm>
-            <a:off x="9572625" y="248984"/>
-            <a:ext cx="2095500" cy="787908"/>
-          </a:xfrm>
-          <a:prstGeom prst="rect">
-            <a:avLst/>
-          </a:prstGeom>
-        </p:spPr>
-      </p:pic>
     </p:spTree>
     <p:extLst>
       <p:ext uri="{BB962C8B-B14F-4D97-AF65-F5344CB8AC3E}">
@@ -10830,21 +11739,126 @@
       </p:sp>
       <p:sp>
         <p:nvSpPr>
-          <p:cNvPr id="24" name="Прямоугольник 23">
-            <a:extLst>
-              <a:ext uri="{FF2B5EF4-FFF2-40B4-BE49-F238E27FC236}">
-                <a16:creationId xmlns:a16="http://schemas.microsoft.com/office/drawing/2014/main" id="{356A3A1E-BADA-48BF-B38F-342971CBCA91}"/>
-              </a:ext>
-            </a:extLst>
-          </p:cNvPr>
-          <p:cNvSpPr>
-            <a:spLocks noGrp="1"/>
-          </p:cNvSpPr>
-          <p:nvPr/>
-        </p:nvSpPr>
-        <p:spPr>
-          <a:xfrm>
-            <a:off x="514350" y="6248400"/>
+          <p:cNvPr id="25" name="Прямоугольник 24">
+            <a:extLst>
+              <a:ext uri="{FF2B5EF4-FFF2-40B4-BE49-F238E27FC236}">
+                <a16:creationId xmlns:a16="http://schemas.microsoft.com/office/drawing/2014/main" id="{512E7EBF-2E68-4333-9FFC-61C9D8FBEB5B}"/>
+              </a:ext>
+            </a:extLst>
+          </p:cNvPr>
+          <p:cNvSpPr>
+            <a:spLocks noGrp="1"/>
+          </p:cNvSpPr>
+          <p:nvPr/>
+        </p:nvSpPr>
+        <p:spPr>
+          <a:xfrm>
+            <a:off x="10763250" y="6419850"/>
+            <a:ext cx="914400" cy="266700"/>
+          </a:xfrm>
+          <a:prstGeom prst="rect">
+            <a:avLst/>
+          </a:prstGeom>
+          <a:solidFill>
+            <a:srgbClr val="000000">
+              <a:alpha val="0"/>
+            </a:srgbClr>
+          </a:solidFill>
+          <a:ln w="0">
+            <a:solidFill>
+              <a:srgbClr val="000000">
+                <a:alpha val="0"/>
+              </a:srgbClr>
+            </a:solidFill>
+            <a:prstDash val="solid"/>
+          </a:ln>
+        </p:spPr>
+        <p:txBody>
+          <a:bodyPr lIns="0" tIns="0" rIns="0" bIns="0" anchor="t"/>
+          <a:lstStyle/>
+          <a:p>
+            <a:pPr algn="r">
+              <a:defRPr sz="1800" b="1">
+                <a:solidFill>
+                  <a:srgbClr val="15181F"/>
+                </a:solidFill>
+                <a:latin typeface="Onest"/>
+                <a:ea typeface="Onest"/>
+                <a:cs typeface="Onest"/>
+              </a:defRPr>
+            </a:pPr>
+            <a:r>
+              <a:rPr sz="1800" b="1" dirty="0">
+                <a:solidFill>
+                  <a:srgbClr val="15181F"/>
+                </a:solidFill>
+                <a:latin typeface="Onest"/>
+                <a:ea typeface="Onest"/>
+                <a:cs typeface="Onest"/>
+              </a:rPr>
+              <a:t>13/1</a:t>
+            </a:r>
+            <a:r>
+              <a:rPr lang="ru-RU" sz="1800" b="1" dirty="0">
+                <a:solidFill>
+                  <a:srgbClr val="15181F"/>
+                </a:solidFill>
+                <a:latin typeface="Onest"/>
+                <a:ea typeface="Onest"/>
+                <a:cs typeface="Onest"/>
+              </a:rPr>
+              <a:t>8</a:t>
+            </a:r>
+            <a:endParaRPr sz="1800" b="1" dirty="0">
+              <a:solidFill>
+                <a:srgbClr val="15181F"/>
+              </a:solidFill>
+              <a:latin typeface="Onest"/>
+              <a:ea typeface="Onest"/>
+              <a:cs typeface="Onest"/>
+            </a:endParaRPr>
+          </a:p>
+        </p:txBody>
+      </p:sp>
+      <p:pic>
+        <p:nvPicPr>
+          <p:cNvPr id="26" name="Рисунок 25"/>
+          <p:cNvPicPr>
+            <a:picLocks noChangeAspect="1"/>
+          </p:cNvPicPr>
+          <p:nvPr/>
+        </p:nvPicPr>
+        <p:blipFill>
+          <a:blip r:embed="rId5"/>
+          <a:stretch/>
+        </p:blipFill>
+        <p:spPr>
+          <a:xfrm>
+            <a:off x="9572625" y="248984"/>
+            <a:ext cx="2095500" cy="787908"/>
+          </a:xfrm>
+          <a:prstGeom prst="rect">
+            <a:avLst/>
+          </a:prstGeom>
+        </p:spPr>
+      </p:pic>
+      <p:sp>
+        <p:nvSpPr>
+          <p:cNvPr id="27" name="Прямоугольник 26">
+            <a:extLst>
+              <a:ext uri="{FF2B5EF4-FFF2-40B4-BE49-F238E27FC236}">
+                <a16:creationId xmlns:a16="http://schemas.microsoft.com/office/drawing/2014/main" id="{3F020CEF-6BB2-4D55-BECA-0BEE641C1DBC}"/>
+              </a:ext>
+            </a:extLst>
+          </p:cNvPr>
+          <p:cNvSpPr>
+            <a:spLocks noGrp="1"/>
+          </p:cNvSpPr>
+          <p:nvPr/>
+        </p:nvSpPr>
+        <p:spPr>
+          <a:xfrm>
+            <a:off x="514350" y="6304429"/>
             <a:ext cx="9810750" cy="457200"/>
           </a:xfrm>
           <a:prstGeom prst="rect">
@@ -10879,16 +11893,178 @@
               </a:defRPr>
             </a:pPr>
             <a:r>
-              <a:rPr sz="1800" b="0">
-                <a:solidFill>
-                  <a:srgbClr val="58606B"/>
-                </a:solidFill>
-                <a:latin typeface="Onest"/>
-                <a:ea typeface="Onest"/>
-                <a:cs typeface="Onest"/>
-              </a:rPr>
-              <a:t>Автоматизация подбора параметров алгоритма факторизации больших чисел с применением</a:t>
-            </a:r>
+              <a:rPr sz="1600" b="0" dirty="0" err="1">
+                <a:solidFill>
+                  <a:srgbClr val="58606B"/>
+                </a:solidFill>
+                <a:latin typeface="Onest"/>
+                <a:ea typeface="Onest"/>
+                <a:cs typeface="Onest"/>
+              </a:rPr>
+              <a:t>Автоматизация</a:t>
+            </a:r>
+            <a:r>
+              <a:rPr sz="1600" b="0" dirty="0">
+                <a:solidFill>
+                  <a:srgbClr val="58606B"/>
+                </a:solidFill>
+                <a:latin typeface="Onest"/>
+                <a:ea typeface="Onest"/>
+                <a:cs typeface="Onest"/>
+              </a:rPr>
+              <a:t> </a:t>
+            </a:r>
+            <a:r>
+              <a:rPr sz="1600" b="0" dirty="0" err="1">
+                <a:solidFill>
+                  <a:srgbClr val="58606B"/>
+                </a:solidFill>
+                <a:latin typeface="Onest"/>
+                <a:ea typeface="Onest"/>
+                <a:cs typeface="Onest"/>
+              </a:rPr>
+              <a:t>подбора</a:t>
+            </a:r>
+            <a:r>
+              <a:rPr sz="1600" b="0" dirty="0">
+                <a:solidFill>
+                  <a:srgbClr val="58606B"/>
+                </a:solidFill>
+                <a:latin typeface="Onest"/>
+                <a:ea typeface="Onest"/>
+                <a:cs typeface="Onest"/>
+              </a:rPr>
+              <a:t> </a:t>
+            </a:r>
+            <a:r>
+              <a:rPr sz="1600" b="0" dirty="0" err="1">
+                <a:solidFill>
+                  <a:srgbClr val="58606B"/>
+                </a:solidFill>
+                <a:latin typeface="Onest"/>
+                <a:ea typeface="Onest"/>
+                <a:cs typeface="Onest"/>
+              </a:rPr>
+              <a:t>параметров</a:t>
+            </a:r>
+            <a:r>
+              <a:rPr sz="1600" b="0" dirty="0">
+                <a:solidFill>
+                  <a:srgbClr val="58606B"/>
+                </a:solidFill>
+                <a:latin typeface="Onest"/>
+                <a:ea typeface="Onest"/>
+                <a:cs typeface="Onest"/>
+              </a:rPr>
+              <a:t> </a:t>
+            </a:r>
+            <a:r>
+              <a:rPr sz="1600" b="0" dirty="0" err="1">
+                <a:solidFill>
+                  <a:srgbClr val="58606B"/>
+                </a:solidFill>
+                <a:latin typeface="Onest"/>
+                <a:ea typeface="Onest"/>
+                <a:cs typeface="Onest"/>
+              </a:rPr>
+              <a:t>алгоритма</a:t>
+            </a:r>
+            <a:r>
+              <a:rPr sz="1600" b="0" dirty="0">
+                <a:solidFill>
+                  <a:srgbClr val="58606B"/>
+                </a:solidFill>
+                <a:latin typeface="Onest"/>
+                <a:ea typeface="Onest"/>
+                <a:cs typeface="Onest"/>
+              </a:rPr>
+              <a:t> </a:t>
+            </a:r>
+            <a:r>
+              <a:rPr sz="1600" b="0" dirty="0" err="1">
+                <a:solidFill>
+                  <a:srgbClr val="58606B"/>
+                </a:solidFill>
+                <a:latin typeface="Onest"/>
+                <a:ea typeface="Onest"/>
+                <a:cs typeface="Onest"/>
+              </a:rPr>
+              <a:t>факторизации</a:t>
+            </a:r>
+            <a:r>
+              <a:rPr sz="1600" b="0" dirty="0">
+                <a:solidFill>
+                  <a:srgbClr val="58606B"/>
+                </a:solidFill>
+                <a:latin typeface="Onest"/>
+                <a:ea typeface="Onest"/>
+                <a:cs typeface="Onest"/>
+              </a:rPr>
+              <a:t> </a:t>
+            </a:r>
+            <a:r>
+              <a:rPr sz="1600" b="0" dirty="0" err="1">
+                <a:solidFill>
+                  <a:srgbClr val="58606B"/>
+                </a:solidFill>
+                <a:latin typeface="Onest"/>
+                <a:ea typeface="Onest"/>
+                <a:cs typeface="Onest"/>
+              </a:rPr>
+              <a:t>больших</a:t>
+            </a:r>
+            <a:r>
+              <a:rPr sz="1600" b="0" dirty="0">
+                <a:solidFill>
+                  <a:srgbClr val="58606B"/>
+                </a:solidFill>
+                <a:latin typeface="Onest"/>
+                <a:ea typeface="Onest"/>
+                <a:cs typeface="Onest"/>
+              </a:rPr>
+              <a:t> </a:t>
+            </a:r>
+            <a:r>
+              <a:rPr sz="1600" b="0" dirty="0" err="1">
+                <a:solidFill>
+                  <a:srgbClr val="58606B"/>
+                </a:solidFill>
+                <a:latin typeface="Onest"/>
+                <a:ea typeface="Onest"/>
+                <a:cs typeface="Onest"/>
+              </a:rPr>
+              <a:t>чисел</a:t>
+            </a:r>
+            <a:r>
+              <a:rPr sz="1600" b="0" dirty="0">
+                <a:solidFill>
+                  <a:srgbClr val="58606B"/>
+                </a:solidFill>
+                <a:latin typeface="Onest"/>
+                <a:ea typeface="Onest"/>
+                <a:cs typeface="Onest"/>
+              </a:rPr>
+              <a:t> с </a:t>
+            </a:r>
+            <a:r>
+              <a:rPr sz="1600" b="0" dirty="0" err="1">
+                <a:solidFill>
+                  <a:srgbClr val="58606B"/>
+                </a:solidFill>
+                <a:latin typeface="Onest"/>
+                <a:ea typeface="Onest"/>
+                <a:cs typeface="Onest"/>
+              </a:rPr>
+              <a:t>применением</a:t>
+            </a:r>
+            <a:endParaRPr sz="1600" b="0" dirty="0">
+              <a:solidFill>
+                <a:srgbClr val="58606B"/>
+              </a:solidFill>
+              <a:latin typeface="Onest"/>
+              <a:ea typeface="Onest"/>
+              <a:cs typeface="Onest"/>
+            </a:endParaRPr>
           </a:p>
           <a:p>
             <a:pPr algn="l">
@@ -10902,105 +12078,159 @@
               </a:defRPr>
             </a:pPr>
             <a:r>
-              <a:rPr sz="1800" b="0">
-                <a:solidFill>
-                  <a:srgbClr val="58606B"/>
-                </a:solidFill>
-                <a:latin typeface="Onest"/>
-                <a:ea typeface="Onest"/>
-                <a:cs typeface="Onest"/>
-              </a:rPr>
-              <a:t>эллиптических кривых на основе эвристических методов оптимизации</a:t>
-            </a:r>
+              <a:rPr sz="1600" b="0" dirty="0" err="1">
+                <a:solidFill>
+                  <a:srgbClr val="58606B"/>
+                </a:solidFill>
+                <a:latin typeface="Onest"/>
+                <a:ea typeface="Onest"/>
+                <a:cs typeface="Onest"/>
+              </a:rPr>
+              <a:t>эллиптических</a:t>
+            </a:r>
+            <a:r>
+              <a:rPr sz="1600" b="0" dirty="0">
+                <a:solidFill>
+                  <a:srgbClr val="58606B"/>
+                </a:solidFill>
+                <a:latin typeface="Onest"/>
+                <a:ea typeface="Onest"/>
+                <a:cs typeface="Onest"/>
+              </a:rPr>
+              <a:t> </a:t>
+            </a:r>
+            <a:r>
+              <a:rPr sz="1600" b="0" dirty="0" err="1">
+                <a:solidFill>
+                  <a:srgbClr val="58606B"/>
+                </a:solidFill>
+                <a:latin typeface="Onest"/>
+                <a:ea typeface="Onest"/>
+                <a:cs typeface="Onest"/>
+              </a:rPr>
+              <a:t>кривых</a:t>
+            </a:r>
+            <a:r>
+              <a:rPr sz="1600" b="0" dirty="0">
+                <a:solidFill>
+                  <a:srgbClr val="58606B"/>
+                </a:solidFill>
+                <a:latin typeface="Onest"/>
+                <a:ea typeface="Onest"/>
+                <a:cs typeface="Onest"/>
+              </a:rPr>
+              <a:t> </a:t>
+            </a:r>
+            <a:r>
+              <a:rPr sz="1600" b="0" dirty="0" err="1">
+                <a:solidFill>
+                  <a:srgbClr val="58606B"/>
+                </a:solidFill>
+                <a:latin typeface="Onest"/>
+                <a:ea typeface="Onest"/>
+                <a:cs typeface="Onest"/>
+              </a:rPr>
+              <a:t>на</a:t>
+            </a:r>
+            <a:r>
+              <a:rPr sz="1600" b="0" dirty="0">
+                <a:solidFill>
+                  <a:srgbClr val="58606B"/>
+                </a:solidFill>
+                <a:latin typeface="Onest"/>
+                <a:ea typeface="Onest"/>
+                <a:cs typeface="Onest"/>
+              </a:rPr>
+              <a:t> </a:t>
+            </a:r>
+            <a:r>
+              <a:rPr sz="1600" b="0" dirty="0" err="1">
+                <a:solidFill>
+                  <a:srgbClr val="58606B"/>
+                </a:solidFill>
+                <a:latin typeface="Onest"/>
+                <a:ea typeface="Onest"/>
+                <a:cs typeface="Onest"/>
+              </a:rPr>
+              <a:t>основе</a:t>
+            </a:r>
+            <a:r>
+              <a:rPr sz="1600" b="0" dirty="0">
+                <a:solidFill>
+                  <a:srgbClr val="58606B"/>
+                </a:solidFill>
+                <a:latin typeface="Onest"/>
+                <a:ea typeface="Onest"/>
+                <a:cs typeface="Onest"/>
+              </a:rPr>
+              <a:t> </a:t>
+            </a:r>
+            <a:r>
+              <a:rPr sz="1600" b="0" dirty="0" err="1">
+                <a:solidFill>
+                  <a:srgbClr val="58606B"/>
+                </a:solidFill>
+                <a:latin typeface="Onest"/>
+                <a:ea typeface="Onest"/>
+                <a:cs typeface="Onest"/>
+              </a:rPr>
+              <a:t>эвристических</a:t>
+            </a:r>
+            <a:r>
+              <a:rPr sz="1600" b="0" dirty="0">
+                <a:solidFill>
+                  <a:srgbClr val="58606B"/>
+                </a:solidFill>
+                <a:latin typeface="Onest"/>
+                <a:ea typeface="Onest"/>
+                <a:cs typeface="Onest"/>
+              </a:rPr>
+              <a:t> </a:t>
+            </a:r>
+            <a:r>
+              <a:rPr sz="1600" b="0" dirty="0" err="1">
+                <a:solidFill>
+                  <a:srgbClr val="58606B"/>
+                </a:solidFill>
+                <a:latin typeface="Onest"/>
+                <a:ea typeface="Onest"/>
+                <a:cs typeface="Onest"/>
+              </a:rPr>
+              <a:t>методов</a:t>
+            </a:r>
+            <a:r>
+              <a:rPr sz="1600" b="0" dirty="0">
+                <a:solidFill>
+                  <a:srgbClr val="58606B"/>
+                </a:solidFill>
+                <a:latin typeface="Onest"/>
+                <a:ea typeface="Onest"/>
+                <a:cs typeface="Onest"/>
+              </a:rPr>
+              <a:t> </a:t>
+            </a:r>
+            <a:r>
+              <a:rPr sz="1600" b="0" dirty="0" err="1">
+                <a:solidFill>
+                  <a:srgbClr val="58606B"/>
+                </a:solidFill>
+                <a:latin typeface="Onest"/>
+                <a:ea typeface="Onest"/>
+                <a:cs typeface="Onest"/>
+              </a:rPr>
+              <a:t>оптимизации</a:t>
+            </a:r>
+            <a:endParaRPr sz="1600" b="0" dirty="0">
+              <a:solidFill>
+                <a:srgbClr val="58606B"/>
+              </a:solidFill>
+              <a:latin typeface="Onest"/>
+              <a:ea typeface="Onest"/>
+              <a:cs typeface="Onest"/>
+            </a:endParaRPr>
           </a:p>
         </p:txBody>
       </p:sp>
-      <p:sp>
-        <p:nvSpPr>
-          <p:cNvPr id="25" name="Прямоугольник 24">
-            <a:extLst>
-              <a:ext uri="{FF2B5EF4-FFF2-40B4-BE49-F238E27FC236}">
-                <a16:creationId xmlns:a16="http://schemas.microsoft.com/office/drawing/2014/main" id="{512E7EBF-2E68-4333-9FFC-61C9D8FBEB5B}"/>
-              </a:ext>
-            </a:extLst>
-          </p:cNvPr>
-          <p:cNvSpPr>
-            <a:spLocks noGrp="1"/>
-          </p:cNvSpPr>
-          <p:nvPr/>
-        </p:nvSpPr>
-        <p:spPr>
-          <a:xfrm>
-            <a:off x="10763250" y="6419850"/>
-            <a:ext cx="914400" cy="266700"/>
-          </a:xfrm>
-          <a:prstGeom prst="rect">
-            <a:avLst/>
-          </a:prstGeom>
-          <a:solidFill>
-            <a:srgbClr val="000000">
-              <a:alpha val="0"/>
-            </a:srgbClr>
-          </a:solidFill>
-          <a:ln w="0">
-            <a:solidFill>
-              <a:srgbClr val="000000">
-                <a:alpha val="0"/>
-              </a:srgbClr>
-            </a:solidFill>
-            <a:prstDash val="solid"/>
-          </a:ln>
-        </p:spPr>
-        <p:txBody>
-          <a:bodyPr lIns="0" tIns="0" rIns="0" bIns="0" anchor="t"/>
-          <a:lstStyle/>
-          <a:p>
-            <a:pPr algn="r">
-              <a:defRPr sz="1800" b="1">
-                <a:solidFill>
-                  <a:srgbClr val="15181F"/>
-                </a:solidFill>
-                <a:latin typeface="Onest"/>
-                <a:ea typeface="Onest"/>
-                <a:cs typeface="Onest"/>
-              </a:defRPr>
-            </a:pPr>
-            <a:r>
-              <a:rPr sz="1800" b="1">
-                <a:solidFill>
-                  <a:srgbClr val="15181F"/>
-                </a:solidFill>
-                <a:latin typeface="Onest"/>
-                <a:ea typeface="Onest"/>
-                <a:cs typeface="Onest"/>
-              </a:rPr>
-              <a:t>13/19</a:t>
-            </a:r>
-          </a:p>
-        </p:txBody>
-      </p:sp>
-      <p:pic>
-        <p:nvPicPr>
-          <p:cNvPr id="26" name="Рисунок 25"/>
-          <p:cNvPicPr>
-            <a:picLocks noChangeAspect="1"/>
-          </p:cNvPicPr>
-          <p:nvPr/>
-        </p:nvPicPr>
-        <p:blipFill>
-          <a:blip r:embed="rId5"/>
-          <a:stretch/>
-        </p:blipFill>
-        <p:spPr>
-          <a:xfrm>
-            <a:off x="9572625" y="248984"/>
-            <a:ext cx="2095500" cy="787908"/>
-          </a:xfrm>
-          <a:prstGeom prst="rect">
-            <a:avLst/>
-          </a:prstGeom>
-        </p:spPr>
-      </p:pic>
     </p:spTree>
     <p:extLst>
       <p:ext uri="{BB962C8B-B14F-4D97-AF65-F5344CB8AC3E}">
@@ -12069,21 +13299,126 @@
       </p:sp>
       <p:sp>
         <p:nvSpPr>
-          <p:cNvPr id="24" name="Прямоугольник 23">
-            <a:extLst>
-              <a:ext uri="{FF2B5EF4-FFF2-40B4-BE49-F238E27FC236}">
-                <a16:creationId xmlns:a16="http://schemas.microsoft.com/office/drawing/2014/main" id="{B3A224C6-5C9D-4514-B027-776FCAAF2866}"/>
-              </a:ext>
-            </a:extLst>
-          </p:cNvPr>
-          <p:cNvSpPr>
-            <a:spLocks noGrp="1"/>
-          </p:cNvSpPr>
-          <p:nvPr/>
-        </p:nvSpPr>
-        <p:spPr>
-          <a:xfrm>
-            <a:off x="514350" y="6248400"/>
+          <p:cNvPr id="25" name="Прямоугольник 24">
+            <a:extLst>
+              <a:ext uri="{FF2B5EF4-FFF2-40B4-BE49-F238E27FC236}">
+                <a16:creationId xmlns:a16="http://schemas.microsoft.com/office/drawing/2014/main" id="{19F35680-2232-40AF-878E-A04FEE696764}"/>
+              </a:ext>
+            </a:extLst>
+          </p:cNvPr>
+          <p:cNvSpPr>
+            <a:spLocks noGrp="1"/>
+          </p:cNvSpPr>
+          <p:nvPr/>
+        </p:nvSpPr>
+        <p:spPr>
+          <a:xfrm>
+            <a:off x="10763250" y="6419850"/>
+            <a:ext cx="914400" cy="266700"/>
+          </a:xfrm>
+          <a:prstGeom prst="rect">
+            <a:avLst/>
+          </a:prstGeom>
+          <a:solidFill>
+            <a:srgbClr val="000000">
+              <a:alpha val="0"/>
+            </a:srgbClr>
+          </a:solidFill>
+          <a:ln w="0">
+            <a:solidFill>
+              <a:srgbClr val="000000">
+                <a:alpha val="0"/>
+              </a:srgbClr>
+            </a:solidFill>
+            <a:prstDash val="solid"/>
+          </a:ln>
+        </p:spPr>
+        <p:txBody>
+          <a:bodyPr lIns="0" tIns="0" rIns="0" bIns="0" anchor="t"/>
+          <a:lstStyle/>
+          <a:p>
+            <a:pPr algn="r">
+              <a:defRPr sz="1800" b="1">
+                <a:solidFill>
+                  <a:srgbClr val="15181F"/>
+                </a:solidFill>
+                <a:latin typeface="Onest"/>
+                <a:ea typeface="Onest"/>
+                <a:cs typeface="Onest"/>
+              </a:defRPr>
+            </a:pPr>
+            <a:r>
+              <a:rPr sz="1800" b="1" dirty="0">
+                <a:solidFill>
+                  <a:srgbClr val="15181F"/>
+                </a:solidFill>
+                <a:latin typeface="Onest"/>
+                <a:ea typeface="Onest"/>
+                <a:cs typeface="Onest"/>
+              </a:rPr>
+              <a:t>14/1</a:t>
+            </a:r>
+            <a:r>
+              <a:rPr lang="ru-RU" sz="1800" b="1" dirty="0">
+                <a:solidFill>
+                  <a:srgbClr val="15181F"/>
+                </a:solidFill>
+                <a:latin typeface="Onest"/>
+                <a:ea typeface="Onest"/>
+                <a:cs typeface="Onest"/>
+              </a:rPr>
+              <a:t>8</a:t>
+            </a:r>
+            <a:endParaRPr sz="1800" b="1" dirty="0">
+              <a:solidFill>
+                <a:srgbClr val="15181F"/>
+              </a:solidFill>
+              <a:latin typeface="Onest"/>
+              <a:ea typeface="Onest"/>
+              <a:cs typeface="Onest"/>
+            </a:endParaRPr>
+          </a:p>
+        </p:txBody>
+      </p:sp>
+      <p:pic>
+        <p:nvPicPr>
+          <p:cNvPr id="26" name="Рисунок 25"/>
+          <p:cNvPicPr>
+            <a:picLocks noChangeAspect="1"/>
+          </p:cNvPicPr>
+          <p:nvPr/>
+        </p:nvPicPr>
+        <p:blipFill>
+          <a:blip r:embed="rId3"/>
+          <a:stretch/>
+        </p:blipFill>
+        <p:spPr>
+          <a:xfrm>
+            <a:off x="9572625" y="248984"/>
+            <a:ext cx="2095500" cy="787908"/>
+          </a:xfrm>
+          <a:prstGeom prst="rect">
+            <a:avLst/>
+          </a:prstGeom>
+        </p:spPr>
+      </p:pic>
+      <p:sp>
+        <p:nvSpPr>
+          <p:cNvPr id="27" name="Прямоугольник 26">
+            <a:extLst>
+              <a:ext uri="{FF2B5EF4-FFF2-40B4-BE49-F238E27FC236}">
+                <a16:creationId xmlns:a16="http://schemas.microsoft.com/office/drawing/2014/main" id="{B576C68D-0C56-43B7-A24E-EA6F0B001CCE}"/>
+              </a:ext>
+            </a:extLst>
+          </p:cNvPr>
+          <p:cNvSpPr>
+            <a:spLocks noGrp="1"/>
+          </p:cNvSpPr>
+          <p:nvPr/>
+        </p:nvSpPr>
+        <p:spPr>
+          <a:xfrm>
+            <a:off x="514350" y="6304429"/>
             <a:ext cx="9810750" cy="457200"/>
           </a:xfrm>
           <a:prstGeom prst="rect">
@@ -12118,16 +13453,178 @@
               </a:defRPr>
             </a:pPr>
             <a:r>
-              <a:rPr sz="1800" b="0">
-                <a:solidFill>
-                  <a:srgbClr val="58606B"/>
-                </a:solidFill>
-                <a:latin typeface="Onest"/>
-                <a:ea typeface="Onest"/>
-                <a:cs typeface="Onest"/>
-              </a:rPr>
-              <a:t>Автоматизация подбора параметров алгоритма факторизации больших чисел с применением</a:t>
-            </a:r>
+              <a:rPr sz="1600" b="0" dirty="0" err="1">
+                <a:solidFill>
+                  <a:srgbClr val="58606B"/>
+                </a:solidFill>
+                <a:latin typeface="Onest"/>
+                <a:ea typeface="Onest"/>
+                <a:cs typeface="Onest"/>
+              </a:rPr>
+              <a:t>Автоматизация</a:t>
+            </a:r>
+            <a:r>
+              <a:rPr sz="1600" b="0" dirty="0">
+                <a:solidFill>
+                  <a:srgbClr val="58606B"/>
+                </a:solidFill>
+                <a:latin typeface="Onest"/>
+                <a:ea typeface="Onest"/>
+                <a:cs typeface="Onest"/>
+              </a:rPr>
+              <a:t> </a:t>
+            </a:r>
+            <a:r>
+              <a:rPr sz="1600" b="0" dirty="0" err="1">
+                <a:solidFill>
+                  <a:srgbClr val="58606B"/>
+                </a:solidFill>
+                <a:latin typeface="Onest"/>
+                <a:ea typeface="Onest"/>
+                <a:cs typeface="Onest"/>
+              </a:rPr>
+              <a:t>подбора</a:t>
+            </a:r>
+            <a:r>
+              <a:rPr sz="1600" b="0" dirty="0">
+                <a:solidFill>
+                  <a:srgbClr val="58606B"/>
+                </a:solidFill>
+                <a:latin typeface="Onest"/>
+                <a:ea typeface="Onest"/>
+                <a:cs typeface="Onest"/>
+              </a:rPr>
+              <a:t> </a:t>
+            </a:r>
+            <a:r>
+              <a:rPr sz="1600" b="0" dirty="0" err="1">
+                <a:solidFill>
+                  <a:srgbClr val="58606B"/>
+                </a:solidFill>
+                <a:latin typeface="Onest"/>
+                <a:ea typeface="Onest"/>
+                <a:cs typeface="Onest"/>
+              </a:rPr>
+              <a:t>параметров</a:t>
+            </a:r>
+            <a:r>
+              <a:rPr sz="1600" b="0" dirty="0">
+                <a:solidFill>
+                  <a:srgbClr val="58606B"/>
+                </a:solidFill>
+                <a:latin typeface="Onest"/>
+                <a:ea typeface="Onest"/>
+                <a:cs typeface="Onest"/>
+              </a:rPr>
+              <a:t> </a:t>
+            </a:r>
+            <a:r>
+              <a:rPr sz="1600" b="0" dirty="0" err="1">
+                <a:solidFill>
+                  <a:srgbClr val="58606B"/>
+                </a:solidFill>
+                <a:latin typeface="Onest"/>
+                <a:ea typeface="Onest"/>
+                <a:cs typeface="Onest"/>
+              </a:rPr>
+              <a:t>алгоритма</a:t>
+            </a:r>
+            <a:r>
+              <a:rPr sz="1600" b="0" dirty="0">
+                <a:solidFill>
+                  <a:srgbClr val="58606B"/>
+                </a:solidFill>
+                <a:latin typeface="Onest"/>
+                <a:ea typeface="Onest"/>
+                <a:cs typeface="Onest"/>
+              </a:rPr>
+              <a:t> </a:t>
+            </a:r>
+            <a:r>
+              <a:rPr sz="1600" b="0" dirty="0" err="1">
+                <a:solidFill>
+                  <a:srgbClr val="58606B"/>
+                </a:solidFill>
+                <a:latin typeface="Onest"/>
+                <a:ea typeface="Onest"/>
+                <a:cs typeface="Onest"/>
+              </a:rPr>
+              <a:t>факторизации</a:t>
+            </a:r>
+            <a:r>
+              <a:rPr sz="1600" b="0" dirty="0">
+                <a:solidFill>
+                  <a:srgbClr val="58606B"/>
+                </a:solidFill>
+                <a:latin typeface="Onest"/>
+                <a:ea typeface="Onest"/>
+                <a:cs typeface="Onest"/>
+              </a:rPr>
+              <a:t> </a:t>
+            </a:r>
+            <a:r>
+              <a:rPr sz="1600" b="0" dirty="0" err="1">
+                <a:solidFill>
+                  <a:srgbClr val="58606B"/>
+                </a:solidFill>
+                <a:latin typeface="Onest"/>
+                <a:ea typeface="Onest"/>
+                <a:cs typeface="Onest"/>
+              </a:rPr>
+              <a:t>больших</a:t>
+            </a:r>
+            <a:r>
+              <a:rPr sz="1600" b="0" dirty="0">
+                <a:solidFill>
+                  <a:srgbClr val="58606B"/>
+                </a:solidFill>
+                <a:latin typeface="Onest"/>
+                <a:ea typeface="Onest"/>
+                <a:cs typeface="Onest"/>
+              </a:rPr>
+              <a:t> </a:t>
+            </a:r>
+            <a:r>
+              <a:rPr sz="1600" b="0" dirty="0" err="1">
+                <a:solidFill>
+                  <a:srgbClr val="58606B"/>
+                </a:solidFill>
+                <a:latin typeface="Onest"/>
+                <a:ea typeface="Onest"/>
+                <a:cs typeface="Onest"/>
+              </a:rPr>
+              <a:t>чисел</a:t>
+            </a:r>
+            <a:r>
+              <a:rPr sz="1600" b="0" dirty="0">
+                <a:solidFill>
+                  <a:srgbClr val="58606B"/>
+                </a:solidFill>
+                <a:latin typeface="Onest"/>
+                <a:ea typeface="Onest"/>
+                <a:cs typeface="Onest"/>
+              </a:rPr>
+              <a:t> с </a:t>
+            </a:r>
+            <a:r>
+              <a:rPr sz="1600" b="0" dirty="0" err="1">
+                <a:solidFill>
+                  <a:srgbClr val="58606B"/>
+                </a:solidFill>
+                <a:latin typeface="Onest"/>
+                <a:ea typeface="Onest"/>
+                <a:cs typeface="Onest"/>
+              </a:rPr>
+              <a:t>применением</a:t>
+            </a:r>
+            <a:endParaRPr sz="1600" b="0" dirty="0">
+              <a:solidFill>
+                <a:srgbClr val="58606B"/>
+              </a:solidFill>
+              <a:latin typeface="Onest"/>
+              <a:ea typeface="Onest"/>
+              <a:cs typeface="Onest"/>
+            </a:endParaRPr>
           </a:p>
           <a:p>
             <a:pPr algn="l">
@@ -12141,105 +13638,159 @@
               </a:defRPr>
             </a:pPr>
             <a:r>
-              <a:rPr sz="1800" b="0">
-                <a:solidFill>
-                  <a:srgbClr val="58606B"/>
-                </a:solidFill>
-                <a:latin typeface="Onest"/>
-                <a:ea typeface="Onest"/>
-                <a:cs typeface="Onest"/>
-              </a:rPr>
-              <a:t>эллиптических кривых на основе эвристических методов оптимизации</a:t>
-            </a:r>
+              <a:rPr sz="1600" b="0" dirty="0" err="1">
+                <a:solidFill>
+                  <a:srgbClr val="58606B"/>
+                </a:solidFill>
+                <a:latin typeface="Onest"/>
+                <a:ea typeface="Onest"/>
+                <a:cs typeface="Onest"/>
+              </a:rPr>
+              <a:t>эллиптических</a:t>
+            </a:r>
+            <a:r>
+              <a:rPr sz="1600" b="0" dirty="0">
+                <a:solidFill>
+                  <a:srgbClr val="58606B"/>
+                </a:solidFill>
+                <a:latin typeface="Onest"/>
+                <a:ea typeface="Onest"/>
+                <a:cs typeface="Onest"/>
+              </a:rPr>
+              <a:t> </a:t>
+            </a:r>
+            <a:r>
+              <a:rPr sz="1600" b="0" dirty="0" err="1">
+                <a:solidFill>
+                  <a:srgbClr val="58606B"/>
+                </a:solidFill>
+                <a:latin typeface="Onest"/>
+                <a:ea typeface="Onest"/>
+                <a:cs typeface="Onest"/>
+              </a:rPr>
+              <a:t>кривых</a:t>
+            </a:r>
+            <a:r>
+              <a:rPr sz="1600" b="0" dirty="0">
+                <a:solidFill>
+                  <a:srgbClr val="58606B"/>
+                </a:solidFill>
+                <a:latin typeface="Onest"/>
+                <a:ea typeface="Onest"/>
+                <a:cs typeface="Onest"/>
+              </a:rPr>
+              <a:t> </a:t>
+            </a:r>
+            <a:r>
+              <a:rPr sz="1600" b="0" dirty="0" err="1">
+                <a:solidFill>
+                  <a:srgbClr val="58606B"/>
+                </a:solidFill>
+                <a:latin typeface="Onest"/>
+                <a:ea typeface="Onest"/>
+                <a:cs typeface="Onest"/>
+              </a:rPr>
+              <a:t>на</a:t>
+            </a:r>
+            <a:r>
+              <a:rPr sz="1600" b="0" dirty="0">
+                <a:solidFill>
+                  <a:srgbClr val="58606B"/>
+                </a:solidFill>
+                <a:latin typeface="Onest"/>
+                <a:ea typeface="Onest"/>
+                <a:cs typeface="Onest"/>
+              </a:rPr>
+              <a:t> </a:t>
+            </a:r>
+            <a:r>
+              <a:rPr sz="1600" b="0" dirty="0" err="1">
+                <a:solidFill>
+                  <a:srgbClr val="58606B"/>
+                </a:solidFill>
+                <a:latin typeface="Onest"/>
+                <a:ea typeface="Onest"/>
+                <a:cs typeface="Onest"/>
+              </a:rPr>
+              <a:t>основе</a:t>
+            </a:r>
+            <a:r>
+              <a:rPr sz="1600" b="0" dirty="0">
+                <a:solidFill>
+                  <a:srgbClr val="58606B"/>
+                </a:solidFill>
+                <a:latin typeface="Onest"/>
+                <a:ea typeface="Onest"/>
+                <a:cs typeface="Onest"/>
+              </a:rPr>
+              <a:t> </a:t>
+            </a:r>
+            <a:r>
+              <a:rPr sz="1600" b="0" dirty="0" err="1">
+                <a:solidFill>
+                  <a:srgbClr val="58606B"/>
+                </a:solidFill>
+                <a:latin typeface="Onest"/>
+                <a:ea typeface="Onest"/>
+                <a:cs typeface="Onest"/>
+              </a:rPr>
+              <a:t>эвристических</a:t>
+            </a:r>
+            <a:r>
+              <a:rPr sz="1600" b="0" dirty="0">
+                <a:solidFill>
+                  <a:srgbClr val="58606B"/>
+                </a:solidFill>
+                <a:latin typeface="Onest"/>
+                <a:ea typeface="Onest"/>
+                <a:cs typeface="Onest"/>
+              </a:rPr>
+              <a:t> </a:t>
+            </a:r>
+            <a:r>
+              <a:rPr sz="1600" b="0" dirty="0" err="1">
+                <a:solidFill>
+                  <a:srgbClr val="58606B"/>
+                </a:solidFill>
+                <a:latin typeface="Onest"/>
+                <a:ea typeface="Onest"/>
+                <a:cs typeface="Onest"/>
+              </a:rPr>
+              <a:t>методов</a:t>
+            </a:r>
+            <a:r>
+              <a:rPr sz="1600" b="0" dirty="0">
+                <a:solidFill>
+                  <a:srgbClr val="58606B"/>
+                </a:solidFill>
+                <a:latin typeface="Onest"/>
+                <a:ea typeface="Onest"/>
+                <a:cs typeface="Onest"/>
+              </a:rPr>
+              <a:t> </a:t>
+            </a:r>
+            <a:r>
+              <a:rPr sz="1600" b="0" dirty="0" err="1">
+                <a:solidFill>
+                  <a:srgbClr val="58606B"/>
+                </a:solidFill>
+                <a:latin typeface="Onest"/>
+                <a:ea typeface="Onest"/>
+                <a:cs typeface="Onest"/>
+              </a:rPr>
+              <a:t>оптимизации</a:t>
+            </a:r>
+            <a:endParaRPr sz="1600" b="0" dirty="0">
+              <a:solidFill>
+                <a:srgbClr val="58606B"/>
+              </a:solidFill>
+              <a:latin typeface="Onest"/>
+              <a:ea typeface="Onest"/>
+              <a:cs typeface="Onest"/>
+            </a:endParaRPr>
           </a:p>
         </p:txBody>
       </p:sp>
-      <p:sp>
-        <p:nvSpPr>
-          <p:cNvPr id="25" name="Прямоугольник 24">
-            <a:extLst>
-              <a:ext uri="{FF2B5EF4-FFF2-40B4-BE49-F238E27FC236}">
-                <a16:creationId xmlns:a16="http://schemas.microsoft.com/office/drawing/2014/main" id="{19F35680-2232-40AF-878E-A04FEE696764}"/>
-              </a:ext>
-            </a:extLst>
-          </p:cNvPr>
-          <p:cNvSpPr>
-            <a:spLocks noGrp="1"/>
-          </p:cNvSpPr>
-          <p:nvPr/>
-        </p:nvSpPr>
-        <p:spPr>
-          <a:xfrm>
-            <a:off x="10763250" y="6419850"/>
-            <a:ext cx="914400" cy="266700"/>
-          </a:xfrm>
-          <a:prstGeom prst="rect">
-            <a:avLst/>
-          </a:prstGeom>
-          <a:solidFill>
-            <a:srgbClr val="000000">
-              <a:alpha val="0"/>
-            </a:srgbClr>
-          </a:solidFill>
-          <a:ln w="0">
-            <a:solidFill>
-              <a:srgbClr val="000000">
-                <a:alpha val="0"/>
-              </a:srgbClr>
-            </a:solidFill>
-            <a:prstDash val="solid"/>
-          </a:ln>
-        </p:spPr>
-        <p:txBody>
-          <a:bodyPr lIns="0" tIns="0" rIns="0" bIns="0" anchor="t"/>
-          <a:lstStyle/>
-          <a:p>
-            <a:pPr algn="r">
-              <a:defRPr sz="1800" b="1">
-                <a:solidFill>
-                  <a:srgbClr val="15181F"/>
-                </a:solidFill>
-                <a:latin typeface="Onest"/>
-                <a:ea typeface="Onest"/>
-                <a:cs typeface="Onest"/>
-              </a:defRPr>
-            </a:pPr>
-            <a:r>
-              <a:rPr sz="1800" b="1">
-                <a:solidFill>
-                  <a:srgbClr val="15181F"/>
-                </a:solidFill>
-                <a:latin typeface="Onest"/>
-                <a:ea typeface="Onest"/>
-                <a:cs typeface="Onest"/>
-              </a:rPr>
-              <a:t>14/19</a:t>
-            </a:r>
-          </a:p>
-        </p:txBody>
-      </p:sp>
-      <p:pic>
-        <p:nvPicPr>
-          <p:cNvPr id="26" name="Рисунок 25"/>
-          <p:cNvPicPr>
-            <a:picLocks noChangeAspect="1"/>
-          </p:cNvPicPr>
-          <p:nvPr/>
-        </p:nvPicPr>
-        <p:blipFill>
-          <a:blip r:embed="rId3"/>
-          <a:stretch/>
-        </p:blipFill>
-        <p:spPr>
-          <a:xfrm>
-            <a:off x="9572625" y="248984"/>
-            <a:ext cx="2095500" cy="787908"/>
-          </a:xfrm>
-          <a:prstGeom prst="rect">
-            <a:avLst/>
-          </a:prstGeom>
-        </p:spPr>
-      </p:pic>
     </p:spTree>
     <p:extLst>
       <p:ext uri="{BB962C8B-B14F-4D97-AF65-F5344CB8AC3E}">
@@ -13599,21 +15150,126 @@
       </p:sp>
       <p:sp>
         <p:nvSpPr>
-          <p:cNvPr id="30" name="Прямоугольник 29">
-            <a:extLst>
-              <a:ext uri="{FF2B5EF4-FFF2-40B4-BE49-F238E27FC236}">
-                <a16:creationId xmlns:a16="http://schemas.microsoft.com/office/drawing/2014/main" id="{565ABE83-71A1-44AF-BADC-BB16F3D4B0FD}"/>
-              </a:ext>
-            </a:extLst>
-          </p:cNvPr>
-          <p:cNvSpPr>
-            <a:spLocks noGrp="1"/>
-          </p:cNvSpPr>
-          <p:nvPr/>
-        </p:nvSpPr>
-        <p:spPr>
-          <a:xfrm>
-            <a:off x="514350" y="6248400"/>
+          <p:cNvPr id="31" name="Прямоугольник 30">
+            <a:extLst>
+              <a:ext uri="{FF2B5EF4-FFF2-40B4-BE49-F238E27FC236}">
+                <a16:creationId xmlns:a16="http://schemas.microsoft.com/office/drawing/2014/main" id="{CBF78AA8-6E60-4C6F-97B5-02E611CDCEF2}"/>
+              </a:ext>
+            </a:extLst>
+          </p:cNvPr>
+          <p:cNvSpPr>
+            <a:spLocks noGrp="1"/>
+          </p:cNvSpPr>
+          <p:nvPr/>
+        </p:nvSpPr>
+        <p:spPr>
+          <a:xfrm>
+            <a:off x="10763250" y="6419850"/>
+            <a:ext cx="914400" cy="266700"/>
+          </a:xfrm>
+          <a:prstGeom prst="rect">
+            <a:avLst/>
+          </a:prstGeom>
+          <a:solidFill>
+            <a:srgbClr val="000000">
+              <a:alpha val="0"/>
+            </a:srgbClr>
+          </a:solidFill>
+          <a:ln w="0">
+            <a:solidFill>
+              <a:srgbClr val="000000">
+                <a:alpha val="0"/>
+              </a:srgbClr>
+            </a:solidFill>
+            <a:prstDash val="solid"/>
+          </a:ln>
+        </p:spPr>
+        <p:txBody>
+          <a:bodyPr lIns="0" tIns="0" rIns="0" bIns="0" anchor="t"/>
+          <a:lstStyle/>
+          <a:p>
+            <a:pPr algn="r">
+              <a:defRPr sz="1800" b="1">
+                <a:solidFill>
+                  <a:srgbClr val="15181F"/>
+                </a:solidFill>
+                <a:latin typeface="Onest"/>
+                <a:ea typeface="Onest"/>
+                <a:cs typeface="Onest"/>
+              </a:defRPr>
+            </a:pPr>
+            <a:r>
+              <a:rPr sz="1800" b="1" dirty="0">
+                <a:solidFill>
+                  <a:srgbClr val="15181F"/>
+                </a:solidFill>
+                <a:latin typeface="Onest"/>
+                <a:ea typeface="Onest"/>
+                <a:cs typeface="Onest"/>
+              </a:rPr>
+              <a:t>15/1</a:t>
+            </a:r>
+            <a:r>
+              <a:rPr lang="ru-RU" sz="1800" b="1" dirty="0">
+                <a:solidFill>
+                  <a:srgbClr val="15181F"/>
+                </a:solidFill>
+                <a:latin typeface="Onest"/>
+                <a:ea typeface="Onest"/>
+                <a:cs typeface="Onest"/>
+              </a:rPr>
+              <a:t>8</a:t>
+            </a:r>
+            <a:endParaRPr sz="1800" b="1" dirty="0">
+              <a:solidFill>
+                <a:srgbClr val="15181F"/>
+              </a:solidFill>
+              <a:latin typeface="Onest"/>
+              <a:ea typeface="Onest"/>
+              <a:cs typeface="Onest"/>
+            </a:endParaRPr>
+          </a:p>
+        </p:txBody>
+      </p:sp>
+      <p:pic>
+        <p:nvPicPr>
+          <p:cNvPr id="32" name="Рисунок 31"/>
+          <p:cNvPicPr>
+            <a:picLocks noChangeAspect="1"/>
+          </p:cNvPicPr>
+          <p:nvPr/>
+        </p:nvPicPr>
+        <p:blipFill>
+          <a:blip r:embed="rId3"/>
+          <a:stretch/>
+        </p:blipFill>
+        <p:spPr>
+          <a:xfrm>
+            <a:off x="9572625" y="248984"/>
+            <a:ext cx="2095500" cy="787908"/>
+          </a:xfrm>
+          <a:prstGeom prst="rect">
+            <a:avLst/>
+          </a:prstGeom>
+        </p:spPr>
+      </p:pic>
+      <p:sp>
+        <p:nvSpPr>
+          <p:cNvPr id="33" name="Прямоугольник 32">
+            <a:extLst>
+              <a:ext uri="{FF2B5EF4-FFF2-40B4-BE49-F238E27FC236}">
+                <a16:creationId xmlns:a16="http://schemas.microsoft.com/office/drawing/2014/main" id="{DEB79B3B-A855-4EFB-9F41-CE3F8B5F8DD6}"/>
+              </a:ext>
+            </a:extLst>
+          </p:cNvPr>
+          <p:cNvSpPr>
+            <a:spLocks noGrp="1"/>
+          </p:cNvSpPr>
+          <p:nvPr/>
+        </p:nvSpPr>
+        <p:spPr>
+          <a:xfrm>
+            <a:off x="514350" y="6304429"/>
             <a:ext cx="9810750" cy="457200"/>
           </a:xfrm>
           <a:prstGeom prst="rect">
@@ -13648,16 +15304,178 @@
               </a:defRPr>
             </a:pPr>
             <a:r>
-              <a:rPr sz="1800" b="0">
-                <a:solidFill>
-                  <a:srgbClr val="58606B"/>
-                </a:solidFill>
-                <a:latin typeface="Onest"/>
-                <a:ea typeface="Onest"/>
-                <a:cs typeface="Onest"/>
-              </a:rPr>
-              <a:t>Автоматизация подбора параметров алгоритма факторизации больших чисел с применением</a:t>
-            </a:r>
+              <a:rPr sz="1600" b="0" dirty="0" err="1">
+                <a:solidFill>
+                  <a:srgbClr val="58606B"/>
+                </a:solidFill>
+                <a:latin typeface="Onest"/>
+                <a:ea typeface="Onest"/>
+                <a:cs typeface="Onest"/>
+              </a:rPr>
+              <a:t>Автоматизация</a:t>
+            </a:r>
+            <a:r>
+              <a:rPr sz="1600" b="0" dirty="0">
+                <a:solidFill>
+                  <a:srgbClr val="58606B"/>
+                </a:solidFill>
+                <a:latin typeface="Onest"/>
+                <a:ea typeface="Onest"/>
+                <a:cs typeface="Onest"/>
+              </a:rPr>
+              <a:t> </a:t>
+            </a:r>
+            <a:r>
+              <a:rPr sz="1600" b="0" dirty="0" err="1">
+                <a:solidFill>
+                  <a:srgbClr val="58606B"/>
+                </a:solidFill>
+                <a:latin typeface="Onest"/>
+                <a:ea typeface="Onest"/>
+                <a:cs typeface="Onest"/>
+              </a:rPr>
+              <a:t>подбора</a:t>
+            </a:r>
+            <a:r>
+              <a:rPr sz="1600" b="0" dirty="0">
+                <a:solidFill>
+                  <a:srgbClr val="58606B"/>
+                </a:solidFill>
+                <a:latin typeface="Onest"/>
+                <a:ea typeface="Onest"/>
+                <a:cs typeface="Onest"/>
+              </a:rPr>
+              <a:t> </a:t>
+            </a:r>
+            <a:r>
+              <a:rPr sz="1600" b="0" dirty="0" err="1">
+                <a:solidFill>
+                  <a:srgbClr val="58606B"/>
+                </a:solidFill>
+                <a:latin typeface="Onest"/>
+                <a:ea typeface="Onest"/>
+                <a:cs typeface="Onest"/>
+              </a:rPr>
+              <a:t>параметров</a:t>
+            </a:r>
+            <a:r>
+              <a:rPr sz="1600" b="0" dirty="0">
+                <a:solidFill>
+                  <a:srgbClr val="58606B"/>
+                </a:solidFill>
+                <a:latin typeface="Onest"/>
+                <a:ea typeface="Onest"/>
+                <a:cs typeface="Onest"/>
+              </a:rPr>
+              <a:t> </a:t>
+            </a:r>
+            <a:r>
+              <a:rPr sz="1600" b="0" dirty="0" err="1">
+                <a:solidFill>
+                  <a:srgbClr val="58606B"/>
+                </a:solidFill>
+                <a:latin typeface="Onest"/>
+                <a:ea typeface="Onest"/>
+                <a:cs typeface="Onest"/>
+              </a:rPr>
+              <a:t>алгоритма</a:t>
+            </a:r>
+            <a:r>
+              <a:rPr sz="1600" b="0" dirty="0">
+                <a:solidFill>
+                  <a:srgbClr val="58606B"/>
+                </a:solidFill>
+                <a:latin typeface="Onest"/>
+                <a:ea typeface="Onest"/>
+                <a:cs typeface="Onest"/>
+              </a:rPr>
+              <a:t> </a:t>
+            </a:r>
+            <a:r>
+              <a:rPr sz="1600" b="0" dirty="0" err="1">
+                <a:solidFill>
+                  <a:srgbClr val="58606B"/>
+                </a:solidFill>
+                <a:latin typeface="Onest"/>
+                <a:ea typeface="Onest"/>
+                <a:cs typeface="Onest"/>
+              </a:rPr>
+              <a:t>факторизации</a:t>
+            </a:r>
+            <a:r>
+              <a:rPr sz="1600" b="0" dirty="0">
+                <a:solidFill>
+                  <a:srgbClr val="58606B"/>
+                </a:solidFill>
+                <a:latin typeface="Onest"/>
+                <a:ea typeface="Onest"/>
+                <a:cs typeface="Onest"/>
+              </a:rPr>
+              <a:t> </a:t>
+            </a:r>
+            <a:r>
+              <a:rPr sz="1600" b="0" dirty="0" err="1">
+                <a:solidFill>
+                  <a:srgbClr val="58606B"/>
+                </a:solidFill>
+                <a:latin typeface="Onest"/>
+                <a:ea typeface="Onest"/>
+                <a:cs typeface="Onest"/>
+              </a:rPr>
+              <a:t>больших</a:t>
+            </a:r>
+            <a:r>
+              <a:rPr sz="1600" b="0" dirty="0">
+                <a:solidFill>
+                  <a:srgbClr val="58606B"/>
+                </a:solidFill>
+                <a:latin typeface="Onest"/>
+                <a:ea typeface="Onest"/>
+                <a:cs typeface="Onest"/>
+              </a:rPr>
+              <a:t> </a:t>
+            </a:r>
+            <a:r>
+              <a:rPr sz="1600" b="0" dirty="0" err="1">
+                <a:solidFill>
+                  <a:srgbClr val="58606B"/>
+                </a:solidFill>
+                <a:latin typeface="Onest"/>
+                <a:ea typeface="Onest"/>
+                <a:cs typeface="Onest"/>
+              </a:rPr>
+              <a:t>чисел</a:t>
+            </a:r>
+            <a:r>
+              <a:rPr sz="1600" b="0" dirty="0">
+                <a:solidFill>
+                  <a:srgbClr val="58606B"/>
+                </a:solidFill>
+                <a:latin typeface="Onest"/>
+                <a:ea typeface="Onest"/>
+                <a:cs typeface="Onest"/>
+              </a:rPr>
+              <a:t> с </a:t>
+            </a:r>
+            <a:r>
+              <a:rPr sz="1600" b="0" dirty="0" err="1">
+                <a:solidFill>
+                  <a:srgbClr val="58606B"/>
+                </a:solidFill>
+                <a:latin typeface="Onest"/>
+                <a:ea typeface="Onest"/>
+                <a:cs typeface="Onest"/>
+              </a:rPr>
+              <a:t>применением</a:t>
+            </a:r>
+            <a:endParaRPr sz="1600" b="0" dirty="0">
+              <a:solidFill>
+                <a:srgbClr val="58606B"/>
+              </a:solidFill>
+              <a:latin typeface="Onest"/>
+              <a:ea typeface="Onest"/>
+              <a:cs typeface="Onest"/>
+            </a:endParaRPr>
           </a:p>
           <a:p>
             <a:pPr algn="l">
@@ -13671,105 +15489,159 @@
               </a:defRPr>
             </a:pPr>
             <a:r>
-              <a:rPr sz="1800" b="0">
-                <a:solidFill>
-                  <a:srgbClr val="58606B"/>
-                </a:solidFill>
-                <a:latin typeface="Onest"/>
-                <a:ea typeface="Onest"/>
-                <a:cs typeface="Onest"/>
-              </a:rPr>
-              <a:t>эллиптических кривых на основе эвристических методов оптимизации</a:t>
-            </a:r>
+              <a:rPr sz="1600" b="0" dirty="0" err="1">
+                <a:solidFill>
+                  <a:srgbClr val="58606B"/>
+                </a:solidFill>
+                <a:latin typeface="Onest"/>
+                <a:ea typeface="Onest"/>
+                <a:cs typeface="Onest"/>
+              </a:rPr>
+              <a:t>эллиптических</a:t>
+            </a:r>
+            <a:r>
+              <a:rPr sz="1600" b="0" dirty="0">
+                <a:solidFill>
+                  <a:srgbClr val="58606B"/>
+                </a:solidFill>
+                <a:latin typeface="Onest"/>
+                <a:ea typeface="Onest"/>
+                <a:cs typeface="Onest"/>
+              </a:rPr>
+              <a:t> </a:t>
+            </a:r>
+            <a:r>
+              <a:rPr sz="1600" b="0" dirty="0" err="1">
+                <a:solidFill>
+                  <a:srgbClr val="58606B"/>
+                </a:solidFill>
+                <a:latin typeface="Onest"/>
+                <a:ea typeface="Onest"/>
+                <a:cs typeface="Onest"/>
+              </a:rPr>
+              <a:t>кривых</a:t>
+            </a:r>
+            <a:r>
+              <a:rPr sz="1600" b="0" dirty="0">
+                <a:solidFill>
+                  <a:srgbClr val="58606B"/>
+                </a:solidFill>
+                <a:latin typeface="Onest"/>
+                <a:ea typeface="Onest"/>
+                <a:cs typeface="Onest"/>
+              </a:rPr>
+              <a:t> </a:t>
+            </a:r>
+            <a:r>
+              <a:rPr sz="1600" b="0" dirty="0" err="1">
+                <a:solidFill>
+                  <a:srgbClr val="58606B"/>
+                </a:solidFill>
+                <a:latin typeface="Onest"/>
+                <a:ea typeface="Onest"/>
+                <a:cs typeface="Onest"/>
+              </a:rPr>
+              <a:t>на</a:t>
+            </a:r>
+            <a:r>
+              <a:rPr sz="1600" b="0" dirty="0">
+                <a:solidFill>
+                  <a:srgbClr val="58606B"/>
+                </a:solidFill>
+                <a:latin typeface="Onest"/>
+                <a:ea typeface="Onest"/>
+                <a:cs typeface="Onest"/>
+              </a:rPr>
+              <a:t> </a:t>
+            </a:r>
+            <a:r>
+              <a:rPr sz="1600" b="0" dirty="0" err="1">
+                <a:solidFill>
+                  <a:srgbClr val="58606B"/>
+                </a:solidFill>
+                <a:latin typeface="Onest"/>
+                <a:ea typeface="Onest"/>
+                <a:cs typeface="Onest"/>
+              </a:rPr>
+              <a:t>основе</a:t>
+            </a:r>
+            <a:r>
+              <a:rPr sz="1600" b="0" dirty="0">
+                <a:solidFill>
+                  <a:srgbClr val="58606B"/>
+                </a:solidFill>
+                <a:latin typeface="Onest"/>
+                <a:ea typeface="Onest"/>
+                <a:cs typeface="Onest"/>
+              </a:rPr>
+              <a:t> </a:t>
+            </a:r>
+            <a:r>
+              <a:rPr sz="1600" b="0" dirty="0" err="1">
+                <a:solidFill>
+                  <a:srgbClr val="58606B"/>
+                </a:solidFill>
+                <a:latin typeface="Onest"/>
+                <a:ea typeface="Onest"/>
+                <a:cs typeface="Onest"/>
+              </a:rPr>
+              <a:t>эвристических</a:t>
+            </a:r>
+            <a:r>
+              <a:rPr sz="1600" b="0" dirty="0">
+                <a:solidFill>
+                  <a:srgbClr val="58606B"/>
+                </a:solidFill>
+                <a:latin typeface="Onest"/>
+                <a:ea typeface="Onest"/>
+                <a:cs typeface="Onest"/>
+              </a:rPr>
+              <a:t> </a:t>
+            </a:r>
+            <a:r>
+              <a:rPr sz="1600" b="0" dirty="0" err="1">
+                <a:solidFill>
+                  <a:srgbClr val="58606B"/>
+                </a:solidFill>
+                <a:latin typeface="Onest"/>
+                <a:ea typeface="Onest"/>
+                <a:cs typeface="Onest"/>
+              </a:rPr>
+              <a:t>методов</a:t>
+            </a:r>
+            <a:r>
+              <a:rPr sz="1600" b="0" dirty="0">
+                <a:solidFill>
+                  <a:srgbClr val="58606B"/>
+                </a:solidFill>
+                <a:latin typeface="Onest"/>
+                <a:ea typeface="Onest"/>
+                <a:cs typeface="Onest"/>
+              </a:rPr>
+              <a:t> </a:t>
+            </a:r>
+            <a:r>
+              <a:rPr sz="1600" b="0" dirty="0" err="1">
+                <a:solidFill>
+                  <a:srgbClr val="58606B"/>
+                </a:solidFill>
+                <a:latin typeface="Onest"/>
+                <a:ea typeface="Onest"/>
+                <a:cs typeface="Onest"/>
+              </a:rPr>
+              <a:t>оптимизации</a:t>
+            </a:r>
+            <a:endParaRPr sz="1600" b="0" dirty="0">
+              <a:solidFill>
+                <a:srgbClr val="58606B"/>
+              </a:solidFill>
+              <a:latin typeface="Onest"/>
+              <a:ea typeface="Onest"/>
+              <a:cs typeface="Onest"/>
+            </a:endParaRPr>
           </a:p>
         </p:txBody>
       </p:sp>
-      <p:sp>
-        <p:nvSpPr>
-          <p:cNvPr id="31" name="Прямоугольник 30">
-            <a:extLst>
-              <a:ext uri="{FF2B5EF4-FFF2-40B4-BE49-F238E27FC236}">
-                <a16:creationId xmlns:a16="http://schemas.microsoft.com/office/drawing/2014/main" id="{CBF78AA8-6E60-4C6F-97B5-02E611CDCEF2}"/>
-              </a:ext>
-            </a:extLst>
-          </p:cNvPr>
-          <p:cNvSpPr>
-            <a:spLocks noGrp="1"/>
-          </p:cNvSpPr>
-          <p:nvPr/>
-        </p:nvSpPr>
-        <p:spPr>
-          <a:xfrm>
-            <a:off x="10763250" y="6419850"/>
-            <a:ext cx="914400" cy="266700"/>
-          </a:xfrm>
-          <a:prstGeom prst="rect">
-            <a:avLst/>
-          </a:prstGeom>
-          <a:solidFill>
-            <a:srgbClr val="000000">
-              <a:alpha val="0"/>
-            </a:srgbClr>
-          </a:solidFill>
-          <a:ln w="0">
-            <a:solidFill>
-              <a:srgbClr val="000000">
-                <a:alpha val="0"/>
-              </a:srgbClr>
-            </a:solidFill>
-            <a:prstDash val="solid"/>
-          </a:ln>
-        </p:spPr>
-        <p:txBody>
-          <a:bodyPr lIns="0" tIns="0" rIns="0" bIns="0" anchor="t"/>
-          <a:lstStyle/>
-          <a:p>
-            <a:pPr algn="r">
-              <a:defRPr sz="1800" b="1">
-                <a:solidFill>
-                  <a:srgbClr val="15181F"/>
-                </a:solidFill>
-                <a:latin typeface="Onest"/>
-                <a:ea typeface="Onest"/>
-                <a:cs typeface="Onest"/>
-              </a:defRPr>
-            </a:pPr>
-            <a:r>
-              <a:rPr sz="1800" b="1">
-                <a:solidFill>
-                  <a:srgbClr val="15181F"/>
-                </a:solidFill>
-                <a:latin typeface="Onest"/>
-                <a:ea typeface="Onest"/>
-                <a:cs typeface="Onest"/>
-              </a:rPr>
-              <a:t>15/19</a:t>
-            </a:r>
-          </a:p>
-        </p:txBody>
-      </p:sp>
-      <p:pic>
-        <p:nvPicPr>
-          <p:cNvPr id="32" name="Рисунок 31"/>
-          <p:cNvPicPr>
-            <a:picLocks noChangeAspect="1"/>
-          </p:cNvPicPr>
-          <p:nvPr/>
-        </p:nvPicPr>
-        <p:blipFill>
-          <a:blip r:embed="rId3"/>
-          <a:stretch/>
-        </p:blipFill>
-        <p:spPr>
-          <a:xfrm>
-            <a:off x="9572625" y="248984"/>
-            <a:ext cx="2095500" cy="787908"/>
-          </a:xfrm>
-          <a:prstGeom prst="rect">
-            <a:avLst/>
-          </a:prstGeom>
-        </p:spPr>
-      </p:pic>
     </p:spTree>
     <p:extLst>
       <p:ext uri="{BB962C8B-B14F-4D97-AF65-F5344CB8AC3E}">
@@ -14683,16 +16555,35 @@
               </a:defRPr>
             </a:pPr>
             <a:r>
-              <a:rPr sz="1800" b="1">
-                <a:solidFill>
-                  <a:srgbClr val="15181F"/>
-                </a:solidFill>
-                <a:latin typeface="Onest"/>
-                <a:ea typeface="Onest"/>
-                <a:cs typeface="Onest"/>
-              </a:rPr>
-              <a:t>16/19</a:t>
-            </a:r>
+              <a:rPr sz="1800" b="1" dirty="0">
+                <a:solidFill>
+                  <a:srgbClr val="15181F"/>
+                </a:solidFill>
+                <a:latin typeface="Onest"/>
+                <a:ea typeface="Onest"/>
+                <a:cs typeface="Onest"/>
+              </a:rPr>
+              <a:t>16/1</a:t>
+            </a:r>
+            <a:r>
+              <a:rPr lang="ru-RU" sz="1800" b="1" dirty="0">
+                <a:solidFill>
+                  <a:srgbClr val="15181F"/>
+                </a:solidFill>
+                <a:latin typeface="Onest"/>
+                <a:ea typeface="Onest"/>
+                <a:cs typeface="Onest"/>
+              </a:rPr>
+              <a:t>8</a:t>
+            </a:r>
+            <a:endParaRPr sz="1800" b="1" dirty="0">
+              <a:solidFill>
+                <a:srgbClr val="15181F"/>
+              </a:solidFill>
+              <a:latin typeface="Onest"/>
+              <a:ea typeface="Onest"/>
+              <a:cs typeface="Onest"/>
+            </a:endParaRPr>
           </a:p>
         </p:txBody>
       </p:sp>
@@ -16114,16 +18005,35 @@
               </a:defRPr>
             </a:pPr>
             <a:r>
-              <a:rPr sz="1800" b="1">
-                <a:solidFill>
-                  <a:srgbClr val="15181F"/>
-                </a:solidFill>
-                <a:latin typeface="Onest"/>
-                <a:ea typeface="Onest"/>
-                <a:cs typeface="Onest"/>
-              </a:rPr>
-              <a:t>17/19</a:t>
-            </a:r>
+              <a:rPr sz="1800" b="1" dirty="0">
+                <a:solidFill>
+                  <a:srgbClr val="15181F"/>
+                </a:solidFill>
+                <a:latin typeface="Onest"/>
+                <a:ea typeface="Onest"/>
+                <a:cs typeface="Onest"/>
+              </a:rPr>
+              <a:t>17/1</a:t>
+            </a:r>
+            <a:r>
+              <a:rPr lang="ru-RU" sz="1800" b="1" dirty="0">
+                <a:solidFill>
+                  <a:srgbClr val="15181F"/>
+                </a:solidFill>
+                <a:latin typeface="Onest"/>
+                <a:ea typeface="Onest"/>
+                <a:cs typeface="Onest"/>
+              </a:rPr>
+              <a:t>8</a:t>
+            </a:r>
+            <a:endParaRPr sz="1800" b="1" dirty="0">
+              <a:solidFill>
+                <a:srgbClr val="15181F"/>
+              </a:solidFill>
+              <a:latin typeface="Onest"/>
+              <a:ea typeface="Onest"/>
+              <a:cs typeface="Onest"/>
+            </a:endParaRPr>
           </a:p>
         </p:txBody>
       </p:sp>
@@ -17901,514 +19811,28 @@
               </a:defRPr>
             </a:pPr>
             <a:r>
-              <a:rPr sz="1800" b="1">
-                <a:solidFill>
-                  <a:srgbClr val="15181F"/>
-                </a:solidFill>
-                <a:latin typeface="Onest"/>
-                <a:ea typeface="Onest"/>
-                <a:cs typeface="Onest"/>
-              </a:rPr>
-              <a:t>18/19</a:t>
-            </a:r>
-          </a:p>
-        </p:txBody>
-      </p:sp>
-      <p:pic>
-        <p:nvPicPr>
-          <p:cNvPr id="36" name="Рисунок 35"/>
-          <p:cNvPicPr>
-            <a:picLocks noChangeAspect="1"/>
-          </p:cNvPicPr>
-          <p:nvPr/>
-        </p:nvPicPr>
-        <p:blipFill>
-          <a:blip r:embed="rId3"/>
-          <a:stretch/>
-        </p:blipFill>
-        <p:spPr>
-          <a:xfrm>
-            <a:off x="9572625" y="248984"/>
-            <a:ext cx="2095500" cy="787908"/>
-          </a:xfrm>
-          <a:prstGeom prst="rect">
-            <a:avLst/>
-          </a:prstGeom>
-        </p:spPr>
-      </p:pic>
-    </p:spTree>
-    <p:extLst>
-      <p:ext uri="{BB962C8B-B14F-4D97-AF65-F5344CB8AC3E}">
-        <p14:creationId xmlns:p14="http://schemas.microsoft.com/office/powerpoint/2010/main" val="1441652632"/>
-      </p:ext>
-    </p:extLst>
-  </p:cSld>
-  <p:clrMapOvr>
-    <a:masterClrMapping/>
-  </p:clrMapOvr>
-</p:sld>
-</file>
-
-<file path=ppt/slides/slide19.xml><?xml version="1.0" encoding="utf-8"?>
-<p:sld xmlns:a="http://schemas.openxmlformats.org/drawingml/2006/main" xmlns:r="http://schemas.openxmlformats.org/officeDocument/2006/relationships" xmlns:p="http://schemas.openxmlformats.org/presentationml/2006/main">
-  <p:cSld>
-    <p:spTree>
-      <p:nvGrpSpPr>
-        <p:cNvPr id="1" name=""/>
-        <p:cNvGrpSpPr/>
-        <p:nvPr/>
-      </p:nvGrpSpPr>
-      <p:grpSpPr>
-        <a:xfrm>
-          <a:off x="0" y="0"/>
-          <a:ext cx="0" cy="0"/>
-          <a:chOff x="0" y="0"/>
-          <a:chExt cx="0" cy="0"/>
-        </a:xfrm>
-      </p:grpSpPr>
-      <p:sp>
-        <p:nvSpPr>
-          <p:cNvPr id="2" name="Прямоугольник 1">
-            <a:extLst>
-              <a:ext uri="{FF2B5EF4-FFF2-40B4-BE49-F238E27FC236}">
-                <a16:creationId xmlns:a16="http://schemas.microsoft.com/office/drawing/2014/main" id="{C33DED05-2501-4D24-8616-A972F7BE01BA}"/>
-              </a:ext>
-            </a:extLst>
-          </p:cNvPr>
-          <p:cNvSpPr>
-            <a:spLocks noGrp="1"/>
-          </p:cNvSpPr>
-          <p:nvPr/>
-        </p:nvSpPr>
-        <p:spPr>
-          <a:xfrm>
-            <a:off x="0" y="0"/>
-            <a:ext cx="400050" cy="6858000"/>
-          </a:xfrm>
-          <a:prstGeom prst="rect">
-            <a:avLst/>
-          </a:prstGeom>
-          <a:solidFill>
-            <a:srgbClr val="37B34A"/>
-          </a:solidFill>
-          <a:ln w="0">
-            <a:solidFill>
-              <a:srgbClr val="37B34A"/>
-            </a:solidFill>
-            <a:prstDash val="solid"/>
-          </a:ln>
-        </p:spPr>
-      </p:sp>
-      <p:sp>
-        <p:nvSpPr>
-          <p:cNvPr id="3" name="Прямоугольник 2">
-            <a:extLst>
-              <a:ext uri="{FF2B5EF4-FFF2-40B4-BE49-F238E27FC236}">
-                <a16:creationId xmlns:a16="http://schemas.microsoft.com/office/drawing/2014/main" id="{3BB5C92F-88F6-469E-8F3D-71BF55AC1D51}"/>
-              </a:ext>
-            </a:extLst>
-          </p:cNvPr>
-          <p:cNvSpPr>
-            <a:spLocks noGrp="1"/>
-          </p:cNvSpPr>
-          <p:nvPr/>
-        </p:nvSpPr>
-        <p:spPr>
-          <a:xfrm>
-            <a:off x="400050" y="0"/>
-            <a:ext cx="114300" cy="6858000"/>
-          </a:xfrm>
-          <a:prstGeom prst="rect">
-            <a:avLst/>
-          </a:prstGeom>
-          <a:solidFill>
-            <a:srgbClr val="522878"/>
-          </a:solidFill>
-          <a:ln w="0">
-            <a:solidFill>
-              <a:srgbClr val="522878"/>
-            </a:solidFill>
-            <a:prstDash val="solid"/>
-          </a:ln>
-        </p:spPr>
-      </p:sp>
-      <p:pic>
-        <p:nvPicPr>
-          <p:cNvPr id="4" name="Рисунок 3"/>
-          <p:cNvPicPr>
-            <a:picLocks noChangeAspect="1"/>
-          </p:cNvPicPr>
-          <p:nvPr/>
-        </p:nvPicPr>
-        <p:blipFill>
-          <a:blip r:embed="rId3"/>
-          <a:stretch/>
-        </p:blipFill>
-        <p:spPr>
-          <a:xfrm>
-            <a:off x="9572625" y="248984"/>
-            <a:ext cx="2095500" cy="787908"/>
-          </a:xfrm>
-          <a:prstGeom prst="rect">
-            <a:avLst/>
-          </a:prstGeom>
-        </p:spPr>
-      </p:pic>
-      <p:sp>
-        <p:nvSpPr>
-          <p:cNvPr id="5" name="Прямоугольник 4">
-            <a:extLst>
-              <a:ext uri="{FF2B5EF4-FFF2-40B4-BE49-F238E27FC236}">
-                <a16:creationId xmlns:a16="http://schemas.microsoft.com/office/drawing/2014/main" id="{F7F09C19-4AB5-4EDE-9DFD-BBA3EEF90EDA}"/>
-              </a:ext>
-            </a:extLst>
-          </p:cNvPr>
-          <p:cNvSpPr>
-            <a:spLocks noGrp="1"/>
-          </p:cNvSpPr>
-          <p:nvPr/>
-        </p:nvSpPr>
-        <p:spPr>
-          <a:xfrm>
-            <a:off x="1047750" y="1619250"/>
-            <a:ext cx="7810500" cy="666750"/>
-          </a:xfrm>
-          <a:prstGeom prst="rect">
-            <a:avLst/>
-          </a:prstGeom>
-          <a:solidFill>
-            <a:srgbClr val="000000">
-              <a:alpha val="0"/>
-            </a:srgbClr>
-          </a:solidFill>
-          <a:ln w="0">
-            <a:solidFill>
-              <a:srgbClr val="000000">
-                <a:alpha val="0"/>
-              </a:srgbClr>
-            </a:solidFill>
-            <a:prstDash val="solid"/>
-          </a:ln>
-        </p:spPr>
-        <p:txBody>
-          <a:bodyPr lIns="0" tIns="0" rIns="0" bIns="0" anchor="t"/>
-          <a:lstStyle/>
-          <a:p>
-            <a:pPr algn="l">
-              <a:defRPr sz="3450" b="1">
-                <a:solidFill>
-                  <a:srgbClr val="15181F"/>
-                </a:solidFill>
-                <a:latin typeface="Onest"/>
-                <a:ea typeface="Onest"/>
-                <a:cs typeface="Onest"/>
-              </a:defRPr>
-            </a:pPr>
-            <a:r>
-              <a:rPr sz="3450" b="1">
-                <a:solidFill>
-                  <a:srgbClr val="15181F"/>
-                </a:solidFill>
-                <a:latin typeface="Onest"/>
-                <a:ea typeface="Onest"/>
-                <a:cs typeface="Onest"/>
-              </a:rPr>
-              <a:t>Спасибо за внимание</a:t>
-            </a:r>
-          </a:p>
-        </p:txBody>
-      </p:sp>
-      <p:sp>
-        <p:nvSpPr>
-          <p:cNvPr id="6" name="Прямоугольник 5">
-            <a:extLst>
-              <a:ext uri="{FF2B5EF4-FFF2-40B4-BE49-F238E27FC236}">
-                <a16:creationId xmlns:a16="http://schemas.microsoft.com/office/drawing/2014/main" id="{19D0E989-7D28-4ADA-8550-9D24EF7AF55A}"/>
-              </a:ext>
-            </a:extLst>
-          </p:cNvPr>
-          <p:cNvSpPr>
-            <a:spLocks noGrp="1"/>
-          </p:cNvSpPr>
-          <p:nvPr/>
-        </p:nvSpPr>
-        <p:spPr>
-          <a:xfrm>
-            <a:off x="1047750" y="2571750"/>
-            <a:ext cx="8572500" cy="571500"/>
-          </a:xfrm>
-          <a:prstGeom prst="rect">
-            <a:avLst/>
-          </a:prstGeom>
-          <a:solidFill>
-            <a:srgbClr val="000000">
-              <a:alpha val="0"/>
-            </a:srgbClr>
-          </a:solidFill>
-          <a:ln w="0">
-            <a:solidFill>
-              <a:srgbClr val="000000">
-                <a:alpha val="0"/>
-              </a:srgbClr>
-            </a:solidFill>
-            <a:prstDash val="solid"/>
-          </a:ln>
-        </p:spPr>
-        <p:txBody>
-          <a:bodyPr lIns="0" tIns="0" rIns="0" bIns="0" anchor="t"/>
-          <a:lstStyle/>
-          <a:p>
-            <a:pPr algn="l">
-              <a:defRPr sz="1800" b="0">
-                <a:solidFill>
-                  <a:srgbClr val="58606B"/>
-                </a:solidFill>
-                <a:latin typeface="Onest"/>
-                <a:ea typeface="Onest"/>
-                <a:cs typeface="Onest"/>
-              </a:defRPr>
-            </a:pPr>
-            <a:r>
-              <a:rPr sz="1800" b="0">
-                <a:solidFill>
-                  <a:srgbClr val="58606B"/>
-                </a:solidFill>
-                <a:latin typeface="Onest"/>
-                <a:ea typeface="Onest"/>
-                <a:cs typeface="Onest"/>
-              </a:rPr>
-              <a:t>Автоматизация подбора параметров алгоритма факторизации больших чисел с применением эллиптических кривых на основе эвристических методов оптимизации</a:t>
-            </a:r>
-          </a:p>
-        </p:txBody>
-      </p:sp>
-      <p:sp>
-        <p:nvSpPr>
-          <p:cNvPr id="7" name="Прямоугольник 6">
-            <a:extLst>
-              <a:ext uri="{FF2B5EF4-FFF2-40B4-BE49-F238E27FC236}">
-                <a16:creationId xmlns:a16="http://schemas.microsoft.com/office/drawing/2014/main" id="{CAF5C7E4-BA6B-4128-8C96-3494569C8235}"/>
-              </a:ext>
-            </a:extLst>
-          </p:cNvPr>
-          <p:cNvSpPr>
-            <a:spLocks noGrp="1"/>
-          </p:cNvSpPr>
-          <p:nvPr/>
-        </p:nvSpPr>
-        <p:spPr>
-          <a:xfrm>
-            <a:off x="1047750" y="3619500"/>
-            <a:ext cx="3143250" cy="66675"/>
-          </a:xfrm>
-          <a:prstGeom prst="rect">
-            <a:avLst/>
-          </a:prstGeom>
-          <a:solidFill>
-            <a:srgbClr val="37B34A"/>
-          </a:solidFill>
-          <a:ln w="0">
-            <a:solidFill>
-              <a:srgbClr val="37B34A"/>
-            </a:solidFill>
-            <a:prstDash val="solid"/>
-          </a:ln>
-        </p:spPr>
-      </p:sp>
-      <p:sp>
-        <p:nvSpPr>
-          <p:cNvPr id="8" name="Прямоугольник 7">
-            <a:extLst>
-              <a:ext uri="{FF2B5EF4-FFF2-40B4-BE49-F238E27FC236}">
-                <a16:creationId xmlns:a16="http://schemas.microsoft.com/office/drawing/2014/main" id="{9C1C60D9-2546-4037-BCD0-01A9954B2D68}"/>
-              </a:ext>
-            </a:extLst>
-          </p:cNvPr>
-          <p:cNvSpPr>
-            <a:spLocks noGrp="1"/>
-          </p:cNvSpPr>
-          <p:nvPr/>
-        </p:nvSpPr>
-        <p:spPr>
-          <a:xfrm>
-            <a:off x="4191000" y="3619500"/>
-            <a:ext cx="2000250" cy="66675"/>
-          </a:xfrm>
-          <a:prstGeom prst="rect">
-            <a:avLst/>
-          </a:prstGeom>
-          <a:solidFill>
-            <a:srgbClr val="522878"/>
-          </a:solidFill>
-          <a:ln w="0">
-            <a:solidFill>
-              <a:srgbClr val="522878"/>
-            </a:solidFill>
-            <a:prstDash val="solid"/>
-          </a:ln>
-        </p:spPr>
-      </p:sp>
-      <p:sp>
-        <p:nvSpPr>
-          <p:cNvPr id="9" name="Прямоугольник 8">
-            <a:extLst>
-              <a:ext uri="{FF2B5EF4-FFF2-40B4-BE49-F238E27FC236}">
-                <a16:creationId xmlns:a16="http://schemas.microsoft.com/office/drawing/2014/main" id="{89385AC2-9949-4998-B70C-68CEC638708F}"/>
-              </a:ext>
-            </a:extLst>
-          </p:cNvPr>
-          <p:cNvSpPr>
-            <a:spLocks noGrp="1"/>
-          </p:cNvSpPr>
-          <p:nvPr/>
-        </p:nvSpPr>
-        <p:spPr>
-          <a:xfrm>
-            <a:off x="6191250" y="3619500"/>
-            <a:ext cx="1143000" cy="66675"/>
-          </a:xfrm>
-          <a:prstGeom prst="rect">
-            <a:avLst/>
-          </a:prstGeom>
-          <a:solidFill>
-            <a:srgbClr val="F39768"/>
-          </a:solidFill>
-          <a:ln w="0">
-            <a:solidFill>
-              <a:srgbClr val="F39768"/>
-            </a:solidFill>
-            <a:prstDash val="solid"/>
-          </a:ln>
-        </p:spPr>
-      </p:sp>
-      <p:sp>
-        <p:nvSpPr>
-          <p:cNvPr id="10" name="Прямоугольник 9">
-            <a:extLst>
-              <a:ext uri="{FF2B5EF4-FFF2-40B4-BE49-F238E27FC236}">
-                <a16:creationId xmlns:a16="http://schemas.microsoft.com/office/drawing/2014/main" id="{9E57A8DC-E346-4962-A3AA-DD5043D7FBA1}"/>
-              </a:ext>
-            </a:extLst>
-          </p:cNvPr>
-          <p:cNvSpPr>
-            <a:spLocks noGrp="1"/>
-          </p:cNvSpPr>
-          <p:nvPr/>
-        </p:nvSpPr>
-        <p:spPr>
-          <a:xfrm>
-            <a:off x="1047750" y="4381500"/>
-            <a:ext cx="5715000" cy="323850"/>
-          </a:xfrm>
-          <a:prstGeom prst="rect">
-            <a:avLst/>
-          </a:prstGeom>
-          <a:solidFill>
-            <a:srgbClr val="000000">
-              <a:alpha val="0"/>
-            </a:srgbClr>
-          </a:solidFill>
-          <a:ln w="0">
-            <a:solidFill>
-              <a:srgbClr val="000000">
-                <a:alpha val="0"/>
-              </a:srgbClr>
-            </a:solidFill>
-            <a:prstDash val="solid"/>
-          </a:ln>
-        </p:spPr>
-        <p:txBody>
-          <a:bodyPr lIns="0" tIns="0" rIns="0" bIns="0" anchor="t"/>
-          <a:lstStyle/>
-          <a:p>
-            <a:pPr algn="l">
-              <a:defRPr sz="2100" b="1">
-                <a:solidFill>
-                  <a:srgbClr val="15181F"/>
-                </a:solidFill>
-                <a:latin typeface="Onest"/>
-                <a:ea typeface="Onest"/>
-                <a:cs typeface="Onest"/>
-              </a:defRPr>
-            </a:pPr>
-            <a:r>
-              <a:rPr sz="2100" b="1" dirty="0" err="1">
-                <a:solidFill>
-                  <a:srgbClr val="15181F"/>
-                </a:solidFill>
-                <a:latin typeface="Onest"/>
-                <a:ea typeface="Onest"/>
-                <a:cs typeface="Onest"/>
-              </a:rPr>
-              <a:t>Готов</a:t>
-            </a:r>
-            <a:r>
-              <a:rPr sz="2100" b="1" dirty="0">
-                <a:solidFill>
-                  <a:srgbClr val="15181F"/>
-                </a:solidFill>
-                <a:latin typeface="Onest"/>
-                <a:ea typeface="Onest"/>
-                <a:cs typeface="Onest"/>
-              </a:rPr>
-              <a:t> </a:t>
-            </a:r>
-            <a:r>
-              <a:rPr sz="2100" b="1" dirty="0" err="1">
-                <a:solidFill>
-                  <a:srgbClr val="15181F"/>
-                </a:solidFill>
-                <a:latin typeface="Onest"/>
-                <a:ea typeface="Onest"/>
-                <a:cs typeface="Onest"/>
-              </a:rPr>
-              <a:t>ответить</a:t>
-            </a:r>
-            <a:r>
-              <a:rPr sz="2100" b="1" dirty="0">
-                <a:solidFill>
-                  <a:srgbClr val="15181F"/>
-                </a:solidFill>
-                <a:latin typeface="Onest"/>
-                <a:ea typeface="Onest"/>
-                <a:cs typeface="Onest"/>
-              </a:rPr>
-              <a:t> </a:t>
-            </a:r>
-            <a:r>
-              <a:rPr sz="2100" b="1" dirty="0" err="1">
-                <a:solidFill>
-                  <a:srgbClr val="15181F"/>
-                </a:solidFill>
-                <a:latin typeface="Onest"/>
-                <a:ea typeface="Onest"/>
-                <a:cs typeface="Onest"/>
-              </a:rPr>
-              <a:t>на</a:t>
-            </a:r>
-            <a:r>
-              <a:rPr sz="2100" b="1" dirty="0">
-                <a:solidFill>
-                  <a:srgbClr val="15181F"/>
-                </a:solidFill>
-                <a:latin typeface="Onest"/>
-                <a:ea typeface="Onest"/>
-                <a:cs typeface="Onest"/>
-              </a:rPr>
-              <a:t> </a:t>
-            </a:r>
-            <a:r>
-              <a:rPr sz="2100" b="1" dirty="0" err="1">
-                <a:solidFill>
-                  <a:srgbClr val="15181F"/>
-                </a:solidFill>
-                <a:latin typeface="Onest"/>
-                <a:ea typeface="Onest"/>
-                <a:cs typeface="Onest"/>
-              </a:rPr>
-              <a:t>вопросы</a:t>
-            </a:r>
-            <a:endParaRPr sz="2100" b="1" dirty="0">
+              <a:rPr sz="1800" b="1" dirty="0">
+                <a:solidFill>
+                  <a:srgbClr val="15181F"/>
+                </a:solidFill>
+                <a:latin typeface="Onest"/>
+                <a:ea typeface="Onest"/>
+                <a:cs typeface="Onest"/>
+              </a:rPr>
+              <a:t>18/1</a:t>
+            </a:r>
+            <a:r>
+              <a:rPr lang="ru-RU" sz="1800" b="1" dirty="0">
+                <a:solidFill>
+                  <a:srgbClr val="15181F"/>
+                </a:solidFill>
+                <a:latin typeface="Onest"/>
+                <a:ea typeface="Onest"/>
+                <a:cs typeface="Onest"/>
+              </a:rPr>
+              <a:t>8</a:t>
+            </a:r>
+            <a:endParaRPr sz="1800" b="1" dirty="0">
               <a:solidFill>
                 <a:srgbClr val="15181F"/>
               </a:solidFill>
@@ -18419,420 +19843,9 @@
           </a:p>
         </p:txBody>
       </p:sp>
-      <p:sp>
-        <p:nvSpPr>
-          <p:cNvPr id="11" name="Прямоугольник 10">
-            <a:extLst>
-              <a:ext uri="{FF2B5EF4-FFF2-40B4-BE49-F238E27FC236}">
-                <a16:creationId xmlns:a16="http://schemas.microsoft.com/office/drawing/2014/main" id="{0CBE4748-E04F-4CC3-86AE-0C78BE122FD3}"/>
-              </a:ext>
-            </a:extLst>
-          </p:cNvPr>
-          <p:cNvSpPr>
-            <a:spLocks noGrp="1"/>
-          </p:cNvSpPr>
-          <p:nvPr/>
-        </p:nvSpPr>
-        <p:spPr>
-          <a:xfrm>
-            <a:off x="1047750" y="5162550"/>
-            <a:ext cx="5238750" cy="266700"/>
-          </a:xfrm>
-          <a:prstGeom prst="rect">
-            <a:avLst/>
-          </a:prstGeom>
-          <a:solidFill>
-            <a:srgbClr val="000000">
-              <a:alpha val="0"/>
-            </a:srgbClr>
-          </a:solidFill>
-          <a:ln w="0">
-            <a:solidFill>
-              <a:srgbClr val="000000">
-                <a:alpha val="0"/>
-              </a:srgbClr>
-            </a:solidFill>
-            <a:prstDash val="solid"/>
-          </a:ln>
-        </p:spPr>
-        <p:txBody>
-          <a:bodyPr lIns="0" tIns="0" rIns="0" bIns="0" anchor="t"/>
-          <a:lstStyle/>
-          <a:p>
-            <a:pPr algn="l">
-              <a:defRPr sz="1800" b="0">
-                <a:solidFill>
-                  <a:srgbClr val="522878"/>
-                </a:solidFill>
-                <a:latin typeface="Onest"/>
-                <a:ea typeface="Onest"/>
-                <a:cs typeface="Onest"/>
-              </a:defRPr>
-            </a:pPr>
-            <a:r>
-              <a:rPr sz="1800" b="0">
-                <a:solidFill>
-                  <a:srgbClr val="522878"/>
-                </a:solidFill>
-                <a:latin typeface="Onest"/>
-                <a:ea typeface="Onest"/>
-                <a:cs typeface="Onest"/>
-              </a:rPr>
-              <a:t>Плеханов Егор Сергеевич</a:t>
-            </a:r>
-          </a:p>
-        </p:txBody>
-      </p:sp>
-      <p:sp>
-        <p:nvSpPr>
-          <p:cNvPr id="12" name="Прямоугольник 11">
-            <a:extLst>
-              <a:ext uri="{FF2B5EF4-FFF2-40B4-BE49-F238E27FC236}">
-                <a16:creationId xmlns:a16="http://schemas.microsoft.com/office/drawing/2014/main" id="{0E47DFAC-A541-4A9C-A302-4CDFABE0C58C}"/>
-              </a:ext>
-            </a:extLst>
-          </p:cNvPr>
-          <p:cNvSpPr>
-            <a:spLocks noGrp="1"/>
-          </p:cNvSpPr>
-          <p:nvPr/>
-        </p:nvSpPr>
-        <p:spPr>
-          <a:xfrm>
-            <a:off x="0" y="5905500"/>
-            <a:ext cx="12192000" cy="952500"/>
-          </a:xfrm>
-          <a:prstGeom prst="rect">
-            <a:avLst/>
-          </a:prstGeom>
-          <a:solidFill>
-            <a:srgbClr val="FFFFFF"/>
-          </a:solidFill>
-          <a:ln w="0">
-            <a:solidFill>
-              <a:srgbClr val="FFFFFF"/>
-            </a:solidFill>
-            <a:prstDash val="solid"/>
-          </a:ln>
-        </p:spPr>
-      </p:sp>
-      <p:sp>
-        <p:nvSpPr>
-          <p:cNvPr id="13" name="Прямоугольник 12">
-            <a:extLst>
-              <a:ext uri="{FF2B5EF4-FFF2-40B4-BE49-F238E27FC236}">
-                <a16:creationId xmlns:a16="http://schemas.microsoft.com/office/drawing/2014/main" id="{6F2DF088-A993-4B02-9FF0-FB4A7D838D0B}"/>
-              </a:ext>
-            </a:extLst>
-          </p:cNvPr>
-          <p:cNvSpPr>
-            <a:spLocks noGrp="1"/>
-          </p:cNvSpPr>
-          <p:nvPr/>
-        </p:nvSpPr>
-        <p:spPr>
-          <a:xfrm>
-            <a:off x="0" y="5905500"/>
-            <a:ext cx="2619375" cy="76200"/>
-          </a:xfrm>
-          <a:prstGeom prst="rect">
-            <a:avLst/>
-          </a:prstGeom>
-          <a:solidFill>
-            <a:srgbClr val="F39768"/>
-          </a:solidFill>
-          <a:ln w="0">
-            <a:solidFill>
-              <a:srgbClr val="F39768"/>
-            </a:solidFill>
-            <a:prstDash val="solid"/>
-          </a:ln>
-        </p:spPr>
-      </p:sp>
-      <p:sp>
-        <p:nvSpPr>
-          <p:cNvPr id="14" name="Прямоугольник 13">
-            <a:extLst>
-              <a:ext uri="{FF2B5EF4-FFF2-40B4-BE49-F238E27FC236}">
-                <a16:creationId xmlns:a16="http://schemas.microsoft.com/office/drawing/2014/main" id="{4806993E-BE37-4B19-A0DA-AC803DCB961C}"/>
-              </a:ext>
-            </a:extLst>
-          </p:cNvPr>
-          <p:cNvSpPr>
-            <a:spLocks noGrp="1"/>
-          </p:cNvSpPr>
-          <p:nvPr/>
-        </p:nvSpPr>
-        <p:spPr>
-          <a:xfrm>
-            <a:off x="2619375" y="5905500"/>
-            <a:ext cx="3143250" cy="76200"/>
-          </a:xfrm>
-          <a:prstGeom prst="rect">
-            <a:avLst/>
-          </a:prstGeom>
-          <a:solidFill>
-            <a:srgbClr val="522878"/>
-          </a:solidFill>
-          <a:ln w="0">
-            <a:solidFill>
-              <a:srgbClr val="522878"/>
-            </a:solidFill>
-            <a:prstDash val="solid"/>
-          </a:ln>
-        </p:spPr>
-      </p:sp>
-      <p:sp>
-        <p:nvSpPr>
-          <p:cNvPr id="15" name="Прямоугольник 14">
-            <a:extLst>
-              <a:ext uri="{FF2B5EF4-FFF2-40B4-BE49-F238E27FC236}">
-                <a16:creationId xmlns:a16="http://schemas.microsoft.com/office/drawing/2014/main" id="{0130CCD3-688F-441E-818A-73E8BD538540}"/>
-              </a:ext>
-            </a:extLst>
-          </p:cNvPr>
-          <p:cNvSpPr>
-            <a:spLocks noGrp="1"/>
-          </p:cNvSpPr>
-          <p:nvPr/>
-        </p:nvSpPr>
-        <p:spPr>
-          <a:xfrm>
-            <a:off x="5762625" y="5905500"/>
-            <a:ext cx="6429375" cy="76200"/>
-          </a:xfrm>
-          <a:prstGeom prst="rect">
-            <a:avLst/>
-          </a:prstGeom>
-          <a:solidFill>
-            <a:srgbClr val="37B34A"/>
-          </a:solidFill>
-          <a:ln w="0">
-            <a:solidFill>
-              <a:srgbClr val="37B34A"/>
-            </a:solidFill>
-            <a:prstDash val="solid"/>
-          </a:ln>
-        </p:spPr>
-      </p:sp>
-      <p:sp>
-        <p:nvSpPr>
-          <p:cNvPr id="16" name="Прямоугольник 15">
-            <a:extLst>
-              <a:ext uri="{FF2B5EF4-FFF2-40B4-BE49-F238E27FC236}">
-                <a16:creationId xmlns:a16="http://schemas.microsoft.com/office/drawing/2014/main" id="{0D1E6957-7605-40B4-A0BA-1D65F30B373F}"/>
-              </a:ext>
-            </a:extLst>
-          </p:cNvPr>
-          <p:cNvSpPr>
-            <a:spLocks noGrp="1"/>
-          </p:cNvSpPr>
-          <p:nvPr/>
-        </p:nvSpPr>
-        <p:spPr>
-          <a:xfrm>
-            <a:off x="514350" y="6019800"/>
-            <a:ext cx="6191250" cy="228600"/>
-          </a:xfrm>
-          <a:prstGeom prst="rect">
-            <a:avLst/>
-          </a:prstGeom>
-          <a:solidFill>
-            <a:srgbClr val="000000">
-              <a:alpha val="0"/>
-            </a:srgbClr>
-          </a:solidFill>
-          <a:ln w="0">
-            <a:solidFill>
-              <a:srgbClr val="000000">
-                <a:alpha val="0"/>
-              </a:srgbClr>
-            </a:solidFill>
-            <a:prstDash val="solid"/>
-          </a:ln>
-        </p:spPr>
-        <p:txBody>
-          <a:bodyPr lIns="0" tIns="0" rIns="0" bIns="0" anchor="t"/>
-          <a:lstStyle/>
-          <a:p>
-            <a:pPr algn="l">
-              <a:defRPr sz="1800" b="0">
-                <a:solidFill>
-                  <a:srgbClr val="58606B"/>
-                </a:solidFill>
-                <a:latin typeface="Onest"/>
-                <a:ea typeface="Onest"/>
-                <a:cs typeface="Onest"/>
-              </a:defRPr>
-            </a:pPr>
-            <a:r>
-              <a:rPr sz="1800" b="0">
-                <a:solidFill>
-                  <a:srgbClr val="58606B"/>
-                </a:solidFill>
-                <a:latin typeface="Onest"/>
-                <a:ea typeface="Onest"/>
-                <a:cs typeface="Onest"/>
-              </a:rPr>
-              <a:t>Плеханов Егор Сергеевич</a:t>
-            </a:r>
-          </a:p>
-        </p:txBody>
-      </p:sp>
-      <p:sp>
-        <p:nvSpPr>
-          <p:cNvPr id="17" name="Прямоугольник 16">
-            <a:extLst>
-              <a:ext uri="{FF2B5EF4-FFF2-40B4-BE49-F238E27FC236}">
-                <a16:creationId xmlns:a16="http://schemas.microsoft.com/office/drawing/2014/main" id="{63DE1EBC-6BA1-4CDC-BE94-D858F5C8C03F}"/>
-              </a:ext>
-            </a:extLst>
-          </p:cNvPr>
-          <p:cNvSpPr>
-            <a:spLocks noGrp="1"/>
-          </p:cNvSpPr>
-          <p:nvPr/>
-        </p:nvSpPr>
-        <p:spPr>
-          <a:xfrm>
-            <a:off x="514350" y="6248400"/>
-            <a:ext cx="9810750" cy="457200"/>
-          </a:xfrm>
-          <a:prstGeom prst="rect">
-            <a:avLst/>
-          </a:prstGeom>
-          <a:solidFill>
-            <a:srgbClr val="000000">
-              <a:alpha val="0"/>
-            </a:srgbClr>
-          </a:solidFill>
-          <a:ln w="0">
-            <a:solidFill>
-              <a:srgbClr val="000000">
-                <a:alpha val="0"/>
-              </a:srgbClr>
-            </a:solidFill>
-            <a:prstDash val="solid"/>
-          </a:ln>
-        </p:spPr>
-        <p:txBody>
-          <a:bodyPr lIns="0" tIns="0" rIns="0" bIns="0" anchor="t"/>
-          <a:lstStyle/>
-          <a:p>
-            <a:pPr algn="l">
-              <a:defRPr sz="1800" b="0">
-                <a:solidFill>
-                  <a:srgbClr val="58606B"/>
-                </a:solidFill>
-                <a:latin typeface="Onest"/>
-                <a:ea typeface="Onest"/>
-                <a:cs typeface="Onest"/>
-              </a:defRPr>
-            </a:pPr>
-            <a:r>
-              <a:rPr sz="1800" b="0">
-                <a:solidFill>
-                  <a:srgbClr val="58606B"/>
-                </a:solidFill>
-                <a:latin typeface="Onest"/>
-                <a:ea typeface="Onest"/>
-                <a:cs typeface="Onest"/>
-              </a:rPr>
-              <a:t>Автоматизация подбора параметров алгоритма факторизации больших чисел с применением</a:t>
-            </a:r>
-          </a:p>
-          <a:p>
-            <a:pPr algn="l">
-              <a:defRPr sz="1800" b="0">
-                <a:solidFill>
-                  <a:srgbClr val="58606B"/>
-                </a:solidFill>
-                <a:latin typeface="Onest"/>
-                <a:ea typeface="Onest"/>
-                <a:cs typeface="Onest"/>
-              </a:defRPr>
-            </a:pPr>
-            <a:r>
-              <a:rPr sz="1800" b="0">
-                <a:solidFill>
-                  <a:srgbClr val="58606B"/>
-                </a:solidFill>
-                <a:latin typeface="Onest"/>
-                <a:ea typeface="Onest"/>
-                <a:cs typeface="Onest"/>
-              </a:rPr>
-              <a:t>эллиптических кривых на основе эвристических методов оптимизации</a:t>
-            </a:r>
-          </a:p>
-        </p:txBody>
-      </p:sp>
-      <p:sp>
-        <p:nvSpPr>
-          <p:cNvPr id="18" name="Прямоугольник 17">
-            <a:extLst>
-              <a:ext uri="{FF2B5EF4-FFF2-40B4-BE49-F238E27FC236}">
-                <a16:creationId xmlns:a16="http://schemas.microsoft.com/office/drawing/2014/main" id="{754BDF5B-5ED9-4223-A6B9-FBB84861319E}"/>
-              </a:ext>
-            </a:extLst>
-          </p:cNvPr>
-          <p:cNvSpPr>
-            <a:spLocks noGrp="1"/>
-          </p:cNvSpPr>
-          <p:nvPr/>
-        </p:nvSpPr>
-        <p:spPr>
-          <a:xfrm>
-            <a:off x="10763250" y="6419850"/>
-            <a:ext cx="914400" cy="266700"/>
-          </a:xfrm>
-          <a:prstGeom prst="rect">
-            <a:avLst/>
-          </a:prstGeom>
-          <a:solidFill>
-            <a:srgbClr val="000000">
-              <a:alpha val="0"/>
-            </a:srgbClr>
-          </a:solidFill>
-          <a:ln w="0">
-            <a:solidFill>
-              <a:srgbClr val="000000">
-                <a:alpha val="0"/>
-              </a:srgbClr>
-            </a:solidFill>
-            <a:prstDash val="solid"/>
-          </a:ln>
-        </p:spPr>
-        <p:txBody>
-          <a:bodyPr lIns="0" tIns="0" rIns="0" bIns="0" anchor="t"/>
-          <a:lstStyle/>
-          <a:p>
-            <a:pPr algn="r">
-              <a:defRPr sz="1800" b="1">
-                <a:solidFill>
-                  <a:srgbClr val="15181F"/>
-                </a:solidFill>
-                <a:latin typeface="Onest"/>
-                <a:ea typeface="Onest"/>
-                <a:cs typeface="Onest"/>
-              </a:defRPr>
-            </a:pPr>
-            <a:r>
-              <a:rPr sz="1800" b="1">
-                <a:solidFill>
-                  <a:srgbClr val="15181F"/>
-                </a:solidFill>
-                <a:latin typeface="Onest"/>
-                <a:ea typeface="Onest"/>
-                <a:cs typeface="Onest"/>
-              </a:rPr>
-              <a:t>19/19</a:t>
-            </a:r>
-          </a:p>
-        </p:txBody>
-      </p:sp>
       <p:pic>
         <p:nvPicPr>
-          <p:cNvPr id="19" name="Рисунок 18"/>
+          <p:cNvPr id="36" name="Рисунок 35"/>
           <p:cNvPicPr>
             <a:picLocks noChangeAspect="1"/>
           </p:cNvPicPr>
@@ -18855,7 +19868,7 @@
     </p:spTree>
     <p:extLst>
       <p:ext uri="{BB962C8B-B14F-4D97-AF65-F5344CB8AC3E}">
-        <p14:creationId xmlns:p14="http://schemas.microsoft.com/office/powerpoint/2010/main" val="1423741790"/>
+        <p14:creationId xmlns:p14="http://schemas.microsoft.com/office/powerpoint/2010/main" val="1441652632"/>
       </p:ext>
     </p:extLst>
   </p:cSld>
@@ -20443,7 +21456,7 @@
         </p:nvSpPr>
         <p:spPr>
           <a:xfrm>
-            <a:off x="514350" y="6248400"/>
+            <a:off x="514350" y="6304429"/>
             <a:ext cx="9810750" cy="457200"/>
           </a:xfrm>
           <a:prstGeom prst="rect">
@@ -20478,7 +21491,7 @@
               </a:defRPr>
             </a:pPr>
             <a:r>
-              <a:rPr sz="1800" b="0" dirty="0" err="1">
+              <a:rPr sz="1600" b="0" dirty="0" err="1">
                 <a:solidFill>
                   <a:srgbClr val="58606B"/>
                 </a:solidFill>
@@ -20489,7 +21502,7 @@
               <a:t>Автоматизация</a:t>
             </a:r>
             <a:r>
-              <a:rPr sz="1800" b="0" dirty="0">
+              <a:rPr sz="1600" b="0" dirty="0">
                 <a:solidFill>
                   <a:srgbClr val="58606B"/>
                 </a:solidFill>
@@ -20500,7 +21513,7 @@
               <a:t> </a:t>
             </a:r>
             <a:r>
-              <a:rPr sz="1800" b="0" dirty="0" err="1">
+              <a:rPr sz="1600" b="0" dirty="0" err="1">
                 <a:solidFill>
                   <a:srgbClr val="58606B"/>
                 </a:solidFill>
@@ -20511,7 +21524,7 @@
               <a:t>подбора</a:t>
             </a:r>
             <a:r>
-              <a:rPr sz="1800" b="0" dirty="0">
+              <a:rPr sz="1600" b="0" dirty="0">
                 <a:solidFill>
                   <a:srgbClr val="58606B"/>
                 </a:solidFill>
@@ -20522,7 +21535,7 @@
               <a:t> </a:t>
             </a:r>
             <a:r>
-              <a:rPr sz="1800" b="0" dirty="0" err="1">
+              <a:rPr sz="1600" b="0" dirty="0" err="1">
                 <a:solidFill>
                   <a:srgbClr val="58606B"/>
                 </a:solidFill>
@@ -20533,7 +21546,7 @@
               <a:t>параметров</a:t>
             </a:r>
             <a:r>
-              <a:rPr sz="1800" b="0" dirty="0">
+              <a:rPr sz="1600" b="0" dirty="0">
                 <a:solidFill>
                   <a:srgbClr val="58606B"/>
                 </a:solidFill>
@@ -20544,7 +21557,7 @@
               <a:t> </a:t>
             </a:r>
             <a:r>
-              <a:rPr sz="1800" b="0" dirty="0" err="1">
+              <a:rPr sz="1600" b="0" dirty="0" err="1">
                 <a:solidFill>
                   <a:srgbClr val="58606B"/>
                 </a:solidFill>
@@ -20555,7 +21568,7 @@
               <a:t>алгоритма</a:t>
             </a:r>
             <a:r>
-              <a:rPr sz="1800" b="0" dirty="0">
+              <a:rPr sz="1600" b="0" dirty="0">
                 <a:solidFill>
                   <a:srgbClr val="58606B"/>
                 </a:solidFill>
@@ -20566,7 +21579,7 @@
               <a:t> </a:t>
             </a:r>
             <a:r>
-              <a:rPr sz="1800" b="0" dirty="0" err="1">
+              <a:rPr sz="1600" b="0" dirty="0" err="1">
                 <a:solidFill>
                   <a:srgbClr val="58606B"/>
                 </a:solidFill>
@@ -20577,7 +21590,7 @@
               <a:t>факторизации</a:t>
             </a:r>
             <a:r>
-              <a:rPr sz="1800" b="0" dirty="0">
+              <a:rPr sz="1600" b="0" dirty="0">
                 <a:solidFill>
                   <a:srgbClr val="58606B"/>
                 </a:solidFill>
@@ -20588,7 +21601,7 @@
               <a:t> </a:t>
             </a:r>
             <a:r>
-              <a:rPr sz="1800" b="0" dirty="0" err="1">
+              <a:rPr sz="1600" b="0" dirty="0" err="1">
                 <a:solidFill>
                   <a:srgbClr val="58606B"/>
                 </a:solidFill>
@@ -20599,7 +21612,7 @@
               <a:t>больших</a:t>
             </a:r>
             <a:r>
-              <a:rPr sz="1800" b="0" dirty="0">
+              <a:rPr sz="1600" b="0" dirty="0">
                 <a:solidFill>
                   <a:srgbClr val="58606B"/>
                 </a:solidFill>
@@ -20610,7 +21623,7 @@
               <a:t> </a:t>
             </a:r>
             <a:r>
-              <a:rPr sz="1800" b="0" dirty="0" err="1">
+              <a:rPr sz="1600" b="0" dirty="0" err="1">
                 <a:solidFill>
                   <a:srgbClr val="58606B"/>
                 </a:solidFill>
@@ -20621,7 +21634,7 @@
               <a:t>чисел</a:t>
             </a:r>
             <a:r>
-              <a:rPr sz="1800" b="0" dirty="0">
+              <a:rPr sz="1600" b="0" dirty="0">
                 <a:solidFill>
                   <a:srgbClr val="58606B"/>
                 </a:solidFill>
@@ -20632,7 +21645,7 @@
               <a:t> с </a:t>
             </a:r>
             <a:r>
-              <a:rPr sz="1800" b="0" dirty="0" err="1">
+              <a:rPr sz="1600" b="0" dirty="0" err="1">
                 <a:solidFill>
                   <a:srgbClr val="58606B"/>
                 </a:solidFill>
@@ -20642,7 +21655,7 @@
               </a:rPr>
               <a:t>применением</a:t>
             </a:r>
-            <a:endParaRPr sz="1800" b="0" dirty="0">
+            <a:endParaRPr sz="1600" b="0" dirty="0">
               <a:solidFill>
                 <a:srgbClr val="58606B"/>
               </a:solidFill>
@@ -20663,7 +21676,7 @@
               </a:defRPr>
             </a:pPr>
             <a:r>
-              <a:rPr sz="1800" b="0" dirty="0" err="1">
+              <a:rPr sz="1600" b="0" dirty="0" err="1">
                 <a:solidFill>
                   <a:srgbClr val="58606B"/>
                 </a:solidFill>
@@ -20674,7 +21687,7 @@
               <a:t>эллиптических</a:t>
             </a:r>
             <a:r>
-              <a:rPr sz="1800" b="0" dirty="0">
+              <a:rPr sz="1600" b="0" dirty="0">
                 <a:solidFill>
                   <a:srgbClr val="58606B"/>
                 </a:solidFill>
@@ -20685,7 +21698,7 @@
               <a:t> </a:t>
             </a:r>
             <a:r>
-              <a:rPr sz="1800" b="0" dirty="0" err="1">
+              <a:rPr sz="1600" b="0" dirty="0" err="1">
                 <a:solidFill>
                   <a:srgbClr val="58606B"/>
                 </a:solidFill>
@@ -20696,7 +21709,7 @@
               <a:t>кривых</a:t>
             </a:r>
             <a:r>
-              <a:rPr sz="1800" b="0" dirty="0">
+              <a:rPr sz="1600" b="0" dirty="0">
                 <a:solidFill>
                   <a:srgbClr val="58606B"/>
                 </a:solidFill>
@@ -20707,7 +21720,7 @@
               <a:t> </a:t>
             </a:r>
             <a:r>
-              <a:rPr sz="1800" b="0" dirty="0" err="1">
+              <a:rPr sz="1600" b="0" dirty="0" err="1">
                 <a:solidFill>
                   <a:srgbClr val="58606B"/>
                 </a:solidFill>
@@ -20718,7 +21731,7 @@
               <a:t>на</a:t>
             </a:r>
             <a:r>
-              <a:rPr sz="1800" b="0" dirty="0">
+              <a:rPr sz="1600" b="0" dirty="0">
                 <a:solidFill>
                   <a:srgbClr val="58606B"/>
                 </a:solidFill>
@@ -20729,7 +21742,7 @@
               <a:t> </a:t>
             </a:r>
             <a:r>
-              <a:rPr sz="1800" b="0" dirty="0" err="1">
+              <a:rPr sz="1600" b="0" dirty="0" err="1">
                 <a:solidFill>
                   <a:srgbClr val="58606B"/>
                 </a:solidFill>
@@ -20740,7 +21753,7 @@
               <a:t>основе</a:t>
             </a:r>
             <a:r>
-              <a:rPr sz="1800" b="0" dirty="0">
+              <a:rPr sz="1600" b="0" dirty="0">
                 <a:solidFill>
                   <a:srgbClr val="58606B"/>
                 </a:solidFill>
@@ -20751,7 +21764,7 @@
               <a:t> </a:t>
             </a:r>
             <a:r>
-              <a:rPr sz="1800" b="0" dirty="0" err="1">
+              <a:rPr sz="1600" b="0" dirty="0" err="1">
                 <a:solidFill>
                   <a:srgbClr val="58606B"/>
                 </a:solidFill>
@@ -20762,7 +21775,7 @@
               <a:t>эвристических</a:t>
             </a:r>
             <a:r>
-              <a:rPr sz="1800" b="0" dirty="0">
+              <a:rPr sz="1600" b="0" dirty="0">
                 <a:solidFill>
                   <a:srgbClr val="58606B"/>
                 </a:solidFill>
@@ -20773,7 +21786,7 @@
               <a:t> </a:t>
             </a:r>
             <a:r>
-              <a:rPr sz="1800" b="0" dirty="0" err="1">
+              <a:rPr sz="1600" b="0" dirty="0" err="1">
                 <a:solidFill>
                   <a:srgbClr val="58606B"/>
                 </a:solidFill>
@@ -20784,7 +21797,7 @@
               <a:t>методов</a:t>
             </a:r>
             <a:r>
-              <a:rPr sz="1800" b="0" dirty="0">
+              <a:rPr sz="1600" b="0" dirty="0">
                 <a:solidFill>
                   <a:srgbClr val="58606B"/>
                 </a:solidFill>
@@ -20795,7 +21808,7 @@
               <a:t> </a:t>
             </a:r>
             <a:r>
-              <a:rPr sz="1800" b="0" dirty="0" err="1">
+              <a:rPr sz="1600" b="0" dirty="0" err="1">
                 <a:solidFill>
                   <a:srgbClr val="58606B"/>
                 </a:solidFill>
@@ -20805,7 +21818,7 @@
               </a:rPr>
               <a:t>оптимизации</a:t>
             </a:r>
-            <a:endParaRPr sz="1800" b="0" dirty="0">
+            <a:endParaRPr sz="1600" b="0" dirty="0">
               <a:solidFill>
                 <a:srgbClr val="58606B"/>
               </a:solidFill>
@@ -20867,16 +21880,35 @@
               </a:defRPr>
             </a:pPr>
             <a:r>
-              <a:rPr sz="1800" b="1">
-                <a:solidFill>
-                  <a:srgbClr val="15181F"/>
-                </a:solidFill>
-                <a:latin typeface="Onest"/>
-                <a:ea typeface="Onest"/>
-                <a:cs typeface="Onest"/>
-              </a:rPr>
-              <a:t>2/19</a:t>
-            </a:r>
+              <a:rPr sz="1800" b="1" dirty="0">
+                <a:solidFill>
+                  <a:srgbClr val="15181F"/>
+                </a:solidFill>
+                <a:latin typeface="Onest"/>
+                <a:ea typeface="Onest"/>
+                <a:cs typeface="Onest"/>
+              </a:rPr>
+              <a:t>2/1</a:t>
+            </a:r>
+            <a:r>
+              <a:rPr lang="ru-RU" sz="1800" b="1" dirty="0">
+                <a:solidFill>
+                  <a:srgbClr val="15181F"/>
+                </a:solidFill>
+                <a:latin typeface="Onest"/>
+                <a:ea typeface="Onest"/>
+                <a:cs typeface="Onest"/>
+              </a:rPr>
+              <a:t>8</a:t>
+            </a:r>
+            <a:endParaRPr sz="1800" b="1" dirty="0">
+              <a:solidFill>
+                <a:srgbClr val="15181F"/>
+              </a:solidFill>
+              <a:latin typeface="Onest"/>
+              <a:ea typeface="Onest"/>
+              <a:cs typeface="Onest"/>
+            </a:endParaRPr>
           </a:p>
         </p:txBody>
       </p:sp>
@@ -21046,7 +22078,7 @@
         <p:spPr>
           <a:xfrm>
             <a:off x="571500" y="819150"/>
-            <a:ext cx="8477250" cy="723900"/>
+            <a:ext cx="8477250" cy="449008"/>
           </a:xfrm>
           <a:prstGeom prst="rect">
             <a:avLst/>
@@ -21080,16 +22112,134 @@
               </a:defRPr>
             </a:pPr>
             <a:r>
-              <a:rPr sz="2325" b="1">
-                <a:solidFill>
-                  <a:srgbClr val="15181F"/>
-                </a:solidFill>
-                <a:latin typeface="Onest"/>
-                <a:ea typeface="Onest"/>
-                <a:cs typeface="Onest"/>
-              </a:rPr>
-              <a:t>Работа связывает постановку, систему и независимую проверку</a:t>
-            </a:r>
+              <a:rPr sz="2325" b="1" dirty="0" err="1">
+                <a:solidFill>
+                  <a:srgbClr val="15181F"/>
+                </a:solidFill>
+                <a:latin typeface="Onest"/>
+                <a:ea typeface="Onest"/>
+                <a:cs typeface="Onest"/>
+              </a:rPr>
+              <a:t>Работа</a:t>
+            </a:r>
+            <a:r>
+              <a:rPr sz="2325" b="1" dirty="0">
+                <a:solidFill>
+                  <a:srgbClr val="15181F"/>
+                </a:solidFill>
+                <a:latin typeface="Onest"/>
+                <a:ea typeface="Onest"/>
+                <a:cs typeface="Onest"/>
+              </a:rPr>
+              <a:t> </a:t>
+            </a:r>
+            <a:r>
+              <a:rPr sz="2325" b="1" dirty="0" err="1">
+                <a:solidFill>
+                  <a:srgbClr val="15181F"/>
+                </a:solidFill>
+                <a:latin typeface="Onest"/>
+                <a:ea typeface="Onest"/>
+                <a:cs typeface="Onest"/>
+              </a:rPr>
+              <a:t>связывает</a:t>
+            </a:r>
+            <a:r>
+              <a:rPr sz="2325" b="1" dirty="0">
+                <a:solidFill>
+                  <a:srgbClr val="15181F"/>
+                </a:solidFill>
+                <a:latin typeface="Onest"/>
+                <a:ea typeface="Onest"/>
+                <a:cs typeface="Onest"/>
+              </a:rPr>
+              <a:t> </a:t>
+            </a:r>
+            <a:r>
+              <a:rPr sz="2325" b="1" dirty="0" err="1">
+                <a:solidFill>
+                  <a:srgbClr val="15181F"/>
+                </a:solidFill>
+                <a:latin typeface="Onest"/>
+                <a:ea typeface="Onest"/>
+                <a:cs typeface="Onest"/>
+              </a:rPr>
+              <a:t>постановку</a:t>
+            </a:r>
+            <a:r>
+              <a:rPr sz="2325" b="1" dirty="0">
+                <a:solidFill>
+                  <a:srgbClr val="15181F"/>
+                </a:solidFill>
+                <a:latin typeface="Onest"/>
+                <a:ea typeface="Onest"/>
+                <a:cs typeface="Onest"/>
+              </a:rPr>
+              <a:t>, </a:t>
+            </a:r>
+            <a:r>
+              <a:rPr sz="2325" b="1" dirty="0" err="1">
+                <a:solidFill>
+                  <a:srgbClr val="15181F"/>
+                </a:solidFill>
+                <a:latin typeface="Onest"/>
+                <a:ea typeface="Onest"/>
+                <a:cs typeface="Onest"/>
+              </a:rPr>
+              <a:t>систему</a:t>
+            </a:r>
+            <a:r>
+              <a:rPr sz="2325" b="1" dirty="0">
+                <a:solidFill>
+                  <a:srgbClr val="15181F"/>
+                </a:solidFill>
+                <a:latin typeface="Onest"/>
+                <a:ea typeface="Onest"/>
+                <a:cs typeface="Onest"/>
+              </a:rPr>
+              <a:t> и </a:t>
+            </a:r>
+            <a:r>
+              <a:rPr sz="2325" b="1" dirty="0" err="1">
+                <a:solidFill>
+                  <a:srgbClr val="15181F"/>
+                </a:solidFill>
+                <a:latin typeface="Onest"/>
+                <a:ea typeface="Onest"/>
+                <a:cs typeface="Onest"/>
+              </a:rPr>
+              <a:t>независимую</a:t>
+            </a:r>
+            <a:r>
+              <a:rPr sz="2325" b="1" dirty="0">
+                <a:solidFill>
+                  <a:srgbClr val="15181F"/>
+                </a:solidFill>
+                <a:latin typeface="Onest"/>
+                <a:ea typeface="Onest"/>
+                <a:cs typeface="Onest"/>
+              </a:rPr>
+              <a:t> </a:t>
+            </a:r>
+            <a:r>
+              <a:rPr sz="2325" b="1" dirty="0" err="1">
+                <a:solidFill>
+                  <a:srgbClr val="15181F"/>
+                </a:solidFill>
+                <a:latin typeface="Onest"/>
+                <a:ea typeface="Onest"/>
+                <a:cs typeface="Onest"/>
+              </a:rPr>
+              <a:t>проверку</a:t>
+            </a:r>
+            <a:endParaRPr sz="2325" b="1" dirty="0">
+              <a:solidFill>
+                <a:srgbClr val="15181F"/>
+              </a:solidFill>
+              <a:latin typeface="Onest"/>
+              <a:ea typeface="Onest"/>
+              <a:cs typeface="Onest"/>
+            </a:endParaRPr>
           </a:p>
         </p:txBody>
       </p:sp>
@@ -21110,7 +22260,7 @@
         <p:spPr>
           <a:xfrm>
             <a:off x="666750" y="1752600"/>
-            <a:ext cx="4810125" cy="1333500"/>
+            <a:ext cx="10494736" cy="1104901"/>
           </a:xfrm>
           <a:prstGeom prst="rect">
             <a:avLst/>
@@ -21143,7 +22293,7 @@
         <p:spPr>
           <a:xfrm>
             <a:off x="666750" y="1752600"/>
-            <a:ext cx="57150" cy="1333500"/>
+            <a:ext cx="45719" cy="1085851"/>
           </a:xfrm>
           <a:prstGeom prst="rect">
             <a:avLst/>
@@ -21240,7 +22390,7 @@
         <p:spPr>
           <a:xfrm>
             <a:off x="895350" y="2266950"/>
-            <a:ext cx="4410075" cy="781050"/>
+            <a:ext cx="9867900" cy="571501"/>
           </a:xfrm>
           <a:prstGeom prst="rect">
             <a:avLst/>
@@ -21274,15 +22424,202 @@
               </a:defRPr>
             </a:pPr>
             <a:r>
-              <a:rPr sz="1800" b="0">
-                <a:solidFill>
-                  <a:srgbClr val="15181F"/>
-                </a:solidFill>
-                <a:latin typeface="Onest"/>
-                <a:ea typeface="Onest"/>
-                <a:cs typeface="Onest"/>
-              </a:rPr>
-              <a:t>Разработать и исследовать систему автоматического подбора параметров ECM и оценить выигрыш относительно GMP-ECM.</a:t>
+              <a:rPr sz="1800" b="0" dirty="0" err="1">
+                <a:solidFill>
+                  <a:srgbClr val="15181F"/>
+                </a:solidFill>
+                <a:latin typeface="Onest"/>
+                <a:ea typeface="Onest"/>
+                <a:cs typeface="Onest"/>
+              </a:rPr>
+              <a:t>Разработать</a:t>
+            </a:r>
+            <a:r>
+              <a:rPr sz="1800" b="0" dirty="0">
+                <a:solidFill>
+                  <a:srgbClr val="15181F"/>
+                </a:solidFill>
+                <a:latin typeface="Onest"/>
+                <a:ea typeface="Onest"/>
+                <a:cs typeface="Onest"/>
+              </a:rPr>
+              <a:t> и </a:t>
+            </a:r>
+            <a:r>
+              <a:rPr sz="1800" b="0" dirty="0" err="1">
+                <a:solidFill>
+                  <a:srgbClr val="15181F"/>
+                </a:solidFill>
+                <a:latin typeface="Onest"/>
+                <a:ea typeface="Onest"/>
+                <a:cs typeface="Onest"/>
+              </a:rPr>
+              <a:t>исследовать</a:t>
+            </a:r>
+            <a:r>
+              <a:rPr sz="1800" b="0" dirty="0">
+                <a:solidFill>
+                  <a:srgbClr val="15181F"/>
+                </a:solidFill>
+                <a:latin typeface="Onest"/>
+                <a:ea typeface="Onest"/>
+                <a:cs typeface="Onest"/>
+              </a:rPr>
+              <a:t> </a:t>
+            </a:r>
+            <a:r>
+              <a:rPr sz="1800" b="0" dirty="0" err="1">
+                <a:solidFill>
+                  <a:srgbClr val="15181F"/>
+                </a:solidFill>
+                <a:latin typeface="Onest"/>
+                <a:ea typeface="Onest"/>
+                <a:cs typeface="Onest"/>
+              </a:rPr>
+              <a:t>систему</a:t>
+            </a:r>
+            <a:r>
+              <a:rPr sz="1800" b="0" dirty="0">
+                <a:solidFill>
+                  <a:srgbClr val="15181F"/>
+                </a:solidFill>
+                <a:latin typeface="Onest"/>
+                <a:ea typeface="Onest"/>
+                <a:cs typeface="Onest"/>
+              </a:rPr>
+              <a:t> </a:t>
+            </a:r>
+            <a:r>
+              <a:rPr sz="1800" b="0" dirty="0" err="1">
+                <a:solidFill>
+                  <a:srgbClr val="15181F"/>
+                </a:solidFill>
+                <a:latin typeface="Onest"/>
+                <a:ea typeface="Onest"/>
+                <a:cs typeface="Onest"/>
+              </a:rPr>
+              <a:t>автоматического</a:t>
+            </a:r>
+            <a:r>
+              <a:rPr sz="1800" b="0" dirty="0">
+                <a:solidFill>
+                  <a:srgbClr val="15181F"/>
+                </a:solidFill>
+                <a:latin typeface="Onest"/>
+                <a:ea typeface="Onest"/>
+                <a:cs typeface="Onest"/>
+              </a:rPr>
+              <a:t> </a:t>
+            </a:r>
+            <a:r>
+              <a:rPr sz="1800" b="0" dirty="0" err="1">
+                <a:solidFill>
+                  <a:srgbClr val="15181F"/>
+                </a:solidFill>
+                <a:latin typeface="Onest"/>
+                <a:ea typeface="Onest"/>
+                <a:cs typeface="Onest"/>
+              </a:rPr>
+              <a:t>подбора</a:t>
+            </a:r>
+            <a:r>
+              <a:rPr sz="1800" b="0" dirty="0">
+                <a:solidFill>
+                  <a:srgbClr val="15181F"/>
+                </a:solidFill>
+                <a:latin typeface="Onest"/>
+                <a:ea typeface="Onest"/>
+                <a:cs typeface="Onest"/>
+              </a:rPr>
+              <a:t> </a:t>
+            </a:r>
+            <a:r>
+              <a:rPr sz="1800" b="0" dirty="0" err="1">
+                <a:solidFill>
+                  <a:srgbClr val="15181F"/>
+                </a:solidFill>
+                <a:latin typeface="Onest"/>
+                <a:ea typeface="Onest"/>
+                <a:cs typeface="Onest"/>
+              </a:rPr>
+              <a:t>параметров</a:t>
+            </a:r>
+            <a:r>
+              <a:rPr sz="1800" b="0" dirty="0">
+                <a:solidFill>
+                  <a:srgbClr val="15181F"/>
+                </a:solidFill>
+                <a:latin typeface="Onest"/>
+                <a:ea typeface="Onest"/>
+                <a:cs typeface="Onest"/>
+              </a:rPr>
+              <a:t> ECM и </a:t>
+            </a:r>
+            <a:r>
+              <a:rPr sz="1800" b="0" dirty="0" err="1">
+                <a:solidFill>
+                  <a:srgbClr val="15181F"/>
+                </a:solidFill>
+                <a:latin typeface="Onest"/>
+                <a:ea typeface="Onest"/>
+                <a:cs typeface="Onest"/>
+              </a:rPr>
+              <a:t>оценить</a:t>
+            </a:r>
+            <a:r>
+              <a:rPr sz="1800" b="0" dirty="0">
+                <a:solidFill>
+                  <a:srgbClr val="15181F"/>
+                </a:solidFill>
+                <a:latin typeface="Onest"/>
+                <a:ea typeface="Onest"/>
+                <a:cs typeface="Onest"/>
+              </a:rPr>
+              <a:t> </a:t>
+            </a:r>
+            <a:r>
+              <a:rPr sz="1800" b="0" dirty="0" err="1">
+                <a:solidFill>
+                  <a:srgbClr val="15181F"/>
+                </a:solidFill>
+                <a:latin typeface="Onest"/>
+                <a:ea typeface="Onest"/>
+                <a:cs typeface="Onest"/>
+              </a:rPr>
+              <a:t>выигрыш</a:t>
+            </a:r>
+            <a:r>
+              <a:rPr sz="1800" b="0" dirty="0">
+                <a:solidFill>
+                  <a:srgbClr val="15181F"/>
+                </a:solidFill>
+                <a:latin typeface="Onest"/>
+                <a:ea typeface="Onest"/>
+                <a:cs typeface="Onest"/>
+              </a:rPr>
+              <a:t> </a:t>
+            </a:r>
+            <a:r>
+              <a:rPr sz="1800" b="0" dirty="0" err="1">
+                <a:solidFill>
+                  <a:srgbClr val="15181F"/>
+                </a:solidFill>
+                <a:latin typeface="Onest"/>
+                <a:ea typeface="Onest"/>
+                <a:cs typeface="Onest"/>
+              </a:rPr>
+              <a:t>относительно</a:t>
+            </a:r>
+            <a:r>
+              <a:rPr sz="1800" b="0" dirty="0">
+                <a:solidFill>
+                  <a:srgbClr val="15181F"/>
+                </a:solidFill>
+                <a:latin typeface="Onest"/>
+                <a:ea typeface="Onest"/>
+                <a:cs typeface="Onest"/>
+              </a:rPr>
+              <a:t> GMP-ECM.</a:t>
             </a:r>
           </a:p>
         </p:txBody>
@@ -21303,8 +22640,8 @@
         </p:nvSpPr>
         <p:spPr>
           <a:xfrm>
-            <a:off x="6191250" y="1752600"/>
-            <a:ext cx="2190750" cy="685800"/>
+            <a:off x="785813" y="3162301"/>
+            <a:ext cx="4976812" cy="685800"/>
           </a:xfrm>
           <a:prstGeom prst="rect">
             <a:avLst/>
@@ -21336,7 +22673,7 @@
         </p:nvSpPr>
         <p:spPr>
           <a:xfrm>
-            <a:off x="6362700" y="1885950"/>
+            <a:off x="957263" y="3295651"/>
             <a:ext cx="1847850" cy="209550"/>
           </a:xfrm>
           <a:prstGeom prst="rect">
@@ -21400,7 +22737,7 @@
         </p:nvSpPr>
         <p:spPr>
           <a:xfrm>
-            <a:off x="6362700" y="2133600"/>
+            <a:off x="957263" y="3543301"/>
             <a:ext cx="1847850" cy="228600"/>
           </a:xfrm>
           <a:prstGeom prst="rect">
@@ -21435,15 +22772,70 @@
               </a:defRPr>
             </a:pPr>
             <a:r>
-              <a:rPr sz="1800" b="0">
-                <a:solidFill>
-                  <a:srgbClr val="15181F"/>
-                </a:solidFill>
-                <a:latin typeface="Onest"/>
-                <a:ea typeface="Onest"/>
-                <a:cs typeface="Onest"/>
-              </a:rPr>
-              <a:t>обзор факторизации и роли ECM</a:t>
+              <a:rPr sz="1800" b="0" dirty="0" err="1">
+                <a:solidFill>
+                  <a:srgbClr val="15181F"/>
+                </a:solidFill>
+                <a:latin typeface="Onest"/>
+                <a:ea typeface="Onest"/>
+                <a:cs typeface="Onest"/>
+              </a:rPr>
+              <a:t>обзор</a:t>
+            </a:r>
+            <a:r>
+              <a:rPr sz="1800" b="0" dirty="0">
+                <a:solidFill>
+                  <a:srgbClr val="15181F"/>
+                </a:solidFill>
+                <a:latin typeface="Onest"/>
+                <a:ea typeface="Onest"/>
+                <a:cs typeface="Onest"/>
+              </a:rPr>
+              <a:t> </a:t>
+            </a:r>
+            <a:r>
+              <a:rPr sz="1800" b="0" dirty="0" err="1">
+                <a:solidFill>
+                  <a:srgbClr val="15181F"/>
+                </a:solidFill>
+                <a:latin typeface="Onest"/>
+                <a:ea typeface="Onest"/>
+                <a:cs typeface="Onest"/>
+              </a:rPr>
+              <a:t>факторизации</a:t>
+            </a:r>
+            <a:r>
+              <a:rPr sz="1800" b="0" dirty="0">
+                <a:solidFill>
+                  <a:srgbClr val="15181F"/>
+                </a:solidFill>
+                <a:latin typeface="Onest"/>
+                <a:ea typeface="Onest"/>
+                <a:cs typeface="Onest"/>
+              </a:rPr>
+              <a:t> и </a:t>
+            </a:r>
+            <a:r>
+              <a:rPr sz="1800" b="0" dirty="0" err="1">
+                <a:solidFill>
+                  <a:srgbClr val="15181F"/>
+                </a:solidFill>
+                <a:latin typeface="Onest"/>
+                <a:ea typeface="Onest"/>
+                <a:cs typeface="Onest"/>
+              </a:rPr>
+              <a:t>роли</a:t>
+            </a:r>
+            <a:r>
+              <a:rPr sz="1800" b="0" dirty="0">
+                <a:solidFill>
+                  <a:srgbClr val="15181F"/>
+                </a:solidFill>
+                <a:latin typeface="Onest"/>
+                <a:ea typeface="Onest"/>
+                <a:cs typeface="Onest"/>
+              </a:rPr>
+              <a:t> ECM</a:t>
             </a:r>
           </a:p>
         </p:txBody>
@@ -21464,8 +22856,8 @@
         </p:nvSpPr>
         <p:spPr>
           <a:xfrm>
-            <a:off x="8858250" y="1752600"/>
-            <a:ext cx="2190750" cy="685800"/>
+            <a:off x="6696529" y="3086101"/>
+            <a:ext cx="4319814" cy="685800"/>
           </a:xfrm>
           <a:prstGeom prst="rect">
             <a:avLst/>
@@ -21497,7 +22889,7 @@
         </p:nvSpPr>
         <p:spPr>
           <a:xfrm>
-            <a:off x="9029700" y="1885950"/>
+            <a:off x="6867979" y="3219451"/>
             <a:ext cx="1847850" cy="209550"/>
           </a:xfrm>
           <a:prstGeom prst="rect">
@@ -21561,7 +22953,7 @@
         </p:nvSpPr>
         <p:spPr>
           <a:xfrm>
-            <a:off x="9029700" y="2133600"/>
+            <a:off x="6867979" y="3467101"/>
             <a:ext cx="1847850" cy="228600"/>
           </a:xfrm>
           <a:prstGeom prst="rect">
@@ -21625,8 +23017,8 @@
         </p:nvSpPr>
         <p:spPr>
           <a:xfrm>
-            <a:off x="6191250" y="2686050"/>
-            <a:ext cx="2190750" cy="685800"/>
+            <a:off x="785812" y="4095751"/>
+            <a:ext cx="4976811" cy="685800"/>
           </a:xfrm>
           <a:prstGeom prst="rect">
             <a:avLst/>
@@ -21658,7 +23050,7 @@
         </p:nvSpPr>
         <p:spPr>
           <a:xfrm>
-            <a:off x="6362700" y="2819400"/>
+            <a:off x="957263" y="4229101"/>
             <a:ext cx="1847850" cy="209550"/>
           </a:xfrm>
           <a:prstGeom prst="rect">
@@ -21722,7 +23114,7 @@
         </p:nvSpPr>
         <p:spPr>
           <a:xfrm>
-            <a:off x="6362700" y="3067050"/>
+            <a:off x="957263" y="4476751"/>
             <a:ext cx="1847850" cy="228600"/>
           </a:xfrm>
           <a:prstGeom prst="rect">
@@ -21786,8 +23178,8 @@
         </p:nvSpPr>
         <p:spPr>
           <a:xfrm>
-            <a:off x="8858250" y="2686050"/>
-            <a:ext cx="2190750" cy="685800"/>
+            <a:off x="6696528" y="4019551"/>
+            <a:ext cx="4066721" cy="685800"/>
           </a:xfrm>
           <a:prstGeom prst="rect">
             <a:avLst/>
@@ -21819,7 +23211,7 @@
         </p:nvSpPr>
         <p:spPr>
           <a:xfrm>
-            <a:off x="9029700" y="2819400"/>
+            <a:off x="6867979" y="4152901"/>
             <a:ext cx="1847850" cy="209550"/>
           </a:xfrm>
           <a:prstGeom prst="rect">
@@ -21883,7 +23275,7 @@
         </p:nvSpPr>
         <p:spPr>
           <a:xfrm>
-            <a:off x="9029700" y="3067050"/>
+            <a:off x="6867979" y="4400551"/>
             <a:ext cx="1847850" cy="228600"/>
           </a:xfrm>
           <a:prstGeom prst="rect">
@@ -21947,8 +23339,8 @@
         </p:nvSpPr>
         <p:spPr>
           <a:xfrm>
-            <a:off x="6191250" y="3619500"/>
-            <a:ext cx="2190750" cy="685800"/>
+            <a:off x="785813" y="5029201"/>
+            <a:ext cx="4976810" cy="685800"/>
           </a:xfrm>
           <a:prstGeom prst="rect">
             <a:avLst/>
@@ -21980,8 +23372,8 @@
         </p:nvSpPr>
         <p:spPr>
           <a:xfrm>
-            <a:off x="6362700" y="3752850"/>
-            <a:ext cx="1847850" cy="209550"/>
+            <a:off x="957263" y="5162550"/>
+            <a:ext cx="1847850" cy="952499"/>
           </a:xfrm>
           <a:prstGeom prst="rect">
             <a:avLst/>
@@ -22044,7 +23436,7 @@
         </p:nvSpPr>
         <p:spPr>
           <a:xfrm>
-            <a:off x="6362700" y="4000500"/>
+            <a:off x="957263" y="5410201"/>
             <a:ext cx="1847850" cy="228600"/>
           </a:xfrm>
           <a:prstGeom prst="rect">
@@ -22108,8 +23500,8 @@
         </p:nvSpPr>
         <p:spPr>
           <a:xfrm>
-            <a:off x="8858250" y="3619500"/>
-            <a:ext cx="2190750" cy="685800"/>
+            <a:off x="6696529" y="4953001"/>
+            <a:ext cx="4319814" cy="685800"/>
           </a:xfrm>
           <a:prstGeom prst="rect">
             <a:avLst/>
@@ -22141,7 +23533,7 @@
         </p:nvSpPr>
         <p:spPr>
           <a:xfrm>
-            <a:off x="9029700" y="3752850"/>
+            <a:off x="6867979" y="5086351"/>
             <a:ext cx="1847850" cy="209550"/>
           </a:xfrm>
           <a:prstGeom prst="rect">
@@ -22205,7 +23597,7 @@
         </p:nvSpPr>
         <p:spPr>
           <a:xfrm>
-            <a:off x="9029700" y="4000500"/>
+            <a:off x="6867979" y="5334001"/>
             <a:ext cx="1847850" cy="228600"/>
           </a:xfrm>
           <a:prstGeom prst="rect">
@@ -22451,21 +23843,126 @@
       </p:sp>
       <p:sp>
         <p:nvSpPr>
-          <p:cNvPr id="32" name="Прямоугольник 31">
-            <a:extLst>
-              <a:ext uri="{FF2B5EF4-FFF2-40B4-BE49-F238E27FC236}">
-                <a16:creationId xmlns:a16="http://schemas.microsoft.com/office/drawing/2014/main" id="{0FFCE112-6594-4207-A428-D0F8D948F730}"/>
-              </a:ext>
-            </a:extLst>
-          </p:cNvPr>
-          <p:cNvSpPr>
-            <a:spLocks noGrp="1"/>
-          </p:cNvSpPr>
-          <p:nvPr/>
-        </p:nvSpPr>
-        <p:spPr>
-          <a:xfrm>
-            <a:off x="514350" y="6248400"/>
+          <p:cNvPr id="33" name="Прямоугольник 32">
+            <a:extLst>
+              <a:ext uri="{FF2B5EF4-FFF2-40B4-BE49-F238E27FC236}">
+                <a16:creationId xmlns:a16="http://schemas.microsoft.com/office/drawing/2014/main" id="{45F5B4B1-85AC-425C-AABC-E6A870F056CD}"/>
+              </a:ext>
+            </a:extLst>
+          </p:cNvPr>
+          <p:cNvSpPr>
+            <a:spLocks noGrp="1"/>
+          </p:cNvSpPr>
+          <p:nvPr/>
+        </p:nvSpPr>
+        <p:spPr>
+          <a:xfrm>
+            <a:off x="10763250" y="6419850"/>
+            <a:ext cx="914400" cy="266700"/>
+          </a:xfrm>
+          <a:prstGeom prst="rect">
+            <a:avLst/>
+          </a:prstGeom>
+          <a:solidFill>
+            <a:srgbClr val="000000">
+              <a:alpha val="0"/>
+            </a:srgbClr>
+          </a:solidFill>
+          <a:ln w="0">
+            <a:solidFill>
+              <a:srgbClr val="000000">
+                <a:alpha val="0"/>
+              </a:srgbClr>
+            </a:solidFill>
+            <a:prstDash val="solid"/>
+          </a:ln>
+        </p:spPr>
+        <p:txBody>
+          <a:bodyPr lIns="0" tIns="0" rIns="0" bIns="0" anchor="t"/>
+          <a:lstStyle/>
+          <a:p>
+            <a:pPr algn="r">
+              <a:defRPr sz="1800" b="1">
+                <a:solidFill>
+                  <a:srgbClr val="15181F"/>
+                </a:solidFill>
+                <a:latin typeface="Onest"/>
+                <a:ea typeface="Onest"/>
+                <a:cs typeface="Onest"/>
+              </a:defRPr>
+            </a:pPr>
+            <a:r>
+              <a:rPr sz="1800" b="1" dirty="0">
+                <a:solidFill>
+                  <a:srgbClr val="15181F"/>
+                </a:solidFill>
+                <a:latin typeface="Onest"/>
+                <a:ea typeface="Onest"/>
+                <a:cs typeface="Onest"/>
+              </a:rPr>
+              <a:t>3/1</a:t>
+            </a:r>
+            <a:r>
+              <a:rPr lang="ru-RU" sz="1800" b="1" dirty="0">
+                <a:solidFill>
+                  <a:srgbClr val="15181F"/>
+                </a:solidFill>
+                <a:latin typeface="Onest"/>
+                <a:ea typeface="Onest"/>
+                <a:cs typeface="Onest"/>
+              </a:rPr>
+              <a:t>8</a:t>
+            </a:r>
+            <a:endParaRPr sz="1800" b="1" dirty="0">
+              <a:solidFill>
+                <a:srgbClr val="15181F"/>
+              </a:solidFill>
+              <a:latin typeface="Onest"/>
+              <a:ea typeface="Onest"/>
+              <a:cs typeface="Onest"/>
+            </a:endParaRPr>
+          </a:p>
+        </p:txBody>
+      </p:sp>
+      <p:pic>
+        <p:nvPicPr>
+          <p:cNvPr id="34" name="Рисунок 33"/>
+          <p:cNvPicPr>
+            <a:picLocks noChangeAspect="1"/>
+          </p:cNvPicPr>
+          <p:nvPr/>
+        </p:nvPicPr>
+        <p:blipFill>
+          <a:blip r:embed="rId3"/>
+          <a:stretch/>
+        </p:blipFill>
+        <p:spPr>
+          <a:xfrm>
+            <a:off x="9572625" y="248984"/>
+            <a:ext cx="2095500" cy="787908"/>
+          </a:xfrm>
+          <a:prstGeom prst="rect">
+            <a:avLst/>
+          </a:prstGeom>
+        </p:spPr>
+      </p:pic>
+      <p:sp>
+        <p:nvSpPr>
+          <p:cNvPr id="35" name="Прямоугольник 34">
+            <a:extLst>
+              <a:ext uri="{FF2B5EF4-FFF2-40B4-BE49-F238E27FC236}">
+                <a16:creationId xmlns:a16="http://schemas.microsoft.com/office/drawing/2014/main" id="{DDAD35C5-35B6-4C79-A6B2-C46F07AF8F87}"/>
+              </a:ext>
+            </a:extLst>
+          </p:cNvPr>
+          <p:cNvSpPr>
+            <a:spLocks noGrp="1"/>
+          </p:cNvSpPr>
+          <p:nvPr/>
+        </p:nvSpPr>
+        <p:spPr>
+          <a:xfrm>
+            <a:off x="514350" y="6304429"/>
             <a:ext cx="9810750" cy="457200"/>
           </a:xfrm>
           <a:prstGeom prst="rect">
@@ -22500,16 +23997,178 @@
               </a:defRPr>
             </a:pPr>
             <a:r>
-              <a:rPr sz="1800" b="0">
-                <a:solidFill>
-                  <a:srgbClr val="58606B"/>
-                </a:solidFill>
-                <a:latin typeface="Onest"/>
-                <a:ea typeface="Onest"/>
-                <a:cs typeface="Onest"/>
-              </a:rPr>
-              <a:t>Автоматизация подбора параметров алгоритма факторизации больших чисел с применением</a:t>
-            </a:r>
+              <a:rPr sz="1600" b="0" dirty="0" err="1">
+                <a:solidFill>
+                  <a:srgbClr val="58606B"/>
+                </a:solidFill>
+                <a:latin typeface="Onest"/>
+                <a:ea typeface="Onest"/>
+                <a:cs typeface="Onest"/>
+              </a:rPr>
+              <a:t>Автоматизация</a:t>
+            </a:r>
+            <a:r>
+              <a:rPr sz="1600" b="0" dirty="0">
+                <a:solidFill>
+                  <a:srgbClr val="58606B"/>
+                </a:solidFill>
+                <a:latin typeface="Onest"/>
+                <a:ea typeface="Onest"/>
+                <a:cs typeface="Onest"/>
+              </a:rPr>
+              <a:t> </a:t>
+            </a:r>
+            <a:r>
+              <a:rPr sz="1600" b="0" dirty="0" err="1">
+                <a:solidFill>
+                  <a:srgbClr val="58606B"/>
+                </a:solidFill>
+                <a:latin typeface="Onest"/>
+                <a:ea typeface="Onest"/>
+                <a:cs typeface="Onest"/>
+              </a:rPr>
+              <a:t>подбора</a:t>
+            </a:r>
+            <a:r>
+              <a:rPr sz="1600" b="0" dirty="0">
+                <a:solidFill>
+                  <a:srgbClr val="58606B"/>
+                </a:solidFill>
+                <a:latin typeface="Onest"/>
+                <a:ea typeface="Onest"/>
+                <a:cs typeface="Onest"/>
+              </a:rPr>
+              <a:t> </a:t>
+            </a:r>
+            <a:r>
+              <a:rPr sz="1600" b="0" dirty="0" err="1">
+                <a:solidFill>
+                  <a:srgbClr val="58606B"/>
+                </a:solidFill>
+                <a:latin typeface="Onest"/>
+                <a:ea typeface="Onest"/>
+                <a:cs typeface="Onest"/>
+              </a:rPr>
+              <a:t>параметров</a:t>
+            </a:r>
+            <a:r>
+              <a:rPr sz="1600" b="0" dirty="0">
+                <a:solidFill>
+                  <a:srgbClr val="58606B"/>
+                </a:solidFill>
+                <a:latin typeface="Onest"/>
+                <a:ea typeface="Onest"/>
+                <a:cs typeface="Onest"/>
+              </a:rPr>
+              <a:t> </a:t>
+            </a:r>
+            <a:r>
+              <a:rPr sz="1600" b="0" dirty="0" err="1">
+                <a:solidFill>
+                  <a:srgbClr val="58606B"/>
+                </a:solidFill>
+                <a:latin typeface="Onest"/>
+                <a:ea typeface="Onest"/>
+                <a:cs typeface="Onest"/>
+              </a:rPr>
+              <a:t>алгоритма</a:t>
+            </a:r>
+            <a:r>
+              <a:rPr sz="1600" b="0" dirty="0">
+                <a:solidFill>
+                  <a:srgbClr val="58606B"/>
+                </a:solidFill>
+                <a:latin typeface="Onest"/>
+                <a:ea typeface="Onest"/>
+                <a:cs typeface="Onest"/>
+              </a:rPr>
+              <a:t> </a:t>
+            </a:r>
+            <a:r>
+              <a:rPr sz="1600" b="0" dirty="0" err="1">
+                <a:solidFill>
+                  <a:srgbClr val="58606B"/>
+                </a:solidFill>
+                <a:latin typeface="Onest"/>
+                <a:ea typeface="Onest"/>
+                <a:cs typeface="Onest"/>
+              </a:rPr>
+              <a:t>факторизации</a:t>
+            </a:r>
+            <a:r>
+              <a:rPr sz="1600" b="0" dirty="0">
+                <a:solidFill>
+                  <a:srgbClr val="58606B"/>
+                </a:solidFill>
+                <a:latin typeface="Onest"/>
+                <a:ea typeface="Onest"/>
+                <a:cs typeface="Onest"/>
+              </a:rPr>
+              <a:t> </a:t>
+            </a:r>
+            <a:r>
+              <a:rPr sz="1600" b="0" dirty="0" err="1">
+                <a:solidFill>
+                  <a:srgbClr val="58606B"/>
+                </a:solidFill>
+                <a:latin typeface="Onest"/>
+                <a:ea typeface="Onest"/>
+                <a:cs typeface="Onest"/>
+              </a:rPr>
+              <a:t>больших</a:t>
+            </a:r>
+            <a:r>
+              <a:rPr sz="1600" b="0" dirty="0">
+                <a:solidFill>
+                  <a:srgbClr val="58606B"/>
+                </a:solidFill>
+                <a:latin typeface="Onest"/>
+                <a:ea typeface="Onest"/>
+                <a:cs typeface="Onest"/>
+              </a:rPr>
+              <a:t> </a:t>
+            </a:r>
+            <a:r>
+              <a:rPr sz="1600" b="0" dirty="0" err="1">
+                <a:solidFill>
+                  <a:srgbClr val="58606B"/>
+                </a:solidFill>
+                <a:latin typeface="Onest"/>
+                <a:ea typeface="Onest"/>
+                <a:cs typeface="Onest"/>
+              </a:rPr>
+              <a:t>чисел</a:t>
+            </a:r>
+            <a:r>
+              <a:rPr sz="1600" b="0" dirty="0">
+                <a:solidFill>
+                  <a:srgbClr val="58606B"/>
+                </a:solidFill>
+                <a:latin typeface="Onest"/>
+                <a:ea typeface="Onest"/>
+                <a:cs typeface="Onest"/>
+              </a:rPr>
+              <a:t> с </a:t>
+            </a:r>
+            <a:r>
+              <a:rPr sz="1600" b="0" dirty="0" err="1">
+                <a:solidFill>
+                  <a:srgbClr val="58606B"/>
+                </a:solidFill>
+                <a:latin typeface="Onest"/>
+                <a:ea typeface="Onest"/>
+                <a:cs typeface="Onest"/>
+              </a:rPr>
+              <a:t>применением</a:t>
+            </a:r>
+            <a:endParaRPr sz="1600" b="0" dirty="0">
+              <a:solidFill>
+                <a:srgbClr val="58606B"/>
+              </a:solidFill>
+              <a:latin typeface="Onest"/>
+              <a:ea typeface="Onest"/>
+              <a:cs typeface="Onest"/>
+            </a:endParaRPr>
           </a:p>
           <a:p>
             <a:pPr algn="l">
@@ -22523,105 +24182,159 @@
               </a:defRPr>
             </a:pPr>
             <a:r>
-              <a:rPr sz="1800" b="0">
-                <a:solidFill>
-                  <a:srgbClr val="58606B"/>
-                </a:solidFill>
-                <a:latin typeface="Onest"/>
-                <a:ea typeface="Onest"/>
-                <a:cs typeface="Onest"/>
-              </a:rPr>
-              <a:t>эллиптических кривых на основе эвристических методов оптимизации</a:t>
-            </a:r>
+              <a:rPr sz="1600" b="0" dirty="0" err="1">
+                <a:solidFill>
+                  <a:srgbClr val="58606B"/>
+                </a:solidFill>
+                <a:latin typeface="Onest"/>
+                <a:ea typeface="Onest"/>
+                <a:cs typeface="Onest"/>
+              </a:rPr>
+              <a:t>эллиптических</a:t>
+            </a:r>
+            <a:r>
+              <a:rPr sz="1600" b="0" dirty="0">
+                <a:solidFill>
+                  <a:srgbClr val="58606B"/>
+                </a:solidFill>
+                <a:latin typeface="Onest"/>
+                <a:ea typeface="Onest"/>
+                <a:cs typeface="Onest"/>
+              </a:rPr>
+              <a:t> </a:t>
+            </a:r>
+            <a:r>
+              <a:rPr sz="1600" b="0" dirty="0" err="1">
+                <a:solidFill>
+                  <a:srgbClr val="58606B"/>
+                </a:solidFill>
+                <a:latin typeface="Onest"/>
+                <a:ea typeface="Onest"/>
+                <a:cs typeface="Onest"/>
+              </a:rPr>
+              <a:t>кривых</a:t>
+            </a:r>
+            <a:r>
+              <a:rPr sz="1600" b="0" dirty="0">
+                <a:solidFill>
+                  <a:srgbClr val="58606B"/>
+                </a:solidFill>
+                <a:latin typeface="Onest"/>
+                <a:ea typeface="Onest"/>
+                <a:cs typeface="Onest"/>
+              </a:rPr>
+              <a:t> </a:t>
+            </a:r>
+            <a:r>
+              <a:rPr sz="1600" b="0" dirty="0" err="1">
+                <a:solidFill>
+                  <a:srgbClr val="58606B"/>
+                </a:solidFill>
+                <a:latin typeface="Onest"/>
+                <a:ea typeface="Onest"/>
+                <a:cs typeface="Onest"/>
+              </a:rPr>
+              <a:t>на</a:t>
+            </a:r>
+            <a:r>
+              <a:rPr sz="1600" b="0" dirty="0">
+                <a:solidFill>
+                  <a:srgbClr val="58606B"/>
+                </a:solidFill>
+                <a:latin typeface="Onest"/>
+                <a:ea typeface="Onest"/>
+                <a:cs typeface="Onest"/>
+              </a:rPr>
+              <a:t> </a:t>
+            </a:r>
+            <a:r>
+              <a:rPr sz="1600" b="0" dirty="0" err="1">
+                <a:solidFill>
+                  <a:srgbClr val="58606B"/>
+                </a:solidFill>
+                <a:latin typeface="Onest"/>
+                <a:ea typeface="Onest"/>
+                <a:cs typeface="Onest"/>
+              </a:rPr>
+              <a:t>основе</a:t>
+            </a:r>
+            <a:r>
+              <a:rPr sz="1600" b="0" dirty="0">
+                <a:solidFill>
+                  <a:srgbClr val="58606B"/>
+                </a:solidFill>
+                <a:latin typeface="Onest"/>
+                <a:ea typeface="Onest"/>
+                <a:cs typeface="Onest"/>
+              </a:rPr>
+              <a:t> </a:t>
+            </a:r>
+            <a:r>
+              <a:rPr sz="1600" b="0" dirty="0" err="1">
+                <a:solidFill>
+                  <a:srgbClr val="58606B"/>
+                </a:solidFill>
+                <a:latin typeface="Onest"/>
+                <a:ea typeface="Onest"/>
+                <a:cs typeface="Onest"/>
+              </a:rPr>
+              <a:t>эвристических</a:t>
+            </a:r>
+            <a:r>
+              <a:rPr sz="1600" b="0" dirty="0">
+                <a:solidFill>
+                  <a:srgbClr val="58606B"/>
+                </a:solidFill>
+                <a:latin typeface="Onest"/>
+                <a:ea typeface="Onest"/>
+                <a:cs typeface="Onest"/>
+              </a:rPr>
+              <a:t> </a:t>
+            </a:r>
+            <a:r>
+              <a:rPr sz="1600" b="0" dirty="0" err="1">
+                <a:solidFill>
+                  <a:srgbClr val="58606B"/>
+                </a:solidFill>
+                <a:latin typeface="Onest"/>
+                <a:ea typeface="Onest"/>
+                <a:cs typeface="Onest"/>
+              </a:rPr>
+              <a:t>методов</a:t>
+            </a:r>
+            <a:r>
+              <a:rPr sz="1600" b="0" dirty="0">
+                <a:solidFill>
+                  <a:srgbClr val="58606B"/>
+                </a:solidFill>
+                <a:latin typeface="Onest"/>
+                <a:ea typeface="Onest"/>
+                <a:cs typeface="Onest"/>
+              </a:rPr>
+              <a:t> </a:t>
+            </a:r>
+            <a:r>
+              <a:rPr sz="1600" b="0" dirty="0" err="1">
+                <a:solidFill>
+                  <a:srgbClr val="58606B"/>
+                </a:solidFill>
+                <a:latin typeface="Onest"/>
+                <a:ea typeface="Onest"/>
+                <a:cs typeface="Onest"/>
+              </a:rPr>
+              <a:t>оптимизации</a:t>
+            </a:r>
+            <a:endParaRPr sz="1600" b="0" dirty="0">
+              <a:solidFill>
+                <a:srgbClr val="58606B"/>
+              </a:solidFill>
+              <a:latin typeface="Onest"/>
+              <a:ea typeface="Onest"/>
+              <a:cs typeface="Onest"/>
+            </a:endParaRPr>
           </a:p>
         </p:txBody>
       </p:sp>
-      <p:sp>
-        <p:nvSpPr>
-          <p:cNvPr id="33" name="Прямоугольник 32">
-            <a:extLst>
-              <a:ext uri="{FF2B5EF4-FFF2-40B4-BE49-F238E27FC236}">
-                <a16:creationId xmlns:a16="http://schemas.microsoft.com/office/drawing/2014/main" id="{45F5B4B1-85AC-425C-AABC-E6A870F056CD}"/>
-              </a:ext>
-            </a:extLst>
-          </p:cNvPr>
-          <p:cNvSpPr>
-            <a:spLocks noGrp="1"/>
-          </p:cNvSpPr>
-          <p:nvPr/>
-        </p:nvSpPr>
-        <p:spPr>
-          <a:xfrm>
-            <a:off x="10763250" y="6419850"/>
-            <a:ext cx="914400" cy="266700"/>
-          </a:xfrm>
-          <a:prstGeom prst="rect">
-            <a:avLst/>
-          </a:prstGeom>
-          <a:solidFill>
-            <a:srgbClr val="000000">
-              <a:alpha val="0"/>
-            </a:srgbClr>
-          </a:solidFill>
-          <a:ln w="0">
-            <a:solidFill>
-              <a:srgbClr val="000000">
-                <a:alpha val="0"/>
-              </a:srgbClr>
-            </a:solidFill>
-            <a:prstDash val="solid"/>
-          </a:ln>
-        </p:spPr>
-        <p:txBody>
-          <a:bodyPr lIns="0" tIns="0" rIns="0" bIns="0" anchor="t"/>
-          <a:lstStyle/>
-          <a:p>
-            <a:pPr algn="r">
-              <a:defRPr sz="1800" b="1">
-                <a:solidFill>
-                  <a:srgbClr val="15181F"/>
-                </a:solidFill>
-                <a:latin typeface="Onest"/>
-                <a:ea typeface="Onest"/>
-                <a:cs typeface="Onest"/>
-              </a:defRPr>
-            </a:pPr>
-            <a:r>
-              <a:rPr sz="1800" b="1">
-                <a:solidFill>
-                  <a:srgbClr val="15181F"/>
-                </a:solidFill>
-                <a:latin typeface="Onest"/>
-                <a:ea typeface="Onest"/>
-                <a:cs typeface="Onest"/>
-              </a:rPr>
-              <a:t>3/19</a:t>
-            </a:r>
-          </a:p>
-        </p:txBody>
-      </p:sp>
-      <p:pic>
-        <p:nvPicPr>
-          <p:cNvPr id="34" name="Рисунок 33"/>
-          <p:cNvPicPr>
-            <a:picLocks noChangeAspect="1"/>
-          </p:cNvPicPr>
-          <p:nvPr/>
-        </p:nvPicPr>
-        <p:blipFill>
-          <a:blip r:embed="rId3"/>
-          <a:stretch/>
-        </p:blipFill>
-        <p:spPr>
-          <a:xfrm>
-            <a:off x="9572625" y="248984"/>
-            <a:ext cx="2095500" cy="787908"/>
-          </a:xfrm>
-          <a:prstGeom prst="rect">
-            <a:avLst/>
-          </a:prstGeom>
-        </p:spPr>
-      </p:pic>
     </p:spTree>
     <p:extLst>
       <p:ext uri="{BB962C8B-B14F-4D97-AF65-F5344CB8AC3E}">
@@ -23657,21 +25370,126 @@
       </p:sp>
       <p:sp>
         <p:nvSpPr>
-          <p:cNvPr id="23" name="Прямоугольник 22">
-            <a:extLst>
-              <a:ext uri="{FF2B5EF4-FFF2-40B4-BE49-F238E27FC236}">
-                <a16:creationId xmlns:a16="http://schemas.microsoft.com/office/drawing/2014/main" id="{3DE136EB-F311-4194-82F7-744740292B58}"/>
-              </a:ext>
-            </a:extLst>
-          </p:cNvPr>
-          <p:cNvSpPr>
-            <a:spLocks noGrp="1"/>
-          </p:cNvSpPr>
-          <p:nvPr/>
-        </p:nvSpPr>
-        <p:spPr>
-          <a:xfrm>
-            <a:off x="514350" y="6248400"/>
+          <p:cNvPr id="24" name="Прямоугольник 23">
+            <a:extLst>
+              <a:ext uri="{FF2B5EF4-FFF2-40B4-BE49-F238E27FC236}">
+                <a16:creationId xmlns:a16="http://schemas.microsoft.com/office/drawing/2014/main" id="{0E3B3690-556C-43A4-B4AC-8C4BDB4BA4D8}"/>
+              </a:ext>
+            </a:extLst>
+          </p:cNvPr>
+          <p:cNvSpPr>
+            <a:spLocks noGrp="1"/>
+          </p:cNvSpPr>
+          <p:nvPr/>
+        </p:nvSpPr>
+        <p:spPr>
+          <a:xfrm>
+            <a:off x="10763250" y="6419850"/>
+            <a:ext cx="914400" cy="266700"/>
+          </a:xfrm>
+          <a:prstGeom prst="rect">
+            <a:avLst/>
+          </a:prstGeom>
+          <a:solidFill>
+            <a:srgbClr val="000000">
+              <a:alpha val="0"/>
+            </a:srgbClr>
+          </a:solidFill>
+          <a:ln w="0">
+            <a:solidFill>
+              <a:srgbClr val="000000">
+                <a:alpha val="0"/>
+              </a:srgbClr>
+            </a:solidFill>
+            <a:prstDash val="solid"/>
+          </a:ln>
+        </p:spPr>
+        <p:txBody>
+          <a:bodyPr lIns="0" tIns="0" rIns="0" bIns="0" anchor="t"/>
+          <a:lstStyle/>
+          <a:p>
+            <a:pPr algn="r">
+              <a:defRPr sz="1800" b="1">
+                <a:solidFill>
+                  <a:srgbClr val="15181F"/>
+                </a:solidFill>
+                <a:latin typeface="Onest"/>
+                <a:ea typeface="Onest"/>
+                <a:cs typeface="Onest"/>
+              </a:defRPr>
+            </a:pPr>
+            <a:r>
+              <a:rPr sz="1800" b="1" dirty="0">
+                <a:solidFill>
+                  <a:srgbClr val="15181F"/>
+                </a:solidFill>
+                <a:latin typeface="Onest"/>
+                <a:ea typeface="Onest"/>
+                <a:cs typeface="Onest"/>
+              </a:rPr>
+              <a:t>4/1</a:t>
+            </a:r>
+            <a:r>
+              <a:rPr lang="ru-RU" sz="1800" b="1" dirty="0">
+                <a:solidFill>
+                  <a:srgbClr val="15181F"/>
+                </a:solidFill>
+                <a:latin typeface="Onest"/>
+                <a:ea typeface="Onest"/>
+                <a:cs typeface="Onest"/>
+              </a:rPr>
+              <a:t>8</a:t>
+            </a:r>
+            <a:endParaRPr sz="1800" b="1" dirty="0">
+              <a:solidFill>
+                <a:srgbClr val="15181F"/>
+              </a:solidFill>
+              <a:latin typeface="Onest"/>
+              <a:ea typeface="Onest"/>
+              <a:cs typeface="Onest"/>
+            </a:endParaRPr>
+          </a:p>
+        </p:txBody>
+      </p:sp>
+      <p:pic>
+        <p:nvPicPr>
+          <p:cNvPr id="25" name="Рисунок 24"/>
+          <p:cNvPicPr>
+            <a:picLocks noChangeAspect="1"/>
+          </p:cNvPicPr>
+          <p:nvPr/>
+        </p:nvPicPr>
+        <p:blipFill>
+          <a:blip r:embed="rId3"/>
+          <a:stretch/>
+        </p:blipFill>
+        <p:spPr>
+          <a:xfrm>
+            <a:off x="9572625" y="248984"/>
+            <a:ext cx="2095500" cy="787908"/>
+          </a:xfrm>
+          <a:prstGeom prst="rect">
+            <a:avLst/>
+          </a:prstGeom>
+        </p:spPr>
+      </p:pic>
+      <p:sp>
+        <p:nvSpPr>
+          <p:cNvPr id="26" name="Прямоугольник 25">
+            <a:extLst>
+              <a:ext uri="{FF2B5EF4-FFF2-40B4-BE49-F238E27FC236}">
+                <a16:creationId xmlns:a16="http://schemas.microsoft.com/office/drawing/2014/main" id="{2C3BA775-9690-4C7B-BA0B-825C85CF6AC0}"/>
+              </a:ext>
+            </a:extLst>
+          </p:cNvPr>
+          <p:cNvSpPr>
+            <a:spLocks noGrp="1"/>
+          </p:cNvSpPr>
+          <p:nvPr/>
+        </p:nvSpPr>
+        <p:spPr>
+          <a:xfrm>
+            <a:off x="514350" y="6304429"/>
             <a:ext cx="9810750" cy="457200"/>
           </a:xfrm>
           <a:prstGeom prst="rect">
@@ -23706,16 +25524,178 @@
               </a:defRPr>
             </a:pPr>
             <a:r>
-              <a:rPr sz="1800" b="0">
-                <a:solidFill>
-                  <a:srgbClr val="58606B"/>
-                </a:solidFill>
-                <a:latin typeface="Onest"/>
-                <a:ea typeface="Onest"/>
-                <a:cs typeface="Onest"/>
-              </a:rPr>
-              <a:t>Автоматизация подбора параметров алгоритма факторизации больших чисел с применением</a:t>
-            </a:r>
+              <a:rPr sz="1600" b="0" dirty="0" err="1">
+                <a:solidFill>
+                  <a:srgbClr val="58606B"/>
+                </a:solidFill>
+                <a:latin typeface="Onest"/>
+                <a:ea typeface="Onest"/>
+                <a:cs typeface="Onest"/>
+              </a:rPr>
+              <a:t>Автоматизация</a:t>
+            </a:r>
+            <a:r>
+              <a:rPr sz="1600" b="0" dirty="0">
+                <a:solidFill>
+                  <a:srgbClr val="58606B"/>
+                </a:solidFill>
+                <a:latin typeface="Onest"/>
+                <a:ea typeface="Onest"/>
+                <a:cs typeface="Onest"/>
+              </a:rPr>
+              <a:t> </a:t>
+            </a:r>
+            <a:r>
+              <a:rPr sz="1600" b="0" dirty="0" err="1">
+                <a:solidFill>
+                  <a:srgbClr val="58606B"/>
+                </a:solidFill>
+                <a:latin typeface="Onest"/>
+                <a:ea typeface="Onest"/>
+                <a:cs typeface="Onest"/>
+              </a:rPr>
+              <a:t>подбора</a:t>
+            </a:r>
+            <a:r>
+              <a:rPr sz="1600" b="0" dirty="0">
+                <a:solidFill>
+                  <a:srgbClr val="58606B"/>
+                </a:solidFill>
+                <a:latin typeface="Onest"/>
+                <a:ea typeface="Onest"/>
+                <a:cs typeface="Onest"/>
+              </a:rPr>
+              <a:t> </a:t>
+            </a:r>
+            <a:r>
+              <a:rPr sz="1600" b="0" dirty="0" err="1">
+                <a:solidFill>
+                  <a:srgbClr val="58606B"/>
+                </a:solidFill>
+                <a:latin typeface="Onest"/>
+                <a:ea typeface="Onest"/>
+                <a:cs typeface="Onest"/>
+              </a:rPr>
+              <a:t>параметров</a:t>
+            </a:r>
+            <a:r>
+              <a:rPr sz="1600" b="0" dirty="0">
+                <a:solidFill>
+                  <a:srgbClr val="58606B"/>
+                </a:solidFill>
+                <a:latin typeface="Onest"/>
+                <a:ea typeface="Onest"/>
+                <a:cs typeface="Onest"/>
+              </a:rPr>
+              <a:t> </a:t>
+            </a:r>
+            <a:r>
+              <a:rPr sz="1600" b="0" dirty="0" err="1">
+                <a:solidFill>
+                  <a:srgbClr val="58606B"/>
+                </a:solidFill>
+                <a:latin typeface="Onest"/>
+                <a:ea typeface="Onest"/>
+                <a:cs typeface="Onest"/>
+              </a:rPr>
+              <a:t>алгоритма</a:t>
+            </a:r>
+            <a:r>
+              <a:rPr sz="1600" b="0" dirty="0">
+                <a:solidFill>
+                  <a:srgbClr val="58606B"/>
+                </a:solidFill>
+                <a:latin typeface="Onest"/>
+                <a:ea typeface="Onest"/>
+                <a:cs typeface="Onest"/>
+              </a:rPr>
+              <a:t> </a:t>
+            </a:r>
+            <a:r>
+              <a:rPr sz="1600" b="0" dirty="0" err="1">
+                <a:solidFill>
+                  <a:srgbClr val="58606B"/>
+                </a:solidFill>
+                <a:latin typeface="Onest"/>
+                <a:ea typeface="Onest"/>
+                <a:cs typeface="Onest"/>
+              </a:rPr>
+              <a:t>факторизации</a:t>
+            </a:r>
+            <a:r>
+              <a:rPr sz="1600" b="0" dirty="0">
+                <a:solidFill>
+                  <a:srgbClr val="58606B"/>
+                </a:solidFill>
+                <a:latin typeface="Onest"/>
+                <a:ea typeface="Onest"/>
+                <a:cs typeface="Onest"/>
+              </a:rPr>
+              <a:t> </a:t>
+            </a:r>
+            <a:r>
+              <a:rPr sz="1600" b="0" dirty="0" err="1">
+                <a:solidFill>
+                  <a:srgbClr val="58606B"/>
+                </a:solidFill>
+                <a:latin typeface="Onest"/>
+                <a:ea typeface="Onest"/>
+                <a:cs typeface="Onest"/>
+              </a:rPr>
+              <a:t>больших</a:t>
+            </a:r>
+            <a:r>
+              <a:rPr sz="1600" b="0" dirty="0">
+                <a:solidFill>
+                  <a:srgbClr val="58606B"/>
+                </a:solidFill>
+                <a:latin typeface="Onest"/>
+                <a:ea typeface="Onest"/>
+                <a:cs typeface="Onest"/>
+              </a:rPr>
+              <a:t> </a:t>
+            </a:r>
+            <a:r>
+              <a:rPr sz="1600" b="0" dirty="0" err="1">
+                <a:solidFill>
+                  <a:srgbClr val="58606B"/>
+                </a:solidFill>
+                <a:latin typeface="Onest"/>
+                <a:ea typeface="Onest"/>
+                <a:cs typeface="Onest"/>
+              </a:rPr>
+              <a:t>чисел</a:t>
+            </a:r>
+            <a:r>
+              <a:rPr sz="1600" b="0" dirty="0">
+                <a:solidFill>
+                  <a:srgbClr val="58606B"/>
+                </a:solidFill>
+                <a:latin typeface="Onest"/>
+                <a:ea typeface="Onest"/>
+                <a:cs typeface="Onest"/>
+              </a:rPr>
+              <a:t> с </a:t>
+            </a:r>
+            <a:r>
+              <a:rPr sz="1600" b="0" dirty="0" err="1">
+                <a:solidFill>
+                  <a:srgbClr val="58606B"/>
+                </a:solidFill>
+                <a:latin typeface="Onest"/>
+                <a:ea typeface="Onest"/>
+                <a:cs typeface="Onest"/>
+              </a:rPr>
+              <a:t>применением</a:t>
+            </a:r>
+            <a:endParaRPr sz="1600" b="0" dirty="0">
+              <a:solidFill>
+                <a:srgbClr val="58606B"/>
+              </a:solidFill>
+              <a:latin typeface="Onest"/>
+              <a:ea typeface="Onest"/>
+              <a:cs typeface="Onest"/>
+            </a:endParaRPr>
           </a:p>
           <a:p>
             <a:pPr algn="l">
@@ -23729,105 +25709,159 @@
               </a:defRPr>
             </a:pPr>
             <a:r>
-              <a:rPr sz="1800" b="0">
-                <a:solidFill>
-                  <a:srgbClr val="58606B"/>
-                </a:solidFill>
-                <a:latin typeface="Onest"/>
-                <a:ea typeface="Onest"/>
-                <a:cs typeface="Onest"/>
-              </a:rPr>
-              <a:t>эллиптических кривых на основе эвристических методов оптимизации</a:t>
-            </a:r>
+              <a:rPr sz="1600" b="0" dirty="0" err="1">
+                <a:solidFill>
+                  <a:srgbClr val="58606B"/>
+                </a:solidFill>
+                <a:latin typeface="Onest"/>
+                <a:ea typeface="Onest"/>
+                <a:cs typeface="Onest"/>
+              </a:rPr>
+              <a:t>эллиптических</a:t>
+            </a:r>
+            <a:r>
+              <a:rPr sz="1600" b="0" dirty="0">
+                <a:solidFill>
+                  <a:srgbClr val="58606B"/>
+                </a:solidFill>
+                <a:latin typeface="Onest"/>
+                <a:ea typeface="Onest"/>
+                <a:cs typeface="Onest"/>
+              </a:rPr>
+              <a:t> </a:t>
+            </a:r>
+            <a:r>
+              <a:rPr sz="1600" b="0" dirty="0" err="1">
+                <a:solidFill>
+                  <a:srgbClr val="58606B"/>
+                </a:solidFill>
+                <a:latin typeface="Onest"/>
+                <a:ea typeface="Onest"/>
+                <a:cs typeface="Onest"/>
+              </a:rPr>
+              <a:t>кривых</a:t>
+            </a:r>
+            <a:r>
+              <a:rPr sz="1600" b="0" dirty="0">
+                <a:solidFill>
+                  <a:srgbClr val="58606B"/>
+                </a:solidFill>
+                <a:latin typeface="Onest"/>
+                <a:ea typeface="Onest"/>
+                <a:cs typeface="Onest"/>
+              </a:rPr>
+              <a:t> </a:t>
+            </a:r>
+            <a:r>
+              <a:rPr sz="1600" b="0" dirty="0" err="1">
+                <a:solidFill>
+                  <a:srgbClr val="58606B"/>
+                </a:solidFill>
+                <a:latin typeface="Onest"/>
+                <a:ea typeface="Onest"/>
+                <a:cs typeface="Onest"/>
+              </a:rPr>
+              <a:t>на</a:t>
+            </a:r>
+            <a:r>
+              <a:rPr sz="1600" b="0" dirty="0">
+                <a:solidFill>
+                  <a:srgbClr val="58606B"/>
+                </a:solidFill>
+                <a:latin typeface="Onest"/>
+                <a:ea typeface="Onest"/>
+                <a:cs typeface="Onest"/>
+              </a:rPr>
+              <a:t> </a:t>
+            </a:r>
+            <a:r>
+              <a:rPr sz="1600" b="0" dirty="0" err="1">
+                <a:solidFill>
+                  <a:srgbClr val="58606B"/>
+                </a:solidFill>
+                <a:latin typeface="Onest"/>
+                <a:ea typeface="Onest"/>
+                <a:cs typeface="Onest"/>
+              </a:rPr>
+              <a:t>основе</a:t>
+            </a:r>
+            <a:r>
+              <a:rPr sz="1600" b="0" dirty="0">
+                <a:solidFill>
+                  <a:srgbClr val="58606B"/>
+                </a:solidFill>
+                <a:latin typeface="Onest"/>
+                <a:ea typeface="Onest"/>
+                <a:cs typeface="Onest"/>
+              </a:rPr>
+              <a:t> </a:t>
+            </a:r>
+            <a:r>
+              <a:rPr sz="1600" b="0" dirty="0" err="1">
+                <a:solidFill>
+                  <a:srgbClr val="58606B"/>
+                </a:solidFill>
+                <a:latin typeface="Onest"/>
+                <a:ea typeface="Onest"/>
+                <a:cs typeface="Onest"/>
+              </a:rPr>
+              <a:t>эвристических</a:t>
+            </a:r>
+            <a:r>
+              <a:rPr sz="1600" b="0" dirty="0">
+                <a:solidFill>
+                  <a:srgbClr val="58606B"/>
+                </a:solidFill>
+                <a:latin typeface="Onest"/>
+                <a:ea typeface="Onest"/>
+                <a:cs typeface="Onest"/>
+              </a:rPr>
+              <a:t> </a:t>
+            </a:r>
+            <a:r>
+              <a:rPr sz="1600" b="0" dirty="0" err="1">
+                <a:solidFill>
+                  <a:srgbClr val="58606B"/>
+                </a:solidFill>
+                <a:latin typeface="Onest"/>
+                <a:ea typeface="Onest"/>
+                <a:cs typeface="Onest"/>
+              </a:rPr>
+              <a:t>методов</a:t>
+            </a:r>
+            <a:r>
+              <a:rPr sz="1600" b="0" dirty="0">
+                <a:solidFill>
+                  <a:srgbClr val="58606B"/>
+                </a:solidFill>
+                <a:latin typeface="Onest"/>
+                <a:ea typeface="Onest"/>
+                <a:cs typeface="Onest"/>
+              </a:rPr>
+              <a:t> </a:t>
+            </a:r>
+            <a:r>
+              <a:rPr sz="1600" b="0" dirty="0" err="1">
+                <a:solidFill>
+                  <a:srgbClr val="58606B"/>
+                </a:solidFill>
+                <a:latin typeface="Onest"/>
+                <a:ea typeface="Onest"/>
+                <a:cs typeface="Onest"/>
+              </a:rPr>
+              <a:t>оптимизации</a:t>
+            </a:r>
+            <a:endParaRPr sz="1600" b="0" dirty="0">
+              <a:solidFill>
+                <a:srgbClr val="58606B"/>
+              </a:solidFill>
+              <a:latin typeface="Onest"/>
+              <a:ea typeface="Onest"/>
+              <a:cs typeface="Onest"/>
+            </a:endParaRPr>
           </a:p>
         </p:txBody>
       </p:sp>
-      <p:sp>
-        <p:nvSpPr>
-          <p:cNvPr id="24" name="Прямоугольник 23">
-            <a:extLst>
-              <a:ext uri="{FF2B5EF4-FFF2-40B4-BE49-F238E27FC236}">
-                <a16:creationId xmlns:a16="http://schemas.microsoft.com/office/drawing/2014/main" id="{0E3B3690-556C-43A4-B4AC-8C4BDB4BA4D8}"/>
-              </a:ext>
-            </a:extLst>
-          </p:cNvPr>
-          <p:cNvSpPr>
-            <a:spLocks noGrp="1"/>
-          </p:cNvSpPr>
-          <p:nvPr/>
-        </p:nvSpPr>
-        <p:spPr>
-          <a:xfrm>
-            <a:off x="10763250" y="6419850"/>
-            <a:ext cx="914400" cy="266700"/>
-          </a:xfrm>
-          <a:prstGeom prst="rect">
-            <a:avLst/>
-          </a:prstGeom>
-          <a:solidFill>
-            <a:srgbClr val="000000">
-              <a:alpha val="0"/>
-            </a:srgbClr>
-          </a:solidFill>
-          <a:ln w="0">
-            <a:solidFill>
-              <a:srgbClr val="000000">
-                <a:alpha val="0"/>
-              </a:srgbClr>
-            </a:solidFill>
-            <a:prstDash val="solid"/>
-          </a:ln>
-        </p:spPr>
-        <p:txBody>
-          <a:bodyPr lIns="0" tIns="0" rIns="0" bIns="0" anchor="t"/>
-          <a:lstStyle/>
-          <a:p>
-            <a:pPr algn="r">
-              <a:defRPr sz="1800" b="1">
-                <a:solidFill>
-                  <a:srgbClr val="15181F"/>
-                </a:solidFill>
-                <a:latin typeface="Onest"/>
-                <a:ea typeface="Onest"/>
-                <a:cs typeface="Onest"/>
-              </a:defRPr>
-            </a:pPr>
-            <a:r>
-              <a:rPr sz="1800" b="1">
-                <a:solidFill>
-                  <a:srgbClr val="15181F"/>
-                </a:solidFill>
-                <a:latin typeface="Onest"/>
-                <a:ea typeface="Onest"/>
-                <a:cs typeface="Onest"/>
-              </a:rPr>
-              <a:t>4/19</a:t>
-            </a:r>
-          </a:p>
-        </p:txBody>
-      </p:sp>
-      <p:pic>
-        <p:nvPicPr>
-          <p:cNvPr id="25" name="Рисунок 24"/>
-          <p:cNvPicPr>
-            <a:picLocks noChangeAspect="1"/>
-          </p:cNvPicPr>
-          <p:nvPr/>
-        </p:nvPicPr>
-        <p:blipFill>
-          <a:blip r:embed="rId3"/>
-          <a:stretch/>
-        </p:blipFill>
-        <p:spPr>
-          <a:xfrm>
-            <a:off x="9572625" y="248984"/>
-            <a:ext cx="2095500" cy="787908"/>
-          </a:xfrm>
-          <a:prstGeom prst="rect">
-            <a:avLst/>
-          </a:prstGeom>
-        </p:spPr>
-      </p:pic>
     </p:spTree>
     <p:extLst>
       <p:ext uri="{BB962C8B-B14F-4D97-AF65-F5344CB8AC3E}">
@@ -25667,21 +27701,126 @@
       </p:sp>
       <p:sp>
         <p:nvSpPr>
-          <p:cNvPr id="38" name="Прямоугольник 37">
-            <a:extLst>
-              <a:ext uri="{FF2B5EF4-FFF2-40B4-BE49-F238E27FC236}">
-                <a16:creationId xmlns:a16="http://schemas.microsoft.com/office/drawing/2014/main" id="{F710EB7C-1925-455D-BD9A-E9024FCC7018}"/>
-              </a:ext>
-            </a:extLst>
-          </p:cNvPr>
-          <p:cNvSpPr>
-            <a:spLocks noGrp="1"/>
-          </p:cNvSpPr>
-          <p:nvPr/>
-        </p:nvSpPr>
-        <p:spPr>
-          <a:xfrm>
-            <a:off x="514350" y="6248400"/>
+          <p:cNvPr id="39" name="Прямоугольник 38">
+            <a:extLst>
+              <a:ext uri="{FF2B5EF4-FFF2-40B4-BE49-F238E27FC236}">
+                <a16:creationId xmlns:a16="http://schemas.microsoft.com/office/drawing/2014/main" id="{51070D83-9514-4BFF-A2B4-CC283D5818E6}"/>
+              </a:ext>
+            </a:extLst>
+          </p:cNvPr>
+          <p:cNvSpPr>
+            <a:spLocks noGrp="1"/>
+          </p:cNvSpPr>
+          <p:nvPr/>
+        </p:nvSpPr>
+        <p:spPr>
+          <a:xfrm>
+            <a:off x="10763250" y="6419850"/>
+            <a:ext cx="914400" cy="266700"/>
+          </a:xfrm>
+          <a:prstGeom prst="rect">
+            <a:avLst/>
+          </a:prstGeom>
+          <a:solidFill>
+            <a:srgbClr val="000000">
+              <a:alpha val="0"/>
+            </a:srgbClr>
+          </a:solidFill>
+          <a:ln w="0">
+            <a:solidFill>
+              <a:srgbClr val="000000">
+                <a:alpha val="0"/>
+              </a:srgbClr>
+            </a:solidFill>
+            <a:prstDash val="solid"/>
+          </a:ln>
+        </p:spPr>
+        <p:txBody>
+          <a:bodyPr lIns="0" tIns="0" rIns="0" bIns="0" anchor="t"/>
+          <a:lstStyle/>
+          <a:p>
+            <a:pPr algn="r">
+              <a:defRPr sz="1800" b="1">
+                <a:solidFill>
+                  <a:srgbClr val="15181F"/>
+                </a:solidFill>
+                <a:latin typeface="Onest"/>
+                <a:ea typeface="Onest"/>
+                <a:cs typeface="Onest"/>
+              </a:defRPr>
+            </a:pPr>
+            <a:r>
+              <a:rPr sz="1800" b="1" dirty="0">
+                <a:solidFill>
+                  <a:srgbClr val="15181F"/>
+                </a:solidFill>
+                <a:latin typeface="Onest"/>
+                <a:ea typeface="Onest"/>
+                <a:cs typeface="Onest"/>
+              </a:rPr>
+              <a:t>5/1</a:t>
+            </a:r>
+            <a:r>
+              <a:rPr lang="ru-RU" sz="1800" b="1" dirty="0">
+                <a:solidFill>
+                  <a:srgbClr val="15181F"/>
+                </a:solidFill>
+                <a:latin typeface="Onest"/>
+                <a:ea typeface="Onest"/>
+                <a:cs typeface="Onest"/>
+              </a:rPr>
+              <a:t>8</a:t>
+            </a:r>
+            <a:endParaRPr sz="1800" b="1" dirty="0">
+              <a:solidFill>
+                <a:srgbClr val="15181F"/>
+              </a:solidFill>
+              <a:latin typeface="Onest"/>
+              <a:ea typeface="Onest"/>
+              <a:cs typeface="Onest"/>
+            </a:endParaRPr>
+          </a:p>
+        </p:txBody>
+      </p:sp>
+      <p:pic>
+        <p:nvPicPr>
+          <p:cNvPr id="40" name="Рисунок 39"/>
+          <p:cNvPicPr>
+            <a:picLocks noChangeAspect="1"/>
+          </p:cNvPicPr>
+          <p:nvPr/>
+        </p:nvPicPr>
+        <p:blipFill>
+          <a:blip r:embed="rId3"/>
+          <a:stretch/>
+        </p:blipFill>
+        <p:spPr>
+          <a:xfrm>
+            <a:off x="9572625" y="248984"/>
+            <a:ext cx="2095500" cy="787908"/>
+          </a:xfrm>
+          <a:prstGeom prst="rect">
+            <a:avLst/>
+          </a:prstGeom>
+        </p:spPr>
+      </p:pic>
+      <p:sp>
+        <p:nvSpPr>
+          <p:cNvPr id="41" name="Прямоугольник 40">
+            <a:extLst>
+              <a:ext uri="{FF2B5EF4-FFF2-40B4-BE49-F238E27FC236}">
+                <a16:creationId xmlns:a16="http://schemas.microsoft.com/office/drawing/2014/main" id="{4101398C-5C47-4E6B-95AC-2D5925090325}"/>
+              </a:ext>
+            </a:extLst>
+          </p:cNvPr>
+          <p:cNvSpPr>
+            <a:spLocks noGrp="1"/>
+          </p:cNvSpPr>
+          <p:nvPr/>
+        </p:nvSpPr>
+        <p:spPr>
+          <a:xfrm>
+            <a:off x="514350" y="6304429"/>
             <a:ext cx="9810750" cy="457200"/>
           </a:xfrm>
           <a:prstGeom prst="rect">
@@ -25716,16 +27855,178 @@
               </a:defRPr>
             </a:pPr>
             <a:r>
-              <a:rPr sz="1800" b="0">
-                <a:solidFill>
-                  <a:srgbClr val="58606B"/>
-                </a:solidFill>
-                <a:latin typeface="Onest"/>
-                <a:ea typeface="Onest"/>
-                <a:cs typeface="Onest"/>
-              </a:rPr>
-              <a:t>Автоматизация подбора параметров алгоритма факторизации больших чисел с применением</a:t>
-            </a:r>
+              <a:rPr sz="1600" b="0" dirty="0" err="1">
+                <a:solidFill>
+                  <a:srgbClr val="58606B"/>
+                </a:solidFill>
+                <a:latin typeface="Onest"/>
+                <a:ea typeface="Onest"/>
+                <a:cs typeface="Onest"/>
+              </a:rPr>
+              <a:t>Автоматизация</a:t>
+            </a:r>
+            <a:r>
+              <a:rPr sz="1600" b="0" dirty="0">
+                <a:solidFill>
+                  <a:srgbClr val="58606B"/>
+                </a:solidFill>
+                <a:latin typeface="Onest"/>
+                <a:ea typeface="Onest"/>
+                <a:cs typeface="Onest"/>
+              </a:rPr>
+              <a:t> </a:t>
+            </a:r>
+            <a:r>
+              <a:rPr sz="1600" b="0" dirty="0" err="1">
+                <a:solidFill>
+                  <a:srgbClr val="58606B"/>
+                </a:solidFill>
+                <a:latin typeface="Onest"/>
+                <a:ea typeface="Onest"/>
+                <a:cs typeface="Onest"/>
+              </a:rPr>
+              <a:t>подбора</a:t>
+            </a:r>
+            <a:r>
+              <a:rPr sz="1600" b="0" dirty="0">
+                <a:solidFill>
+                  <a:srgbClr val="58606B"/>
+                </a:solidFill>
+                <a:latin typeface="Onest"/>
+                <a:ea typeface="Onest"/>
+                <a:cs typeface="Onest"/>
+              </a:rPr>
+              <a:t> </a:t>
+            </a:r>
+            <a:r>
+              <a:rPr sz="1600" b="0" dirty="0" err="1">
+                <a:solidFill>
+                  <a:srgbClr val="58606B"/>
+                </a:solidFill>
+                <a:latin typeface="Onest"/>
+                <a:ea typeface="Onest"/>
+                <a:cs typeface="Onest"/>
+              </a:rPr>
+              <a:t>параметров</a:t>
+            </a:r>
+            <a:r>
+              <a:rPr sz="1600" b="0" dirty="0">
+                <a:solidFill>
+                  <a:srgbClr val="58606B"/>
+                </a:solidFill>
+                <a:latin typeface="Onest"/>
+                <a:ea typeface="Onest"/>
+                <a:cs typeface="Onest"/>
+              </a:rPr>
+              <a:t> </a:t>
+            </a:r>
+            <a:r>
+              <a:rPr sz="1600" b="0" dirty="0" err="1">
+                <a:solidFill>
+                  <a:srgbClr val="58606B"/>
+                </a:solidFill>
+                <a:latin typeface="Onest"/>
+                <a:ea typeface="Onest"/>
+                <a:cs typeface="Onest"/>
+              </a:rPr>
+              <a:t>алгоритма</a:t>
+            </a:r>
+            <a:r>
+              <a:rPr sz="1600" b="0" dirty="0">
+                <a:solidFill>
+                  <a:srgbClr val="58606B"/>
+                </a:solidFill>
+                <a:latin typeface="Onest"/>
+                <a:ea typeface="Onest"/>
+                <a:cs typeface="Onest"/>
+              </a:rPr>
+              <a:t> </a:t>
+            </a:r>
+            <a:r>
+              <a:rPr sz="1600" b="0" dirty="0" err="1">
+                <a:solidFill>
+                  <a:srgbClr val="58606B"/>
+                </a:solidFill>
+                <a:latin typeface="Onest"/>
+                <a:ea typeface="Onest"/>
+                <a:cs typeface="Onest"/>
+              </a:rPr>
+              <a:t>факторизации</a:t>
+            </a:r>
+            <a:r>
+              <a:rPr sz="1600" b="0" dirty="0">
+                <a:solidFill>
+                  <a:srgbClr val="58606B"/>
+                </a:solidFill>
+                <a:latin typeface="Onest"/>
+                <a:ea typeface="Onest"/>
+                <a:cs typeface="Onest"/>
+              </a:rPr>
+              <a:t> </a:t>
+            </a:r>
+            <a:r>
+              <a:rPr sz="1600" b="0" dirty="0" err="1">
+                <a:solidFill>
+                  <a:srgbClr val="58606B"/>
+                </a:solidFill>
+                <a:latin typeface="Onest"/>
+                <a:ea typeface="Onest"/>
+                <a:cs typeface="Onest"/>
+              </a:rPr>
+              <a:t>больших</a:t>
+            </a:r>
+            <a:r>
+              <a:rPr sz="1600" b="0" dirty="0">
+                <a:solidFill>
+                  <a:srgbClr val="58606B"/>
+                </a:solidFill>
+                <a:latin typeface="Onest"/>
+                <a:ea typeface="Onest"/>
+                <a:cs typeface="Onest"/>
+              </a:rPr>
+              <a:t> </a:t>
+            </a:r>
+            <a:r>
+              <a:rPr sz="1600" b="0" dirty="0" err="1">
+                <a:solidFill>
+                  <a:srgbClr val="58606B"/>
+                </a:solidFill>
+                <a:latin typeface="Onest"/>
+                <a:ea typeface="Onest"/>
+                <a:cs typeface="Onest"/>
+              </a:rPr>
+              <a:t>чисел</a:t>
+            </a:r>
+            <a:r>
+              <a:rPr sz="1600" b="0" dirty="0">
+                <a:solidFill>
+                  <a:srgbClr val="58606B"/>
+                </a:solidFill>
+                <a:latin typeface="Onest"/>
+                <a:ea typeface="Onest"/>
+                <a:cs typeface="Onest"/>
+              </a:rPr>
+              <a:t> с </a:t>
+            </a:r>
+            <a:r>
+              <a:rPr sz="1600" b="0" dirty="0" err="1">
+                <a:solidFill>
+                  <a:srgbClr val="58606B"/>
+                </a:solidFill>
+                <a:latin typeface="Onest"/>
+                <a:ea typeface="Onest"/>
+                <a:cs typeface="Onest"/>
+              </a:rPr>
+              <a:t>применением</a:t>
+            </a:r>
+            <a:endParaRPr sz="1600" b="0" dirty="0">
+              <a:solidFill>
+                <a:srgbClr val="58606B"/>
+              </a:solidFill>
+              <a:latin typeface="Onest"/>
+              <a:ea typeface="Onest"/>
+              <a:cs typeface="Onest"/>
+            </a:endParaRPr>
           </a:p>
           <a:p>
             <a:pPr algn="l">
@@ -25739,105 +28040,159 @@
               </a:defRPr>
             </a:pPr>
             <a:r>
-              <a:rPr sz="1800" b="0">
-                <a:solidFill>
-                  <a:srgbClr val="58606B"/>
-                </a:solidFill>
-                <a:latin typeface="Onest"/>
-                <a:ea typeface="Onest"/>
-                <a:cs typeface="Onest"/>
-              </a:rPr>
-              <a:t>эллиптических кривых на основе эвристических методов оптимизации</a:t>
-            </a:r>
+              <a:rPr sz="1600" b="0" dirty="0" err="1">
+                <a:solidFill>
+                  <a:srgbClr val="58606B"/>
+                </a:solidFill>
+                <a:latin typeface="Onest"/>
+                <a:ea typeface="Onest"/>
+                <a:cs typeface="Onest"/>
+              </a:rPr>
+              <a:t>эллиптических</a:t>
+            </a:r>
+            <a:r>
+              <a:rPr sz="1600" b="0" dirty="0">
+                <a:solidFill>
+                  <a:srgbClr val="58606B"/>
+                </a:solidFill>
+                <a:latin typeface="Onest"/>
+                <a:ea typeface="Onest"/>
+                <a:cs typeface="Onest"/>
+              </a:rPr>
+              <a:t> </a:t>
+            </a:r>
+            <a:r>
+              <a:rPr sz="1600" b="0" dirty="0" err="1">
+                <a:solidFill>
+                  <a:srgbClr val="58606B"/>
+                </a:solidFill>
+                <a:latin typeface="Onest"/>
+                <a:ea typeface="Onest"/>
+                <a:cs typeface="Onest"/>
+              </a:rPr>
+              <a:t>кривых</a:t>
+            </a:r>
+            <a:r>
+              <a:rPr sz="1600" b="0" dirty="0">
+                <a:solidFill>
+                  <a:srgbClr val="58606B"/>
+                </a:solidFill>
+                <a:latin typeface="Onest"/>
+                <a:ea typeface="Onest"/>
+                <a:cs typeface="Onest"/>
+              </a:rPr>
+              <a:t> </a:t>
+            </a:r>
+            <a:r>
+              <a:rPr sz="1600" b="0" dirty="0" err="1">
+                <a:solidFill>
+                  <a:srgbClr val="58606B"/>
+                </a:solidFill>
+                <a:latin typeface="Onest"/>
+                <a:ea typeface="Onest"/>
+                <a:cs typeface="Onest"/>
+              </a:rPr>
+              <a:t>на</a:t>
+            </a:r>
+            <a:r>
+              <a:rPr sz="1600" b="0" dirty="0">
+                <a:solidFill>
+                  <a:srgbClr val="58606B"/>
+                </a:solidFill>
+                <a:latin typeface="Onest"/>
+                <a:ea typeface="Onest"/>
+                <a:cs typeface="Onest"/>
+              </a:rPr>
+              <a:t> </a:t>
+            </a:r>
+            <a:r>
+              <a:rPr sz="1600" b="0" dirty="0" err="1">
+                <a:solidFill>
+                  <a:srgbClr val="58606B"/>
+                </a:solidFill>
+                <a:latin typeface="Onest"/>
+                <a:ea typeface="Onest"/>
+                <a:cs typeface="Onest"/>
+              </a:rPr>
+              <a:t>основе</a:t>
+            </a:r>
+            <a:r>
+              <a:rPr sz="1600" b="0" dirty="0">
+                <a:solidFill>
+                  <a:srgbClr val="58606B"/>
+                </a:solidFill>
+                <a:latin typeface="Onest"/>
+                <a:ea typeface="Onest"/>
+                <a:cs typeface="Onest"/>
+              </a:rPr>
+              <a:t> </a:t>
+            </a:r>
+            <a:r>
+              <a:rPr sz="1600" b="0" dirty="0" err="1">
+                <a:solidFill>
+                  <a:srgbClr val="58606B"/>
+                </a:solidFill>
+                <a:latin typeface="Onest"/>
+                <a:ea typeface="Onest"/>
+                <a:cs typeface="Onest"/>
+              </a:rPr>
+              <a:t>эвристических</a:t>
+            </a:r>
+            <a:r>
+              <a:rPr sz="1600" b="0" dirty="0">
+                <a:solidFill>
+                  <a:srgbClr val="58606B"/>
+                </a:solidFill>
+                <a:latin typeface="Onest"/>
+                <a:ea typeface="Onest"/>
+                <a:cs typeface="Onest"/>
+              </a:rPr>
+              <a:t> </a:t>
+            </a:r>
+            <a:r>
+              <a:rPr sz="1600" b="0" dirty="0" err="1">
+                <a:solidFill>
+                  <a:srgbClr val="58606B"/>
+                </a:solidFill>
+                <a:latin typeface="Onest"/>
+                <a:ea typeface="Onest"/>
+                <a:cs typeface="Onest"/>
+              </a:rPr>
+              <a:t>методов</a:t>
+            </a:r>
+            <a:r>
+              <a:rPr sz="1600" b="0" dirty="0">
+                <a:solidFill>
+                  <a:srgbClr val="58606B"/>
+                </a:solidFill>
+                <a:latin typeface="Onest"/>
+                <a:ea typeface="Onest"/>
+                <a:cs typeface="Onest"/>
+              </a:rPr>
+              <a:t> </a:t>
+            </a:r>
+            <a:r>
+              <a:rPr sz="1600" b="0" dirty="0" err="1">
+                <a:solidFill>
+                  <a:srgbClr val="58606B"/>
+                </a:solidFill>
+                <a:latin typeface="Onest"/>
+                <a:ea typeface="Onest"/>
+                <a:cs typeface="Onest"/>
+              </a:rPr>
+              <a:t>оптимизации</a:t>
+            </a:r>
+            <a:endParaRPr sz="1600" b="0" dirty="0">
+              <a:solidFill>
+                <a:srgbClr val="58606B"/>
+              </a:solidFill>
+              <a:latin typeface="Onest"/>
+              <a:ea typeface="Onest"/>
+              <a:cs typeface="Onest"/>
+            </a:endParaRPr>
           </a:p>
         </p:txBody>
       </p:sp>
-      <p:sp>
-        <p:nvSpPr>
-          <p:cNvPr id="39" name="Прямоугольник 38">
-            <a:extLst>
-              <a:ext uri="{FF2B5EF4-FFF2-40B4-BE49-F238E27FC236}">
-                <a16:creationId xmlns:a16="http://schemas.microsoft.com/office/drawing/2014/main" id="{51070D83-9514-4BFF-A2B4-CC283D5818E6}"/>
-              </a:ext>
-            </a:extLst>
-          </p:cNvPr>
-          <p:cNvSpPr>
-            <a:spLocks noGrp="1"/>
-          </p:cNvSpPr>
-          <p:nvPr/>
-        </p:nvSpPr>
-        <p:spPr>
-          <a:xfrm>
-            <a:off x="10763250" y="6419850"/>
-            <a:ext cx="914400" cy="266700"/>
-          </a:xfrm>
-          <a:prstGeom prst="rect">
-            <a:avLst/>
-          </a:prstGeom>
-          <a:solidFill>
-            <a:srgbClr val="000000">
-              <a:alpha val="0"/>
-            </a:srgbClr>
-          </a:solidFill>
-          <a:ln w="0">
-            <a:solidFill>
-              <a:srgbClr val="000000">
-                <a:alpha val="0"/>
-              </a:srgbClr>
-            </a:solidFill>
-            <a:prstDash val="solid"/>
-          </a:ln>
-        </p:spPr>
-        <p:txBody>
-          <a:bodyPr lIns="0" tIns="0" rIns="0" bIns="0" anchor="t"/>
-          <a:lstStyle/>
-          <a:p>
-            <a:pPr algn="r">
-              <a:defRPr sz="1800" b="1">
-                <a:solidFill>
-                  <a:srgbClr val="15181F"/>
-                </a:solidFill>
-                <a:latin typeface="Onest"/>
-                <a:ea typeface="Onest"/>
-                <a:cs typeface="Onest"/>
-              </a:defRPr>
-            </a:pPr>
-            <a:r>
-              <a:rPr sz="1800" b="1">
-                <a:solidFill>
-                  <a:srgbClr val="15181F"/>
-                </a:solidFill>
-                <a:latin typeface="Onest"/>
-                <a:ea typeface="Onest"/>
-                <a:cs typeface="Onest"/>
-              </a:rPr>
-              <a:t>5/19</a:t>
-            </a:r>
-          </a:p>
-        </p:txBody>
-      </p:sp>
-      <p:pic>
-        <p:nvPicPr>
-          <p:cNvPr id="40" name="Рисунок 39"/>
-          <p:cNvPicPr>
-            <a:picLocks noChangeAspect="1"/>
-          </p:cNvPicPr>
-          <p:nvPr/>
-        </p:nvPicPr>
-        <p:blipFill>
-          <a:blip r:embed="rId3"/>
-          <a:stretch/>
-        </p:blipFill>
-        <p:spPr>
-          <a:xfrm>
-            <a:off x="9572625" y="248984"/>
-            <a:ext cx="2095500" cy="787908"/>
-          </a:xfrm>
-          <a:prstGeom prst="rect">
-            <a:avLst/>
-          </a:prstGeom>
-        </p:spPr>
-      </p:pic>
     </p:spTree>
     <p:extLst>
       <p:ext uri="{BB962C8B-B14F-4D97-AF65-F5344CB8AC3E}">
@@ -27055,21 +29410,126 @@
       </p:sp>
       <p:sp>
         <p:nvSpPr>
-          <p:cNvPr id="24" name="Прямоугольник 23">
-            <a:extLst>
-              <a:ext uri="{FF2B5EF4-FFF2-40B4-BE49-F238E27FC236}">
-                <a16:creationId xmlns:a16="http://schemas.microsoft.com/office/drawing/2014/main" id="{7C989F85-A786-49D7-B6A8-A3158CB819B7}"/>
-              </a:ext>
-            </a:extLst>
-          </p:cNvPr>
-          <p:cNvSpPr>
-            <a:spLocks noGrp="1"/>
-          </p:cNvSpPr>
-          <p:nvPr/>
-        </p:nvSpPr>
-        <p:spPr>
-          <a:xfrm>
-            <a:off x="514350" y="6248400"/>
+          <p:cNvPr id="25" name="Прямоугольник 24">
+            <a:extLst>
+              <a:ext uri="{FF2B5EF4-FFF2-40B4-BE49-F238E27FC236}">
+                <a16:creationId xmlns:a16="http://schemas.microsoft.com/office/drawing/2014/main" id="{2B41F52A-9F4E-4AC7-970C-5E756B71A5B1}"/>
+              </a:ext>
+            </a:extLst>
+          </p:cNvPr>
+          <p:cNvSpPr>
+            <a:spLocks noGrp="1"/>
+          </p:cNvSpPr>
+          <p:nvPr/>
+        </p:nvSpPr>
+        <p:spPr>
+          <a:xfrm>
+            <a:off x="10763250" y="6419850"/>
+            <a:ext cx="914400" cy="266700"/>
+          </a:xfrm>
+          <a:prstGeom prst="rect">
+            <a:avLst/>
+          </a:prstGeom>
+          <a:solidFill>
+            <a:srgbClr val="000000">
+              <a:alpha val="0"/>
+            </a:srgbClr>
+          </a:solidFill>
+          <a:ln w="0">
+            <a:solidFill>
+              <a:srgbClr val="000000">
+                <a:alpha val="0"/>
+              </a:srgbClr>
+            </a:solidFill>
+            <a:prstDash val="solid"/>
+          </a:ln>
+        </p:spPr>
+        <p:txBody>
+          <a:bodyPr lIns="0" tIns="0" rIns="0" bIns="0" anchor="t"/>
+          <a:lstStyle/>
+          <a:p>
+            <a:pPr algn="r">
+              <a:defRPr sz="1800" b="1">
+                <a:solidFill>
+                  <a:srgbClr val="15181F"/>
+                </a:solidFill>
+                <a:latin typeface="Onest"/>
+                <a:ea typeface="Onest"/>
+                <a:cs typeface="Onest"/>
+              </a:defRPr>
+            </a:pPr>
+            <a:r>
+              <a:rPr sz="1800" b="1" dirty="0">
+                <a:solidFill>
+                  <a:srgbClr val="15181F"/>
+                </a:solidFill>
+                <a:latin typeface="Onest"/>
+                <a:ea typeface="Onest"/>
+                <a:cs typeface="Onest"/>
+              </a:rPr>
+              <a:t>6/1</a:t>
+            </a:r>
+            <a:r>
+              <a:rPr lang="ru-RU" sz="1800" b="1" dirty="0">
+                <a:solidFill>
+                  <a:srgbClr val="15181F"/>
+                </a:solidFill>
+                <a:latin typeface="Onest"/>
+                <a:ea typeface="Onest"/>
+                <a:cs typeface="Onest"/>
+              </a:rPr>
+              <a:t>8</a:t>
+            </a:r>
+            <a:endParaRPr sz="1800" b="1" dirty="0">
+              <a:solidFill>
+                <a:srgbClr val="15181F"/>
+              </a:solidFill>
+              <a:latin typeface="Onest"/>
+              <a:ea typeface="Onest"/>
+              <a:cs typeface="Onest"/>
+            </a:endParaRPr>
+          </a:p>
+        </p:txBody>
+      </p:sp>
+      <p:pic>
+        <p:nvPicPr>
+          <p:cNvPr id="26" name="Рисунок 25"/>
+          <p:cNvPicPr>
+            <a:picLocks noChangeAspect="1"/>
+          </p:cNvPicPr>
+          <p:nvPr/>
+        </p:nvPicPr>
+        <p:blipFill>
+          <a:blip r:embed="rId3"/>
+          <a:stretch/>
+        </p:blipFill>
+        <p:spPr>
+          <a:xfrm>
+            <a:off x="9572625" y="248984"/>
+            <a:ext cx="2095500" cy="787908"/>
+          </a:xfrm>
+          <a:prstGeom prst="rect">
+            <a:avLst/>
+          </a:prstGeom>
+        </p:spPr>
+      </p:pic>
+      <p:sp>
+        <p:nvSpPr>
+          <p:cNvPr id="27" name="Прямоугольник 26">
+            <a:extLst>
+              <a:ext uri="{FF2B5EF4-FFF2-40B4-BE49-F238E27FC236}">
+                <a16:creationId xmlns:a16="http://schemas.microsoft.com/office/drawing/2014/main" id="{CA5A5653-7F1E-439B-937D-9D58676F2851}"/>
+              </a:ext>
+            </a:extLst>
+          </p:cNvPr>
+          <p:cNvSpPr>
+            <a:spLocks noGrp="1"/>
+          </p:cNvSpPr>
+          <p:nvPr/>
+        </p:nvSpPr>
+        <p:spPr>
+          <a:xfrm>
+            <a:off x="514350" y="6304429"/>
             <a:ext cx="9810750" cy="457200"/>
           </a:xfrm>
           <a:prstGeom prst="rect">
@@ -27104,16 +29564,178 @@
               </a:defRPr>
             </a:pPr>
             <a:r>
-              <a:rPr sz="1800" b="0">
-                <a:solidFill>
-                  <a:srgbClr val="58606B"/>
-                </a:solidFill>
-                <a:latin typeface="Onest"/>
-                <a:ea typeface="Onest"/>
-                <a:cs typeface="Onest"/>
-              </a:rPr>
-              <a:t>Автоматизация подбора параметров алгоритма факторизации больших чисел с применением</a:t>
-            </a:r>
+              <a:rPr sz="1600" b="0" dirty="0" err="1">
+                <a:solidFill>
+                  <a:srgbClr val="58606B"/>
+                </a:solidFill>
+                <a:latin typeface="Onest"/>
+                <a:ea typeface="Onest"/>
+                <a:cs typeface="Onest"/>
+              </a:rPr>
+              <a:t>Автоматизация</a:t>
+            </a:r>
+            <a:r>
+              <a:rPr sz="1600" b="0" dirty="0">
+                <a:solidFill>
+                  <a:srgbClr val="58606B"/>
+                </a:solidFill>
+                <a:latin typeface="Onest"/>
+                <a:ea typeface="Onest"/>
+                <a:cs typeface="Onest"/>
+              </a:rPr>
+              <a:t> </a:t>
+            </a:r>
+            <a:r>
+              <a:rPr sz="1600" b="0" dirty="0" err="1">
+                <a:solidFill>
+                  <a:srgbClr val="58606B"/>
+                </a:solidFill>
+                <a:latin typeface="Onest"/>
+                <a:ea typeface="Onest"/>
+                <a:cs typeface="Onest"/>
+              </a:rPr>
+              <a:t>подбора</a:t>
+            </a:r>
+            <a:r>
+              <a:rPr sz="1600" b="0" dirty="0">
+                <a:solidFill>
+                  <a:srgbClr val="58606B"/>
+                </a:solidFill>
+                <a:latin typeface="Onest"/>
+                <a:ea typeface="Onest"/>
+                <a:cs typeface="Onest"/>
+              </a:rPr>
+              <a:t> </a:t>
+            </a:r>
+            <a:r>
+              <a:rPr sz="1600" b="0" dirty="0" err="1">
+                <a:solidFill>
+                  <a:srgbClr val="58606B"/>
+                </a:solidFill>
+                <a:latin typeface="Onest"/>
+                <a:ea typeface="Onest"/>
+                <a:cs typeface="Onest"/>
+              </a:rPr>
+              <a:t>параметров</a:t>
+            </a:r>
+            <a:r>
+              <a:rPr sz="1600" b="0" dirty="0">
+                <a:solidFill>
+                  <a:srgbClr val="58606B"/>
+                </a:solidFill>
+                <a:latin typeface="Onest"/>
+                <a:ea typeface="Onest"/>
+                <a:cs typeface="Onest"/>
+              </a:rPr>
+              <a:t> </a:t>
+            </a:r>
+            <a:r>
+              <a:rPr sz="1600" b="0" dirty="0" err="1">
+                <a:solidFill>
+                  <a:srgbClr val="58606B"/>
+                </a:solidFill>
+                <a:latin typeface="Onest"/>
+                <a:ea typeface="Onest"/>
+                <a:cs typeface="Onest"/>
+              </a:rPr>
+              <a:t>алгоритма</a:t>
+            </a:r>
+            <a:r>
+              <a:rPr sz="1600" b="0" dirty="0">
+                <a:solidFill>
+                  <a:srgbClr val="58606B"/>
+                </a:solidFill>
+                <a:latin typeface="Onest"/>
+                <a:ea typeface="Onest"/>
+                <a:cs typeface="Onest"/>
+              </a:rPr>
+              <a:t> </a:t>
+            </a:r>
+            <a:r>
+              <a:rPr sz="1600" b="0" dirty="0" err="1">
+                <a:solidFill>
+                  <a:srgbClr val="58606B"/>
+                </a:solidFill>
+                <a:latin typeface="Onest"/>
+                <a:ea typeface="Onest"/>
+                <a:cs typeface="Onest"/>
+              </a:rPr>
+              <a:t>факторизации</a:t>
+            </a:r>
+            <a:r>
+              <a:rPr sz="1600" b="0" dirty="0">
+                <a:solidFill>
+                  <a:srgbClr val="58606B"/>
+                </a:solidFill>
+                <a:latin typeface="Onest"/>
+                <a:ea typeface="Onest"/>
+                <a:cs typeface="Onest"/>
+              </a:rPr>
+              <a:t> </a:t>
+            </a:r>
+            <a:r>
+              <a:rPr sz="1600" b="0" dirty="0" err="1">
+                <a:solidFill>
+                  <a:srgbClr val="58606B"/>
+                </a:solidFill>
+                <a:latin typeface="Onest"/>
+                <a:ea typeface="Onest"/>
+                <a:cs typeface="Onest"/>
+              </a:rPr>
+              <a:t>больших</a:t>
+            </a:r>
+            <a:r>
+              <a:rPr sz="1600" b="0" dirty="0">
+                <a:solidFill>
+                  <a:srgbClr val="58606B"/>
+                </a:solidFill>
+                <a:latin typeface="Onest"/>
+                <a:ea typeface="Onest"/>
+                <a:cs typeface="Onest"/>
+              </a:rPr>
+              <a:t> </a:t>
+            </a:r>
+            <a:r>
+              <a:rPr sz="1600" b="0" dirty="0" err="1">
+                <a:solidFill>
+                  <a:srgbClr val="58606B"/>
+                </a:solidFill>
+                <a:latin typeface="Onest"/>
+                <a:ea typeface="Onest"/>
+                <a:cs typeface="Onest"/>
+              </a:rPr>
+              <a:t>чисел</a:t>
+            </a:r>
+            <a:r>
+              <a:rPr sz="1600" b="0" dirty="0">
+                <a:solidFill>
+                  <a:srgbClr val="58606B"/>
+                </a:solidFill>
+                <a:latin typeface="Onest"/>
+                <a:ea typeface="Onest"/>
+                <a:cs typeface="Onest"/>
+              </a:rPr>
+              <a:t> с </a:t>
+            </a:r>
+            <a:r>
+              <a:rPr sz="1600" b="0" dirty="0" err="1">
+                <a:solidFill>
+                  <a:srgbClr val="58606B"/>
+                </a:solidFill>
+                <a:latin typeface="Onest"/>
+                <a:ea typeface="Onest"/>
+                <a:cs typeface="Onest"/>
+              </a:rPr>
+              <a:t>применением</a:t>
+            </a:r>
+            <a:endParaRPr sz="1600" b="0" dirty="0">
+              <a:solidFill>
+                <a:srgbClr val="58606B"/>
+              </a:solidFill>
+              <a:latin typeface="Onest"/>
+              <a:ea typeface="Onest"/>
+              <a:cs typeface="Onest"/>
+            </a:endParaRPr>
           </a:p>
           <a:p>
             <a:pPr algn="l">
@@ -27127,105 +29749,159 @@
               </a:defRPr>
             </a:pPr>
             <a:r>
-              <a:rPr sz="1800" b="0">
-                <a:solidFill>
-                  <a:srgbClr val="58606B"/>
-                </a:solidFill>
-                <a:latin typeface="Onest"/>
-                <a:ea typeface="Onest"/>
-                <a:cs typeface="Onest"/>
-              </a:rPr>
-              <a:t>эллиптических кривых на основе эвристических методов оптимизации</a:t>
-            </a:r>
+              <a:rPr sz="1600" b="0" dirty="0" err="1">
+                <a:solidFill>
+                  <a:srgbClr val="58606B"/>
+                </a:solidFill>
+                <a:latin typeface="Onest"/>
+                <a:ea typeface="Onest"/>
+                <a:cs typeface="Onest"/>
+              </a:rPr>
+              <a:t>эллиптических</a:t>
+            </a:r>
+            <a:r>
+              <a:rPr sz="1600" b="0" dirty="0">
+                <a:solidFill>
+                  <a:srgbClr val="58606B"/>
+                </a:solidFill>
+                <a:latin typeface="Onest"/>
+                <a:ea typeface="Onest"/>
+                <a:cs typeface="Onest"/>
+              </a:rPr>
+              <a:t> </a:t>
+            </a:r>
+            <a:r>
+              <a:rPr sz="1600" b="0" dirty="0" err="1">
+                <a:solidFill>
+                  <a:srgbClr val="58606B"/>
+                </a:solidFill>
+                <a:latin typeface="Onest"/>
+                <a:ea typeface="Onest"/>
+                <a:cs typeface="Onest"/>
+              </a:rPr>
+              <a:t>кривых</a:t>
+            </a:r>
+            <a:r>
+              <a:rPr sz="1600" b="0" dirty="0">
+                <a:solidFill>
+                  <a:srgbClr val="58606B"/>
+                </a:solidFill>
+                <a:latin typeface="Onest"/>
+                <a:ea typeface="Onest"/>
+                <a:cs typeface="Onest"/>
+              </a:rPr>
+              <a:t> </a:t>
+            </a:r>
+            <a:r>
+              <a:rPr sz="1600" b="0" dirty="0" err="1">
+                <a:solidFill>
+                  <a:srgbClr val="58606B"/>
+                </a:solidFill>
+                <a:latin typeface="Onest"/>
+                <a:ea typeface="Onest"/>
+                <a:cs typeface="Onest"/>
+              </a:rPr>
+              <a:t>на</a:t>
+            </a:r>
+            <a:r>
+              <a:rPr sz="1600" b="0" dirty="0">
+                <a:solidFill>
+                  <a:srgbClr val="58606B"/>
+                </a:solidFill>
+                <a:latin typeface="Onest"/>
+                <a:ea typeface="Onest"/>
+                <a:cs typeface="Onest"/>
+              </a:rPr>
+              <a:t> </a:t>
+            </a:r>
+            <a:r>
+              <a:rPr sz="1600" b="0" dirty="0" err="1">
+                <a:solidFill>
+                  <a:srgbClr val="58606B"/>
+                </a:solidFill>
+                <a:latin typeface="Onest"/>
+                <a:ea typeface="Onest"/>
+                <a:cs typeface="Onest"/>
+              </a:rPr>
+              <a:t>основе</a:t>
+            </a:r>
+            <a:r>
+              <a:rPr sz="1600" b="0" dirty="0">
+                <a:solidFill>
+                  <a:srgbClr val="58606B"/>
+                </a:solidFill>
+                <a:latin typeface="Onest"/>
+                <a:ea typeface="Onest"/>
+                <a:cs typeface="Onest"/>
+              </a:rPr>
+              <a:t> </a:t>
+            </a:r>
+            <a:r>
+              <a:rPr sz="1600" b="0" dirty="0" err="1">
+                <a:solidFill>
+                  <a:srgbClr val="58606B"/>
+                </a:solidFill>
+                <a:latin typeface="Onest"/>
+                <a:ea typeface="Onest"/>
+                <a:cs typeface="Onest"/>
+              </a:rPr>
+              <a:t>эвристических</a:t>
+            </a:r>
+            <a:r>
+              <a:rPr sz="1600" b="0" dirty="0">
+                <a:solidFill>
+                  <a:srgbClr val="58606B"/>
+                </a:solidFill>
+                <a:latin typeface="Onest"/>
+                <a:ea typeface="Onest"/>
+                <a:cs typeface="Onest"/>
+              </a:rPr>
+              <a:t> </a:t>
+            </a:r>
+            <a:r>
+              <a:rPr sz="1600" b="0" dirty="0" err="1">
+                <a:solidFill>
+                  <a:srgbClr val="58606B"/>
+                </a:solidFill>
+                <a:latin typeface="Onest"/>
+                <a:ea typeface="Onest"/>
+                <a:cs typeface="Onest"/>
+              </a:rPr>
+              <a:t>методов</a:t>
+            </a:r>
+            <a:r>
+              <a:rPr sz="1600" b="0" dirty="0">
+                <a:solidFill>
+                  <a:srgbClr val="58606B"/>
+                </a:solidFill>
+                <a:latin typeface="Onest"/>
+                <a:ea typeface="Onest"/>
+                <a:cs typeface="Onest"/>
+              </a:rPr>
+              <a:t> </a:t>
+            </a:r>
+            <a:r>
+              <a:rPr sz="1600" b="0" dirty="0" err="1">
+                <a:solidFill>
+                  <a:srgbClr val="58606B"/>
+                </a:solidFill>
+                <a:latin typeface="Onest"/>
+                <a:ea typeface="Onest"/>
+                <a:cs typeface="Onest"/>
+              </a:rPr>
+              <a:t>оптимизации</a:t>
+            </a:r>
+            <a:endParaRPr sz="1600" b="0" dirty="0">
+              <a:solidFill>
+                <a:srgbClr val="58606B"/>
+              </a:solidFill>
+              <a:latin typeface="Onest"/>
+              <a:ea typeface="Onest"/>
+              <a:cs typeface="Onest"/>
+            </a:endParaRPr>
           </a:p>
         </p:txBody>
       </p:sp>
-      <p:sp>
-        <p:nvSpPr>
-          <p:cNvPr id="25" name="Прямоугольник 24">
-            <a:extLst>
-              <a:ext uri="{FF2B5EF4-FFF2-40B4-BE49-F238E27FC236}">
-                <a16:creationId xmlns:a16="http://schemas.microsoft.com/office/drawing/2014/main" id="{2B41F52A-9F4E-4AC7-970C-5E756B71A5B1}"/>
-              </a:ext>
-            </a:extLst>
-          </p:cNvPr>
-          <p:cNvSpPr>
-            <a:spLocks noGrp="1"/>
-          </p:cNvSpPr>
-          <p:nvPr/>
-        </p:nvSpPr>
-        <p:spPr>
-          <a:xfrm>
-            <a:off x="10763250" y="6419850"/>
-            <a:ext cx="914400" cy="266700"/>
-          </a:xfrm>
-          <a:prstGeom prst="rect">
-            <a:avLst/>
-          </a:prstGeom>
-          <a:solidFill>
-            <a:srgbClr val="000000">
-              <a:alpha val="0"/>
-            </a:srgbClr>
-          </a:solidFill>
-          <a:ln w="0">
-            <a:solidFill>
-              <a:srgbClr val="000000">
-                <a:alpha val="0"/>
-              </a:srgbClr>
-            </a:solidFill>
-            <a:prstDash val="solid"/>
-          </a:ln>
-        </p:spPr>
-        <p:txBody>
-          <a:bodyPr lIns="0" tIns="0" rIns="0" bIns="0" anchor="t"/>
-          <a:lstStyle/>
-          <a:p>
-            <a:pPr algn="r">
-              <a:defRPr sz="1800" b="1">
-                <a:solidFill>
-                  <a:srgbClr val="15181F"/>
-                </a:solidFill>
-                <a:latin typeface="Onest"/>
-                <a:ea typeface="Onest"/>
-                <a:cs typeface="Onest"/>
-              </a:defRPr>
-            </a:pPr>
-            <a:r>
-              <a:rPr sz="1800" b="1">
-                <a:solidFill>
-                  <a:srgbClr val="15181F"/>
-                </a:solidFill>
-                <a:latin typeface="Onest"/>
-                <a:ea typeface="Onest"/>
-                <a:cs typeface="Onest"/>
-              </a:rPr>
-              <a:t>6/19</a:t>
-            </a:r>
-          </a:p>
-        </p:txBody>
-      </p:sp>
-      <p:pic>
-        <p:nvPicPr>
-          <p:cNvPr id="26" name="Рисунок 25"/>
-          <p:cNvPicPr>
-            <a:picLocks noChangeAspect="1"/>
-          </p:cNvPicPr>
-          <p:nvPr/>
-        </p:nvPicPr>
-        <p:blipFill>
-          <a:blip r:embed="rId3"/>
-          <a:stretch/>
-        </p:blipFill>
-        <p:spPr>
-          <a:xfrm>
-            <a:off x="9572625" y="248984"/>
-            <a:ext cx="2095500" cy="787908"/>
-          </a:xfrm>
-          <a:prstGeom prst="rect">
-            <a:avLst/>
-          </a:prstGeom>
-        </p:spPr>
-      </p:pic>
     </p:spTree>
     <p:extLst>
       <p:ext uri="{BB962C8B-B14F-4D97-AF65-F5344CB8AC3E}">
@@ -28914,21 +31590,126 @@
       </p:sp>
       <p:sp>
         <p:nvSpPr>
-          <p:cNvPr id="36" name="Прямоугольник 35">
-            <a:extLst>
-              <a:ext uri="{FF2B5EF4-FFF2-40B4-BE49-F238E27FC236}">
-                <a16:creationId xmlns:a16="http://schemas.microsoft.com/office/drawing/2014/main" id="{8D5791E6-718B-4025-8042-BB9AE63951EA}"/>
-              </a:ext>
-            </a:extLst>
-          </p:cNvPr>
-          <p:cNvSpPr>
-            <a:spLocks noGrp="1"/>
-          </p:cNvSpPr>
-          <p:nvPr/>
-        </p:nvSpPr>
-        <p:spPr>
-          <a:xfrm>
-            <a:off x="514350" y="6248400"/>
+          <p:cNvPr id="37" name="Прямоугольник 36">
+            <a:extLst>
+              <a:ext uri="{FF2B5EF4-FFF2-40B4-BE49-F238E27FC236}">
+                <a16:creationId xmlns:a16="http://schemas.microsoft.com/office/drawing/2014/main" id="{B351C176-EC35-4CE1-99CD-94B4AA9D553D}"/>
+              </a:ext>
+            </a:extLst>
+          </p:cNvPr>
+          <p:cNvSpPr>
+            <a:spLocks noGrp="1"/>
+          </p:cNvSpPr>
+          <p:nvPr/>
+        </p:nvSpPr>
+        <p:spPr>
+          <a:xfrm>
+            <a:off x="10763250" y="6419850"/>
+            <a:ext cx="914400" cy="266700"/>
+          </a:xfrm>
+          <a:prstGeom prst="rect">
+            <a:avLst/>
+          </a:prstGeom>
+          <a:solidFill>
+            <a:srgbClr val="000000">
+              <a:alpha val="0"/>
+            </a:srgbClr>
+          </a:solidFill>
+          <a:ln w="0">
+            <a:solidFill>
+              <a:srgbClr val="000000">
+                <a:alpha val="0"/>
+              </a:srgbClr>
+            </a:solidFill>
+            <a:prstDash val="solid"/>
+          </a:ln>
+        </p:spPr>
+        <p:txBody>
+          <a:bodyPr lIns="0" tIns="0" rIns="0" bIns="0" anchor="t"/>
+          <a:lstStyle/>
+          <a:p>
+            <a:pPr algn="r">
+              <a:defRPr sz="1800" b="1">
+                <a:solidFill>
+                  <a:srgbClr val="15181F"/>
+                </a:solidFill>
+                <a:latin typeface="Onest"/>
+                <a:ea typeface="Onest"/>
+                <a:cs typeface="Onest"/>
+              </a:defRPr>
+            </a:pPr>
+            <a:r>
+              <a:rPr sz="1800" b="1" dirty="0">
+                <a:solidFill>
+                  <a:srgbClr val="15181F"/>
+                </a:solidFill>
+                <a:latin typeface="Onest"/>
+                <a:ea typeface="Onest"/>
+                <a:cs typeface="Onest"/>
+              </a:rPr>
+              <a:t>7/1</a:t>
+            </a:r>
+            <a:r>
+              <a:rPr lang="ru-RU" sz="1800" b="1" dirty="0">
+                <a:solidFill>
+                  <a:srgbClr val="15181F"/>
+                </a:solidFill>
+                <a:latin typeface="Onest"/>
+                <a:ea typeface="Onest"/>
+                <a:cs typeface="Onest"/>
+              </a:rPr>
+              <a:t>8</a:t>
+            </a:r>
+            <a:endParaRPr sz="1800" b="1" dirty="0">
+              <a:solidFill>
+                <a:srgbClr val="15181F"/>
+              </a:solidFill>
+              <a:latin typeface="Onest"/>
+              <a:ea typeface="Onest"/>
+              <a:cs typeface="Onest"/>
+            </a:endParaRPr>
+          </a:p>
+        </p:txBody>
+      </p:sp>
+      <p:pic>
+        <p:nvPicPr>
+          <p:cNvPr id="38" name="Рисунок 37"/>
+          <p:cNvPicPr>
+            <a:picLocks noChangeAspect="1"/>
+          </p:cNvPicPr>
+          <p:nvPr/>
+        </p:nvPicPr>
+        <p:blipFill>
+          <a:blip r:embed="rId3"/>
+          <a:stretch/>
+        </p:blipFill>
+        <p:spPr>
+          <a:xfrm>
+            <a:off x="9572625" y="248984"/>
+            <a:ext cx="2095500" cy="787908"/>
+          </a:xfrm>
+          <a:prstGeom prst="rect">
+            <a:avLst/>
+          </a:prstGeom>
+        </p:spPr>
+      </p:pic>
+      <p:sp>
+        <p:nvSpPr>
+          <p:cNvPr id="39" name="Прямоугольник 38">
+            <a:extLst>
+              <a:ext uri="{FF2B5EF4-FFF2-40B4-BE49-F238E27FC236}">
+                <a16:creationId xmlns:a16="http://schemas.microsoft.com/office/drawing/2014/main" id="{CD658305-5C4E-4FA5-BB44-F1FCF91CFFEA}"/>
+              </a:ext>
+            </a:extLst>
+          </p:cNvPr>
+          <p:cNvSpPr>
+            <a:spLocks noGrp="1"/>
+          </p:cNvSpPr>
+          <p:nvPr/>
+        </p:nvSpPr>
+        <p:spPr>
+          <a:xfrm>
+            <a:off x="514350" y="6304429"/>
             <a:ext cx="9810750" cy="457200"/>
           </a:xfrm>
           <a:prstGeom prst="rect">
@@ -28963,16 +31744,178 @@
               </a:defRPr>
             </a:pPr>
             <a:r>
-              <a:rPr sz="1800" b="0">
-                <a:solidFill>
-                  <a:srgbClr val="58606B"/>
-                </a:solidFill>
-                <a:latin typeface="Onest"/>
-                <a:ea typeface="Onest"/>
-                <a:cs typeface="Onest"/>
-              </a:rPr>
-              <a:t>Автоматизация подбора параметров алгоритма факторизации больших чисел с применением</a:t>
-            </a:r>
+              <a:rPr sz="1600" b="0" dirty="0" err="1">
+                <a:solidFill>
+                  <a:srgbClr val="58606B"/>
+                </a:solidFill>
+                <a:latin typeface="Onest"/>
+                <a:ea typeface="Onest"/>
+                <a:cs typeface="Onest"/>
+              </a:rPr>
+              <a:t>Автоматизация</a:t>
+            </a:r>
+            <a:r>
+              <a:rPr sz="1600" b="0" dirty="0">
+                <a:solidFill>
+                  <a:srgbClr val="58606B"/>
+                </a:solidFill>
+                <a:latin typeface="Onest"/>
+                <a:ea typeface="Onest"/>
+                <a:cs typeface="Onest"/>
+              </a:rPr>
+              <a:t> </a:t>
+            </a:r>
+            <a:r>
+              <a:rPr sz="1600" b="0" dirty="0" err="1">
+                <a:solidFill>
+                  <a:srgbClr val="58606B"/>
+                </a:solidFill>
+                <a:latin typeface="Onest"/>
+                <a:ea typeface="Onest"/>
+                <a:cs typeface="Onest"/>
+              </a:rPr>
+              <a:t>подбора</a:t>
+            </a:r>
+            <a:r>
+              <a:rPr sz="1600" b="0" dirty="0">
+                <a:solidFill>
+                  <a:srgbClr val="58606B"/>
+                </a:solidFill>
+                <a:latin typeface="Onest"/>
+                <a:ea typeface="Onest"/>
+                <a:cs typeface="Onest"/>
+              </a:rPr>
+              <a:t> </a:t>
+            </a:r>
+            <a:r>
+              <a:rPr sz="1600" b="0" dirty="0" err="1">
+                <a:solidFill>
+                  <a:srgbClr val="58606B"/>
+                </a:solidFill>
+                <a:latin typeface="Onest"/>
+                <a:ea typeface="Onest"/>
+                <a:cs typeface="Onest"/>
+              </a:rPr>
+              <a:t>параметров</a:t>
+            </a:r>
+            <a:r>
+              <a:rPr sz="1600" b="0" dirty="0">
+                <a:solidFill>
+                  <a:srgbClr val="58606B"/>
+                </a:solidFill>
+                <a:latin typeface="Onest"/>
+                <a:ea typeface="Onest"/>
+                <a:cs typeface="Onest"/>
+              </a:rPr>
+              <a:t> </a:t>
+            </a:r>
+            <a:r>
+              <a:rPr sz="1600" b="0" dirty="0" err="1">
+                <a:solidFill>
+                  <a:srgbClr val="58606B"/>
+                </a:solidFill>
+                <a:latin typeface="Onest"/>
+                <a:ea typeface="Onest"/>
+                <a:cs typeface="Onest"/>
+              </a:rPr>
+              <a:t>алгоритма</a:t>
+            </a:r>
+            <a:r>
+              <a:rPr sz="1600" b="0" dirty="0">
+                <a:solidFill>
+                  <a:srgbClr val="58606B"/>
+                </a:solidFill>
+                <a:latin typeface="Onest"/>
+                <a:ea typeface="Onest"/>
+                <a:cs typeface="Onest"/>
+              </a:rPr>
+              <a:t> </a:t>
+            </a:r>
+            <a:r>
+              <a:rPr sz="1600" b="0" dirty="0" err="1">
+                <a:solidFill>
+                  <a:srgbClr val="58606B"/>
+                </a:solidFill>
+                <a:latin typeface="Onest"/>
+                <a:ea typeface="Onest"/>
+                <a:cs typeface="Onest"/>
+              </a:rPr>
+              <a:t>факторизации</a:t>
+            </a:r>
+            <a:r>
+              <a:rPr sz="1600" b="0" dirty="0">
+                <a:solidFill>
+                  <a:srgbClr val="58606B"/>
+                </a:solidFill>
+                <a:latin typeface="Onest"/>
+                <a:ea typeface="Onest"/>
+                <a:cs typeface="Onest"/>
+              </a:rPr>
+              <a:t> </a:t>
+            </a:r>
+            <a:r>
+              <a:rPr sz="1600" b="0" dirty="0" err="1">
+                <a:solidFill>
+                  <a:srgbClr val="58606B"/>
+                </a:solidFill>
+                <a:latin typeface="Onest"/>
+                <a:ea typeface="Onest"/>
+                <a:cs typeface="Onest"/>
+              </a:rPr>
+              <a:t>больших</a:t>
+            </a:r>
+            <a:r>
+              <a:rPr sz="1600" b="0" dirty="0">
+                <a:solidFill>
+                  <a:srgbClr val="58606B"/>
+                </a:solidFill>
+                <a:latin typeface="Onest"/>
+                <a:ea typeface="Onest"/>
+                <a:cs typeface="Onest"/>
+              </a:rPr>
+              <a:t> </a:t>
+            </a:r>
+            <a:r>
+              <a:rPr sz="1600" b="0" dirty="0" err="1">
+                <a:solidFill>
+                  <a:srgbClr val="58606B"/>
+                </a:solidFill>
+                <a:latin typeface="Onest"/>
+                <a:ea typeface="Onest"/>
+                <a:cs typeface="Onest"/>
+              </a:rPr>
+              <a:t>чисел</a:t>
+            </a:r>
+            <a:r>
+              <a:rPr sz="1600" b="0" dirty="0">
+                <a:solidFill>
+                  <a:srgbClr val="58606B"/>
+                </a:solidFill>
+                <a:latin typeface="Onest"/>
+                <a:ea typeface="Onest"/>
+                <a:cs typeface="Onest"/>
+              </a:rPr>
+              <a:t> с </a:t>
+            </a:r>
+            <a:r>
+              <a:rPr sz="1600" b="0" dirty="0" err="1">
+                <a:solidFill>
+                  <a:srgbClr val="58606B"/>
+                </a:solidFill>
+                <a:latin typeface="Onest"/>
+                <a:ea typeface="Onest"/>
+                <a:cs typeface="Onest"/>
+              </a:rPr>
+              <a:t>применением</a:t>
+            </a:r>
+            <a:endParaRPr sz="1600" b="0" dirty="0">
+              <a:solidFill>
+                <a:srgbClr val="58606B"/>
+              </a:solidFill>
+              <a:latin typeface="Onest"/>
+              <a:ea typeface="Onest"/>
+              <a:cs typeface="Onest"/>
+            </a:endParaRPr>
           </a:p>
           <a:p>
             <a:pPr algn="l">
@@ -28986,105 +31929,159 @@
               </a:defRPr>
             </a:pPr>
             <a:r>
-              <a:rPr sz="1800" b="0">
-                <a:solidFill>
-                  <a:srgbClr val="58606B"/>
-                </a:solidFill>
-                <a:latin typeface="Onest"/>
-                <a:ea typeface="Onest"/>
-                <a:cs typeface="Onest"/>
-              </a:rPr>
-              <a:t>эллиптических кривых на основе эвристических методов оптимизации</a:t>
-            </a:r>
+              <a:rPr sz="1600" b="0" dirty="0" err="1">
+                <a:solidFill>
+                  <a:srgbClr val="58606B"/>
+                </a:solidFill>
+                <a:latin typeface="Onest"/>
+                <a:ea typeface="Onest"/>
+                <a:cs typeface="Onest"/>
+              </a:rPr>
+              <a:t>эллиптических</a:t>
+            </a:r>
+            <a:r>
+              <a:rPr sz="1600" b="0" dirty="0">
+                <a:solidFill>
+                  <a:srgbClr val="58606B"/>
+                </a:solidFill>
+                <a:latin typeface="Onest"/>
+                <a:ea typeface="Onest"/>
+                <a:cs typeface="Onest"/>
+              </a:rPr>
+              <a:t> </a:t>
+            </a:r>
+            <a:r>
+              <a:rPr sz="1600" b="0" dirty="0" err="1">
+                <a:solidFill>
+                  <a:srgbClr val="58606B"/>
+                </a:solidFill>
+                <a:latin typeface="Onest"/>
+                <a:ea typeface="Onest"/>
+                <a:cs typeface="Onest"/>
+              </a:rPr>
+              <a:t>кривых</a:t>
+            </a:r>
+            <a:r>
+              <a:rPr sz="1600" b="0" dirty="0">
+                <a:solidFill>
+                  <a:srgbClr val="58606B"/>
+                </a:solidFill>
+                <a:latin typeface="Onest"/>
+                <a:ea typeface="Onest"/>
+                <a:cs typeface="Onest"/>
+              </a:rPr>
+              <a:t> </a:t>
+            </a:r>
+            <a:r>
+              <a:rPr sz="1600" b="0" dirty="0" err="1">
+                <a:solidFill>
+                  <a:srgbClr val="58606B"/>
+                </a:solidFill>
+                <a:latin typeface="Onest"/>
+                <a:ea typeface="Onest"/>
+                <a:cs typeface="Onest"/>
+              </a:rPr>
+              <a:t>на</a:t>
+            </a:r>
+            <a:r>
+              <a:rPr sz="1600" b="0" dirty="0">
+                <a:solidFill>
+                  <a:srgbClr val="58606B"/>
+                </a:solidFill>
+                <a:latin typeface="Onest"/>
+                <a:ea typeface="Onest"/>
+                <a:cs typeface="Onest"/>
+              </a:rPr>
+              <a:t> </a:t>
+            </a:r>
+            <a:r>
+              <a:rPr sz="1600" b="0" dirty="0" err="1">
+                <a:solidFill>
+                  <a:srgbClr val="58606B"/>
+                </a:solidFill>
+                <a:latin typeface="Onest"/>
+                <a:ea typeface="Onest"/>
+                <a:cs typeface="Onest"/>
+              </a:rPr>
+              <a:t>основе</a:t>
+            </a:r>
+            <a:r>
+              <a:rPr sz="1600" b="0" dirty="0">
+                <a:solidFill>
+                  <a:srgbClr val="58606B"/>
+                </a:solidFill>
+                <a:latin typeface="Onest"/>
+                <a:ea typeface="Onest"/>
+                <a:cs typeface="Onest"/>
+              </a:rPr>
+              <a:t> </a:t>
+            </a:r>
+            <a:r>
+              <a:rPr sz="1600" b="0" dirty="0" err="1">
+                <a:solidFill>
+                  <a:srgbClr val="58606B"/>
+                </a:solidFill>
+                <a:latin typeface="Onest"/>
+                <a:ea typeface="Onest"/>
+                <a:cs typeface="Onest"/>
+              </a:rPr>
+              <a:t>эвристических</a:t>
+            </a:r>
+            <a:r>
+              <a:rPr sz="1600" b="0" dirty="0">
+                <a:solidFill>
+                  <a:srgbClr val="58606B"/>
+                </a:solidFill>
+                <a:latin typeface="Onest"/>
+                <a:ea typeface="Onest"/>
+                <a:cs typeface="Onest"/>
+              </a:rPr>
+              <a:t> </a:t>
+            </a:r>
+            <a:r>
+              <a:rPr sz="1600" b="0" dirty="0" err="1">
+                <a:solidFill>
+                  <a:srgbClr val="58606B"/>
+                </a:solidFill>
+                <a:latin typeface="Onest"/>
+                <a:ea typeface="Onest"/>
+                <a:cs typeface="Onest"/>
+              </a:rPr>
+              <a:t>методов</a:t>
+            </a:r>
+            <a:r>
+              <a:rPr sz="1600" b="0" dirty="0">
+                <a:solidFill>
+                  <a:srgbClr val="58606B"/>
+                </a:solidFill>
+                <a:latin typeface="Onest"/>
+                <a:ea typeface="Onest"/>
+                <a:cs typeface="Onest"/>
+              </a:rPr>
+              <a:t> </a:t>
+            </a:r>
+            <a:r>
+              <a:rPr sz="1600" b="0" dirty="0" err="1">
+                <a:solidFill>
+                  <a:srgbClr val="58606B"/>
+                </a:solidFill>
+                <a:latin typeface="Onest"/>
+                <a:ea typeface="Onest"/>
+                <a:cs typeface="Onest"/>
+              </a:rPr>
+              <a:t>оптимизации</a:t>
+            </a:r>
+            <a:endParaRPr sz="1600" b="0" dirty="0">
+              <a:solidFill>
+                <a:srgbClr val="58606B"/>
+              </a:solidFill>
+              <a:latin typeface="Onest"/>
+              <a:ea typeface="Onest"/>
+              <a:cs typeface="Onest"/>
+            </a:endParaRPr>
           </a:p>
         </p:txBody>
       </p:sp>
-      <p:sp>
-        <p:nvSpPr>
-          <p:cNvPr id="37" name="Прямоугольник 36">
-            <a:extLst>
-              <a:ext uri="{FF2B5EF4-FFF2-40B4-BE49-F238E27FC236}">
-                <a16:creationId xmlns:a16="http://schemas.microsoft.com/office/drawing/2014/main" id="{B351C176-EC35-4CE1-99CD-94B4AA9D553D}"/>
-              </a:ext>
-            </a:extLst>
-          </p:cNvPr>
-          <p:cNvSpPr>
-            <a:spLocks noGrp="1"/>
-          </p:cNvSpPr>
-          <p:nvPr/>
-        </p:nvSpPr>
-        <p:spPr>
-          <a:xfrm>
-            <a:off x="10763250" y="6419850"/>
-            <a:ext cx="914400" cy="266700"/>
-          </a:xfrm>
-          <a:prstGeom prst="rect">
-            <a:avLst/>
-          </a:prstGeom>
-          <a:solidFill>
-            <a:srgbClr val="000000">
-              <a:alpha val="0"/>
-            </a:srgbClr>
-          </a:solidFill>
-          <a:ln w="0">
-            <a:solidFill>
-              <a:srgbClr val="000000">
-                <a:alpha val="0"/>
-              </a:srgbClr>
-            </a:solidFill>
-            <a:prstDash val="solid"/>
-          </a:ln>
-        </p:spPr>
-        <p:txBody>
-          <a:bodyPr lIns="0" tIns="0" rIns="0" bIns="0" anchor="t"/>
-          <a:lstStyle/>
-          <a:p>
-            <a:pPr algn="r">
-              <a:defRPr sz="1800" b="1">
-                <a:solidFill>
-                  <a:srgbClr val="15181F"/>
-                </a:solidFill>
-                <a:latin typeface="Onest"/>
-                <a:ea typeface="Onest"/>
-                <a:cs typeface="Onest"/>
-              </a:defRPr>
-            </a:pPr>
-            <a:r>
-              <a:rPr sz="1800" b="1">
-                <a:solidFill>
-                  <a:srgbClr val="15181F"/>
-                </a:solidFill>
-                <a:latin typeface="Onest"/>
-                <a:ea typeface="Onest"/>
-                <a:cs typeface="Onest"/>
-              </a:rPr>
-              <a:t>7/19</a:t>
-            </a:r>
-          </a:p>
-        </p:txBody>
-      </p:sp>
-      <p:pic>
-        <p:nvPicPr>
-          <p:cNvPr id="38" name="Рисунок 37"/>
-          <p:cNvPicPr>
-            <a:picLocks noChangeAspect="1"/>
-          </p:cNvPicPr>
-          <p:nvPr/>
-        </p:nvPicPr>
-        <p:blipFill>
-          <a:blip r:embed="rId3"/>
-          <a:stretch/>
-        </p:blipFill>
-        <p:spPr>
-          <a:xfrm>
-            <a:off x="9572625" y="248984"/>
-            <a:ext cx="2095500" cy="787908"/>
-          </a:xfrm>
-          <a:prstGeom prst="rect">
-            <a:avLst/>
-          </a:prstGeom>
-        </p:spPr>
-      </p:pic>
     </p:spTree>
     <p:extLst>
       <p:ext uri="{BB962C8B-B14F-4D97-AF65-F5344CB8AC3E}">
@@ -30888,21 +33885,126 @@
       </p:sp>
       <p:sp>
         <p:nvSpPr>
-          <p:cNvPr id="35" name="Прямоугольник 34">
-            <a:extLst>
-              <a:ext uri="{FF2B5EF4-FFF2-40B4-BE49-F238E27FC236}">
-                <a16:creationId xmlns:a16="http://schemas.microsoft.com/office/drawing/2014/main" id="{FAE03B2A-1C48-4986-86C2-7F65D874FEA5}"/>
-              </a:ext>
-            </a:extLst>
-          </p:cNvPr>
-          <p:cNvSpPr>
-            <a:spLocks noGrp="1"/>
-          </p:cNvSpPr>
-          <p:nvPr/>
-        </p:nvSpPr>
-        <p:spPr>
-          <a:xfrm>
-            <a:off x="514350" y="6248400"/>
+          <p:cNvPr id="36" name="Прямоугольник 35">
+            <a:extLst>
+              <a:ext uri="{FF2B5EF4-FFF2-40B4-BE49-F238E27FC236}">
+                <a16:creationId xmlns:a16="http://schemas.microsoft.com/office/drawing/2014/main" id="{712ADE5F-5C6C-4C42-8138-8B9DFE15C3C1}"/>
+              </a:ext>
+            </a:extLst>
+          </p:cNvPr>
+          <p:cNvSpPr>
+            <a:spLocks noGrp="1"/>
+          </p:cNvSpPr>
+          <p:nvPr/>
+        </p:nvSpPr>
+        <p:spPr>
+          <a:xfrm>
+            <a:off x="10763250" y="6419850"/>
+            <a:ext cx="914400" cy="266700"/>
+          </a:xfrm>
+          <a:prstGeom prst="rect">
+            <a:avLst/>
+          </a:prstGeom>
+          <a:solidFill>
+            <a:srgbClr val="000000">
+              <a:alpha val="0"/>
+            </a:srgbClr>
+          </a:solidFill>
+          <a:ln w="0">
+            <a:solidFill>
+              <a:srgbClr val="000000">
+                <a:alpha val="0"/>
+              </a:srgbClr>
+            </a:solidFill>
+            <a:prstDash val="solid"/>
+          </a:ln>
+        </p:spPr>
+        <p:txBody>
+          <a:bodyPr lIns="0" tIns="0" rIns="0" bIns="0" anchor="t"/>
+          <a:lstStyle/>
+          <a:p>
+            <a:pPr algn="r">
+              <a:defRPr sz="1800" b="1">
+                <a:solidFill>
+                  <a:srgbClr val="15181F"/>
+                </a:solidFill>
+                <a:latin typeface="Onest"/>
+                <a:ea typeface="Onest"/>
+                <a:cs typeface="Onest"/>
+              </a:defRPr>
+            </a:pPr>
+            <a:r>
+              <a:rPr sz="1800" b="1" dirty="0">
+                <a:solidFill>
+                  <a:srgbClr val="15181F"/>
+                </a:solidFill>
+                <a:latin typeface="Onest"/>
+                <a:ea typeface="Onest"/>
+                <a:cs typeface="Onest"/>
+              </a:rPr>
+              <a:t>8/1</a:t>
+            </a:r>
+            <a:r>
+              <a:rPr lang="ru-RU" sz="1800" b="1" dirty="0">
+                <a:solidFill>
+                  <a:srgbClr val="15181F"/>
+                </a:solidFill>
+                <a:latin typeface="Onest"/>
+                <a:ea typeface="Onest"/>
+                <a:cs typeface="Onest"/>
+              </a:rPr>
+              <a:t>8</a:t>
+            </a:r>
+            <a:endParaRPr sz="1800" b="1" dirty="0">
+              <a:solidFill>
+                <a:srgbClr val="15181F"/>
+              </a:solidFill>
+              <a:latin typeface="Onest"/>
+              <a:ea typeface="Onest"/>
+              <a:cs typeface="Onest"/>
+            </a:endParaRPr>
+          </a:p>
+        </p:txBody>
+      </p:sp>
+      <p:pic>
+        <p:nvPicPr>
+          <p:cNvPr id="37" name="Рисунок 36"/>
+          <p:cNvPicPr>
+            <a:picLocks noChangeAspect="1"/>
+          </p:cNvPicPr>
+          <p:nvPr/>
+        </p:nvPicPr>
+        <p:blipFill>
+          <a:blip r:embed="rId3"/>
+          <a:stretch/>
+        </p:blipFill>
+        <p:spPr>
+          <a:xfrm>
+            <a:off x="9572625" y="248984"/>
+            <a:ext cx="2095500" cy="787908"/>
+          </a:xfrm>
+          <a:prstGeom prst="rect">
+            <a:avLst/>
+          </a:prstGeom>
+        </p:spPr>
+      </p:pic>
+      <p:sp>
+        <p:nvSpPr>
+          <p:cNvPr id="38" name="Прямоугольник 37">
+            <a:extLst>
+              <a:ext uri="{FF2B5EF4-FFF2-40B4-BE49-F238E27FC236}">
+                <a16:creationId xmlns:a16="http://schemas.microsoft.com/office/drawing/2014/main" id="{259529E0-C496-415C-B091-82871A74E560}"/>
+              </a:ext>
+            </a:extLst>
+          </p:cNvPr>
+          <p:cNvSpPr>
+            <a:spLocks noGrp="1"/>
+          </p:cNvSpPr>
+          <p:nvPr/>
+        </p:nvSpPr>
+        <p:spPr>
+          <a:xfrm>
+            <a:off x="514350" y="6304429"/>
             <a:ext cx="9810750" cy="457200"/>
           </a:xfrm>
           <a:prstGeom prst="rect">
@@ -30937,16 +34039,178 @@
               </a:defRPr>
             </a:pPr>
             <a:r>
-              <a:rPr sz="1800" b="0">
-                <a:solidFill>
-                  <a:srgbClr val="58606B"/>
-                </a:solidFill>
-                <a:latin typeface="Onest"/>
-                <a:ea typeface="Onest"/>
-                <a:cs typeface="Onest"/>
-              </a:rPr>
-              <a:t>Автоматизация подбора параметров алгоритма факторизации больших чисел с применением</a:t>
-            </a:r>
+              <a:rPr sz="1600" b="0" dirty="0" err="1">
+                <a:solidFill>
+                  <a:srgbClr val="58606B"/>
+                </a:solidFill>
+                <a:latin typeface="Onest"/>
+                <a:ea typeface="Onest"/>
+                <a:cs typeface="Onest"/>
+              </a:rPr>
+              <a:t>Автоматизация</a:t>
+            </a:r>
+            <a:r>
+              <a:rPr sz="1600" b="0" dirty="0">
+                <a:solidFill>
+                  <a:srgbClr val="58606B"/>
+                </a:solidFill>
+                <a:latin typeface="Onest"/>
+                <a:ea typeface="Onest"/>
+                <a:cs typeface="Onest"/>
+              </a:rPr>
+              <a:t> </a:t>
+            </a:r>
+            <a:r>
+              <a:rPr sz="1600" b="0" dirty="0" err="1">
+                <a:solidFill>
+                  <a:srgbClr val="58606B"/>
+                </a:solidFill>
+                <a:latin typeface="Onest"/>
+                <a:ea typeface="Onest"/>
+                <a:cs typeface="Onest"/>
+              </a:rPr>
+              <a:t>подбора</a:t>
+            </a:r>
+            <a:r>
+              <a:rPr sz="1600" b="0" dirty="0">
+                <a:solidFill>
+                  <a:srgbClr val="58606B"/>
+                </a:solidFill>
+                <a:latin typeface="Onest"/>
+                <a:ea typeface="Onest"/>
+                <a:cs typeface="Onest"/>
+              </a:rPr>
+              <a:t> </a:t>
+            </a:r>
+            <a:r>
+              <a:rPr sz="1600" b="0" dirty="0" err="1">
+                <a:solidFill>
+                  <a:srgbClr val="58606B"/>
+                </a:solidFill>
+                <a:latin typeface="Onest"/>
+                <a:ea typeface="Onest"/>
+                <a:cs typeface="Onest"/>
+              </a:rPr>
+              <a:t>параметров</a:t>
+            </a:r>
+            <a:r>
+              <a:rPr sz="1600" b="0" dirty="0">
+                <a:solidFill>
+                  <a:srgbClr val="58606B"/>
+                </a:solidFill>
+                <a:latin typeface="Onest"/>
+                <a:ea typeface="Onest"/>
+                <a:cs typeface="Onest"/>
+              </a:rPr>
+              <a:t> </a:t>
+            </a:r>
+            <a:r>
+              <a:rPr sz="1600" b="0" dirty="0" err="1">
+                <a:solidFill>
+                  <a:srgbClr val="58606B"/>
+                </a:solidFill>
+                <a:latin typeface="Onest"/>
+                <a:ea typeface="Onest"/>
+                <a:cs typeface="Onest"/>
+              </a:rPr>
+              <a:t>алгоритма</a:t>
+            </a:r>
+            <a:r>
+              <a:rPr sz="1600" b="0" dirty="0">
+                <a:solidFill>
+                  <a:srgbClr val="58606B"/>
+                </a:solidFill>
+                <a:latin typeface="Onest"/>
+                <a:ea typeface="Onest"/>
+                <a:cs typeface="Onest"/>
+              </a:rPr>
+              <a:t> </a:t>
+            </a:r>
+            <a:r>
+              <a:rPr sz="1600" b="0" dirty="0" err="1">
+                <a:solidFill>
+                  <a:srgbClr val="58606B"/>
+                </a:solidFill>
+                <a:latin typeface="Onest"/>
+                <a:ea typeface="Onest"/>
+                <a:cs typeface="Onest"/>
+              </a:rPr>
+              <a:t>факторизации</a:t>
+            </a:r>
+            <a:r>
+              <a:rPr sz="1600" b="0" dirty="0">
+                <a:solidFill>
+                  <a:srgbClr val="58606B"/>
+                </a:solidFill>
+                <a:latin typeface="Onest"/>
+                <a:ea typeface="Onest"/>
+                <a:cs typeface="Onest"/>
+              </a:rPr>
+              <a:t> </a:t>
+            </a:r>
+            <a:r>
+              <a:rPr sz="1600" b="0" dirty="0" err="1">
+                <a:solidFill>
+                  <a:srgbClr val="58606B"/>
+                </a:solidFill>
+                <a:latin typeface="Onest"/>
+                <a:ea typeface="Onest"/>
+                <a:cs typeface="Onest"/>
+              </a:rPr>
+              <a:t>больших</a:t>
+            </a:r>
+            <a:r>
+              <a:rPr sz="1600" b="0" dirty="0">
+                <a:solidFill>
+                  <a:srgbClr val="58606B"/>
+                </a:solidFill>
+                <a:latin typeface="Onest"/>
+                <a:ea typeface="Onest"/>
+                <a:cs typeface="Onest"/>
+              </a:rPr>
+              <a:t> </a:t>
+            </a:r>
+            <a:r>
+              <a:rPr sz="1600" b="0" dirty="0" err="1">
+                <a:solidFill>
+                  <a:srgbClr val="58606B"/>
+                </a:solidFill>
+                <a:latin typeface="Onest"/>
+                <a:ea typeface="Onest"/>
+                <a:cs typeface="Onest"/>
+              </a:rPr>
+              <a:t>чисел</a:t>
+            </a:r>
+            <a:r>
+              <a:rPr sz="1600" b="0" dirty="0">
+                <a:solidFill>
+                  <a:srgbClr val="58606B"/>
+                </a:solidFill>
+                <a:latin typeface="Onest"/>
+                <a:ea typeface="Onest"/>
+                <a:cs typeface="Onest"/>
+              </a:rPr>
+              <a:t> с </a:t>
+            </a:r>
+            <a:r>
+              <a:rPr sz="1600" b="0" dirty="0" err="1">
+                <a:solidFill>
+                  <a:srgbClr val="58606B"/>
+                </a:solidFill>
+                <a:latin typeface="Onest"/>
+                <a:ea typeface="Onest"/>
+                <a:cs typeface="Onest"/>
+              </a:rPr>
+              <a:t>применением</a:t>
+            </a:r>
+            <a:endParaRPr sz="1600" b="0" dirty="0">
+              <a:solidFill>
+                <a:srgbClr val="58606B"/>
+              </a:solidFill>
+              <a:latin typeface="Onest"/>
+              <a:ea typeface="Onest"/>
+              <a:cs typeface="Onest"/>
+            </a:endParaRPr>
           </a:p>
           <a:p>
             <a:pPr algn="l">
@@ -30960,105 +34224,159 @@
               </a:defRPr>
             </a:pPr>
             <a:r>
-              <a:rPr sz="1800" b="0">
-                <a:solidFill>
-                  <a:srgbClr val="58606B"/>
-                </a:solidFill>
-                <a:latin typeface="Onest"/>
-                <a:ea typeface="Onest"/>
-                <a:cs typeface="Onest"/>
-              </a:rPr>
-              <a:t>эллиптических кривых на основе эвристических методов оптимизации</a:t>
-            </a:r>
+              <a:rPr sz="1600" b="0" dirty="0" err="1">
+                <a:solidFill>
+                  <a:srgbClr val="58606B"/>
+                </a:solidFill>
+                <a:latin typeface="Onest"/>
+                <a:ea typeface="Onest"/>
+                <a:cs typeface="Onest"/>
+              </a:rPr>
+              <a:t>эллиптических</a:t>
+            </a:r>
+            <a:r>
+              <a:rPr sz="1600" b="0" dirty="0">
+                <a:solidFill>
+                  <a:srgbClr val="58606B"/>
+                </a:solidFill>
+                <a:latin typeface="Onest"/>
+                <a:ea typeface="Onest"/>
+                <a:cs typeface="Onest"/>
+              </a:rPr>
+              <a:t> </a:t>
+            </a:r>
+            <a:r>
+              <a:rPr sz="1600" b="0" dirty="0" err="1">
+                <a:solidFill>
+                  <a:srgbClr val="58606B"/>
+                </a:solidFill>
+                <a:latin typeface="Onest"/>
+                <a:ea typeface="Onest"/>
+                <a:cs typeface="Onest"/>
+              </a:rPr>
+              <a:t>кривых</a:t>
+            </a:r>
+            <a:r>
+              <a:rPr sz="1600" b="0" dirty="0">
+                <a:solidFill>
+                  <a:srgbClr val="58606B"/>
+                </a:solidFill>
+                <a:latin typeface="Onest"/>
+                <a:ea typeface="Onest"/>
+                <a:cs typeface="Onest"/>
+              </a:rPr>
+              <a:t> </a:t>
+            </a:r>
+            <a:r>
+              <a:rPr sz="1600" b="0" dirty="0" err="1">
+                <a:solidFill>
+                  <a:srgbClr val="58606B"/>
+                </a:solidFill>
+                <a:latin typeface="Onest"/>
+                <a:ea typeface="Onest"/>
+                <a:cs typeface="Onest"/>
+              </a:rPr>
+              <a:t>на</a:t>
+            </a:r>
+            <a:r>
+              <a:rPr sz="1600" b="0" dirty="0">
+                <a:solidFill>
+                  <a:srgbClr val="58606B"/>
+                </a:solidFill>
+                <a:latin typeface="Onest"/>
+                <a:ea typeface="Onest"/>
+                <a:cs typeface="Onest"/>
+              </a:rPr>
+              <a:t> </a:t>
+            </a:r>
+            <a:r>
+              <a:rPr sz="1600" b="0" dirty="0" err="1">
+                <a:solidFill>
+                  <a:srgbClr val="58606B"/>
+                </a:solidFill>
+                <a:latin typeface="Onest"/>
+                <a:ea typeface="Onest"/>
+                <a:cs typeface="Onest"/>
+              </a:rPr>
+              <a:t>основе</a:t>
+            </a:r>
+            <a:r>
+              <a:rPr sz="1600" b="0" dirty="0">
+                <a:solidFill>
+                  <a:srgbClr val="58606B"/>
+                </a:solidFill>
+                <a:latin typeface="Onest"/>
+                <a:ea typeface="Onest"/>
+                <a:cs typeface="Onest"/>
+              </a:rPr>
+              <a:t> </a:t>
+            </a:r>
+            <a:r>
+              <a:rPr sz="1600" b="0" dirty="0" err="1">
+                <a:solidFill>
+                  <a:srgbClr val="58606B"/>
+                </a:solidFill>
+                <a:latin typeface="Onest"/>
+                <a:ea typeface="Onest"/>
+                <a:cs typeface="Onest"/>
+              </a:rPr>
+              <a:t>эвристических</a:t>
+            </a:r>
+            <a:r>
+              <a:rPr sz="1600" b="0" dirty="0">
+                <a:solidFill>
+                  <a:srgbClr val="58606B"/>
+                </a:solidFill>
+                <a:latin typeface="Onest"/>
+                <a:ea typeface="Onest"/>
+                <a:cs typeface="Onest"/>
+              </a:rPr>
+              <a:t> </a:t>
+            </a:r>
+            <a:r>
+              <a:rPr sz="1600" b="0" dirty="0" err="1">
+                <a:solidFill>
+                  <a:srgbClr val="58606B"/>
+                </a:solidFill>
+                <a:latin typeface="Onest"/>
+                <a:ea typeface="Onest"/>
+                <a:cs typeface="Onest"/>
+              </a:rPr>
+              <a:t>методов</a:t>
+            </a:r>
+            <a:r>
+              <a:rPr sz="1600" b="0" dirty="0">
+                <a:solidFill>
+                  <a:srgbClr val="58606B"/>
+                </a:solidFill>
+                <a:latin typeface="Onest"/>
+                <a:ea typeface="Onest"/>
+                <a:cs typeface="Onest"/>
+              </a:rPr>
+              <a:t> </a:t>
+            </a:r>
+            <a:r>
+              <a:rPr sz="1600" b="0" dirty="0" err="1">
+                <a:solidFill>
+                  <a:srgbClr val="58606B"/>
+                </a:solidFill>
+                <a:latin typeface="Onest"/>
+                <a:ea typeface="Onest"/>
+                <a:cs typeface="Onest"/>
+              </a:rPr>
+              <a:t>оптимизации</a:t>
+            </a:r>
+            <a:endParaRPr sz="1600" b="0" dirty="0">
+              <a:solidFill>
+                <a:srgbClr val="58606B"/>
+              </a:solidFill>
+              <a:latin typeface="Onest"/>
+              <a:ea typeface="Onest"/>
+              <a:cs typeface="Onest"/>
+            </a:endParaRPr>
           </a:p>
         </p:txBody>
       </p:sp>
-      <p:sp>
-        <p:nvSpPr>
-          <p:cNvPr id="36" name="Прямоугольник 35">
-            <a:extLst>
-              <a:ext uri="{FF2B5EF4-FFF2-40B4-BE49-F238E27FC236}">
-                <a16:creationId xmlns:a16="http://schemas.microsoft.com/office/drawing/2014/main" id="{712ADE5F-5C6C-4C42-8138-8B9DFE15C3C1}"/>
-              </a:ext>
-            </a:extLst>
-          </p:cNvPr>
-          <p:cNvSpPr>
-            <a:spLocks noGrp="1"/>
-          </p:cNvSpPr>
-          <p:nvPr/>
-        </p:nvSpPr>
-        <p:spPr>
-          <a:xfrm>
-            <a:off x="10763250" y="6419850"/>
-            <a:ext cx="914400" cy="266700"/>
-          </a:xfrm>
-          <a:prstGeom prst="rect">
-            <a:avLst/>
-          </a:prstGeom>
-          <a:solidFill>
-            <a:srgbClr val="000000">
-              <a:alpha val="0"/>
-            </a:srgbClr>
-          </a:solidFill>
-          <a:ln w="0">
-            <a:solidFill>
-              <a:srgbClr val="000000">
-                <a:alpha val="0"/>
-              </a:srgbClr>
-            </a:solidFill>
-            <a:prstDash val="solid"/>
-          </a:ln>
-        </p:spPr>
-        <p:txBody>
-          <a:bodyPr lIns="0" tIns="0" rIns="0" bIns="0" anchor="t"/>
-          <a:lstStyle/>
-          <a:p>
-            <a:pPr algn="r">
-              <a:defRPr sz="1800" b="1">
-                <a:solidFill>
-                  <a:srgbClr val="15181F"/>
-                </a:solidFill>
-                <a:latin typeface="Onest"/>
-                <a:ea typeface="Onest"/>
-                <a:cs typeface="Onest"/>
-              </a:defRPr>
-            </a:pPr>
-            <a:r>
-              <a:rPr sz="1800" b="1">
-                <a:solidFill>
-                  <a:srgbClr val="15181F"/>
-                </a:solidFill>
-                <a:latin typeface="Onest"/>
-                <a:ea typeface="Onest"/>
-                <a:cs typeface="Onest"/>
-              </a:rPr>
-              <a:t>8/19</a:t>
-            </a:r>
-          </a:p>
-        </p:txBody>
-      </p:sp>
-      <p:pic>
-        <p:nvPicPr>
-          <p:cNvPr id="37" name="Рисунок 36"/>
-          <p:cNvPicPr>
-            <a:picLocks noChangeAspect="1"/>
-          </p:cNvPicPr>
-          <p:nvPr/>
-        </p:nvPicPr>
-        <p:blipFill>
-          <a:blip r:embed="rId3"/>
-          <a:stretch/>
-        </p:blipFill>
-        <p:spPr>
-          <a:xfrm>
-            <a:off x="9572625" y="248984"/>
-            <a:ext cx="2095500" cy="787908"/>
-          </a:xfrm>
-          <a:prstGeom prst="rect">
-            <a:avLst/>
-          </a:prstGeom>
-        </p:spPr>
-      </p:pic>
     </p:spTree>
     <p:extLst>
       <p:ext uri="{BB962C8B-B14F-4D97-AF65-F5344CB8AC3E}">
@@ -32709,21 +36027,126 @@
       </p:sp>
       <p:sp>
         <p:nvSpPr>
-          <p:cNvPr id="33" name="Прямоугольник 32">
-            <a:extLst>
-              <a:ext uri="{FF2B5EF4-FFF2-40B4-BE49-F238E27FC236}">
-                <a16:creationId xmlns:a16="http://schemas.microsoft.com/office/drawing/2014/main" id="{A853C0F5-5CBA-4944-B9DA-5597EEC1DED3}"/>
-              </a:ext>
-            </a:extLst>
-          </p:cNvPr>
-          <p:cNvSpPr>
-            <a:spLocks noGrp="1"/>
-          </p:cNvSpPr>
-          <p:nvPr/>
-        </p:nvSpPr>
-        <p:spPr>
-          <a:xfrm>
-            <a:off x="514350" y="6248400"/>
+          <p:cNvPr id="34" name="Прямоугольник 33">
+            <a:extLst>
+              <a:ext uri="{FF2B5EF4-FFF2-40B4-BE49-F238E27FC236}">
+                <a16:creationId xmlns:a16="http://schemas.microsoft.com/office/drawing/2014/main" id="{F93BC176-D6AB-40BC-9E25-66A035C6DAC9}"/>
+              </a:ext>
+            </a:extLst>
+          </p:cNvPr>
+          <p:cNvSpPr>
+            <a:spLocks noGrp="1"/>
+          </p:cNvSpPr>
+          <p:nvPr/>
+        </p:nvSpPr>
+        <p:spPr>
+          <a:xfrm>
+            <a:off x="10763250" y="6419850"/>
+            <a:ext cx="914400" cy="266700"/>
+          </a:xfrm>
+          <a:prstGeom prst="rect">
+            <a:avLst/>
+          </a:prstGeom>
+          <a:solidFill>
+            <a:srgbClr val="000000">
+              <a:alpha val="0"/>
+            </a:srgbClr>
+          </a:solidFill>
+          <a:ln w="0">
+            <a:solidFill>
+              <a:srgbClr val="000000">
+                <a:alpha val="0"/>
+              </a:srgbClr>
+            </a:solidFill>
+            <a:prstDash val="solid"/>
+          </a:ln>
+        </p:spPr>
+        <p:txBody>
+          <a:bodyPr lIns="0" tIns="0" rIns="0" bIns="0" anchor="t"/>
+          <a:lstStyle/>
+          <a:p>
+            <a:pPr algn="r">
+              <a:defRPr sz="1800" b="1">
+                <a:solidFill>
+                  <a:srgbClr val="15181F"/>
+                </a:solidFill>
+                <a:latin typeface="Onest"/>
+                <a:ea typeface="Onest"/>
+                <a:cs typeface="Onest"/>
+              </a:defRPr>
+            </a:pPr>
+            <a:r>
+              <a:rPr sz="1800" b="1" dirty="0">
+                <a:solidFill>
+                  <a:srgbClr val="15181F"/>
+                </a:solidFill>
+                <a:latin typeface="Onest"/>
+                <a:ea typeface="Onest"/>
+                <a:cs typeface="Onest"/>
+              </a:rPr>
+              <a:t>9/1</a:t>
+            </a:r>
+            <a:r>
+              <a:rPr lang="ru-RU" sz="1800" b="1" dirty="0">
+                <a:solidFill>
+                  <a:srgbClr val="15181F"/>
+                </a:solidFill>
+                <a:latin typeface="Onest"/>
+                <a:ea typeface="Onest"/>
+                <a:cs typeface="Onest"/>
+              </a:rPr>
+              <a:t>8</a:t>
+            </a:r>
+            <a:endParaRPr sz="1800" b="1" dirty="0">
+              <a:solidFill>
+                <a:srgbClr val="15181F"/>
+              </a:solidFill>
+              <a:latin typeface="Onest"/>
+              <a:ea typeface="Onest"/>
+              <a:cs typeface="Onest"/>
+            </a:endParaRPr>
+          </a:p>
+        </p:txBody>
+      </p:sp>
+      <p:pic>
+        <p:nvPicPr>
+          <p:cNvPr id="35" name="Рисунок 34"/>
+          <p:cNvPicPr>
+            <a:picLocks noChangeAspect="1"/>
+          </p:cNvPicPr>
+          <p:nvPr/>
+        </p:nvPicPr>
+        <p:blipFill>
+          <a:blip r:embed="rId3"/>
+          <a:stretch/>
+        </p:blipFill>
+        <p:spPr>
+          <a:xfrm>
+            <a:off x="9572625" y="248984"/>
+            <a:ext cx="2095500" cy="787908"/>
+          </a:xfrm>
+          <a:prstGeom prst="rect">
+            <a:avLst/>
+          </a:prstGeom>
+        </p:spPr>
+      </p:pic>
+      <p:sp>
+        <p:nvSpPr>
+          <p:cNvPr id="36" name="Прямоугольник 35">
+            <a:extLst>
+              <a:ext uri="{FF2B5EF4-FFF2-40B4-BE49-F238E27FC236}">
+                <a16:creationId xmlns:a16="http://schemas.microsoft.com/office/drawing/2014/main" id="{EDF4C584-6231-47EB-B492-6D3760673EE3}"/>
+              </a:ext>
+            </a:extLst>
+          </p:cNvPr>
+          <p:cNvSpPr>
+            <a:spLocks noGrp="1"/>
+          </p:cNvSpPr>
+          <p:nvPr/>
+        </p:nvSpPr>
+        <p:spPr>
+          <a:xfrm>
+            <a:off x="514350" y="6304429"/>
             <a:ext cx="9810750" cy="457200"/>
           </a:xfrm>
           <a:prstGeom prst="rect">
@@ -32758,16 +36181,178 @@
               </a:defRPr>
             </a:pPr>
             <a:r>
-              <a:rPr sz="1800" b="0">
-                <a:solidFill>
-                  <a:srgbClr val="58606B"/>
-                </a:solidFill>
-                <a:latin typeface="Onest"/>
-                <a:ea typeface="Onest"/>
-                <a:cs typeface="Onest"/>
-              </a:rPr>
-              <a:t>Автоматизация подбора параметров алгоритма факторизации больших чисел с применением</a:t>
-            </a:r>
+              <a:rPr sz="1600" b="0" dirty="0" err="1">
+                <a:solidFill>
+                  <a:srgbClr val="58606B"/>
+                </a:solidFill>
+                <a:latin typeface="Onest"/>
+                <a:ea typeface="Onest"/>
+                <a:cs typeface="Onest"/>
+              </a:rPr>
+              <a:t>Автоматизация</a:t>
+            </a:r>
+            <a:r>
+              <a:rPr sz="1600" b="0" dirty="0">
+                <a:solidFill>
+                  <a:srgbClr val="58606B"/>
+                </a:solidFill>
+                <a:latin typeface="Onest"/>
+                <a:ea typeface="Onest"/>
+                <a:cs typeface="Onest"/>
+              </a:rPr>
+              <a:t> </a:t>
+            </a:r>
+            <a:r>
+              <a:rPr sz="1600" b="0" dirty="0" err="1">
+                <a:solidFill>
+                  <a:srgbClr val="58606B"/>
+                </a:solidFill>
+                <a:latin typeface="Onest"/>
+                <a:ea typeface="Onest"/>
+                <a:cs typeface="Onest"/>
+              </a:rPr>
+              <a:t>подбора</a:t>
+            </a:r>
+            <a:r>
+              <a:rPr sz="1600" b="0" dirty="0">
+                <a:solidFill>
+                  <a:srgbClr val="58606B"/>
+                </a:solidFill>
+                <a:latin typeface="Onest"/>
+                <a:ea typeface="Onest"/>
+                <a:cs typeface="Onest"/>
+              </a:rPr>
+              <a:t> </a:t>
+            </a:r>
+            <a:r>
+              <a:rPr sz="1600" b="0" dirty="0" err="1">
+                <a:solidFill>
+                  <a:srgbClr val="58606B"/>
+                </a:solidFill>
+                <a:latin typeface="Onest"/>
+                <a:ea typeface="Onest"/>
+                <a:cs typeface="Onest"/>
+              </a:rPr>
+              <a:t>параметров</a:t>
+            </a:r>
+            <a:r>
+              <a:rPr sz="1600" b="0" dirty="0">
+                <a:solidFill>
+                  <a:srgbClr val="58606B"/>
+                </a:solidFill>
+                <a:latin typeface="Onest"/>
+                <a:ea typeface="Onest"/>
+                <a:cs typeface="Onest"/>
+              </a:rPr>
+              <a:t> </a:t>
+            </a:r>
+            <a:r>
+              <a:rPr sz="1600" b="0" dirty="0" err="1">
+                <a:solidFill>
+                  <a:srgbClr val="58606B"/>
+                </a:solidFill>
+                <a:latin typeface="Onest"/>
+                <a:ea typeface="Onest"/>
+                <a:cs typeface="Onest"/>
+              </a:rPr>
+              <a:t>алгоритма</a:t>
+            </a:r>
+            <a:r>
+              <a:rPr sz="1600" b="0" dirty="0">
+                <a:solidFill>
+                  <a:srgbClr val="58606B"/>
+                </a:solidFill>
+                <a:latin typeface="Onest"/>
+                <a:ea typeface="Onest"/>
+                <a:cs typeface="Onest"/>
+              </a:rPr>
+              <a:t> </a:t>
+            </a:r>
+            <a:r>
+              <a:rPr sz="1600" b="0" dirty="0" err="1">
+                <a:solidFill>
+                  <a:srgbClr val="58606B"/>
+                </a:solidFill>
+                <a:latin typeface="Onest"/>
+                <a:ea typeface="Onest"/>
+                <a:cs typeface="Onest"/>
+              </a:rPr>
+              <a:t>факторизации</a:t>
+            </a:r>
+            <a:r>
+              <a:rPr sz="1600" b="0" dirty="0">
+                <a:solidFill>
+                  <a:srgbClr val="58606B"/>
+                </a:solidFill>
+                <a:latin typeface="Onest"/>
+                <a:ea typeface="Onest"/>
+                <a:cs typeface="Onest"/>
+              </a:rPr>
+              <a:t> </a:t>
+            </a:r>
+            <a:r>
+              <a:rPr sz="1600" b="0" dirty="0" err="1">
+                <a:solidFill>
+                  <a:srgbClr val="58606B"/>
+                </a:solidFill>
+                <a:latin typeface="Onest"/>
+                <a:ea typeface="Onest"/>
+                <a:cs typeface="Onest"/>
+              </a:rPr>
+              <a:t>больших</a:t>
+            </a:r>
+            <a:r>
+              <a:rPr sz="1600" b="0" dirty="0">
+                <a:solidFill>
+                  <a:srgbClr val="58606B"/>
+                </a:solidFill>
+                <a:latin typeface="Onest"/>
+                <a:ea typeface="Onest"/>
+                <a:cs typeface="Onest"/>
+              </a:rPr>
+              <a:t> </a:t>
+            </a:r>
+            <a:r>
+              <a:rPr sz="1600" b="0" dirty="0" err="1">
+                <a:solidFill>
+                  <a:srgbClr val="58606B"/>
+                </a:solidFill>
+                <a:latin typeface="Onest"/>
+                <a:ea typeface="Onest"/>
+                <a:cs typeface="Onest"/>
+              </a:rPr>
+              <a:t>чисел</a:t>
+            </a:r>
+            <a:r>
+              <a:rPr sz="1600" b="0" dirty="0">
+                <a:solidFill>
+                  <a:srgbClr val="58606B"/>
+                </a:solidFill>
+                <a:latin typeface="Onest"/>
+                <a:ea typeface="Onest"/>
+                <a:cs typeface="Onest"/>
+              </a:rPr>
+              <a:t> с </a:t>
+            </a:r>
+            <a:r>
+              <a:rPr sz="1600" b="0" dirty="0" err="1">
+                <a:solidFill>
+                  <a:srgbClr val="58606B"/>
+                </a:solidFill>
+                <a:latin typeface="Onest"/>
+                <a:ea typeface="Onest"/>
+                <a:cs typeface="Onest"/>
+              </a:rPr>
+              <a:t>применением</a:t>
+            </a:r>
+            <a:endParaRPr sz="1600" b="0" dirty="0">
+              <a:solidFill>
+                <a:srgbClr val="58606B"/>
+              </a:solidFill>
+              <a:latin typeface="Onest"/>
+              <a:ea typeface="Onest"/>
+              <a:cs typeface="Onest"/>
+            </a:endParaRPr>
           </a:p>
           <a:p>
             <a:pPr algn="l">
@@ -32781,105 +36366,159 @@
               </a:defRPr>
             </a:pPr>
             <a:r>
-              <a:rPr sz="1800" b="0">
-                <a:solidFill>
-                  <a:srgbClr val="58606B"/>
-                </a:solidFill>
-                <a:latin typeface="Onest"/>
-                <a:ea typeface="Onest"/>
-                <a:cs typeface="Onest"/>
-              </a:rPr>
-              <a:t>эллиптических кривых на основе эвристических методов оптимизации</a:t>
-            </a:r>
+              <a:rPr sz="1600" b="0" dirty="0" err="1">
+                <a:solidFill>
+                  <a:srgbClr val="58606B"/>
+                </a:solidFill>
+                <a:latin typeface="Onest"/>
+                <a:ea typeface="Onest"/>
+                <a:cs typeface="Onest"/>
+              </a:rPr>
+              <a:t>эллиптических</a:t>
+            </a:r>
+            <a:r>
+              <a:rPr sz="1600" b="0" dirty="0">
+                <a:solidFill>
+                  <a:srgbClr val="58606B"/>
+                </a:solidFill>
+                <a:latin typeface="Onest"/>
+                <a:ea typeface="Onest"/>
+                <a:cs typeface="Onest"/>
+              </a:rPr>
+              <a:t> </a:t>
+            </a:r>
+            <a:r>
+              <a:rPr sz="1600" b="0" dirty="0" err="1">
+                <a:solidFill>
+                  <a:srgbClr val="58606B"/>
+                </a:solidFill>
+                <a:latin typeface="Onest"/>
+                <a:ea typeface="Onest"/>
+                <a:cs typeface="Onest"/>
+              </a:rPr>
+              <a:t>кривых</a:t>
+            </a:r>
+            <a:r>
+              <a:rPr sz="1600" b="0" dirty="0">
+                <a:solidFill>
+                  <a:srgbClr val="58606B"/>
+                </a:solidFill>
+                <a:latin typeface="Onest"/>
+                <a:ea typeface="Onest"/>
+                <a:cs typeface="Onest"/>
+              </a:rPr>
+              <a:t> </a:t>
+            </a:r>
+            <a:r>
+              <a:rPr sz="1600" b="0" dirty="0" err="1">
+                <a:solidFill>
+                  <a:srgbClr val="58606B"/>
+                </a:solidFill>
+                <a:latin typeface="Onest"/>
+                <a:ea typeface="Onest"/>
+                <a:cs typeface="Onest"/>
+              </a:rPr>
+              <a:t>на</a:t>
+            </a:r>
+            <a:r>
+              <a:rPr sz="1600" b="0" dirty="0">
+                <a:solidFill>
+                  <a:srgbClr val="58606B"/>
+                </a:solidFill>
+                <a:latin typeface="Onest"/>
+                <a:ea typeface="Onest"/>
+                <a:cs typeface="Onest"/>
+              </a:rPr>
+              <a:t> </a:t>
+            </a:r>
+            <a:r>
+              <a:rPr sz="1600" b="0" dirty="0" err="1">
+                <a:solidFill>
+                  <a:srgbClr val="58606B"/>
+                </a:solidFill>
+                <a:latin typeface="Onest"/>
+                <a:ea typeface="Onest"/>
+                <a:cs typeface="Onest"/>
+              </a:rPr>
+              <a:t>основе</a:t>
+            </a:r>
+            <a:r>
+              <a:rPr sz="1600" b="0" dirty="0">
+                <a:solidFill>
+                  <a:srgbClr val="58606B"/>
+                </a:solidFill>
+                <a:latin typeface="Onest"/>
+                <a:ea typeface="Onest"/>
+                <a:cs typeface="Onest"/>
+              </a:rPr>
+              <a:t> </a:t>
+            </a:r>
+            <a:r>
+              <a:rPr sz="1600" b="0" dirty="0" err="1">
+                <a:solidFill>
+                  <a:srgbClr val="58606B"/>
+                </a:solidFill>
+                <a:latin typeface="Onest"/>
+                <a:ea typeface="Onest"/>
+                <a:cs typeface="Onest"/>
+              </a:rPr>
+              <a:t>эвристических</a:t>
+            </a:r>
+            <a:r>
+              <a:rPr sz="1600" b="0" dirty="0">
+                <a:solidFill>
+                  <a:srgbClr val="58606B"/>
+                </a:solidFill>
+                <a:latin typeface="Onest"/>
+                <a:ea typeface="Onest"/>
+                <a:cs typeface="Onest"/>
+              </a:rPr>
+              <a:t> </a:t>
+            </a:r>
+            <a:r>
+              <a:rPr sz="1600" b="0" dirty="0" err="1">
+                <a:solidFill>
+                  <a:srgbClr val="58606B"/>
+                </a:solidFill>
+                <a:latin typeface="Onest"/>
+                <a:ea typeface="Onest"/>
+                <a:cs typeface="Onest"/>
+              </a:rPr>
+              <a:t>методов</a:t>
+            </a:r>
+            <a:r>
+              <a:rPr sz="1600" b="0" dirty="0">
+                <a:solidFill>
+                  <a:srgbClr val="58606B"/>
+                </a:solidFill>
+                <a:latin typeface="Onest"/>
+                <a:ea typeface="Onest"/>
+                <a:cs typeface="Onest"/>
+              </a:rPr>
+              <a:t> </a:t>
+            </a:r>
+            <a:r>
+              <a:rPr sz="1600" b="0" dirty="0" err="1">
+                <a:solidFill>
+                  <a:srgbClr val="58606B"/>
+                </a:solidFill>
+                <a:latin typeface="Onest"/>
+                <a:ea typeface="Onest"/>
+                <a:cs typeface="Onest"/>
+              </a:rPr>
+              <a:t>оптимизации</a:t>
+            </a:r>
+            <a:endParaRPr sz="1600" b="0" dirty="0">
+              <a:solidFill>
+                <a:srgbClr val="58606B"/>
+              </a:solidFill>
+              <a:latin typeface="Onest"/>
+              <a:ea typeface="Onest"/>
+              <a:cs typeface="Onest"/>
+            </a:endParaRPr>
           </a:p>
         </p:txBody>
       </p:sp>
-      <p:sp>
-        <p:nvSpPr>
-          <p:cNvPr id="34" name="Прямоугольник 33">
-            <a:extLst>
-              <a:ext uri="{FF2B5EF4-FFF2-40B4-BE49-F238E27FC236}">
-                <a16:creationId xmlns:a16="http://schemas.microsoft.com/office/drawing/2014/main" id="{F93BC176-D6AB-40BC-9E25-66A035C6DAC9}"/>
-              </a:ext>
-            </a:extLst>
-          </p:cNvPr>
-          <p:cNvSpPr>
-            <a:spLocks noGrp="1"/>
-          </p:cNvSpPr>
-          <p:nvPr/>
-        </p:nvSpPr>
-        <p:spPr>
-          <a:xfrm>
-            <a:off x="10763250" y="6419850"/>
-            <a:ext cx="914400" cy="266700"/>
-          </a:xfrm>
-          <a:prstGeom prst="rect">
-            <a:avLst/>
-          </a:prstGeom>
-          <a:solidFill>
-            <a:srgbClr val="000000">
-              <a:alpha val="0"/>
-            </a:srgbClr>
-          </a:solidFill>
-          <a:ln w="0">
-            <a:solidFill>
-              <a:srgbClr val="000000">
-                <a:alpha val="0"/>
-              </a:srgbClr>
-            </a:solidFill>
-            <a:prstDash val="solid"/>
-          </a:ln>
-        </p:spPr>
-        <p:txBody>
-          <a:bodyPr lIns="0" tIns="0" rIns="0" bIns="0" anchor="t"/>
-          <a:lstStyle/>
-          <a:p>
-            <a:pPr algn="r">
-              <a:defRPr sz="1800" b="1">
-                <a:solidFill>
-                  <a:srgbClr val="15181F"/>
-                </a:solidFill>
-                <a:latin typeface="Onest"/>
-                <a:ea typeface="Onest"/>
-                <a:cs typeface="Onest"/>
-              </a:defRPr>
-            </a:pPr>
-            <a:r>
-              <a:rPr sz="1800" b="1">
-                <a:solidFill>
-                  <a:srgbClr val="15181F"/>
-                </a:solidFill>
-                <a:latin typeface="Onest"/>
-                <a:ea typeface="Onest"/>
-                <a:cs typeface="Onest"/>
-              </a:rPr>
-              <a:t>9/19</a:t>
-            </a:r>
-          </a:p>
-        </p:txBody>
-      </p:sp>
-      <p:pic>
-        <p:nvPicPr>
-          <p:cNvPr id="35" name="Рисунок 34"/>
-          <p:cNvPicPr>
-            <a:picLocks noChangeAspect="1"/>
-          </p:cNvPicPr>
-          <p:nvPr/>
-        </p:nvPicPr>
-        <p:blipFill>
-          <a:blip r:embed="rId3"/>
-          <a:stretch/>
-        </p:blipFill>
-        <p:spPr>
-          <a:xfrm>
-            <a:off x="9572625" y="248984"/>
-            <a:ext cx="2095500" cy="787908"/>
-          </a:xfrm>
-          <a:prstGeom prst="rect">
-            <a:avLst/>
-          </a:prstGeom>
-        </p:spPr>
-      </p:pic>
     </p:spTree>
     <p:extLst>
       <p:ext uri="{BB962C8B-B14F-4D97-AF65-F5344CB8AC3E}">

--- a/REPORTS/06_thesis_defense_presentation/Plekhanov_thesis_defense_ECM_parameter_optimization_polytech.pptx
+++ b/REPORTS/06_thesis_defense_presentation/Plekhanov_thesis_defense_ECM_parameter_optimization_polytech.pptx
@@ -24987,8 +24987,8 @@
           </a:prstGeom>
         </p:spPr>
       </p:pic>
-      <mc:AlternateContent xmlns:mc="http://schemas.openxmlformats.org/markup-compatibility/2006">
-        <mc:Choice xmlns:a14="http://schemas.microsoft.com/office/drawing/2010/main" Requires="a14">
+      <mc:AlternateContent xmlns:mc="http://schemas.openxmlformats.org/markup-compatibility/2006" xmlns:a14="http://schemas.microsoft.com/office/drawing/2010/main">
+        <mc:Choice Requires="a14">
           <p:sp>
             <p:nvSpPr>
               <p:cNvPr id="28" name="Прямоугольник 27">
@@ -25583,7 +25583,7 @@
             </p:txBody>
           </p:sp>
         </mc:Choice>
-        <mc:Fallback>
+        <mc:Fallback xmlns="">
           <p:sp>
             <p:nvSpPr>
               <p:cNvPr id="28" name="Прямоугольник 27">
@@ -26949,7 +26949,7 @@
         <p:spPr>
           <a:xfrm>
             <a:off x="6373166" y="1760114"/>
-            <a:ext cx="5304483" cy="2407006"/>
+            <a:ext cx="5304483" cy="2499056"/>
           </a:xfrm>
           <a:prstGeom prst="rect">
             <a:avLst/>
@@ -26988,8 +26988,8 @@
         </p:nvSpPr>
         <p:spPr>
           <a:xfrm>
-            <a:off x="6373167" y="1760114"/>
-            <a:ext cx="57150" cy="2407006"/>
+            <a:off x="6373166" y="1760113"/>
+            <a:ext cx="57151" cy="2499055"/>
           </a:xfrm>
           <a:prstGeom prst="rect">
             <a:avLst/>
@@ -27110,8 +27110,8 @@
         </p:nvSpPr>
         <p:spPr>
           <a:xfrm>
-            <a:off x="6373167" y="4329750"/>
-            <a:ext cx="5304482" cy="1413120"/>
+            <a:off x="6373167" y="4402320"/>
+            <a:ext cx="5304482" cy="1300125"/>
           </a:xfrm>
           <a:prstGeom prst="rect">
             <a:avLst/>
@@ -27150,8 +27150,8 @@
         </p:nvSpPr>
         <p:spPr>
           <a:xfrm>
-            <a:off x="6373167" y="4329750"/>
-            <a:ext cx="58366" cy="1413120"/>
+            <a:off x="6373166" y="4402320"/>
+            <a:ext cx="58367" cy="1300125"/>
           </a:xfrm>
           <a:prstGeom prst="rect">
             <a:avLst/>
@@ -27183,7 +27183,7 @@
         </p:nvSpPr>
         <p:spPr>
           <a:xfrm>
-            <a:off x="6718499" y="4410662"/>
+            <a:off x="6718499" y="4483232"/>
             <a:ext cx="4169518" cy="596265"/>
           </a:xfrm>
           <a:prstGeom prst="rect">
@@ -27420,8 +27420,8 @@
           </a:prstGeom>
         </p:spPr>
       </p:pic>
-      <mc:AlternateContent xmlns:mc="http://schemas.openxmlformats.org/markup-compatibility/2006" xmlns:a14="http://schemas.microsoft.com/office/drawing/2010/main">
-        <mc:Choice Requires="a14">
+      <mc:AlternateContent xmlns:mc="http://schemas.openxmlformats.org/markup-compatibility/2006">
+        <mc:Choice xmlns:a14="http://schemas.microsoft.com/office/drawing/2010/main" Requires="a14">
           <p:sp>
             <p:nvSpPr>
               <p:cNvPr id="36" name="Прямоугольник 35">
@@ -27438,7 +27438,7 @@
             </p:nvSpPr>
             <p:spPr>
               <a:xfrm>
-                <a:off x="6942187" y="4977031"/>
+                <a:off x="6942187" y="5049601"/>
                 <a:ext cx="3758401" cy="592022"/>
               </a:xfrm>
               <a:prstGeom prst="rect">
@@ -27553,7 +27553,23 @@
                                   <a:ea typeface="Cambria Math"/>
                                   <a:cs typeface="Cambria Math"/>
                                 </a:rPr>
-                                <m:t>𝑚𝑒𝑡h𝑜𝑑</m:t>
+                                <m:t>𝑚𝑒𝑡</m:t>
+                              </m:r>
+                              <m:r>
+                                <a:rPr lang="ru-RU" sz="1600" b="1" i="1">
+                                  <a:latin typeface="Cambria Math"/>
+                                  <a:ea typeface="Cambria Math"/>
+                                  <a:cs typeface="Cambria Math"/>
+                                </a:rPr>
+                                <m:t>h</m:t>
+                              </m:r>
+                              <m:r>
+                                <a:rPr lang="ru-RU" sz="1600" b="1" i="1">
+                                  <a:latin typeface="Cambria Math"/>
+                                  <a:ea typeface="Cambria Math"/>
+                                  <a:cs typeface="Cambria Math"/>
+                                </a:rPr>
+                                <m:t>𝑜𝑑</m:t>
                               </m:r>
                             </m:sub>
                           </m:sSub>
@@ -27632,7 +27648,7 @@
             </p:txBody>
           </p:sp>
         </mc:Choice>
-        <mc:Fallback xmlns="">
+        <mc:Fallback>
           <p:sp>
             <p:nvSpPr>
               <p:cNvPr id="36" name="Прямоугольник 35">
@@ -27649,7 +27665,7 @@
             </p:nvSpPr>
             <p:spPr>
               <a:xfrm>
-                <a:off x="6942187" y="4977031"/>
+                <a:off x="6942187" y="5049601"/>
                 <a:ext cx="3758401" cy="592022"/>
               </a:xfrm>
               <a:prstGeom prst="rect">
@@ -27943,7 +27959,7 @@
                     </m:oMath>
                   </m:oMathPara>
                 </a14:m>
-                <a:endParaRPr/>
+                <a:endParaRPr dirty="0"/>
               </a:p>
             </p:txBody>
           </p:sp>
@@ -28329,143 +28345,480 @@
           </a:fontRef>
         </p:style>
       </p:cxnSp>
-      <p:sp>
-        <p:nvSpPr>
-          <p:cNvPr id="68" name="Прямоугольник 67">
-            <a:extLst>
-              <a:ext uri="{FF2B5EF4-FFF2-40B4-BE49-F238E27FC236}">
-                <a16:creationId xmlns:a16="http://schemas.microsoft.com/office/drawing/2014/main" id="{E9E207A7-2A99-48BD-8624-59C7D4BB43B7}"/>
-              </a:ext>
-            </a:extLst>
-          </p:cNvPr>
-          <p:cNvSpPr>
-            <a:spLocks noGrp="1"/>
-          </p:cNvSpPr>
-          <p:nvPr/>
-        </p:nvSpPr>
-        <p:spPr>
-          <a:xfrm>
-            <a:off x="6565026" y="3200027"/>
-            <a:ext cx="3184069" cy="954107"/>
-          </a:xfrm>
-          <a:prstGeom prst="rect">
-            <a:avLst/>
-          </a:prstGeom>
-        </p:spPr>
-        <p:txBody>
-          <a:bodyPr wrap="square">
-            <a:spAutoFit/>
-          </a:bodyPr>
-          <a:lstStyle/>
-          <a:p>
-            <a:r>
-              <a:rPr sz="1400" b="1">
-                <a:latin typeface="Onest"/>
-                <a:ea typeface="Onest"/>
-                <a:cs typeface="Onest"/>
-              </a:rPr>
-              <a:t>где</a:t>
-            </a:r>
-          </a:p>
-          <a:p>
-            <a:pPr>
-              <a:buNone/>
-            </a:pPr>
-            <a:r>
-              <a:rPr sz="1400" b="1">
-                <a:solidFill>
-                  <a:srgbClr val="DA4927"/>
-                </a:solidFill>
-                <a:latin typeface="Onest"/>
-                <a:ea typeface="Onest"/>
-                <a:cs typeface="Onest"/>
-              </a:rPr>
-              <a:t>p̄ </a:t>
-            </a:r>
-            <a:r>
-              <a:rPr sz="1400" b="1">
-                <a:solidFill>
-                  <a:schemeClr val="tx1">
-                    <a:lumMod val="95000"/>
-                    <a:lumOff val="5000"/>
-                  </a:schemeClr>
-                </a:solidFill>
-                <a:latin typeface="Onest"/>
-                <a:ea typeface="Onest"/>
-                <a:cs typeface="Onest"/>
-              </a:rPr>
-              <a:t>— средняя доля успеха,</a:t>
-            </a:r>
-          </a:p>
-          <a:p>
-            <a:pPr>
-              <a:buNone/>
-            </a:pPr>
-            <a:r>
-              <a:rPr sz="1400" b="1">
-                <a:solidFill>
-                  <a:srgbClr val="37B34A"/>
-                </a:solidFill>
-                <a:latin typeface="Onest"/>
-                <a:ea typeface="Onest"/>
-                <a:cs typeface="Onest"/>
-              </a:rPr>
-              <a:t>t̄ </a:t>
-            </a:r>
-            <a:r>
-              <a:rPr sz="1400" b="1">
-                <a:solidFill>
-                  <a:schemeClr val="tx1">
-                    <a:lumMod val="95000"/>
-                    <a:lumOff val="5000"/>
-                  </a:schemeClr>
-                </a:solidFill>
-                <a:latin typeface="Onest"/>
-                <a:ea typeface="Onest"/>
-                <a:cs typeface="Onest"/>
-              </a:rPr>
-              <a:t>— среднее время,</a:t>
-            </a:r>
-            <a:br/>
-            <a:r>
-              <a:rPr sz="1400" b="1">
-                <a:solidFill>
-                  <a:srgbClr val="522878"/>
-                </a:solidFill>
-                <a:latin typeface="Onest"/>
-                <a:ea typeface="Onest"/>
-                <a:cs typeface="Onest"/>
-              </a:rPr>
-              <a:t>c̄</a:t>
-            </a:r>
-            <a:r>
-              <a:rPr sz="1400" b="1">
-                <a:solidFill>
-                  <a:srgbClr val="37B34A"/>
-                </a:solidFill>
-                <a:latin typeface="Onest"/>
-                <a:ea typeface="Onest"/>
-                <a:cs typeface="Onest"/>
-              </a:rPr>
-              <a:t> </a:t>
-            </a:r>
-            <a:r>
-              <a:rPr sz="1400" b="1">
-                <a:solidFill>
-                  <a:schemeClr val="tx1">
-                    <a:lumMod val="95000"/>
-                    <a:lumOff val="5000"/>
-                  </a:schemeClr>
-                </a:solidFill>
-                <a:latin typeface="Onest"/>
-                <a:ea typeface="Onest"/>
-                <a:cs typeface="Onest"/>
-              </a:rPr>
-              <a:t>— среднее число кривых.</a:t>
-            </a:r>
-          </a:p>
-        </p:txBody>
-      </p:sp>
+      <mc:AlternateContent xmlns:mc="http://schemas.openxmlformats.org/markup-compatibility/2006">
+        <mc:Choice xmlns:a14="http://schemas.microsoft.com/office/drawing/2010/main" Requires="a14">
+          <p:sp>
+            <p:nvSpPr>
+              <p:cNvPr id="68" name="Прямоугольник 67">
+                <a:extLst>
+                  <a:ext uri="{FF2B5EF4-FFF2-40B4-BE49-F238E27FC236}">
+                    <a16:creationId xmlns:a16="http://schemas.microsoft.com/office/drawing/2014/main" id="{E9E207A7-2A99-48BD-8624-59C7D4BB43B7}"/>
+                  </a:ext>
+                </a:extLst>
+              </p:cNvPr>
+              <p:cNvSpPr>
+                <a:spLocks noGrp="1"/>
+              </p:cNvSpPr>
+              <p:nvPr/>
+            </p:nvSpPr>
+            <p:spPr>
+              <a:xfrm>
+                <a:off x="6737641" y="3110013"/>
+                <a:ext cx="3184069" cy="1119730"/>
+              </a:xfrm>
+              <a:prstGeom prst="rect">
+                <a:avLst/>
+              </a:prstGeom>
+            </p:spPr>
+            <p:txBody>
+              <a:bodyPr wrap="square">
+                <a:spAutoFit/>
+              </a:bodyPr>
+              <a:lstStyle/>
+              <a:p>
+                <a:r>
+                  <a:rPr sz="1400" b="1" dirty="0" err="1">
+                    <a:latin typeface="Onest"/>
+                    <a:ea typeface="Onest"/>
+                    <a:cs typeface="Onest"/>
+                  </a:rPr>
+                  <a:t>где</a:t>
+                </a:r>
+                <a:endParaRPr sz="1400" b="1" dirty="0">
+                  <a:latin typeface="Onest"/>
+                  <a:ea typeface="Onest"/>
+                  <a:cs typeface="Onest"/>
+                </a:endParaRPr>
+              </a:p>
+              <a:p>
+                <a14:m>
+                  <m:oMath xmlns:m="http://schemas.openxmlformats.org/officeDocument/2006/math">
+                    <m:acc>
+                      <m:accPr>
+                        <m:chr m:val="̅"/>
+                        <m:ctrlPr>
+                          <a:rPr lang="ru-RU" b="1" i="1" smtClean="0">
+                            <a:solidFill>
+                              <a:srgbClr val="DA4927"/>
+                            </a:solidFill>
+                          </a:rPr>
+                        </m:ctrlPr>
+                      </m:accPr>
+                      <m:e>
+                        <m:r>
+                          <a:rPr lang="ru-RU" b="1" i="1">
+                            <a:solidFill>
+                              <a:srgbClr val="DA4927"/>
+                            </a:solidFill>
+                          </a:rPr>
+                          <m:t>𝒑</m:t>
+                        </m:r>
+                      </m:e>
+                    </m:acc>
+                  </m:oMath>
+                </a14:m>
+                <a:r>
+                  <a:rPr lang="en-US" b="1" dirty="0">
+                    <a:solidFill>
+                      <a:srgbClr val="DA4927"/>
+                    </a:solidFill>
+                  </a:rPr>
+                  <a:t> </a:t>
+                </a:r>
+                <a:r>
+                  <a:rPr sz="1400" b="1" dirty="0">
+                    <a:solidFill>
+                      <a:schemeClr val="tx1">
+                        <a:lumMod val="95000"/>
+                        <a:lumOff val="5000"/>
+                      </a:schemeClr>
+                    </a:solidFill>
+                    <a:latin typeface="Onest"/>
+                    <a:ea typeface="Onest"/>
+                    <a:cs typeface="Onest"/>
+                  </a:rPr>
+                  <a:t>— </a:t>
+                </a:r>
+                <a:r>
+                  <a:rPr sz="1400" b="1" dirty="0" err="1">
+                    <a:solidFill>
+                      <a:schemeClr val="tx1">
+                        <a:lumMod val="95000"/>
+                        <a:lumOff val="5000"/>
+                      </a:schemeClr>
+                    </a:solidFill>
+                    <a:latin typeface="Onest"/>
+                    <a:ea typeface="Onest"/>
+                    <a:cs typeface="Onest"/>
+                  </a:rPr>
+                  <a:t>средняя</a:t>
+                </a:r>
+                <a:r>
+                  <a:rPr sz="1400" b="1" dirty="0">
+                    <a:solidFill>
+                      <a:schemeClr val="tx1">
+                        <a:lumMod val="95000"/>
+                        <a:lumOff val="5000"/>
+                      </a:schemeClr>
+                    </a:solidFill>
+                    <a:latin typeface="Onest"/>
+                    <a:ea typeface="Onest"/>
+                    <a:cs typeface="Onest"/>
+                  </a:rPr>
+                  <a:t> </a:t>
+                </a:r>
+                <a:r>
+                  <a:rPr sz="1400" b="1" dirty="0" err="1">
+                    <a:solidFill>
+                      <a:schemeClr val="tx1">
+                        <a:lumMod val="95000"/>
+                        <a:lumOff val="5000"/>
+                      </a:schemeClr>
+                    </a:solidFill>
+                    <a:latin typeface="Onest"/>
+                    <a:ea typeface="Onest"/>
+                    <a:cs typeface="Onest"/>
+                  </a:rPr>
+                  <a:t>доля</a:t>
+                </a:r>
+                <a:r>
+                  <a:rPr sz="1400" b="1" dirty="0">
+                    <a:solidFill>
+                      <a:schemeClr val="tx1">
+                        <a:lumMod val="95000"/>
+                        <a:lumOff val="5000"/>
+                      </a:schemeClr>
+                    </a:solidFill>
+                    <a:latin typeface="Onest"/>
+                    <a:ea typeface="Onest"/>
+                    <a:cs typeface="Onest"/>
+                  </a:rPr>
+                  <a:t> </a:t>
+                </a:r>
+                <a:r>
+                  <a:rPr sz="1400" b="1" dirty="0" err="1">
+                    <a:solidFill>
+                      <a:schemeClr val="tx1">
+                        <a:lumMod val="95000"/>
+                        <a:lumOff val="5000"/>
+                      </a:schemeClr>
+                    </a:solidFill>
+                    <a:latin typeface="Onest"/>
+                    <a:ea typeface="Onest"/>
+                    <a:cs typeface="Onest"/>
+                  </a:rPr>
+                  <a:t>успеха</a:t>
+                </a:r>
+                <a:r>
+                  <a:rPr sz="1400" b="1" dirty="0">
+                    <a:solidFill>
+                      <a:schemeClr val="tx1">
+                        <a:lumMod val="95000"/>
+                        <a:lumOff val="5000"/>
+                      </a:schemeClr>
+                    </a:solidFill>
+                    <a:latin typeface="Onest"/>
+                    <a:ea typeface="Onest"/>
+                    <a:cs typeface="Onest"/>
+                  </a:rPr>
+                  <a:t>,</a:t>
+                </a:r>
+              </a:p>
+              <a:p>
+                <a14:m>
+                  <m:oMath xmlns:m="http://schemas.openxmlformats.org/officeDocument/2006/math">
+                    <m:acc>
+                      <m:accPr>
+                        <m:chr m:val="̅"/>
+                        <m:ctrlPr>
+                          <a:rPr lang="ru-RU" b="1" i="1" smtClean="0">
+                            <a:solidFill>
+                              <a:srgbClr val="37B34A"/>
+                            </a:solidFill>
+                          </a:rPr>
+                        </m:ctrlPr>
+                      </m:accPr>
+                      <m:e>
+                        <m:r>
+                          <a:rPr lang="en-US" b="1" i="1">
+                            <a:solidFill>
+                              <a:srgbClr val="37B34A"/>
+                            </a:solidFill>
+                          </a:rPr>
+                          <m:t>𝒕</m:t>
+                        </m:r>
+                      </m:e>
+                    </m:acc>
+                  </m:oMath>
+                </a14:m>
+                <a:r>
+                  <a:rPr lang="en-US" sz="1400" b="1" dirty="0">
+                    <a:solidFill>
+                      <a:srgbClr val="37B34A"/>
+                    </a:solidFill>
+                    <a:latin typeface="Onest"/>
+                    <a:ea typeface="Onest"/>
+                    <a:cs typeface="Onest"/>
+                  </a:rPr>
+                  <a:t> </a:t>
+                </a:r>
+                <a:r>
+                  <a:rPr sz="1400" b="1" dirty="0">
+                    <a:solidFill>
+                      <a:schemeClr val="tx1">
+                        <a:lumMod val="95000"/>
+                        <a:lumOff val="5000"/>
+                      </a:schemeClr>
+                    </a:solidFill>
+                    <a:latin typeface="Onest"/>
+                    <a:ea typeface="Onest"/>
+                    <a:cs typeface="Onest"/>
+                  </a:rPr>
+                  <a:t>— </a:t>
+                </a:r>
+                <a:r>
+                  <a:rPr sz="1400" b="1" dirty="0" err="1">
+                    <a:solidFill>
+                      <a:schemeClr val="tx1">
+                        <a:lumMod val="95000"/>
+                        <a:lumOff val="5000"/>
+                      </a:schemeClr>
+                    </a:solidFill>
+                    <a:latin typeface="Onest"/>
+                    <a:ea typeface="Onest"/>
+                    <a:cs typeface="Onest"/>
+                  </a:rPr>
+                  <a:t>среднее</a:t>
+                </a:r>
+                <a:r>
+                  <a:rPr sz="1400" b="1" dirty="0">
+                    <a:solidFill>
+                      <a:schemeClr val="tx1">
+                        <a:lumMod val="95000"/>
+                        <a:lumOff val="5000"/>
+                      </a:schemeClr>
+                    </a:solidFill>
+                    <a:latin typeface="Onest"/>
+                    <a:ea typeface="Onest"/>
+                    <a:cs typeface="Onest"/>
+                  </a:rPr>
+                  <a:t> </a:t>
+                </a:r>
+                <a:r>
+                  <a:rPr sz="1400" b="1" dirty="0" err="1">
+                    <a:solidFill>
+                      <a:schemeClr val="tx1">
+                        <a:lumMod val="95000"/>
+                        <a:lumOff val="5000"/>
+                      </a:schemeClr>
+                    </a:solidFill>
+                    <a:latin typeface="Onest"/>
+                    <a:ea typeface="Onest"/>
+                    <a:cs typeface="Onest"/>
+                  </a:rPr>
+                  <a:t>время</a:t>
+                </a:r>
+                <a:r>
+                  <a:rPr sz="1400" b="1" dirty="0">
+                    <a:solidFill>
+                      <a:schemeClr val="tx1">
+                        <a:lumMod val="95000"/>
+                        <a:lumOff val="5000"/>
+                      </a:schemeClr>
+                    </a:solidFill>
+                    <a:latin typeface="Onest"/>
+                    <a:ea typeface="Onest"/>
+                    <a:cs typeface="Onest"/>
+                  </a:rPr>
+                  <a:t>,</a:t>
+                </a:r>
+                <a:br>
+                  <a:rPr dirty="0"/>
+                </a:br>
+                <a14:m>
+                  <m:oMath xmlns:m="http://schemas.openxmlformats.org/officeDocument/2006/math">
+                    <m:acc>
+                      <m:accPr>
+                        <m:chr m:val="̅"/>
+                        <m:ctrlPr>
+                          <a:rPr lang="ar-AE" b="1" i="1" smtClean="0">
+                            <a:solidFill>
+                              <a:srgbClr val="522878"/>
+                            </a:solidFill>
+                          </a:rPr>
+                        </m:ctrlPr>
+                      </m:accPr>
+                      <m:e>
+                        <m:r>
+                          <a:rPr lang="ar-AE" b="1" i="1">
+                            <a:solidFill>
+                              <a:srgbClr val="522878"/>
+                            </a:solidFill>
+                          </a:rPr>
+                          <m:t>𝒄</m:t>
+                        </m:r>
+                      </m:e>
+                    </m:acc>
+                  </m:oMath>
+                </a14:m>
+                <a:r>
+                  <a:rPr lang="ar-AE" sz="1400" b="1" dirty="0">
+                    <a:solidFill>
+                      <a:srgbClr val="522878"/>
+                    </a:solidFill>
+                    <a:latin typeface="Onest"/>
+                    <a:ea typeface="Onest"/>
+                    <a:cs typeface="Onest"/>
+                  </a:rPr>
+                  <a:t> </a:t>
+                </a:r>
+                <a:r>
+                  <a:rPr sz="1400" b="1" dirty="0">
+                    <a:solidFill>
+                      <a:schemeClr val="tx1">
+                        <a:lumMod val="95000"/>
+                        <a:lumOff val="5000"/>
+                      </a:schemeClr>
+                    </a:solidFill>
+                    <a:latin typeface="Onest"/>
+                    <a:ea typeface="Onest"/>
+                    <a:cs typeface="Onest"/>
+                  </a:rPr>
+                  <a:t>— </a:t>
+                </a:r>
+                <a:r>
+                  <a:rPr sz="1400" b="1" dirty="0" err="1">
+                    <a:solidFill>
+                      <a:schemeClr val="tx1">
+                        <a:lumMod val="95000"/>
+                        <a:lumOff val="5000"/>
+                      </a:schemeClr>
+                    </a:solidFill>
+                    <a:latin typeface="Onest"/>
+                    <a:ea typeface="Onest"/>
+                    <a:cs typeface="Onest"/>
+                  </a:rPr>
+                  <a:t>среднее</a:t>
+                </a:r>
+                <a:r>
+                  <a:rPr sz="1400" b="1" dirty="0">
+                    <a:solidFill>
+                      <a:schemeClr val="tx1">
+                        <a:lumMod val="95000"/>
+                        <a:lumOff val="5000"/>
+                      </a:schemeClr>
+                    </a:solidFill>
+                    <a:latin typeface="Onest"/>
+                    <a:ea typeface="Onest"/>
+                    <a:cs typeface="Onest"/>
+                  </a:rPr>
+                  <a:t> </a:t>
+                </a:r>
+                <a:r>
+                  <a:rPr sz="1400" b="1" dirty="0" err="1">
+                    <a:solidFill>
+                      <a:schemeClr val="tx1">
+                        <a:lumMod val="95000"/>
+                        <a:lumOff val="5000"/>
+                      </a:schemeClr>
+                    </a:solidFill>
+                    <a:latin typeface="Onest"/>
+                    <a:ea typeface="Onest"/>
+                    <a:cs typeface="Onest"/>
+                  </a:rPr>
+                  <a:t>число</a:t>
+                </a:r>
+                <a:r>
+                  <a:rPr sz="1400" b="1" dirty="0">
+                    <a:solidFill>
+                      <a:schemeClr val="tx1">
+                        <a:lumMod val="95000"/>
+                        <a:lumOff val="5000"/>
+                      </a:schemeClr>
+                    </a:solidFill>
+                    <a:latin typeface="Onest"/>
+                    <a:ea typeface="Onest"/>
+                    <a:cs typeface="Onest"/>
+                  </a:rPr>
+                  <a:t> </a:t>
+                </a:r>
+                <a:r>
+                  <a:rPr sz="1400" b="1" dirty="0" err="1">
+                    <a:solidFill>
+                      <a:schemeClr val="tx1">
+                        <a:lumMod val="95000"/>
+                        <a:lumOff val="5000"/>
+                      </a:schemeClr>
+                    </a:solidFill>
+                    <a:latin typeface="Onest"/>
+                    <a:ea typeface="Onest"/>
+                    <a:cs typeface="Onest"/>
+                  </a:rPr>
+                  <a:t>кривых</a:t>
+                </a:r>
+                <a:r>
+                  <a:rPr sz="1400" b="1" dirty="0">
+                    <a:solidFill>
+                      <a:schemeClr val="tx1">
+                        <a:lumMod val="95000"/>
+                        <a:lumOff val="5000"/>
+                      </a:schemeClr>
+                    </a:solidFill>
+                    <a:latin typeface="Onest"/>
+                    <a:ea typeface="Onest"/>
+                    <a:cs typeface="Onest"/>
+                  </a:rPr>
+                  <a:t>.</a:t>
+                </a:r>
+              </a:p>
+            </p:txBody>
+          </p:sp>
+        </mc:Choice>
+        <mc:Fallback>
+          <p:sp>
+            <p:nvSpPr>
+              <p:cNvPr id="68" name="Прямоугольник 67">
+                <a:extLst>
+                  <a:ext uri="{FF2B5EF4-FFF2-40B4-BE49-F238E27FC236}">
+                    <a16:creationId xmlns:a16="http://schemas.microsoft.com/office/drawing/2014/main" id="{E9E207A7-2A99-48BD-8624-59C7D4BB43B7}"/>
+                  </a:ext>
+                </a:extLst>
+              </p:cNvPr>
+              <p:cNvSpPr>
+                <a:spLocks noGrp="1" noRot="1" noChangeAspect="1" noMove="1" noResize="1" noEditPoints="1" noAdjustHandles="1" noChangeArrowheads="1" noChangeShapeType="1" noTextEdit="1"/>
+              </p:cNvSpPr>
+              <p:nvPr/>
+            </p:nvSpPr>
+            <p:spPr>
+              <a:xfrm>
+                <a:off x="6737641" y="3110013"/>
+                <a:ext cx="3184069" cy="1119730"/>
+              </a:xfrm>
+              <a:prstGeom prst="rect">
+                <a:avLst/>
+              </a:prstGeom>
+              <a:blipFill>
+                <a:blip r:embed="rId6"/>
+                <a:stretch>
+                  <a:fillRect l="-574" t="-1087" b="-5435"/>
+                </a:stretch>
+              </a:blipFill>
+            </p:spPr>
+            <p:txBody>
+              <a:bodyPr/>
+              <a:lstStyle/>
+              <a:p>
+                <a:r>
+                  <a:rPr lang="ru-RU">
+                    <a:noFill/>
+                  </a:rPr>
+                  <a:t> </a:t>
+                </a:r>
+              </a:p>
+            </p:txBody>
+          </p:sp>
+        </mc:Fallback>
+      </mc:AlternateContent>
       <p:sp>
         <p:nvSpPr>
           <p:cNvPr id="48" name="Прямоугольник 47">

--- a/REPORTS/06_thesis_defense_presentation/Plekhanov_thesis_defense_ECM_parameter_optimization_polytech.pptx
+++ b/REPORTS/06_thesis_defense_presentation/Plekhanov_thesis_defense_ECM_parameter_optimization_polytech.pptx
@@ -346,24 +346,7 @@
           <a:bodyPr/>
           <a:lstStyle/>
           <a:p>
-            <a:r>
-              <a:t>Добрый день, уважаемый председатель и уважаемые члены государственной экзаменационной комиссии.</a:t>
-            </a:r>
-            <a:br/>
-            <a:br/>
-            <a:r>
-              <a:t>Вашему вниманию представляется выпускная квалификационная работа на тему: «Автоматизация подбора параметров алгоритма факторизации больших чисел с применением эллиптических кривых на основе эвристических методов оптимизации».</a:t>
-            </a:r>
-            <a:br/>
-            <a:br/>
-            <a:r>
-              <a:t>Руководитель кандидат физико-математических наук Пак Вадим Геннадьевич </a:t>
-            </a:r>
-            <a:br/>
-            <a:br/>
-            <a:r>
-              <a:t>Работа посвящена автоматическому выбору параметров метода ECM, то есть метода факторизации на эллиптических кривых. Основной акцент сделан не на разработке новой реализации ECM, а на построении воспроизводимой системы, которая подбирает параметры существующей реализации GMP-ECM и проверяет выигрыш относительно справочных параметров.</a:t>
-            </a:r>
+            <a:endParaRPr dirty="0"/>
           </a:p>
         </p:txBody>
       </p:sp>
@@ -438,19 +421,7 @@
           <a:bodyPr/>
           <a:lstStyle/>
           <a:p>
-            <a:r>
-              <a:t>Эксперименты проводились на составных числах вида N равно p умножить на q. Целевой простой делитель p имел 20 десятичных цифр, а кофактор q - 30 десятичных цифр. Для каждого эксперимента формировались обучающая и контрольная выборки по 80 чисел.</a:t>
-            </a:r>
-            <a:br/>
-            <a:br/>
-            <a:r>
-              <a:t>В качестве эталона использовались справочные параметры GMP-ECM для 20-значного делителя: B1 равно 11000 и B2 равно 1_900_000. Ожидаемое число кривых для такого режима составляет около 74.</a:t>
-            </a:r>
-            <a:br/>
-            <a:br/>
-            <a:r>
-              <a:t>Методика включала два этапа: сначала широкие границы поиска для локализации перспективной области, затем уточненные границы с ограничением отношения B2 к B1. Основные расчеты были выполнены на ресурсах суперкомпьютерного центра СПбПУ с использованием SLURM системы.</a:t>
-            </a:r>
+            <a:endParaRPr dirty="0"/>
           </a:p>
         </p:txBody>
       </p:sp>
@@ -525,19 +496,7 @@
           <a:bodyPr/>
           <a:lstStyle/>
           <a:p>
-            <a:r>
-              <a:t>На первом, разведочном этапе все пять методов нашли параметры, которые улучшили справочные значения GMP-ECM.</a:t>
-            </a:r>
-            <a:br/>
-            <a:br/>
-            <a:r>
-              <a:t>Снижение валидационной метрики составило от 20 до 23 процентов. Среднее время уменьшилось на 18-19 процентов. Среднее число кривых сократилось на 35-52 процента.</a:t>
-            </a:r>
-            <a:br/>
-            <a:br/>
-            <a:r>
-              <a:t>Главный результат этого этапа - локализация эффективной области. Все методы пришли к значениям B1 порядка 21-34 тысяч и B2 порядка 2-3,3 миллиона. Это выше справочных B1 и B2, но такая настройка уменьшает как среднее число необходимых кривых, так и время факторизации.</a:t>
-            </a:r>
+            <a:endParaRPr dirty="0"/>
           </a:p>
         </p:txBody>
       </p:sp>
@@ -612,19 +571,7 @@
           <a:bodyPr/>
           <a:lstStyle/>
           <a:p>
-            <a:r>
-              <a:t>На втором этапе использовались уточненные границы, включая ограничение B2/B1 не более 1000. Этот этап является основным для итоговой интерпретации.</a:t>
-            </a:r>
-            <a:br/>
-            <a:br/>
-            <a:r>
-              <a:t>Все методы снова улучшили эталон по валидационной метрике и среднему времени. Наиболее сильный общий результат показал генетический алгоритм: при при найденных параметрах B1 и B2 снижение валидационной метрики составило 25 процентов, а снижение среднего времени - 21 процент.</a:t>
-            </a:r>
-            <a:br/>
-            <a:br/>
-            <a:r>
-              <a:t>Роевой алгоритм PSO показал максимальное сокращение числа кривых: 62 процента. Дифференциальная эволюция дала устойчивый компромисс: снижение метрики на 22 процента, времени на 17 процента и числа кривых на 51 процента.</a:t>
-            </a:r>
+            <a:endParaRPr dirty="0"/>
           </a:p>
         </p:txBody>
       </p:sp>
@@ -699,19 +646,7 @@
           <a:bodyPr/>
           <a:lstStyle/>
           <a:p>
-            <a:r>
-              <a:t>Сравнение методов показывает, что один универсально лучший метод для всех практических целей выделять некорректно. Разные методы дают разные полезные профили.</a:t>
-            </a:r>
-            <a:br/>
-            <a:br/>
-            <a:r>
-              <a:t>GA оказался наиболее убедительным по суммарному качеству и времени. PSO особенно интересен там, где критично уменьшить число кривых. DE показал ровный компромисс без провалов. BO был полезен на широком этапе поиска, а RS, несмотря на простоту, также улучшил эталон и может служить быстрым ориентиром.</a:t>
-            </a:r>
-            <a:br/>
-            <a:br/>
-            <a:r>
-              <a:t>Главный практический вывод состоит в том, что таблицы GMP-ECM целесообразно рассматривать как надежную стартовую точку, но не как окончательный ответ для всех вычислительных условий.</a:t>
-            </a:r>
+            <a:endParaRPr dirty="0"/>
           </a:p>
         </p:txBody>
       </p:sp>
@@ -786,19 +721,7 @@
           <a:bodyPr/>
           <a:lstStyle/>
           <a:p>
-            <a:r>
-              <a:t>Научная новизна работы заключается в том, что выбор параметров B1 и B2 был формализован как эмпирическая стохастическая задача оптимизации «черного ящика» с ограничениями.</a:t>
-            </a:r>
-            <a:br/>
-            <a:br/>
-            <a:r>
-              <a:t>Кроме того, в едином воспроизводимом конвеере были сопоставлены пять эвристических методов, а итоговые параметры проверялись на независимой контрольной выборке.</a:t>
-            </a:r>
-            <a:br/>
-            <a:br/>
-            <a:r>
-              <a:t>Теоретическая значимость состоит в рассмотрении выбора параметров ECM как задачи автоматической конфигурации алгоритма. Такой подход явно учитывает компромисс между вероятностью успеха одной кривой, стоимостью обработки кривой и средним числом кривых до нахождения делителя.</a:t>
-            </a:r>
+            <a:endParaRPr dirty="0"/>
           </a:p>
         </p:txBody>
       </p:sp>
@@ -873,19 +796,7 @@
           <a:bodyPr/>
           <a:lstStyle/>
           <a:p>
-            <a:r>
-              <a:t>Практическая значимость состоит в разработке программной системы, которая выполняет полный цикл вычислительного эксперимента: генерацию данных, запуск GMP-ECM, расчет метрики, оптимизацию, валидацию и анализ.</a:t>
-            </a:r>
-            <a:br/>
-            <a:br/>
-            <a:r>
-              <a:t>Система может использоваться для локальной настройки ECM под конкретную платформу, версию GMP-ECM, класс чисел, вычислительный бюджет и выбранную метрику качества.</a:t>
-            </a:r>
-            <a:br/>
-            <a:br/>
-            <a:r>
-              <a:t>Основные рекомендации следующие: использовать таблицы GMP-ECM как стартовый эталон, выполнять настройку в два этапа, обязательно проверять параметры на независимой контрольной выборке и сохранять seed, датасеты, версии инструментов и результаты запусков.</a:t>
-            </a:r>
+            <a:endParaRPr dirty="0"/>
           </a:p>
         </p:txBody>
       </p:sp>
@@ -960,19 +871,7 @@
           <a:bodyPr/>
           <a:lstStyle/>
           <a:p>
-            <a:r>
-              <a:t>Апробация результатов выполнена через вычислительные эксперименты и воспроизводимую программную проверку.</a:t>
-            </a:r>
-            <a:br/>
-            <a:br/>
-            <a:r>
-              <a:t>Основные эксперименты были проведены с использованием ресурсов суперкомпьютерного центра Санкт-Петербургского политехнического университета Петра Великого. Для пакетного запуска использовалась среда SLURM.</a:t>
-            </a:r>
-            <a:br/>
-            <a:br/>
-            <a:r>
-              <a:t>С программной стороны апробация выражается в том, что разработанный конвейр выполняет полный цикл от генерации данных до анализа результатов, а для запусков сохраняются параметры, seed, результаты оптимизации и валидации, таблицы и графики.</a:t>
-            </a:r>
+            <a:endParaRPr dirty="0"/>
           </a:p>
         </p:txBody>
       </p:sp>
@@ -1047,65 +946,7 @@
           <a:bodyPr/>
           <a:lstStyle/>
           <a:p>
-            <a:r>
-              <a:rPr sz="1200" b="0"/>
-              <a:t>Цель работы достигнута: разработана и исследована система автоматического подбора параметров ECM с применением эвристических методов оптимизации.</a:t>
-            </a:r>
-          </a:p>
-          <a:p>
-            <a:br/>
-            <a:r>
-              <a:rPr sz="1200" b="0"/>
-              <a:t>Были решены поставленные задачи: проведен обзор ECM, рассмотрено влияние B1 и B2, сформулирована black-box постановка, реализован программный pipeline, проведено сравнение пяти методов и выполнена независимая валидация.</a:t>
-            </a:r>
-          </a:p>
-          <a:p>
-            <a:br/>
-            <a:r>
-              <a:rPr sz="1200" b="0"/>
-              <a:t>Экспериментальная проверка на числах с 20-значным простым делителем показала, что автоматический подбор способен улучшить справочные параметры GMP-ECM: до 25 процента по валидационной метрике, до 21 процента по среднему времени и до 62 процента по среднему числу кривых.</a:t>
-            </a:r>
-          </a:p>
-          <a:p>
-            <a:br/>
-            <a:br/>
-            <a:br/>
-            <a:r>
-              <a:rPr sz="1200" b="0"/>
-              <a:t>Основное ограничение текущих результатов состоит в том, что итоговый вывод относится к 20-значным делителям и конкретной вычислительной среде.</a:t>
-            </a:r>
-          </a:p>
-          <a:p>
-            <a:br/>
-            <a:r>
-              <a:rPr sz="1200" b="0"/>
-              <a:t>Дальнейшие исследования должны включать эксперименты для более крупных делителей, проверку специальных классов чисел, оценку переносимости параметров между платформами и версиями GMP-ECM, увеличение числа seed и контрольных наборов.</a:t>
-            </a:r>
-          </a:p>
-          <a:p>
-            <a:br/>
-            <a:r>
-              <a:rPr sz="1200" b="0"/>
-              <a:t>Также перспективны оценка эффективности на один процессорный час, адаптивная остановка оптимизации и более гибкое распределение вычислительного бюджета.</a:t>
-            </a:r>
-          </a:p>
-          <a:p>
-            <a:br/>
-            <a:r>
-              <a:rPr sz="1200" b="0"/>
-              <a:t>Основной результат работы состоит в том, что для исследованного класса задач автоматический подбор параметров ECM позволил улучшить справочные параметры GMP-ECM по валидационной метрике, времени и числу кривых, а также был реализован воспроизводимый программный инструмент для таких экспериментов.</a:t>
-            </a:r>
-          </a:p>
-          <a:p>
-            <a:br/>
-            <a:r>
-              <a:rPr sz="1200" b="0"/>
-              <a:t>На этом доклад завершен. Спасибо за внимание. Я готов ответить на ваши вопросы.</a:t>
-            </a:r>
-          </a:p>
-          <a:p>
-            <a:br/>
-            <a:endParaRPr/>
+            <a:endParaRPr dirty="0"/>
           </a:p>
         </p:txBody>
       </p:sp>
@@ -1180,19 +1021,7 @@
           <a:bodyPr/>
           <a:lstStyle/>
           <a:p>
-            <a:r>
-              <a:t>Факторизация больших целых чисел является важной задачей вычислительной теории чисел и прикладной криптографии. В частности, стойкость RSA основана на предположении, что по произведению больших простых чисел трудно восстановить сами множители.</a:t>
-            </a:r>
-            <a:br/>
-            <a:br/>
-            <a:r>
-              <a:t>На практике факторизация редко выполняется одним методом. Обычно используется цепочка алгоритмов: специализированные методы ищут малые и средние делители, а методы общего назначения, например квадратичное решето (QS, Quadratic Sieve) или общее решето числового поля (GNFS, General Number Field Sieve), применяются для более крупных кофакторов.</a:t>
-            </a:r>
-            <a:br/>
-            <a:br/>
-            <a:r>
-              <a:t>Метод эллиптических кривых (ECM, Elliptic Curve Method) занимает в этой цепочке важное место, потому что эффективен при поиске сравнительно небольшого простого делителя в большом составном числе. Поэтому массовые ECM-запуски встречаются в предварительной факторизации, кофакторизации и распределённых вычислениях. Даже умеренное снижение времени или числа кривых в таких сценариях даёт заметную экономию ресурсов.</a:t>
-            </a:r>
+            <a:endParaRPr dirty="0"/>
           </a:p>
         </p:txBody>
       </p:sp>
@@ -1267,14 +1096,7 @@
           <a:bodyPr/>
           <a:lstStyle/>
           <a:p>
-            <a:r>
-              <a:t>Цель работы состоит в разработке и исследовании программной системы, которая автоматически подбирает параметры ECM с использованием эвристических методов оптимизации и снижает эмпирическую оценку ожидаемой стоимости нахождения делителя по сравнению со справочными параметрами GMP-ECM.</a:t>
-            </a:r>
-            <a:br/>
-            <a:br/>
-            <a:r>
-              <a:t>Для достижения цели были решены следующие задачи: проведен обзор алгоритмов факторизации и роли ECM, рассмотрено влияние параметров B1 и B2, подбор параметров формализован как стохастическая оптимизация «черного ящика», реализован программный pipeline, проведены вычислительные эксперименты и выполнено сравнение найденных параметров со справочными значениями GMP-ECM.</a:t>
-            </a:r>
+            <a:endParaRPr dirty="0"/>
           </a:p>
         </p:txBody>
       </p:sp>
@@ -1349,19 +1171,7 @@
           <a:bodyPr/>
           <a:lstStyle/>
           <a:p>
-            <a:r>
-              <a:t>Объектом исследования является алгоритм факторизации целых чисел методом эллиптических кривых и его реализация в GMP-ECM.</a:t>
-            </a:r>
-            <a:br/>
-            <a:br/>
-            <a:r>
-              <a:t>Предметом исследования является автоматизированный выбор параметров B1 и B2 с применением эвристических методов оптимизации.</a:t>
-            </a:r>
-            <a:br/>
-            <a:br/>
-            <a:r>
-              <a:t>Исследовательская гипотеза состоит в следующем: если класс чисел, вычислительная среда и метрика качества заранее известны, то параметры B1 и B2 можно подобрать автоматически лучше справочных значений. При этом таблицы GMP-ECM рассматриваются как сильные базовые значения, а не как слабая точка сравнения.</a:t>
-            </a:r>
+            <a:endParaRPr dirty="0"/>
           </a:p>
         </p:txBody>
       </p:sp>
@@ -1436,19 +1246,7 @@
           <a:bodyPr/>
           <a:lstStyle/>
           <a:p>
-            <a:r>
-              <a:t>Метод ECM, или метод эллиптических кривых Ленстры, является вероятностным методом факторизации. Его идея состоит в использовании групп точек случайных эллиптических кривых. Успех одной кривой связан с гладкостью порядка группы по неизвестному простому делителю p.</a:t>
-            </a:r>
-            <a:br/>
-            <a:br/>
-            <a:r>
-              <a:t>Ключевыми параметрами практического ECM являются B1 и B2. B1 задает границу первой стадии алгоритма, а B2 - границу второй стадии. Увеличение этих параметров повышает вероятность успеха одной кривой, но одновременно увеличивает стоимость ее обработки.</a:t>
-            </a:r>
-            <a:br/>
-            <a:br/>
-            <a:r>
-              <a:t>Отсюда возникает основной компромисс: параметры должны обеспечивать не только высокую вероятность успеха, но и минимальную ожидаемую стоимость нахождения делителя.</a:t>
-            </a:r>
+            <a:endParaRPr dirty="0"/>
           </a:p>
         </p:txBody>
       </p:sp>
@@ -1523,19 +1321,7 @@
           <a:bodyPr/>
           <a:lstStyle/>
           <a:p>
-            <a:r>
-              <a:t>В работе рассматривается набор составных чисел. Управляемыми параметрами являются B1 и B2. Поскольку эти значения меняются на порядки, оптимизация выполняется в логарифмическом пространстве: кандидат задается как пара log10 от B1 и B2.</a:t>
-            </a:r>
-            <a:br/>
-            <a:br/>
-            <a:r>
-              <a:t>На параметры накладываются ограничения: допустимые диапазоны B1 и B2, условие B1 меньше либо равно B2, а также ограничение на отношение B2 к B1. Это исключает некорректные и практически нецелесообразные конфигурации.</a:t>
-            </a:r>
-            <a:br/>
-            <a:br/>
-            <a:r>
-              <a:t>Целевая функция не имеет простой аналитической формулы. Чтобы оценить одну пару параметров, необходимо запустить GMP-ECM на наборе чисел и измерить долю успеха, время и число кривых. Поэтому задача является дорогой стохастической оптимизацией «черного ящика».</a:t>
-            </a:r>
+            <a:endParaRPr dirty="0"/>
           </a:p>
         </p:txBody>
       </p:sp>
@@ -1622,22 +1408,7 @@
               </a:spcAft>
               <a:buNone/>
             </a:pPr>
-            <a:r>
-              <a:t>Для сравнения параметров используется композитная метрика score. Она учитывает штраф за недостаточную долю успешных факторизаций, среднее время выполнения и среднее число кривых. Метрика минимизируется.</a:t>
-            </a:r>
-            <a:br/>
-            <a:br/>
-            <a:r>
-              <a:t>Приоритет такой: сначала важно сохранить высокую долю успеха, затем снизить время, а затем число кривых. Это важно, потому что слишком малые параметры могут сделать отдельные запуски быстрыми, но ненадежными.</a:t>
-            </a:r>
-            <a:br/>
-            <a:br/>
-            <a:r>
-              <a:t>Для проверки используется разделение на тренировочные и контрольные наборы. Оптимизатор подбирает параметры на тренировочном наборе, а итоговая оценка выполняется на независимом контрольном наборе. Это снижает риск переоценки результата из-за стохастичности ECM и самих оптимизаторов.</a:t>
-            </a:r>
-            <a:br/>
-            <a:br/>
-            <a:endParaRPr/>
+            <a:endParaRPr dirty="0"/>
           </a:p>
         </p:txBody>
       </p:sp>
@@ -1712,19 +1483,7 @@
           <a:bodyPr/>
           <a:lstStyle/>
           <a:p>
-            <a:r>
-              <a:t>В работе использованы пять методов оптимизации.</a:t>
-            </a:r>
-            <a:br/>
-            <a:br/>
-            <a:r>
-              <a:t>Случайный поиск (Random Search, RS) служит базовым ориентиром. Дифференциальная эволюция (Differential Evolution, DE) представляет популяционный направленный поиск. Генетический алгоритм (Genetic Algorithm, GA) использует селекцию, скрещивание, мутацию и элитизм. Роевой алгоритм, или метод роя частиц (Particle Swarm Optimization, PSO), моделирует движение частиц с учетом личного и коллективного опыта. Байесовская оптимизация (Bayesian Optimization, BO) строит суррогатную модель дорогой целевой функции.</a:t>
-            </a:r>
-            <a:br/>
-            <a:br/>
-            <a:r>
-              <a:t>Такой набор позволяет сравнить разные стратегии поиска: простую случайную, эволюционную, роевую и суррогатную.</a:t>
-            </a:r>
+            <a:endParaRPr dirty="0"/>
           </a:p>
         </p:txBody>
       </p:sp>
@@ -1799,24 +1558,7 @@
           <a:bodyPr/>
           <a:lstStyle/>
           <a:p>
-            <a:r>
-              <a:t>В своей работе я опирался на Python 3, который стал основой моего исследовательского конвейра. Для реализации метода ECM я привлекал внешнюю библиотеку GMP-ECM, а численные расчёты и оптимизацию выполнял с помощью NumPy и SciPy. Визуализацию результатов я строил через Matplotlib, за удобный интерфейс командной строки отвечала библиотека Click. Весь код я контролировал в Git, а все ресурсоёмкие запуски выносил в HPC-среду под управлением SLURM.</a:t>
-            </a:r>
-            <a:br/>
-            <a:br/>
-            <a:r>
-              <a:t>Практическим результатом работы является программный комплекс на Python, организованный как пакет ecm_optimizer.</a:t>
-            </a:r>
-            <a:br/>
-            <a:br/>
-            <a:r>
-              <a:t>Система покрывает полный цикл эксперимента: генерацию датасетов, запуск GMP-ECM, расчет fitness, работу оптимизаторов, независимую валидацию и анализ результатов. Для управления реализованы CLI-команды generate, optimize, validate, run-plan и analyze.</a:t>
-            </a:r>
-            <a:br/>
-            <a:br/>
-            <a:r>
-              <a:t>Архитектурно важно, что оптимизаторы не вызывают GMP-ECM напрямую. Они передают кандидатов в единый fitness evaluator, который по одинаковым правилам выполняет запуск и учет результатов. Это делает сравнение методов сопоставимым.</a:t>
-            </a:r>
+            <a:endParaRPr dirty="0"/>
           </a:p>
         </p:txBody>
       </p:sp>
@@ -2366,7 +2108,7 @@
         </p:nvSpPr>
         <p:spPr>
           <a:xfrm>
-            <a:off x="1047749" y="4969796"/>
+            <a:off x="1047749" y="4809376"/>
             <a:ext cx="3429000" cy="66675"/>
           </a:xfrm>
           <a:prstGeom prst="rect">
@@ -2399,7 +2141,7 @@
         </p:nvSpPr>
         <p:spPr>
           <a:xfrm>
-            <a:off x="4476749" y="4970098"/>
+            <a:off x="4476749" y="4809678"/>
             <a:ext cx="2047875" cy="66675"/>
           </a:xfrm>
           <a:prstGeom prst="rect">
@@ -2432,7 +2174,7 @@
         </p:nvSpPr>
         <p:spPr>
           <a:xfrm>
-            <a:off x="6524624" y="4969796"/>
+            <a:off x="6524624" y="4809376"/>
             <a:ext cx="1381125" cy="66675"/>
           </a:xfrm>
           <a:prstGeom prst="rect">
@@ -2465,7 +2207,7 @@
         </p:nvSpPr>
         <p:spPr>
           <a:xfrm>
-            <a:off x="1047750" y="5504448"/>
+            <a:off x="1047750" y="5392154"/>
             <a:ext cx="7810500" cy="247650"/>
           </a:xfrm>
           <a:prstGeom prst="rect">
@@ -2530,7 +2272,7 @@
         </p:nvSpPr>
         <p:spPr>
           <a:xfrm>
-            <a:off x="1047750" y="5809248"/>
+            <a:off x="1047750" y="5696954"/>
             <a:ext cx="7810500" cy="247650"/>
           </a:xfrm>
           <a:prstGeom prst="rect">
@@ -2595,7 +2337,7 @@
         </p:nvSpPr>
         <p:spPr>
           <a:xfrm>
-            <a:off x="1047750" y="6114048"/>
+            <a:off x="1047750" y="6001754"/>
             <a:ext cx="8572500" cy="266700"/>
           </a:xfrm>
           <a:prstGeom prst="rect">
@@ -3086,7 +2828,7 @@
               </a:defRPr>
             </a:pPr>
             <a:r>
-              <a:rPr sz="1800" b="0">
+              <a:rPr lang="ru-RU" dirty="0">
                 <a:solidFill>
                   <a:srgbClr val="58606B"/>
                 </a:solidFill>
@@ -3094,8 +2836,93 @@
                 <a:ea typeface="Onest"/>
                 <a:cs typeface="Onest"/>
               </a:rPr>
-              <a:t>целевой простой делитель p</a:t>
-            </a:r>
+              <a:t>Ц</a:t>
+            </a:r>
+            <a:r>
+              <a:rPr sz="1800" b="0" dirty="0" err="1">
+                <a:solidFill>
+                  <a:srgbClr val="58606B"/>
+                </a:solidFill>
+                <a:latin typeface="Onest"/>
+                <a:ea typeface="Onest"/>
+                <a:cs typeface="Onest"/>
+              </a:rPr>
+              <a:t>елевой</a:t>
+            </a:r>
+            <a:r>
+              <a:rPr sz="1800" b="0" dirty="0">
+                <a:solidFill>
+                  <a:srgbClr val="58606B"/>
+                </a:solidFill>
+                <a:latin typeface="Onest"/>
+                <a:ea typeface="Onest"/>
+                <a:cs typeface="Onest"/>
+              </a:rPr>
+              <a:t> </a:t>
+            </a:r>
+            <a:r>
+              <a:rPr sz="1800" b="0" dirty="0" err="1">
+                <a:solidFill>
+                  <a:srgbClr val="58606B"/>
+                </a:solidFill>
+                <a:latin typeface="Onest"/>
+                <a:ea typeface="Onest"/>
+                <a:cs typeface="Onest"/>
+              </a:rPr>
+              <a:t>простой</a:t>
+            </a:r>
+            <a:r>
+              <a:rPr sz="1800" b="0" dirty="0">
+                <a:solidFill>
+                  <a:srgbClr val="58606B"/>
+                </a:solidFill>
+                <a:latin typeface="Onest"/>
+                <a:ea typeface="Onest"/>
+                <a:cs typeface="Onest"/>
+              </a:rPr>
+              <a:t> </a:t>
+            </a:r>
+            <a:r>
+              <a:rPr sz="1800" b="0" dirty="0" err="1">
+                <a:solidFill>
+                  <a:srgbClr val="58606B"/>
+                </a:solidFill>
+                <a:latin typeface="Onest"/>
+                <a:ea typeface="Onest"/>
+                <a:cs typeface="Onest"/>
+              </a:rPr>
+              <a:t>делитель</a:t>
+            </a:r>
+            <a:r>
+              <a:rPr sz="1800" b="0" dirty="0">
+                <a:solidFill>
+                  <a:srgbClr val="58606B"/>
+                </a:solidFill>
+                <a:latin typeface="Onest"/>
+                <a:ea typeface="Onest"/>
+                <a:cs typeface="Onest"/>
+              </a:rPr>
+              <a:t> p</a:t>
+            </a:r>
+            <a:r>
+              <a:rPr lang="ru-RU" sz="1800" b="0" dirty="0">
+                <a:solidFill>
+                  <a:srgbClr val="58606B"/>
+                </a:solidFill>
+                <a:latin typeface="Onest"/>
+                <a:ea typeface="Onest"/>
+                <a:cs typeface="Onest"/>
+              </a:rPr>
+              <a:t>.</a:t>
+            </a:r>
+            <a:endParaRPr sz="1800" b="0" dirty="0">
+              <a:solidFill>
+                <a:srgbClr val="58606B"/>
+              </a:solidFill>
+              <a:latin typeface="Onest"/>
+              <a:ea typeface="Onest"/>
+              <a:cs typeface="Onest"/>
+            </a:endParaRPr>
           </a:p>
         </p:txBody>
       </p:sp>
@@ -3214,7 +3041,7 @@
         <p:spPr>
           <a:xfrm>
             <a:off x="3685171" y="2478134"/>
-            <a:ext cx="1619250" cy="419100"/>
+            <a:ext cx="1619250" cy="674538"/>
           </a:xfrm>
           <a:prstGeom prst="rect">
             <a:avLst/>
@@ -3249,7 +3076,7 @@
               </a:defRPr>
             </a:pPr>
             <a:r>
-              <a:rPr sz="1800" b="0">
+              <a:rPr lang="ru-RU" dirty="0">
                 <a:solidFill>
                   <a:srgbClr val="58606B"/>
                 </a:solidFill>
@@ -3257,8 +3084,49 @@
                 <a:ea typeface="Onest"/>
                 <a:cs typeface="Onest"/>
               </a:rPr>
-              <a:t>кофактор q</a:t>
-            </a:r>
+              <a:t>К</a:t>
+            </a:r>
+            <a:r>
+              <a:rPr sz="1800" b="0" dirty="0" err="1">
+                <a:solidFill>
+                  <a:srgbClr val="58606B"/>
+                </a:solidFill>
+                <a:latin typeface="Onest"/>
+                <a:ea typeface="Onest"/>
+                <a:cs typeface="Onest"/>
+              </a:rPr>
+              <a:t>офактор</a:t>
+            </a:r>
+            <a:r>
+              <a:rPr sz="1800" b="0" dirty="0">
+                <a:solidFill>
+                  <a:srgbClr val="58606B"/>
+                </a:solidFill>
+                <a:latin typeface="Onest"/>
+                <a:ea typeface="Onest"/>
+                <a:cs typeface="Onest"/>
+              </a:rPr>
+              <a:t> q</a:t>
+            </a:r>
+            <a:r>
+              <a:rPr lang="ru-RU" sz="1800" b="0" dirty="0">
+                <a:solidFill>
+                  <a:srgbClr val="58606B"/>
+                </a:solidFill>
+                <a:latin typeface="Onest"/>
+                <a:ea typeface="Onest"/>
+                <a:cs typeface="Onest"/>
+              </a:rPr>
+              <a:t>.</a:t>
+            </a:r>
+            <a:endParaRPr sz="1800" b="0" dirty="0">
+              <a:solidFill>
+                <a:srgbClr val="58606B"/>
+              </a:solidFill>
+              <a:latin typeface="Onest"/>
+              <a:ea typeface="Onest"/>
+              <a:cs typeface="Onest"/>
+            </a:endParaRPr>
           </a:p>
         </p:txBody>
       </p:sp>
@@ -3376,8 +3244,8 @@
         </p:nvSpPr>
         <p:spPr>
           <a:xfrm>
-            <a:off x="6297205" y="2478133"/>
-            <a:ext cx="1619250" cy="419100"/>
+            <a:off x="6297205" y="2478132"/>
+            <a:ext cx="1619250" cy="675503"/>
           </a:xfrm>
           <a:prstGeom prst="rect">
             <a:avLst/>
@@ -3412,7 +3280,7 @@
               </a:defRPr>
             </a:pPr>
             <a:r>
-              <a:rPr sz="1800" b="0">
+              <a:rPr lang="en-US" sz="1800" b="0" dirty="0">
                 <a:solidFill>
                   <a:srgbClr val="58606B"/>
                 </a:solidFill>
@@ -3420,8 +3288,81 @@
                 <a:ea typeface="Onest"/>
                 <a:cs typeface="Onest"/>
               </a:rPr>
-              <a:t>train и control</a:t>
-            </a:r>
+              <a:t>T</a:t>
+            </a:r>
+            <a:r>
+              <a:rPr sz="1800" b="0" dirty="0">
+                <a:solidFill>
+                  <a:srgbClr val="58606B"/>
+                </a:solidFill>
+                <a:latin typeface="Onest"/>
+                <a:ea typeface="Onest"/>
+                <a:cs typeface="Onest"/>
+              </a:rPr>
+              <a:t>rain и </a:t>
+            </a:r>
+            <a:r>
+              <a:rPr lang="en-US" sz="1800" b="0" dirty="0">
+                <a:solidFill>
+                  <a:srgbClr val="58606B"/>
+                </a:solidFill>
+                <a:latin typeface="Onest"/>
+                <a:ea typeface="Onest"/>
+                <a:cs typeface="Onest"/>
+              </a:rPr>
+              <a:t>c</a:t>
+            </a:r>
+            <a:r>
+              <a:rPr sz="1800" b="0" dirty="0">
+                <a:solidFill>
+                  <a:srgbClr val="58606B"/>
+                </a:solidFill>
+                <a:latin typeface="Onest"/>
+                <a:ea typeface="Onest"/>
+                <a:cs typeface="Onest"/>
+              </a:rPr>
+              <a:t>ontrol</a:t>
+            </a:r>
+            <a:endParaRPr lang="ru-RU" sz="1800" b="0" dirty="0">
+              <a:solidFill>
+                <a:srgbClr val="58606B"/>
+              </a:solidFill>
+              <a:latin typeface="Onest"/>
+              <a:ea typeface="Onest"/>
+              <a:cs typeface="Onest"/>
+            </a:endParaRPr>
+          </a:p>
+          <a:p>
+            <a:pPr algn="l">
+              <a:buNone/>
+              <a:defRPr sz="1800" b="0">
+                <a:solidFill>
+                  <a:srgbClr val="58606B"/>
+                </a:solidFill>
+                <a:latin typeface="Onest"/>
+                <a:ea typeface="Onest"/>
+                <a:cs typeface="Onest"/>
+              </a:defRPr>
+            </a:pPr>
+            <a:r>
+              <a:rPr lang="ru-RU" dirty="0">
+                <a:solidFill>
+                  <a:srgbClr val="58606B"/>
+                </a:solidFill>
+                <a:latin typeface="Onest"/>
+                <a:ea typeface="Onest"/>
+                <a:cs typeface="Onest"/>
+              </a:rPr>
+              <a:t>наборы.</a:t>
+            </a:r>
+            <a:endParaRPr sz="1800" b="0" dirty="0">
+              <a:solidFill>
+                <a:srgbClr val="58606B"/>
+              </a:solidFill>
+              <a:latin typeface="Onest"/>
+              <a:ea typeface="Onest"/>
+              <a:cs typeface="Onest"/>
+            </a:endParaRPr>
           </a:p>
         </p:txBody>
       </p:sp>
@@ -3540,7 +3481,7 @@
         <p:spPr>
           <a:xfrm>
             <a:off x="8574003" y="2478134"/>
-            <a:ext cx="2000250" cy="419100"/>
+            <a:ext cx="2000250" cy="674538"/>
           </a:xfrm>
           <a:prstGeom prst="rect">
             <a:avLst/>
@@ -3575,7 +3516,7 @@
               </a:defRPr>
             </a:pPr>
             <a:r>
-              <a:rPr sz="1800" b="0">
+              <a:rPr lang="ru-RU" dirty="0">
                 <a:solidFill>
                   <a:srgbClr val="58606B"/>
                 </a:solidFill>
@@ -3583,8 +3524,49 @@
                 <a:ea typeface="Onest"/>
                 <a:cs typeface="Onest"/>
               </a:rPr>
-              <a:t>эталон GMP-ECM B1/B2</a:t>
-            </a:r>
+              <a:t>Э</a:t>
+            </a:r>
+            <a:r>
+              <a:rPr sz="1800" b="0" dirty="0" err="1">
+                <a:solidFill>
+                  <a:srgbClr val="58606B"/>
+                </a:solidFill>
+                <a:latin typeface="Onest"/>
+                <a:ea typeface="Onest"/>
+                <a:cs typeface="Onest"/>
+              </a:rPr>
+              <a:t>талон</a:t>
+            </a:r>
+            <a:r>
+              <a:rPr sz="1800" b="0" dirty="0">
+                <a:solidFill>
+                  <a:srgbClr val="58606B"/>
+                </a:solidFill>
+                <a:latin typeface="Onest"/>
+                <a:ea typeface="Onest"/>
+                <a:cs typeface="Onest"/>
+              </a:rPr>
+              <a:t> GMP-ECM B1/B2</a:t>
+            </a:r>
+            <a:r>
+              <a:rPr lang="ru-RU" sz="1800" b="0" dirty="0">
+                <a:solidFill>
+                  <a:srgbClr val="58606B"/>
+                </a:solidFill>
+                <a:latin typeface="Onest"/>
+                <a:ea typeface="Onest"/>
+                <a:cs typeface="Onest"/>
+              </a:rPr>
+              <a:t>.</a:t>
+            </a:r>
+            <a:endParaRPr sz="1800" b="0" dirty="0">
+              <a:solidFill>
+                <a:srgbClr val="58606B"/>
+              </a:solidFill>
+              <a:latin typeface="Onest"/>
+              <a:ea typeface="Onest"/>
+              <a:cs typeface="Onest"/>
+            </a:endParaRPr>
           </a:p>
         </p:txBody>
       </p:sp>
@@ -4658,16 +4640,156 @@
               </a:defRPr>
             </a:pPr>
             <a:r>
-              <a:rPr sz="2325" b="1">
-                <a:solidFill>
-                  <a:srgbClr val="15181F"/>
-                </a:solidFill>
-                <a:latin typeface="Onest"/>
-                <a:ea typeface="Onest"/>
-                <a:cs typeface="Onest"/>
-              </a:rPr>
-              <a:t>Первый этап нашел область параметров лучше справочной</a:t>
-            </a:r>
+              <a:rPr sz="2325" b="1" dirty="0" err="1">
+                <a:solidFill>
+                  <a:srgbClr val="15181F"/>
+                </a:solidFill>
+                <a:latin typeface="Onest"/>
+                <a:ea typeface="Onest"/>
+                <a:cs typeface="Onest"/>
+              </a:rPr>
+              <a:t>Первый</a:t>
+            </a:r>
+            <a:r>
+              <a:rPr sz="2325" b="1" dirty="0">
+                <a:solidFill>
+                  <a:srgbClr val="15181F"/>
+                </a:solidFill>
+                <a:latin typeface="Onest"/>
+                <a:ea typeface="Onest"/>
+                <a:cs typeface="Onest"/>
+              </a:rPr>
+              <a:t> </a:t>
+            </a:r>
+            <a:r>
+              <a:rPr sz="2325" b="1" dirty="0" err="1">
+                <a:solidFill>
+                  <a:srgbClr val="15181F"/>
+                </a:solidFill>
+                <a:latin typeface="Onest"/>
+                <a:ea typeface="Onest"/>
+                <a:cs typeface="Onest"/>
+              </a:rPr>
+              <a:t>этап</a:t>
+            </a:r>
+            <a:r>
+              <a:rPr sz="2325" b="1" dirty="0">
+                <a:solidFill>
+                  <a:srgbClr val="15181F"/>
+                </a:solidFill>
+                <a:latin typeface="Onest"/>
+                <a:ea typeface="Onest"/>
+                <a:cs typeface="Onest"/>
+              </a:rPr>
+              <a:t> </a:t>
+            </a:r>
+            <a:r>
+              <a:rPr sz="2325" b="1" dirty="0" err="1">
+                <a:solidFill>
+                  <a:srgbClr val="15181F"/>
+                </a:solidFill>
+                <a:latin typeface="Onest"/>
+                <a:ea typeface="Onest"/>
+                <a:cs typeface="Onest"/>
+              </a:rPr>
+              <a:t>нашел</a:t>
+            </a:r>
+            <a:r>
+              <a:rPr sz="2325" b="1" dirty="0">
+                <a:solidFill>
+                  <a:srgbClr val="15181F"/>
+                </a:solidFill>
+                <a:latin typeface="Onest"/>
+                <a:ea typeface="Onest"/>
+                <a:cs typeface="Onest"/>
+              </a:rPr>
+              <a:t> </a:t>
+            </a:r>
+            <a:r>
+              <a:rPr sz="2325" b="1" dirty="0" err="1">
+                <a:solidFill>
+                  <a:srgbClr val="15181F"/>
+                </a:solidFill>
+                <a:latin typeface="Onest"/>
+                <a:ea typeface="Onest"/>
+                <a:cs typeface="Onest"/>
+              </a:rPr>
+              <a:t>область</a:t>
+            </a:r>
+            <a:r>
+              <a:rPr sz="2325" b="1" dirty="0">
+                <a:solidFill>
+                  <a:srgbClr val="15181F"/>
+                </a:solidFill>
+                <a:latin typeface="Onest"/>
+                <a:ea typeface="Onest"/>
+                <a:cs typeface="Onest"/>
+              </a:rPr>
+              <a:t> </a:t>
+            </a:r>
+            <a:r>
+              <a:rPr sz="2325" b="1" dirty="0" err="1">
+                <a:solidFill>
+                  <a:srgbClr val="15181F"/>
+                </a:solidFill>
+                <a:latin typeface="Onest"/>
+                <a:ea typeface="Onest"/>
+                <a:cs typeface="Onest"/>
+              </a:rPr>
+              <a:t>параметров</a:t>
+            </a:r>
+            <a:r>
+              <a:rPr sz="2325" b="1" dirty="0">
+                <a:solidFill>
+                  <a:srgbClr val="15181F"/>
+                </a:solidFill>
+                <a:latin typeface="Onest"/>
+                <a:ea typeface="Onest"/>
+                <a:cs typeface="Onest"/>
+              </a:rPr>
+              <a:t> </a:t>
+            </a:r>
+            <a:r>
+              <a:rPr sz="2325" b="1" dirty="0" err="1">
+                <a:solidFill>
+                  <a:srgbClr val="15181F"/>
+                </a:solidFill>
+                <a:latin typeface="Onest"/>
+                <a:ea typeface="Onest"/>
+                <a:cs typeface="Onest"/>
+              </a:rPr>
+              <a:t>лучше</a:t>
+            </a:r>
+            <a:r>
+              <a:rPr sz="2325" b="1" dirty="0">
+                <a:solidFill>
+                  <a:srgbClr val="15181F"/>
+                </a:solidFill>
+                <a:latin typeface="Onest"/>
+                <a:ea typeface="Onest"/>
+                <a:cs typeface="Onest"/>
+              </a:rPr>
+              <a:t> </a:t>
+            </a:r>
+            <a:r>
+              <a:rPr sz="2325" b="1" dirty="0" err="1">
+                <a:solidFill>
+                  <a:srgbClr val="15181F"/>
+                </a:solidFill>
+                <a:latin typeface="Onest"/>
+                <a:ea typeface="Onest"/>
+                <a:cs typeface="Onest"/>
+              </a:rPr>
+              <a:t>справочной</a:t>
+            </a:r>
+            <a:endParaRPr sz="2325" b="1" dirty="0">
+              <a:solidFill>
+                <a:srgbClr val="15181F"/>
+              </a:solidFill>
+              <a:latin typeface="Onest"/>
+              <a:ea typeface="Onest"/>
+              <a:cs typeface="Onest"/>
+            </a:endParaRPr>
           </a:p>
         </p:txBody>
       </p:sp>
@@ -4908,7 +5030,7 @@
               </a:defRPr>
             </a:pPr>
             <a:r>
-              <a:rPr>
+              <a:rPr dirty="0" err="1">
                 <a:solidFill>
                   <a:srgbClr val="58606B"/>
                 </a:solidFill>
@@ -4919,7 +5041,7 @@
               <a:t>С</a:t>
             </a:r>
             <a:r>
-              <a:rPr sz="1800" b="0">
+              <a:rPr sz="1800" b="0" dirty="0" err="1">
                 <a:solidFill>
                   <a:srgbClr val="58606B"/>
                 </a:solidFill>
@@ -4927,10 +5049,10 @@
                 <a:ea typeface="Onest"/>
                 <a:cs typeface="Onest"/>
               </a:rPr>
-              <a:t>нижение </a:t>
-            </a:r>
-            <a:r>
-              <a:rPr sz="1800" b="1">
+              <a:t>нижение</a:t>
+            </a:r>
+            <a:r>
+              <a:rPr sz="1800" b="0" dirty="0">
                 <a:solidFill>
                   <a:srgbClr val="58606B"/>
                 </a:solidFill>
@@ -4938,8 +5060,38 @@
                 <a:ea typeface="Onest"/>
                 <a:cs typeface="Onest"/>
               </a:rPr>
+              <a:t> </a:t>
+            </a:r>
+            <a:r>
+              <a:rPr sz="1800" b="1" dirty="0" err="1">
+                <a:solidFill>
+                  <a:srgbClr val="58606B"/>
+                </a:solidFill>
+                <a:latin typeface="Onest"/>
+                <a:ea typeface="Onest"/>
+                <a:cs typeface="Onest"/>
+              </a:rPr>
               <a:t>метрики</a:t>
             </a:r>
+            <a:r>
+              <a:rPr lang="ru-RU" sz="1800" b="1" dirty="0">
+                <a:solidFill>
+                  <a:srgbClr val="58606B"/>
+                </a:solidFill>
+                <a:latin typeface="Onest"/>
+                <a:ea typeface="Onest"/>
+                <a:cs typeface="Onest"/>
+              </a:rPr>
+              <a:t>.</a:t>
+            </a:r>
+            <a:endParaRPr sz="1800" b="1" dirty="0">
+              <a:solidFill>
+                <a:srgbClr val="58606B"/>
+              </a:solidFill>
+              <a:latin typeface="Onest"/>
+              <a:ea typeface="Onest"/>
+              <a:cs typeface="Onest"/>
+            </a:endParaRPr>
           </a:p>
         </p:txBody>
       </p:sp>
@@ -5093,7 +5245,7 @@
               </a:defRPr>
             </a:pPr>
             <a:r>
-              <a:rPr>
+              <a:rPr dirty="0" err="1">
                 <a:solidFill>
                   <a:srgbClr val="58606B"/>
                 </a:solidFill>
@@ -5104,7 +5256,7 @@
               <a:t>С</a:t>
             </a:r>
             <a:r>
-              <a:rPr sz="1800">
+              <a:rPr sz="1800" dirty="0" err="1">
                 <a:solidFill>
                   <a:srgbClr val="58606B"/>
                 </a:solidFill>
@@ -5112,10 +5264,10 @@
                 <a:ea typeface="Onest"/>
                 <a:cs typeface="Onest"/>
               </a:rPr>
-              <a:t>нижение </a:t>
-            </a:r>
-            <a:r>
-              <a:rPr sz="1800" b="1">
+              <a:t>нижение</a:t>
+            </a:r>
+            <a:r>
+              <a:rPr sz="1800" dirty="0">
                 <a:solidFill>
                   <a:srgbClr val="58606B"/>
                 </a:solidFill>
@@ -5123,8 +5275,38 @@
                 <a:ea typeface="Onest"/>
                 <a:cs typeface="Onest"/>
               </a:rPr>
+              <a:t> </a:t>
+            </a:r>
+            <a:r>
+              <a:rPr sz="1800" b="1" dirty="0" err="1">
+                <a:solidFill>
+                  <a:srgbClr val="58606B"/>
+                </a:solidFill>
+                <a:latin typeface="Onest"/>
+                <a:ea typeface="Onest"/>
+                <a:cs typeface="Onest"/>
+              </a:rPr>
               <a:t>времени</a:t>
             </a:r>
+            <a:r>
+              <a:rPr lang="ru-RU" sz="1800" b="1" dirty="0">
+                <a:solidFill>
+                  <a:srgbClr val="58606B"/>
+                </a:solidFill>
+                <a:latin typeface="Onest"/>
+                <a:ea typeface="Onest"/>
+                <a:cs typeface="Onest"/>
+              </a:rPr>
+              <a:t>.</a:t>
+            </a:r>
+            <a:endParaRPr sz="1800" b="1" dirty="0">
+              <a:solidFill>
+                <a:srgbClr val="58606B"/>
+              </a:solidFill>
+              <a:latin typeface="Onest"/>
+              <a:ea typeface="Onest"/>
+              <a:cs typeface="Onest"/>
+            </a:endParaRPr>
           </a:p>
         </p:txBody>
       </p:sp>
@@ -5278,7 +5460,7 @@
               </a:defRPr>
             </a:pPr>
             <a:r>
-              <a:rPr>
+              <a:rPr dirty="0" err="1">
                 <a:solidFill>
                   <a:srgbClr val="58606B"/>
                 </a:solidFill>
@@ -5289,7 +5471,7 @@
               <a:t>С</a:t>
             </a:r>
             <a:r>
-              <a:rPr sz="1800" b="0">
+              <a:rPr sz="1800" b="0" dirty="0" err="1">
                 <a:solidFill>
                   <a:srgbClr val="58606B"/>
                 </a:solidFill>
@@ -5297,10 +5479,10 @@
                 <a:ea typeface="Onest"/>
                 <a:cs typeface="Onest"/>
               </a:rPr>
-              <a:t>нижение </a:t>
-            </a:r>
-            <a:r>
-              <a:rPr sz="1800" b="1">
+              <a:t>нижение</a:t>
+            </a:r>
+            <a:r>
+              <a:rPr sz="1800" b="0" dirty="0">
                 <a:solidFill>
                   <a:srgbClr val="58606B"/>
                 </a:solidFill>
@@ -5308,8 +5490,38 @@
                 <a:ea typeface="Onest"/>
                 <a:cs typeface="Onest"/>
               </a:rPr>
+              <a:t> </a:t>
+            </a:r>
+            <a:r>
+              <a:rPr sz="1800" b="1" dirty="0" err="1">
+                <a:solidFill>
+                  <a:srgbClr val="58606B"/>
+                </a:solidFill>
+                <a:latin typeface="Onest"/>
+                <a:ea typeface="Onest"/>
+                <a:cs typeface="Onest"/>
+              </a:rPr>
               <a:t>кривых</a:t>
             </a:r>
+            <a:r>
+              <a:rPr lang="ru-RU" sz="1800" b="1" dirty="0">
+                <a:solidFill>
+                  <a:srgbClr val="58606B"/>
+                </a:solidFill>
+                <a:latin typeface="Onest"/>
+                <a:ea typeface="Onest"/>
+                <a:cs typeface="Onest"/>
+              </a:rPr>
+              <a:t>.</a:t>
+            </a:r>
+            <a:endParaRPr sz="1800" b="1" dirty="0">
+              <a:solidFill>
+                <a:srgbClr val="58606B"/>
+              </a:solidFill>
+              <a:latin typeface="Onest"/>
+              <a:ea typeface="Onest"/>
+              <a:cs typeface="Onest"/>
+            </a:endParaRPr>
           </a:p>
         </p:txBody>
       </p:sp>
@@ -12324,16 +12536,90 @@
               </a:defRPr>
             </a:pPr>
             <a:r>
-              <a:rPr sz="2325" b="1">
-                <a:solidFill>
-                  <a:srgbClr val="15181F"/>
-                </a:solidFill>
-                <a:latin typeface="Onest"/>
-                <a:ea typeface="Onest"/>
-                <a:cs typeface="Onest"/>
-              </a:rPr>
-              <a:t>Апробация результатов является экспериментальной и программной</a:t>
-            </a:r>
+              <a:rPr sz="2325" b="1" dirty="0" err="1">
+                <a:solidFill>
+                  <a:srgbClr val="15181F"/>
+                </a:solidFill>
+                <a:latin typeface="Onest"/>
+                <a:ea typeface="Onest"/>
+                <a:cs typeface="Onest"/>
+              </a:rPr>
+              <a:t>Апробация</a:t>
+            </a:r>
+            <a:r>
+              <a:rPr sz="2325" b="1" dirty="0">
+                <a:solidFill>
+                  <a:srgbClr val="15181F"/>
+                </a:solidFill>
+                <a:latin typeface="Onest"/>
+                <a:ea typeface="Onest"/>
+                <a:cs typeface="Onest"/>
+              </a:rPr>
+              <a:t> </a:t>
+            </a:r>
+            <a:r>
+              <a:rPr sz="2325" b="1" dirty="0" err="1">
+                <a:solidFill>
+                  <a:srgbClr val="15181F"/>
+                </a:solidFill>
+                <a:latin typeface="Onest"/>
+                <a:ea typeface="Onest"/>
+                <a:cs typeface="Onest"/>
+              </a:rPr>
+              <a:t>результатов</a:t>
+            </a:r>
+            <a:r>
+              <a:rPr sz="2325" b="1" dirty="0">
+                <a:solidFill>
+                  <a:srgbClr val="15181F"/>
+                </a:solidFill>
+                <a:latin typeface="Onest"/>
+                <a:ea typeface="Onest"/>
+                <a:cs typeface="Onest"/>
+              </a:rPr>
+              <a:t> </a:t>
+            </a:r>
+            <a:r>
+              <a:rPr lang="ru-RU" sz="2325" b="1" dirty="0">
+                <a:solidFill>
+                  <a:srgbClr val="15181F"/>
+                </a:solidFill>
+                <a:latin typeface="Onest"/>
+                <a:ea typeface="Onest"/>
+                <a:cs typeface="Onest"/>
+              </a:rPr>
+              <a:t>экспериментальная</a:t>
+            </a:r>
+            <a:r>
+              <a:rPr sz="2325" b="1" dirty="0">
+                <a:solidFill>
+                  <a:srgbClr val="15181F"/>
+                </a:solidFill>
+                <a:latin typeface="Onest"/>
+                <a:ea typeface="Onest"/>
+                <a:cs typeface="Onest"/>
+              </a:rPr>
+              <a:t> и </a:t>
+            </a:r>
+            <a:r>
+              <a:rPr lang="ru-RU" sz="2325" b="1" dirty="0">
+                <a:solidFill>
+                  <a:srgbClr val="15181F"/>
+                </a:solidFill>
+                <a:latin typeface="Onest"/>
+                <a:ea typeface="Onest"/>
+                <a:cs typeface="Onest"/>
+              </a:rPr>
+              <a:t>программная</a:t>
+            </a:r>
+            <a:endParaRPr sz="2325" b="1" dirty="0">
+              <a:solidFill>
+                <a:srgbClr val="15181F"/>
+              </a:solidFill>
+              <a:latin typeface="Onest"/>
+              <a:ea typeface="Onest"/>
+              <a:cs typeface="Onest"/>
+            </a:endParaRPr>
           </a:p>
         </p:txBody>
       </p:sp>
@@ -12455,7 +12741,7 @@
               </a:defRPr>
             </a:pPr>
             <a:r>
-              <a:rPr sz="2000" b="1">
+              <a:rPr sz="2000" b="1" dirty="0">
                 <a:solidFill>
                   <a:srgbClr val="522878"/>
                 </a:solidFill>
@@ -12523,15 +12809,246 @@
               </a:defRPr>
             </a:pPr>
             <a:r>
-              <a:rPr sz="2000" b="0">
-                <a:solidFill>
-                  <a:srgbClr val="15181F"/>
-                </a:solidFill>
-                <a:latin typeface="Onest"/>
-                <a:ea typeface="Onest"/>
-                <a:cs typeface="Onest"/>
-              </a:rPr>
-              <a:t>Запуски выполнены на ресурсах СКЦ СПбПУ в среде SLURM. Параметры проверены на независимой выборке.</a:t>
+              <a:rPr sz="2000" b="0" dirty="0" err="1">
+                <a:solidFill>
+                  <a:srgbClr val="15181F"/>
+                </a:solidFill>
+                <a:latin typeface="Onest"/>
+                <a:ea typeface="Onest"/>
+                <a:cs typeface="Onest"/>
+              </a:rPr>
+              <a:t>Запуски</a:t>
+            </a:r>
+            <a:r>
+              <a:rPr sz="2000" b="0" dirty="0">
+                <a:solidFill>
+                  <a:srgbClr val="15181F"/>
+                </a:solidFill>
+                <a:latin typeface="Onest"/>
+                <a:ea typeface="Onest"/>
+                <a:cs typeface="Onest"/>
+              </a:rPr>
+              <a:t> </a:t>
+            </a:r>
+            <a:r>
+              <a:rPr sz="2000" b="0" dirty="0" err="1">
+                <a:solidFill>
+                  <a:srgbClr val="15181F"/>
+                </a:solidFill>
+                <a:latin typeface="Onest"/>
+                <a:ea typeface="Onest"/>
+                <a:cs typeface="Onest"/>
+              </a:rPr>
+              <a:t>выполнены</a:t>
+            </a:r>
+            <a:r>
+              <a:rPr sz="2000" b="0" dirty="0">
+                <a:solidFill>
+                  <a:srgbClr val="15181F"/>
+                </a:solidFill>
+                <a:latin typeface="Onest"/>
+                <a:ea typeface="Onest"/>
+                <a:cs typeface="Onest"/>
+              </a:rPr>
+              <a:t> </a:t>
+            </a:r>
+            <a:r>
+              <a:rPr sz="2000" b="0" dirty="0" err="1">
+                <a:solidFill>
+                  <a:srgbClr val="15181F"/>
+                </a:solidFill>
+                <a:latin typeface="Onest"/>
+                <a:ea typeface="Onest"/>
+                <a:cs typeface="Onest"/>
+              </a:rPr>
+              <a:t>на</a:t>
+            </a:r>
+            <a:r>
+              <a:rPr sz="2000" b="0" dirty="0">
+                <a:solidFill>
+                  <a:srgbClr val="15181F"/>
+                </a:solidFill>
+                <a:latin typeface="Onest"/>
+                <a:ea typeface="Onest"/>
+                <a:cs typeface="Onest"/>
+              </a:rPr>
+              <a:t> </a:t>
+            </a:r>
+            <a:r>
+              <a:rPr sz="2000" b="0" dirty="0" err="1">
+                <a:solidFill>
+                  <a:srgbClr val="15181F"/>
+                </a:solidFill>
+                <a:latin typeface="Onest"/>
+                <a:ea typeface="Onest"/>
+                <a:cs typeface="Onest"/>
+              </a:rPr>
+              <a:t>ресурсах</a:t>
+            </a:r>
+            <a:r>
+              <a:rPr sz="2000" b="0" dirty="0">
+                <a:solidFill>
+                  <a:srgbClr val="15181F"/>
+                </a:solidFill>
+                <a:latin typeface="Onest"/>
+                <a:ea typeface="Onest"/>
+                <a:cs typeface="Onest"/>
+              </a:rPr>
+              <a:t> СКЦ </a:t>
+            </a:r>
+            <a:r>
+              <a:rPr sz="2000" b="0" dirty="0" err="1">
+                <a:solidFill>
+                  <a:srgbClr val="15181F"/>
+                </a:solidFill>
+                <a:latin typeface="Onest"/>
+                <a:ea typeface="Onest"/>
+                <a:cs typeface="Onest"/>
+              </a:rPr>
+              <a:t>СПбПУ</a:t>
+            </a:r>
+            <a:r>
+              <a:rPr sz="2000" b="0" dirty="0">
+                <a:solidFill>
+                  <a:srgbClr val="15181F"/>
+                </a:solidFill>
+                <a:latin typeface="Onest"/>
+                <a:ea typeface="Onest"/>
+                <a:cs typeface="Onest"/>
+              </a:rPr>
+              <a:t> в </a:t>
+            </a:r>
+            <a:r>
+              <a:rPr sz="2000" b="0" dirty="0" err="1">
+                <a:solidFill>
+                  <a:srgbClr val="15181F"/>
+                </a:solidFill>
+                <a:latin typeface="Onest"/>
+                <a:ea typeface="Onest"/>
+                <a:cs typeface="Onest"/>
+              </a:rPr>
+              <a:t>среде</a:t>
+            </a:r>
+            <a:r>
+              <a:rPr sz="2000" b="0" dirty="0">
+                <a:solidFill>
+                  <a:srgbClr val="15181F"/>
+                </a:solidFill>
+                <a:latin typeface="Onest"/>
+                <a:ea typeface="Onest"/>
+                <a:cs typeface="Onest"/>
+              </a:rPr>
+              <a:t> SLURM. </a:t>
+            </a:r>
+            <a:r>
+              <a:rPr sz="2000" b="0" dirty="0" err="1">
+                <a:solidFill>
+                  <a:srgbClr val="15181F"/>
+                </a:solidFill>
+                <a:latin typeface="Onest"/>
+                <a:ea typeface="Onest"/>
+                <a:cs typeface="Onest"/>
+              </a:rPr>
+              <a:t>Параметры</a:t>
+            </a:r>
+            <a:r>
+              <a:rPr sz="2000" b="0" dirty="0">
+                <a:solidFill>
+                  <a:srgbClr val="15181F"/>
+                </a:solidFill>
+                <a:latin typeface="Onest"/>
+                <a:ea typeface="Onest"/>
+                <a:cs typeface="Onest"/>
+              </a:rPr>
+              <a:t> </a:t>
+            </a:r>
+            <a:r>
+              <a:rPr sz="2000" b="0" dirty="0" err="1">
+                <a:solidFill>
+                  <a:srgbClr val="15181F"/>
+                </a:solidFill>
+                <a:latin typeface="Onest"/>
+                <a:ea typeface="Onest"/>
+                <a:cs typeface="Onest"/>
+              </a:rPr>
+              <a:t>проверены</a:t>
+            </a:r>
+            <a:r>
+              <a:rPr sz="2000" b="0" dirty="0">
+                <a:solidFill>
+                  <a:srgbClr val="15181F"/>
+                </a:solidFill>
+                <a:latin typeface="Onest"/>
+                <a:ea typeface="Onest"/>
+                <a:cs typeface="Onest"/>
+              </a:rPr>
+              <a:t> </a:t>
+            </a:r>
+            <a:r>
+              <a:rPr sz="2000" b="0" dirty="0" err="1">
+                <a:solidFill>
+                  <a:srgbClr val="15181F"/>
+                </a:solidFill>
+                <a:latin typeface="Onest"/>
+                <a:ea typeface="Onest"/>
+                <a:cs typeface="Onest"/>
+              </a:rPr>
+              <a:t>на</a:t>
+            </a:r>
+            <a:r>
+              <a:rPr sz="2000" b="0" dirty="0">
+                <a:solidFill>
+                  <a:srgbClr val="15181F"/>
+                </a:solidFill>
+                <a:latin typeface="Onest"/>
+                <a:ea typeface="Onest"/>
+                <a:cs typeface="Onest"/>
+              </a:rPr>
+              <a:t> </a:t>
+            </a:r>
+            <a:r>
+              <a:rPr sz="2000" b="0" dirty="0" err="1">
+                <a:solidFill>
+                  <a:srgbClr val="15181F"/>
+                </a:solidFill>
+                <a:latin typeface="Onest"/>
+                <a:ea typeface="Onest"/>
+                <a:cs typeface="Onest"/>
+              </a:rPr>
+              <a:t>независимой</a:t>
+            </a:r>
+            <a:r>
+              <a:rPr sz="2000" b="0" dirty="0">
+                <a:solidFill>
+                  <a:srgbClr val="15181F"/>
+                </a:solidFill>
+                <a:latin typeface="Onest"/>
+                <a:ea typeface="Onest"/>
+                <a:cs typeface="Onest"/>
+              </a:rPr>
+              <a:t> </a:t>
+            </a:r>
+            <a:r>
+              <a:rPr sz="2000" b="0" dirty="0" err="1">
+                <a:solidFill>
+                  <a:srgbClr val="15181F"/>
+                </a:solidFill>
+                <a:latin typeface="Onest"/>
+                <a:ea typeface="Onest"/>
+                <a:cs typeface="Onest"/>
+              </a:rPr>
+              <a:t>выборке</a:t>
+            </a:r>
+            <a:r>
+              <a:rPr sz="2000" b="0" dirty="0">
+                <a:solidFill>
+                  <a:srgbClr val="15181F"/>
+                </a:solidFill>
+                <a:latin typeface="Onest"/>
+                <a:ea typeface="Onest"/>
+                <a:cs typeface="Onest"/>
+              </a:rPr>
+              <a:t>.</a:t>
             </a:r>
           </a:p>
         </p:txBody>
@@ -12654,7 +13171,7 @@
               </a:defRPr>
             </a:pPr>
             <a:r>
-              <a:rPr sz="2400" b="1">
+              <a:rPr sz="2000" b="1" dirty="0">
                 <a:solidFill>
                   <a:srgbClr val="37B34A"/>
                 </a:solidFill>
@@ -12722,15 +13239,268 @@
               </a:defRPr>
             </a:pPr>
             <a:r>
-              <a:rPr sz="2000" b="0">
-                <a:solidFill>
-                  <a:srgbClr val="15181F"/>
-                </a:solidFill>
-                <a:latin typeface="Onest"/>
-                <a:ea typeface="Onest"/>
-                <a:cs typeface="Onest"/>
-              </a:rPr>
-              <a:t>Конвейр проверен от генерации данных до анализа. Сохраняются seed, параметры, отчеты, таблицы и графики.</a:t>
+              <a:rPr sz="2000" b="0" dirty="0" err="1">
+                <a:solidFill>
+                  <a:srgbClr val="15181F"/>
+                </a:solidFill>
+                <a:latin typeface="Onest"/>
+                <a:ea typeface="Onest"/>
+                <a:cs typeface="Onest"/>
+              </a:rPr>
+              <a:t>Конвейр</a:t>
+            </a:r>
+            <a:r>
+              <a:rPr sz="2000" b="0" dirty="0">
+                <a:solidFill>
+                  <a:srgbClr val="15181F"/>
+                </a:solidFill>
+                <a:latin typeface="Onest"/>
+                <a:ea typeface="Onest"/>
+                <a:cs typeface="Onest"/>
+              </a:rPr>
+              <a:t> </a:t>
+            </a:r>
+            <a:r>
+              <a:rPr sz="2000" b="0" dirty="0" err="1">
+                <a:solidFill>
+                  <a:srgbClr val="15181F"/>
+                </a:solidFill>
+                <a:latin typeface="Onest"/>
+                <a:ea typeface="Onest"/>
+                <a:cs typeface="Onest"/>
+              </a:rPr>
+              <a:t>проверен</a:t>
+            </a:r>
+            <a:r>
+              <a:rPr sz="2000" b="0" dirty="0">
+                <a:solidFill>
+                  <a:srgbClr val="15181F"/>
+                </a:solidFill>
+                <a:latin typeface="Onest"/>
+                <a:ea typeface="Onest"/>
+                <a:cs typeface="Onest"/>
+              </a:rPr>
+              <a:t> </a:t>
+            </a:r>
+            <a:r>
+              <a:rPr sz="2000" b="0" dirty="0" err="1">
+                <a:solidFill>
+                  <a:srgbClr val="15181F"/>
+                </a:solidFill>
+                <a:latin typeface="Onest"/>
+                <a:ea typeface="Onest"/>
+                <a:cs typeface="Onest"/>
+              </a:rPr>
+              <a:t>от</a:t>
+            </a:r>
+            <a:r>
+              <a:rPr sz="2000" b="0" dirty="0">
+                <a:solidFill>
+                  <a:srgbClr val="15181F"/>
+                </a:solidFill>
+                <a:latin typeface="Onest"/>
+                <a:ea typeface="Onest"/>
+                <a:cs typeface="Onest"/>
+              </a:rPr>
+              <a:t> </a:t>
+            </a:r>
+            <a:r>
+              <a:rPr sz="2000" b="0" dirty="0" err="1">
+                <a:solidFill>
+                  <a:srgbClr val="15181F"/>
+                </a:solidFill>
+                <a:latin typeface="Onest"/>
+                <a:ea typeface="Onest"/>
+                <a:cs typeface="Onest"/>
+              </a:rPr>
+              <a:t>генерации</a:t>
+            </a:r>
+            <a:r>
+              <a:rPr sz="2000" b="0" dirty="0">
+                <a:solidFill>
+                  <a:srgbClr val="15181F"/>
+                </a:solidFill>
+                <a:latin typeface="Onest"/>
+                <a:ea typeface="Onest"/>
+                <a:cs typeface="Onest"/>
+              </a:rPr>
+              <a:t> </a:t>
+            </a:r>
+            <a:r>
+              <a:rPr sz="2000" b="0" dirty="0" err="1">
+                <a:solidFill>
+                  <a:srgbClr val="15181F"/>
+                </a:solidFill>
+                <a:latin typeface="Onest"/>
+                <a:ea typeface="Onest"/>
+                <a:cs typeface="Onest"/>
+              </a:rPr>
+              <a:t>данных</a:t>
+            </a:r>
+            <a:r>
+              <a:rPr sz="2000" b="0" dirty="0">
+                <a:solidFill>
+                  <a:srgbClr val="15181F"/>
+                </a:solidFill>
+                <a:latin typeface="Onest"/>
+                <a:ea typeface="Onest"/>
+                <a:cs typeface="Onest"/>
+              </a:rPr>
+              <a:t> </a:t>
+            </a:r>
+            <a:r>
+              <a:rPr sz="2000" b="0" dirty="0" err="1">
+                <a:solidFill>
+                  <a:srgbClr val="15181F"/>
+                </a:solidFill>
+                <a:latin typeface="Onest"/>
+                <a:ea typeface="Onest"/>
+                <a:cs typeface="Onest"/>
+              </a:rPr>
+              <a:t>до</a:t>
+            </a:r>
+            <a:r>
+              <a:rPr sz="2000" b="0" dirty="0">
+                <a:solidFill>
+                  <a:srgbClr val="15181F"/>
+                </a:solidFill>
+                <a:latin typeface="Onest"/>
+                <a:ea typeface="Onest"/>
+                <a:cs typeface="Onest"/>
+              </a:rPr>
+              <a:t> </a:t>
+            </a:r>
+            <a:r>
+              <a:rPr sz="2000" b="0" dirty="0" err="1">
+                <a:solidFill>
+                  <a:srgbClr val="15181F"/>
+                </a:solidFill>
+                <a:latin typeface="Onest"/>
+                <a:ea typeface="Onest"/>
+                <a:cs typeface="Onest"/>
+              </a:rPr>
+              <a:t>анализа</a:t>
+            </a:r>
+            <a:r>
+              <a:rPr sz="2000" b="0" dirty="0">
+                <a:solidFill>
+                  <a:srgbClr val="15181F"/>
+                </a:solidFill>
+                <a:latin typeface="Onest"/>
+                <a:ea typeface="Onest"/>
+                <a:cs typeface="Onest"/>
+              </a:rPr>
+              <a:t>. </a:t>
+            </a:r>
+            <a:r>
+              <a:rPr sz="2000" b="0" dirty="0" err="1">
+                <a:solidFill>
+                  <a:srgbClr val="15181F"/>
+                </a:solidFill>
+                <a:latin typeface="Onest"/>
+                <a:ea typeface="Onest"/>
+                <a:cs typeface="Onest"/>
+              </a:rPr>
+              <a:t>Сохраняются</a:t>
+            </a:r>
+            <a:r>
+              <a:rPr sz="2000" b="0" dirty="0">
+                <a:solidFill>
+                  <a:srgbClr val="15181F"/>
+                </a:solidFill>
+                <a:latin typeface="Onest"/>
+                <a:ea typeface="Onest"/>
+                <a:cs typeface="Onest"/>
+              </a:rPr>
+              <a:t> seed, </a:t>
+            </a:r>
+            <a:r>
+              <a:rPr sz="2000" b="0" dirty="0" err="1">
+                <a:solidFill>
+                  <a:srgbClr val="15181F"/>
+                </a:solidFill>
+                <a:latin typeface="Onest"/>
+                <a:ea typeface="Onest"/>
+                <a:cs typeface="Onest"/>
+              </a:rPr>
+              <a:t>параметры</a:t>
+            </a:r>
+            <a:r>
+              <a:rPr sz="2000" b="0" dirty="0">
+                <a:solidFill>
+                  <a:srgbClr val="15181F"/>
+                </a:solidFill>
+                <a:latin typeface="Onest"/>
+                <a:ea typeface="Onest"/>
+                <a:cs typeface="Onest"/>
+              </a:rPr>
+              <a:t>, </a:t>
+            </a:r>
+            <a:r>
+              <a:rPr sz="2000" b="0" dirty="0" err="1">
+                <a:solidFill>
+                  <a:srgbClr val="15181F"/>
+                </a:solidFill>
+                <a:latin typeface="Onest"/>
+                <a:ea typeface="Onest"/>
+                <a:cs typeface="Onest"/>
+              </a:rPr>
+              <a:t>отчеты</a:t>
+            </a:r>
+            <a:r>
+              <a:rPr sz="2000" b="0" dirty="0">
+                <a:solidFill>
+                  <a:srgbClr val="15181F"/>
+                </a:solidFill>
+                <a:latin typeface="Onest"/>
+                <a:ea typeface="Onest"/>
+                <a:cs typeface="Onest"/>
+              </a:rPr>
+              <a:t>, </a:t>
+            </a:r>
+            <a:r>
+              <a:rPr sz="2000" b="0" dirty="0" err="1">
+                <a:solidFill>
+                  <a:srgbClr val="15181F"/>
+                </a:solidFill>
+                <a:latin typeface="Onest"/>
+                <a:ea typeface="Onest"/>
+                <a:cs typeface="Onest"/>
+              </a:rPr>
+              <a:t>таблицы</a:t>
+            </a:r>
+            <a:r>
+              <a:rPr sz="2000" b="0" dirty="0">
+                <a:solidFill>
+                  <a:srgbClr val="15181F"/>
+                </a:solidFill>
+                <a:latin typeface="Onest"/>
+                <a:ea typeface="Onest"/>
+                <a:cs typeface="Onest"/>
+              </a:rPr>
+              <a:t> и </a:t>
+            </a:r>
+            <a:r>
+              <a:rPr sz="2000" b="0" dirty="0" err="1">
+                <a:solidFill>
+                  <a:srgbClr val="15181F"/>
+                </a:solidFill>
+                <a:latin typeface="Onest"/>
+                <a:ea typeface="Onest"/>
+                <a:cs typeface="Onest"/>
+              </a:rPr>
+              <a:t>графики</a:t>
+            </a:r>
+            <a:r>
+              <a:rPr sz="2000" b="0" dirty="0">
+                <a:solidFill>
+                  <a:srgbClr val="15181F"/>
+                </a:solidFill>
+                <a:latin typeface="Onest"/>
+                <a:ea typeface="Onest"/>
+                <a:cs typeface="Onest"/>
+              </a:rPr>
+              <a:t>.</a:t>
             </a:r>
           </a:p>
         </p:txBody>
@@ -13543,7 +14313,29 @@
                 <a:ea typeface="Onest"/>
                 <a:cs typeface="Onest"/>
               </a:rPr>
-              <a:t>снижать</a:t>
+              <a:t>сни</a:t>
+            </a:r>
+            <a:r>
+              <a:rPr lang="ru-RU" sz="1600" b="1" dirty="0" err="1">
+                <a:solidFill>
+                  <a:srgbClr val="15181F"/>
+                </a:solidFill>
+                <a:latin typeface="Onest"/>
+                <a:ea typeface="Onest"/>
+                <a:cs typeface="Onest"/>
+              </a:rPr>
+              <a:t>зи</a:t>
+            </a:r>
+            <a:r>
+              <a:rPr sz="1600" b="1" dirty="0" err="1">
+                <a:solidFill>
+                  <a:srgbClr val="15181F"/>
+                </a:solidFill>
+                <a:latin typeface="Onest"/>
+                <a:ea typeface="Onest"/>
+                <a:cs typeface="Onest"/>
+              </a:rPr>
+              <a:t>ть</a:t>
             </a:r>
             <a:r>
               <a:rPr sz="1600" b="1" dirty="0">
@@ -13685,8 +14477,8 @@
         </p:nvSpPr>
         <p:spPr>
           <a:xfrm>
-            <a:off x="9048750" y="1428750"/>
-            <a:ext cx="2714625" cy="1028700"/>
+            <a:off x="9658347" y="1428750"/>
+            <a:ext cx="2202784" cy="1028700"/>
           </a:xfrm>
           <a:prstGeom prst="rect">
             <a:avLst/>
@@ -13718,8 +14510,8 @@
         </p:nvSpPr>
         <p:spPr>
           <a:xfrm>
-            <a:off x="9239250" y="1581150"/>
-            <a:ext cx="2190750" cy="304800"/>
+            <a:off x="9848846" y="1581150"/>
+            <a:ext cx="2012284" cy="304800"/>
           </a:xfrm>
           <a:prstGeom prst="rect">
             <a:avLst/>
@@ -13783,8 +14575,8 @@
         </p:nvSpPr>
         <p:spPr>
           <a:xfrm>
-            <a:off x="9239250" y="1952625"/>
-            <a:ext cx="2190750" cy="400050"/>
+            <a:off x="9848846" y="1952625"/>
+            <a:ext cx="2012285" cy="400050"/>
           </a:xfrm>
           <a:prstGeom prst="rect">
             <a:avLst/>
@@ -13896,6 +14688,17 @@
               </a:rPr>
               <a:t>метрики</a:t>
             </a:r>
+            <a:r>
+              <a:rPr lang="ru-RU" sz="1425" dirty="0">
+                <a:solidFill>
+                  <a:srgbClr val="58606B"/>
+                </a:solidFill>
+                <a:latin typeface="Onest"/>
+                <a:ea typeface="Onest"/>
+                <a:cs typeface="Onest"/>
+              </a:rPr>
+              <a:t>.</a:t>
+            </a:r>
             <a:endParaRPr sz="1425" dirty="0">
               <a:solidFill>
                 <a:srgbClr val="58606B"/>
@@ -13923,8 +14726,8 @@
         </p:nvSpPr>
         <p:spPr>
           <a:xfrm>
-            <a:off x="9048750" y="2619375"/>
-            <a:ext cx="2714625" cy="1028700"/>
+            <a:off x="9658346" y="2619375"/>
+            <a:ext cx="2202784" cy="1028700"/>
           </a:xfrm>
           <a:prstGeom prst="rect">
             <a:avLst/>
@@ -13956,8 +14759,8 @@
         </p:nvSpPr>
         <p:spPr>
           <a:xfrm>
-            <a:off x="9239250" y="2771775"/>
-            <a:ext cx="2190750" cy="304800"/>
+            <a:off x="9848846" y="2771775"/>
+            <a:ext cx="1877931" cy="304800"/>
           </a:xfrm>
           <a:prstGeom prst="rect">
             <a:avLst/>
@@ -14021,8 +14824,8 @@
         </p:nvSpPr>
         <p:spPr>
           <a:xfrm>
-            <a:off x="9239250" y="3143250"/>
-            <a:ext cx="2190750" cy="400050"/>
+            <a:off x="9848846" y="3143250"/>
+            <a:ext cx="1877931" cy="390525"/>
           </a:xfrm>
           <a:prstGeom prst="rect">
             <a:avLst/>
@@ -14134,6 +14937,17 @@
               </a:rPr>
               <a:t>времени</a:t>
             </a:r>
+            <a:r>
+              <a:rPr lang="ru-RU" sz="1425" dirty="0">
+                <a:solidFill>
+                  <a:srgbClr val="58606B"/>
+                </a:solidFill>
+                <a:latin typeface="Onest"/>
+                <a:ea typeface="Onest"/>
+                <a:cs typeface="Onest"/>
+              </a:rPr>
+              <a:t>.</a:t>
+            </a:r>
             <a:endParaRPr sz="1425" dirty="0">
               <a:solidFill>
                 <a:srgbClr val="58606B"/>
@@ -14161,8 +14975,8 @@
         </p:nvSpPr>
         <p:spPr>
           <a:xfrm>
-            <a:off x="9048750" y="3810000"/>
-            <a:ext cx="2714625" cy="1028700"/>
+            <a:off x="9658346" y="3810000"/>
+            <a:ext cx="2202784" cy="1028700"/>
           </a:xfrm>
           <a:prstGeom prst="rect">
             <a:avLst/>
@@ -14194,8 +15008,8 @@
         </p:nvSpPr>
         <p:spPr>
           <a:xfrm>
-            <a:off x="9239250" y="3962400"/>
-            <a:ext cx="2190750" cy="304800"/>
+            <a:off x="9848846" y="3962400"/>
+            <a:ext cx="1877931" cy="304800"/>
           </a:xfrm>
           <a:prstGeom prst="rect">
             <a:avLst/>
@@ -14259,8 +15073,8 @@
         </p:nvSpPr>
         <p:spPr>
           <a:xfrm>
-            <a:off x="9239250" y="4333875"/>
-            <a:ext cx="2190750" cy="400050"/>
+            <a:off x="9848846" y="4333875"/>
+            <a:ext cx="1877931" cy="381000"/>
           </a:xfrm>
           <a:prstGeom prst="rect">
             <a:avLst/>
@@ -14281,7 +15095,7 @@
         </p:spPr>
         <p:txBody>
           <a:bodyPr wrap="square" lIns="0" tIns="0" rIns="0" bIns="0" anchor="t">
-            <a:normAutofit fontScale="99605" lnSpcReduction="10000"/>
+            <a:normAutofit fontScale="92105" lnSpcReduction="10000"/>
           </a:bodyPr>
           <a:lstStyle/>
           <a:p>
@@ -14372,6 +15186,17 @@
               </a:rPr>
               <a:t>кривых</a:t>
             </a:r>
+            <a:r>
+              <a:rPr lang="ru-RU" sz="1425" dirty="0">
+                <a:solidFill>
+                  <a:srgbClr val="58606B"/>
+                </a:solidFill>
+                <a:latin typeface="Onest"/>
+                <a:ea typeface="Onest"/>
+                <a:cs typeface="Onest"/>
+              </a:rPr>
+              <a:t>.</a:t>
+            </a:r>
             <a:endParaRPr sz="1425" dirty="0">
               <a:solidFill>
                 <a:srgbClr val="58606B"/>
@@ -14530,8 +15355,8 @@
         </p:nvSpPr>
         <p:spPr>
           <a:xfrm>
-            <a:off x="571499" y="2195704"/>
-            <a:ext cx="8096250" cy="2071496"/>
+            <a:off x="571500" y="2100452"/>
+            <a:ext cx="9063034" cy="2166747"/>
           </a:xfrm>
           <a:prstGeom prst="rect">
             <a:avLst/>
@@ -14552,7 +15377,7 @@
         </p:spPr>
         <p:txBody>
           <a:bodyPr wrap="square" lIns="0" tIns="0" rIns="0" bIns="0" anchor="t">
-            <a:normAutofit fontScale="92500"/>
+            <a:normAutofit/>
           </a:bodyPr>
           <a:lstStyle/>
           <a:p>
@@ -14578,7 +15403,7 @@
                 </a:solidFill>
                 <a:latin typeface="Onest"/>
                 <a:ea typeface="Onest"/>
-                <a:cs typeface="Onest"/>
+                <a:cs typeface="Times New Roman" panose="02020603050405020304" pitchFamily="18" charset="0"/>
               </a:rPr>
               <a:t>Выполнен</a:t>
             </a:r>
@@ -14589,7 +15414,7 @@
                 </a:solidFill>
                 <a:latin typeface="Onest"/>
                 <a:ea typeface="Onest"/>
-                <a:cs typeface="Onest"/>
+                <a:cs typeface="Times New Roman" panose="02020603050405020304" pitchFamily="18" charset="0"/>
               </a:rPr>
               <a:t> </a:t>
             </a:r>
@@ -14600,7 +15425,7 @@
                 </a:solidFill>
                 <a:latin typeface="Onest"/>
                 <a:ea typeface="Onest"/>
-                <a:cs typeface="Onest"/>
+                <a:cs typeface="Times New Roman" panose="02020603050405020304" pitchFamily="18" charset="0"/>
               </a:rPr>
               <a:t>аналитический</a:t>
             </a:r>
@@ -14611,7 +15436,7 @@
                 </a:solidFill>
                 <a:latin typeface="Onest"/>
                 <a:ea typeface="Onest"/>
-                <a:cs typeface="Onest"/>
+                <a:cs typeface="Times New Roman" panose="02020603050405020304" pitchFamily="18" charset="0"/>
               </a:rPr>
               <a:t> </a:t>
             </a:r>
@@ -14622,7 +15447,7 @@
                 </a:solidFill>
                 <a:latin typeface="Onest"/>
                 <a:ea typeface="Onest"/>
-                <a:cs typeface="Onest"/>
+                <a:cs typeface="Times New Roman" panose="02020603050405020304" pitchFamily="18" charset="0"/>
               </a:rPr>
               <a:t>обзор</a:t>
             </a:r>
@@ -14633,7 +15458,7 @@
                 </a:solidFill>
                 <a:latin typeface="Onest"/>
                 <a:ea typeface="Onest"/>
-                <a:cs typeface="Onest"/>
+                <a:cs typeface="Times New Roman" panose="02020603050405020304" pitchFamily="18" charset="0"/>
               </a:rPr>
               <a:t> </a:t>
             </a:r>
@@ -14644,7 +15469,7 @@
                 </a:solidFill>
                 <a:latin typeface="Onest"/>
                 <a:ea typeface="Onest"/>
-                <a:cs typeface="Onest"/>
+                <a:cs typeface="Times New Roman" panose="02020603050405020304" pitchFamily="18" charset="0"/>
               </a:rPr>
               <a:t>методов</a:t>
             </a:r>
@@ -14655,7 +15480,7 @@
                 </a:solidFill>
                 <a:latin typeface="Onest"/>
                 <a:ea typeface="Onest"/>
-                <a:cs typeface="Onest"/>
+                <a:cs typeface="Times New Roman" panose="02020603050405020304" pitchFamily="18" charset="0"/>
               </a:rPr>
               <a:t> </a:t>
             </a:r>
@@ -14666,7 +15491,7 @@
                 </a:solidFill>
                 <a:latin typeface="Onest"/>
                 <a:ea typeface="Onest"/>
-                <a:cs typeface="Onest"/>
+                <a:cs typeface="Times New Roman" panose="02020603050405020304" pitchFamily="18" charset="0"/>
               </a:rPr>
               <a:t>факторизации</a:t>
             </a:r>
@@ -14677,7 +15502,7 @@
                 </a:solidFill>
                 <a:latin typeface="Onest"/>
                 <a:ea typeface="Onest"/>
-                <a:cs typeface="Onest"/>
+                <a:cs typeface="Times New Roman" panose="02020603050405020304" pitchFamily="18" charset="0"/>
               </a:rPr>
               <a:t>; </a:t>
             </a:r>
@@ -14688,7 +15513,7 @@
                 </a:solidFill>
                 <a:latin typeface="Onest"/>
                 <a:ea typeface="Onest"/>
-                <a:cs typeface="Onest"/>
+                <a:cs typeface="Times New Roman" panose="02020603050405020304" pitchFamily="18" charset="0"/>
               </a:rPr>
               <a:t>определено</a:t>
             </a:r>
@@ -14699,7 +15524,7 @@
                 </a:solidFill>
                 <a:latin typeface="Onest"/>
                 <a:ea typeface="Onest"/>
-                <a:cs typeface="Onest"/>
+                <a:cs typeface="Times New Roman" panose="02020603050405020304" pitchFamily="18" charset="0"/>
               </a:rPr>
               <a:t> </a:t>
             </a:r>
@@ -14710,7 +15535,7 @@
                 </a:solidFill>
                 <a:latin typeface="Onest"/>
                 <a:ea typeface="Onest"/>
-                <a:cs typeface="Onest"/>
+                <a:cs typeface="Times New Roman" panose="02020603050405020304" pitchFamily="18" charset="0"/>
               </a:rPr>
               <a:t>место</a:t>
             </a:r>
@@ -14721,7 +15546,7 @@
                 </a:solidFill>
                 <a:latin typeface="Onest"/>
                 <a:ea typeface="Onest"/>
-                <a:cs typeface="Onest"/>
+                <a:cs typeface="Times New Roman" panose="02020603050405020304" pitchFamily="18" charset="0"/>
               </a:rPr>
               <a:t> ECM в </a:t>
             </a:r>
@@ -14732,7 +15557,7 @@
                 </a:solidFill>
                 <a:latin typeface="Onest"/>
                 <a:ea typeface="Onest"/>
-                <a:cs typeface="Onest"/>
+                <a:cs typeface="Times New Roman" panose="02020603050405020304" pitchFamily="18" charset="0"/>
               </a:rPr>
               <a:t>практическом</a:t>
             </a:r>
@@ -14743,7 +15568,7 @@
                 </a:solidFill>
                 <a:latin typeface="Onest"/>
                 <a:ea typeface="Onest"/>
-                <a:cs typeface="Onest"/>
+                <a:cs typeface="Times New Roman" panose="02020603050405020304" pitchFamily="18" charset="0"/>
               </a:rPr>
               <a:t> </a:t>
             </a:r>
@@ -14754,7 +15579,7 @@
                 </a:solidFill>
                 <a:latin typeface="Onest"/>
                 <a:ea typeface="Onest"/>
-                <a:cs typeface="Onest"/>
+                <a:cs typeface="Times New Roman" panose="02020603050405020304" pitchFamily="18" charset="0"/>
               </a:rPr>
               <a:t>конвейере</a:t>
             </a:r>
@@ -14765,7 +15590,7 @@
                 </a:solidFill>
                 <a:latin typeface="Onest"/>
                 <a:ea typeface="Onest"/>
-                <a:cs typeface="Onest"/>
+                <a:cs typeface="Times New Roman" panose="02020603050405020304" pitchFamily="18" charset="0"/>
               </a:rPr>
               <a:t>.</a:t>
             </a:r>
@@ -14793,7 +15618,7 @@
                 </a:solidFill>
                 <a:latin typeface="Onest"/>
                 <a:ea typeface="Onest"/>
-                <a:cs typeface="Onest"/>
+                <a:cs typeface="Times New Roman" panose="02020603050405020304" pitchFamily="18" charset="0"/>
               </a:rPr>
               <a:t>Рассмотрены</a:t>
             </a:r>
@@ -14804,7 +15629,7 @@
                 </a:solidFill>
                 <a:latin typeface="Onest"/>
                 <a:ea typeface="Onest"/>
-                <a:cs typeface="Onest"/>
+                <a:cs typeface="Times New Roman" panose="02020603050405020304" pitchFamily="18" charset="0"/>
               </a:rPr>
               <a:t> </a:t>
             </a:r>
@@ -14815,7 +15640,7 @@
                 </a:solidFill>
                 <a:latin typeface="Onest"/>
                 <a:ea typeface="Onest"/>
-                <a:cs typeface="Onest"/>
+                <a:cs typeface="Times New Roman" panose="02020603050405020304" pitchFamily="18" charset="0"/>
               </a:rPr>
               <a:t>стадии</a:t>
             </a:r>
@@ -14826,7 +15651,7 @@
                 </a:solidFill>
                 <a:latin typeface="Onest"/>
                 <a:ea typeface="Onest"/>
-                <a:cs typeface="Onest"/>
+                <a:cs typeface="Times New Roman" panose="02020603050405020304" pitchFamily="18" charset="0"/>
               </a:rPr>
               <a:t> ECM и </a:t>
             </a:r>
@@ -14837,7 +15662,7 @@
                 </a:solidFill>
                 <a:latin typeface="Onest"/>
                 <a:ea typeface="Onest"/>
-                <a:cs typeface="Onest"/>
+                <a:cs typeface="Times New Roman" panose="02020603050405020304" pitchFamily="18" charset="0"/>
               </a:rPr>
               <a:t>влияние</a:t>
             </a:r>
@@ -14848,7 +15673,7 @@
                 </a:solidFill>
                 <a:latin typeface="Onest"/>
                 <a:ea typeface="Onest"/>
-                <a:cs typeface="Onest"/>
+                <a:cs typeface="Times New Roman" panose="02020603050405020304" pitchFamily="18" charset="0"/>
               </a:rPr>
               <a:t> B1/B2 </a:t>
             </a:r>
@@ -14859,7 +15684,7 @@
                 </a:solidFill>
                 <a:latin typeface="Onest"/>
                 <a:ea typeface="Onest"/>
-                <a:cs typeface="Onest"/>
+                <a:cs typeface="Times New Roman" panose="02020603050405020304" pitchFamily="18" charset="0"/>
               </a:rPr>
               <a:t>на</a:t>
             </a:r>
@@ -14870,7 +15695,7 @@
                 </a:solidFill>
                 <a:latin typeface="Onest"/>
                 <a:ea typeface="Onest"/>
-                <a:cs typeface="Onest"/>
+                <a:cs typeface="Times New Roman" panose="02020603050405020304" pitchFamily="18" charset="0"/>
               </a:rPr>
               <a:t> </a:t>
             </a:r>
@@ -14881,7 +15706,7 @@
                 </a:solidFill>
                 <a:latin typeface="Onest"/>
                 <a:ea typeface="Onest"/>
-                <a:cs typeface="Onest"/>
+                <a:cs typeface="Times New Roman" panose="02020603050405020304" pitchFamily="18" charset="0"/>
               </a:rPr>
               <a:t>вероятность</a:t>
             </a:r>
@@ -14892,7 +15717,7 @@
                 </a:solidFill>
                 <a:latin typeface="Onest"/>
                 <a:ea typeface="Onest"/>
-                <a:cs typeface="Onest"/>
+                <a:cs typeface="Times New Roman" panose="02020603050405020304" pitchFamily="18" charset="0"/>
               </a:rPr>
               <a:t> </a:t>
             </a:r>
@@ -14903,7 +15728,7 @@
                 </a:solidFill>
                 <a:latin typeface="Onest"/>
                 <a:ea typeface="Onest"/>
-                <a:cs typeface="Onest"/>
+                <a:cs typeface="Times New Roman" panose="02020603050405020304" pitchFamily="18" charset="0"/>
               </a:rPr>
               <a:t>успеха</a:t>
             </a:r>
@@ -14914,7 +15739,7 @@
                 </a:solidFill>
                 <a:latin typeface="Onest"/>
                 <a:ea typeface="Onest"/>
-                <a:cs typeface="Onest"/>
+                <a:cs typeface="Times New Roman" panose="02020603050405020304" pitchFamily="18" charset="0"/>
               </a:rPr>
               <a:t>, </a:t>
             </a:r>
@@ -14925,7 +15750,7 @@
                 </a:solidFill>
                 <a:latin typeface="Onest"/>
                 <a:ea typeface="Onest"/>
-                <a:cs typeface="Onest"/>
+                <a:cs typeface="Times New Roman" panose="02020603050405020304" pitchFamily="18" charset="0"/>
               </a:rPr>
               <a:t>время</a:t>
             </a:r>
@@ -14936,7 +15761,7 @@
                 </a:solidFill>
                 <a:latin typeface="Onest"/>
                 <a:ea typeface="Onest"/>
-                <a:cs typeface="Onest"/>
+                <a:cs typeface="Times New Roman" panose="02020603050405020304" pitchFamily="18" charset="0"/>
               </a:rPr>
               <a:t> и </a:t>
             </a:r>
@@ -14947,7 +15772,7 @@
                 </a:solidFill>
                 <a:latin typeface="Onest"/>
                 <a:ea typeface="Onest"/>
-                <a:cs typeface="Onest"/>
+                <a:cs typeface="Times New Roman" panose="02020603050405020304" pitchFamily="18" charset="0"/>
               </a:rPr>
               <a:t>число</a:t>
             </a:r>
@@ -14958,7 +15783,7 @@
                 </a:solidFill>
                 <a:latin typeface="Onest"/>
                 <a:ea typeface="Onest"/>
-                <a:cs typeface="Onest"/>
+                <a:cs typeface="Times New Roman" panose="02020603050405020304" pitchFamily="18" charset="0"/>
               </a:rPr>
               <a:t> </a:t>
             </a:r>
@@ -14969,7 +15794,7 @@
                 </a:solidFill>
                 <a:latin typeface="Onest"/>
                 <a:ea typeface="Onest"/>
-                <a:cs typeface="Onest"/>
+                <a:cs typeface="Times New Roman" panose="02020603050405020304" pitchFamily="18" charset="0"/>
               </a:rPr>
               <a:t>кривых</a:t>
             </a:r>
@@ -14980,7 +15805,7 @@
                 </a:solidFill>
                 <a:latin typeface="Onest"/>
                 <a:ea typeface="Onest"/>
-                <a:cs typeface="Onest"/>
+                <a:cs typeface="Times New Roman" panose="02020603050405020304" pitchFamily="18" charset="0"/>
               </a:rPr>
               <a:t>.</a:t>
             </a:r>
@@ -15008,7 +15833,7 @@
                 </a:solidFill>
                 <a:latin typeface="Onest"/>
                 <a:ea typeface="Onest"/>
-                <a:cs typeface="Onest"/>
+                <a:cs typeface="Times New Roman" panose="02020603050405020304" pitchFamily="18" charset="0"/>
               </a:rPr>
               <a:t>Подбор</a:t>
             </a:r>
@@ -15019,7 +15844,7 @@
                 </a:solidFill>
                 <a:latin typeface="Onest"/>
                 <a:ea typeface="Onest"/>
-                <a:cs typeface="Onest"/>
+                <a:cs typeface="Times New Roman" panose="02020603050405020304" pitchFamily="18" charset="0"/>
               </a:rPr>
               <a:t> B1/B2 </a:t>
             </a:r>
@@ -15030,7 +15855,7 @@
                 </a:solidFill>
                 <a:latin typeface="Onest"/>
                 <a:ea typeface="Onest"/>
-                <a:cs typeface="Onest"/>
+                <a:cs typeface="Times New Roman" panose="02020603050405020304" pitchFamily="18" charset="0"/>
               </a:rPr>
               <a:t>формализован</a:t>
             </a:r>
@@ -15041,7 +15866,7 @@
                 </a:solidFill>
                 <a:latin typeface="Onest"/>
                 <a:ea typeface="Onest"/>
-                <a:cs typeface="Onest"/>
+                <a:cs typeface="Times New Roman" panose="02020603050405020304" pitchFamily="18" charset="0"/>
               </a:rPr>
               <a:t> </a:t>
             </a:r>
@@ -15052,7 +15877,7 @@
                 </a:solidFill>
                 <a:latin typeface="Onest"/>
                 <a:ea typeface="Onest"/>
-                <a:cs typeface="Onest"/>
+                <a:cs typeface="Times New Roman" panose="02020603050405020304" pitchFamily="18" charset="0"/>
               </a:rPr>
               <a:t>как</a:t>
             </a:r>
@@ -15063,7 +15888,7 @@
                 </a:solidFill>
                 <a:latin typeface="Onest"/>
                 <a:ea typeface="Onest"/>
-                <a:cs typeface="Onest"/>
+                <a:cs typeface="Times New Roman" panose="02020603050405020304" pitchFamily="18" charset="0"/>
               </a:rPr>
               <a:t> </a:t>
             </a:r>
@@ -15074,7 +15899,7 @@
                 </a:solidFill>
                 <a:latin typeface="Onest"/>
                 <a:ea typeface="Onest"/>
-                <a:cs typeface="Onest"/>
+                <a:cs typeface="Times New Roman" panose="02020603050405020304" pitchFamily="18" charset="0"/>
               </a:rPr>
               <a:t>стохастическая</a:t>
             </a:r>
@@ -15085,7 +15910,7 @@
                 </a:solidFill>
                 <a:latin typeface="Onest"/>
                 <a:ea typeface="Onest"/>
-                <a:cs typeface="Onest"/>
+                <a:cs typeface="Times New Roman" panose="02020603050405020304" pitchFamily="18" charset="0"/>
               </a:rPr>
               <a:t> black-box </a:t>
             </a:r>
@@ -15096,7 +15921,7 @@
                 </a:solidFill>
                 <a:latin typeface="Onest"/>
                 <a:ea typeface="Onest"/>
-                <a:cs typeface="Onest"/>
+                <a:cs typeface="Times New Roman" panose="02020603050405020304" pitchFamily="18" charset="0"/>
               </a:rPr>
               <a:t>задача</a:t>
             </a:r>
@@ -15107,7 +15932,7 @@
                 </a:solidFill>
                 <a:latin typeface="Onest"/>
                 <a:ea typeface="Onest"/>
-                <a:cs typeface="Onest"/>
+                <a:cs typeface="Times New Roman" panose="02020603050405020304" pitchFamily="18" charset="0"/>
               </a:rPr>
               <a:t> с </a:t>
             </a:r>
@@ -15118,7 +15943,7 @@
                 </a:solidFill>
                 <a:latin typeface="Onest"/>
                 <a:ea typeface="Onest"/>
-                <a:cs typeface="Onest"/>
+                <a:cs typeface="Times New Roman" panose="02020603050405020304" pitchFamily="18" charset="0"/>
               </a:rPr>
               <a:t>ограничениями</a:t>
             </a:r>
@@ -15129,7 +15954,7 @@
                 </a:solidFill>
                 <a:latin typeface="Onest"/>
                 <a:ea typeface="Onest"/>
-                <a:cs typeface="Onest"/>
+                <a:cs typeface="Times New Roman" panose="02020603050405020304" pitchFamily="18" charset="0"/>
               </a:rPr>
               <a:t>.</a:t>
             </a:r>
@@ -15139,7 +15964,7 @@
               </a:solidFill>
               <a:latin typeface="Onest"/>
               <a:ea typeface="Onest"/>
-              <a:cs typeface="Onest"/>
+              <a:cs typeface="Times New Roman" panose="02020603050405020304" pitchFamily="18" charset="0"/>
             </a:endParaRPr>
           </a:p>
           <a:p>
@@ -15165,7 +15990,7 @@
                 </a:solidFill>
                 <a:latin typeface="Onest"/>
                 <a:ea typeface="Onest"/>
-                <a:cs typeface="Onest"/>
+                <a:cs typeface="Times New Roman" panose="02020603050405020304" pitchFamily="18" charset="0"/>
               </a:rPr>
               <a:t>Обоснован набор эвристических методов: RS, DE, GA, PSO и BO.</a:t>
             </a:r>
@@ -15193,7 +16018,7 @@
                 </a:solidFill>
                 <a:latin typeface="Onest"/>
                 <a:ea typeface="Onest"/>
-                <a:cs typeface="Onest"/>
+                <a:cs typeface="Times New Roman" panose="02020603050405020304" pitchFamily="18" charset="0"/>
               </a:rPr>
               <a:t>Разработана </a:t>
             </a:r>
@@ -15204,7 +16029,7 @@
                 </a:solidFill>
                 <a:latin typeface="Onest"/>
                 <a:ea typeface="Onest"/>
-                <a:cs typeface="Onest"/>
+                <a:cs typeface="Times New Roman" panose="02020603050405020304" pitchFamily="18" charset="0"/>
               </a:rPr>
               <a:t>Python</a:t>
             </a:r>
@@ -15215,7 +16040,7 @@
                 </a:solidFill>
                 <a:latin typeface="Onest"/>
                 <a:ea typeface="Onest"/>
-                <a:cs typeface="Onest"/>
+                <a:cs typeface="Times New Roman" panose="02020603050405020304" pitchFamily="18" charset="0"/>
               </a:rPr>
               <a:t>-система: </a:t>
             </a:r>
@@ -15226,7 +16051,7 @@
                 </a:solidFill>
                 <a:latin typeface="Onest"/>
                 <a:ea typeface="Onest"/>
-                <a:cs typeface="Onest"/>
+                <a:cs typeface="Times New Roman" panose="02020603050405020304" pitchFamily="18" charset="0"/>
               </a:rPr>
               <a:t>датасеты</a:t>
             </a:r>
@@ -15237,7 +16062,7 @@
                 </a:solidFill>
                 <a:latin typeface="Onest"/>
                 <a:ea typeface="Onest"/>
-                <a:cs typeface="Onest"/>
+                <a:cs typeface="Times New Roman" panose="02020603050405020304" pitchFamily="18" charset="0"/>
               </a:rPr>
               <a:t>, GMP-ECM, оптимизация, валидация и анализ.</a:t>
             </a:r>
@@ -15265,13 +16090,16 @@
                 </a:solidFill>
                 <a:latin typeface="Onest"/>
                 <a:ea typeface="Onest"/>
-                <a:cs typeface="Onest"/>
+                <a:cs typeface="Times New Roman" panose="02020603050405020304" pitchFamily="18" charset="0"/>
               </a:rPr>
               <a:t>Проведены эксперименты, независимая контрольная валидация, анализ ограничений и рекомендации.</a:t>
             </a:r>
           </a:p>
           <a:p>
             <a:pPr algn="l">
+              <a:lnSpc>
+                <a:spcPct val="150000"/>
+              </a:lnSpc>
               <a:buNone/>
               <a:defRPr sz="1800" b="0">
                 <a:solidFill>
@@ -15282,7 +16110,7 @@
                 <a:cs typeface="Onest"/>
               </a:defRPr>
             </a:pPr>
-            <a:endParaRPr sz="1400" b="0" dirty="0">
+            <a:endParaRPr sz="1100" b="0" dirty="0">
               <a:solidFill>
                 <a:srgbClr val="15181F"/>
               </a:solidFill>
@@ -18901,15 +19729,224 @@
               </a:defRPr>
             </a:pPr>
             <a:r>
-              <a:rPr b="0">
-                <a:solidFill>
-                  <a:srgbClr val="15181F"/>
-                </a:solidFill>
-                <a:latin typeface="Onest"/>
-                <a:ea typeface="Onest"/>
-                <a:cs typeface="Onest"/>
-              </a:rPr>
-              <a:t>Разработать и исследовать программную систему автоматического подбора параметров ECM и оценить выигрыш относительно GMP-ECM.</a:t>
+              <a:rPr b="0" dirty="0" err="1">
+                <a:solidFill>
+                  <a:srgbClr val="15181F"/>
+                </a:solidFill>
+                <a:latin typeface="Onest"/>
+                <a:ea typeface="Onest"/>
+                <a:cs typeface="Onest"/>
+              </a:rPr>
+              <a:t>Разработать</a:t>
+            </a:r>
+            <a:r>
+              <a:rPr b="0" dirty="0">
+                <a:solidFill>
+                  <a:srgbClr val="15181F"/>
+                </a:solidFill>
+                <a:latin typeface="Onest"/>
+                <a:ea typeface="Onest"/>
+                <a:cs typeface="Onest"/>
+              </a:rPr>
+              <a:t> и </a:t>
+            </a:r>
+            <a:r>
+              <a:rPr b="0" dirty="0" err="1">
+                <a:solidFill>
+                  <a:srgbClr val="15181F"/>
+                </a:solidFill>
+                <a:latin typeface="Onest"/>
+                <a:ea typeface="Onest"/>
+                <a:cs typeface="Onest"/>
+              </a:rPr>
+              <a:t>исследовать</a:t>
+            </a:r>
+            <a:r>
+              <a:rPr b="0" dirty="0">
+                <a:solidFill>
+                  <a:srgbClr val="15181F"/>
+                </a:solidFill>
+                <a:latin typeface="Onest"/>
+                <a:ea typeface="Onest"/>
+                <a:cs typeface="Onest"/>
+              </a:rPr>
+              <a:t> </a:t>
+            </a:r>
+            <a:r>
+              <a:rPr b="0" dirty="0" err="1">
+                <a:solidFill>
+                  <a:srgbClr val="15181F"/>
+                </a:solidFill>
+                <a:latin typeface="Onest"/>
+                <a:ea typeface="Onest"/>
+                <a:cs typeface="Onest"/>
+              </a:rPr>
+              <a:t>программную</a:t>
+            </a:r>
+            <a:r>
+              <a:rPr b="0" dirty="0">
+                <a:solidFill>
+                  <a:srgbClr val="15181F"/>
+                </a:solidFill>
+                <a:latin typeface="Onest"/>
+                <a:ea typeface="Onest"/>
+                <a:cs typeface="Onest"/>
+              </a:rPr>
+              <a:t> </a:t>
+            </a:r>
+            <a:r>
+              <a:rPr b="0" dirty="0" err="1">
+                <a:solidFill>
+                  <a:srgbClr val="15181F"/>
+                </a:solidFill>
+                <a:latin typeface="Onest"/>
+                <a:ea typeface="Onest"/>
+                <a:cs typeface="Onest"/>
+              </a:rPr>
+              <a:t>систему</a:t>
+            </a:r>
+            <a:r>
+              <a:rPr b="0" dirty="0">
+                <a:solidFill>
+                  <a:srgbClr val="15181F"/>
+                </a:solidFill>
+                <a:latin typeface="Onest"/>
+                <a:ea typeface="Onest"/>
+                <a:cs typeface="Onest"/>
+              </a:rPr>
+              <a:t> </a:t>
+            </a:r>
+            <a:r>
+              <a:rPr b="0" dirty="0" err="1">
+                <a:solidFill>
+                  <a:srgbClr val="15181F"/>
+                </a:solidFill>
+                <a:latin typeface="Onest"/>
+                <a:ea typeface="Onest"/>
+                <a:cs typeface="Onest"/>
+              </a:rPr>
+              <a:t>автоматического</a:t>
+            </a:r>
+            <a:r>
+              <a:rPr b="0" dirty="0">
+                <a:solidFill>
+                  <a:srgbClr val="15181F"/>
+                </a:solidFill>
+                <a:latin typeface="Onest"/>
+                <a:ea typeface="Onest"/>
+                <a:cs typeface="Onest"/>
+              </a:rPr>
+              <a:t> </a:t>
+            </a:r>
+            <a:r>
+              <a:rPr b="0" dirty="0" err="1">
+                <a:solidFill>
+                  <a:srgbClr val="15181F"/>
+                </a:solidFill>
+                <a:latin typeface="Onest"/>
+                <a:ea typeface="Onest"/>
+                <a:cs typeface="Onest"/>
+              </a:rPr>
+              <a:t>подбора</a:t>
+            </a:r>
+            <a:r>
+              <a:rPr b="0" dirty="0">
+                <a:solidFill>
+                  <a:srgbClr val="15181F"/>
+                </a:solidFill>
+                <a:latin typeface="Onest"/>
+                <a:ea typeface="Onest"/>
+                <a:cs typeface="Onest"/>
+              </a:rPr>
+              <a:t> </a:t>
+            </a:r>
+            <a:r>
+              <a:rPr b="0" dirty="0" err="1">
+                <a:solidFill>
+                  <a:srgbClr val="15181F"/>
+                </a:solidFill>
+                <a:latin typeface="Onest"/>
+                <a:ea typeface="Onest"/>
+                <a:cs typeface="Onest"/>
+              </a:rPr>
+              <a:t>параметров</a:t>
+            </a:r>
+            <a:r>
+              <a:rPr b="0" dirty="0">
+                <a:solidFill>
+                  <a:srgbClr val="15181F"/>
+                </a:solidFill>
+                <a:latin typeface="Onest"/>
+                <a:ea typeface="Onest"/>
+                <a:cs typeface="Onest"/>
+              </a:rPr>
+              <a:t> ECM и </a:t>
+            </a:r>
+            <a:r>
+              <a:rPr b="0" dirty="0" err="1">
+                <a:solidFill>
+                  <a:srgbClr val="15181F"/>
+                </a:solidFill>
+                <a:latin typeface="Onest"/>
+                <a:ea typeface="Onest"/>
+                <a:cs typeface="Onest"/>
+              </a:rPr>
+              <a:t>оценить</a:t>
+            </a:r>
+            <a:r>
+              <a:rPr b="0" dirty="0">
+                <a:solidFill>
+                  <a:srgbClr val="15181F"/>
+                </a:solidFill>
+                <a:latin typeface="Onest"/>
+                <a:ea typeface="Onest"/>
+                <a:cs typeface="Onest"/>
+              </a:rPr>
+              <a:t> </a:t>
+            </a:r>
+            <a:r>
+              <a:rPr b="0" dirty="0" err="1">
+                <a:solidFill>
+                  <a:srgbClr val="15181F"/>
+                </a:solidFill>
+                <a:latin typeface="Onest"/>
+                <a:ea typeface="Onest"/>
+                <a:cs typeface="Onest"/>
+              </a:rPr>
+              <a:t>выигрыш</a:t>
+            </a:r>
+            <a:r>
+              <a:rPr b="0" dirty="0">
+                <a:solidFill>
+                  <a:srgbClr val="15181F"/>
+                </a:solidFill>
+                <a:latin typeface="Onest"/>
+                <a:ea typeface="Onest"/>
+                <a:cs typeface="Onest"/>
+              </a:rPr>
+              <a:t> </a:t>
+            </a:r>
+            <a:r>
+              <a:rPr b="0" dirty="0" err="1">
+                <a:solidFill>
+                  <a:srgbClr val="15181F"/>
+                </a:solidFill>
+                <a:latin typeface="Onest"/>
+                <a:ea typeface="Onest"/>
+                <a:cs typeface="Onest"/>
+              </a:rPr>
+              <a:t>относительно</a:t>
+            </a:r>
+            <a:r>
+              <a:rPr b="0" dirty="0">
+                <a:solidFill>
+                  <a:srgbClr val="15181F"/>
+                </a:solidFill>
+                <a:latin typeface="Onest"/>
+                <a:ea typeface="Onest"/>
+                <a:cs typeface="Onest"/>
+              </a:rPr>
+              <a:t> GMP-ECM.</a:t>
             </a:r>
           </a:p>
         </p:txBody>
@@ -18966,7 +20003,7 @@
               </a:defRPr>
             </a:pPr>
             <a:r>
-              <a:rPr b="1">
+              <a:rPr b="1" dirty="0" err="1">
                 <a:solidFill>
                   <a:srgbClr val="37B34A"/>
                 </a:solidFill>
@@ -18974,7 +20011,18 @@
                 <a:ea typeface="Onest"/>
                 <a:cs typeface="Onest"/>
               </a:rPr>
-              <a:t>Задача 1</a:t>
+              <a:t>Задача</a:t>
+            </a:r>
+            <a:r>
+              <a:rPr b="1" dirty="0">
+                <a:solidFill>
+                  <a:srgbClr val="37B34A"/>
+                </a:solidFill>
+                <a:latin typeface="Onest"/>
+                <a:ea typeface="Onest"/>
+                <a:cs typeface="Onest"/>
+              </a:rPr>
+              <a:t> 1</a:t>
             </a:r>
           </a:p>
         </p:txBody>
@@ -19033,6 +20081,962 @@
               </a:defRPr>
             </a:pPr>
             <a:r>
+              <a:rPr sz="1500" dirty="0" err="1">
+                <a:solidFill>
+                  <a:srgbClr val="15181F"/>
+                </a:solidFill>
+                <a:latin typeface="Onest"/>
+                <a:ea typeface="Onest"/>
+                <a:cs typeface="Onest"/>
+              </a:rPr>
+              <a:t>Провести</a:t>
+            </a:r>
+            <a:r>
+              <a:rPr sz="1500" dirty="0">
+                <a:solidFill>
+                  <a:srgbClr val="15181F"/>
+                </a:solidFill>
+                <a:latin typeface="Onest"/>
+                <a:ea typeface="Onest"/>
+                <a:cs typeface="Onest"/>
+              </a:rPr>
+              <a:t> </a:t>
+            </a:r>
+            <a:r>
+              <a:rPr sz="1500" dirty="0" err="1">
+                <a:solidFill>
+                  <a:srgbClr val="15181F"/>
+                </a:solidFill>
+                <a:latin typeface="Onest"/>
+                <a:ea typeface="Onest"/>
+                <a:cs typeface="Onest"/>
+              </a:rPr>
+              <a:t>аналитический</a:t>
+            </a:r>
+            <a:r>
+              <a:rPr sz="1500" dirty="0">
+                <a:solidFill>
+                  <a:srgbClr val="15181F"/>
+                </a:solidFill>
+                <a:latin typeface="Onest"/>
+                <a:ea typeface="Onest"/>
+                <a:cs typeface="Onest"/>
+              </a:rPr>
+              <a:t> </a:t>
+            </a:r>
+            <a:r>
+              <a:rPr sz="1500" dirty="0" err="1">
+                <a:solidFill>
+                  <a:srgbClr val="15181F"/>
+                </a:solidFill>
+                <a:latin typeface="Onest"/>
+                <a:ea typeface="Onest"/>
+                <a:cs typeface="Onest"/>
+              </a:rPr>
+              <a:t>обзор</a:t>
+            </a:r>
+            <a:r>
+              <a:rPr sz="1500" dirty="0">
+                <a:solidFill>
+                  <a:srgbClr val="15181F"/>
+                </a:solidFill>
+                <a:latin typeface="Onest"/>
+                <a:ea typeface="Onest"/>
+                <a:cs typeface="Onest"/>
+              </a:rPr>
+              <a:t> </a:t>
+            </a:r>
+            <a:r>
+              <a:rPr sz="1500" dirty="0" err="1">
+                <a:solidFill>
+                  <a:srgbClr val="15181F"/>
+                </a:solidFill>
+                <a:latin typeface="Onest"/>
+                <a:ea typeface="Onest"/>
+                <a:cs typeface="Onest"/>
+              </a:rPr>
+              <a:t>алгоритмов</a:t>
+            </a:r>
+            <a:r>
+              <a:rPr sz="1500" dirty="0">
+                <a:solidFill>
+                  <a:srgbClr val="15181F"/>
+                </a:solidFill>
+                <a:latin typeface="Onest"/>
+                <a:ea typeface="Onest"/>
+                <a:cs typeface="Onest"/>
+              </a:rPr>
+              <a:t> </a:t>
+            </a:r>
+            <a:r>
+              <a:rPr sz="1500" dirty="0" err="1">
+                <a:solidFill>
+                  <a:srgbClr val="15181F"/>
+                </a:solidFill>
+                <a:latin typeface="Onest"/>
+                <a:ea typeface="Onest"/>
+                <a:cs typeface="Onest"/>
+              </a:rPr>
+              <a:t>факторизации</a:t>
+            </a:r>
+            <a:r>
+              <a:rPr sz="1500" dirty="0">
+                <a:solidFill>
+                  <a:srgbClr val="15181F"/>
+                </a:solidFill>
+                <a:latin typeface="Onest"/>
+                <a:ea typeface="Onest"/>
+                <a:cs typeface="Onest"/>
+              </a:rPr>
+              <a:t> и </a:t>
+            </a:r>
+            <a:r>
+              <a:rPr sz="1500" dirty="0" err="1">
+                <a:solidFill>
+                  <a:srgbClr val="15181F"/>
+                </a:solidFill>
+                <a:latin typeface="Onest"/>
+                <a:ea typeface="Onest"/>
+                <a:cs typeface="Onest"/>
+              </a:rPr>
+              <a:t>определить</a:t>
+            </a:r>
+            <a:r>
+              <a:rPr sz="1500" dirty="0">
+                <a:solidFill>
+                  <a:srgbClr val="15181F"/>
+                </a:solidFill>
+                <a:latin typeface="Onest"/>
+                <a:ea typeface="Onest"/>
+                <a:cs typeface="Onest"/>
+              </a:rPr>
+              <a:t> </a:t>
+            </a:r>
+            <a:r>
+              <a:rPr sz="1500" dirty="0" err="1">
+                <a:solidFill>
+                  <a:srgbClr val="15181F"/>
+                </a:solidFill>
+                <a:latin typeface="Onest"/>
+                <a:ea typeface="Onest"/>
+                <a:cs typeface="Onest"/>
+              </a:rPr>
+              <a:t>место</a:t>
+            </a:r>
+            <a:r>
+              <a:rPr sz="1500" dirty="0">
+                <a:solidFill>
+                  <a:srgbClr val="15181F"/>
+                </a:solidFill>
+                <a:latin typeface="Onest"/>
+                <a:ea typeface="Onest"/>
+                <a:cs typeface="Onest"/>
+              </a:rPr>
+              <a:t> ECM </a:t>
+            </a:r>
+            <a:r>
+              <a:rPr sz="1500" dirty="0" err="1">
+                <a:solidFill>
+                  <a:srgbClr val="15181F"/>
+                </a:solidFill>
+                <a:latin typeface="Onest"/>
+                <a:ea typeface="Onest"/>
+                <a:cs typeface="Onest"/>
+              </a:rPr>
+              <a:t>среди</a:t>
+            </a:r>
+            <a:r>
+              <a:rPr sz="1500" dirty="0">
+                <a:solidFill>
+                  <a:srgbClr val="15181F"/>
+                </a:solidFill>
+                <a:latin typeface="Onest"/>
+                <a:ea typeface="Onest"/>
+                <a:cs typeface="Onest"/>
+              </a:rPr>
+              <a:t> </a:t>
+            </a:r>
+            <a:r>
+              <a:rPr sz="1500" dirty="0" err="1">
+                <a:solidFill>
+                  <a:srgbClr val="15181F"/>
+                </a:solidFill>
+                <a:latin typeface="Onest"/>
+                <a:ea typeface="Onest"/>
+                <a:cs typeface="Onest"/>
+              </a:rPr>
+              <a:t>специализированных</a:t>
+            </a:r>
+            <a:r>
+              <a:rPr sz="1500" dirty="0">
+                <a:solidFill>
+                  <a:srgbClr val="15181F"/>
+                </a:solidFill>
+                <a:latin typeface="Onest"/>
+                <a:ea typeface="Onest"/>
+                <a:cs typeface="Onest"/>
+              </a:rPr>
+              <a:t> и </a:t>
+            </a:r>
+            <a:r>
+              <a:rPr sz="1500" dirty="0" err="1">
+                <a:solidFill>
+                  <a:srgbClr val="15181F"/>
+                </a:solidFill>
+                <a:latin typeface="Onest"/>
+                <a:ea typeface="Onest"/>
+                <a:cs typeface="Onest"/>
+              </a:rPr>
+              <a:t>универсальных</a:t>
+            </a:r>
+            <a:r>
+              <a:rPr sz="1500" dirty="0">
+                <a:solidFill>
+                  <a:srgbClr val="15181F"/>
+                </a:solidFill>
+                <a:latin typeface="Onest"/>
+                <a:ea typeface="Onest"/>
+                <a:cs typeface="Onest"/>
+              </a:rPr>
+              <a:t> </a:t>
+            </a:r>
+            <a:r>
+              <a:rPr sz="1500" dirty="0" err="1">
+                <a:solidFill>
+                  <a:srgbClr val="15181F"/>
+                </a:solidFill>
+                <a:latin typeface="Onest"/>
+                <a:ea typeface="Onest"/>
+                <a:cs typeface="Onest"/>
+              </a:rPr>
+              <a:t>методов</a:t>
+            </a:r>
+            <a:r>
+              <a:rPr sz="1500" dirty="0">
+                <a:solidFill>
+                  <a:srgbClr val="15181F"/>
+                </a:solidFill>
+                <a:latin typeface="Onest"/>
+                <a:ea typeface="Onest"/>
+                <a:cs typeface="Onest"/>
+              </a:rPr>
+              <a:t>.</a:t>
+            </a:r>
+          </a:p>
+          <a:p>
+            <a:pPr>
+              <a:buNone/>
+              <a:defRPr sz="1800" b="0">
+                <a:solidFill>
+                  <a:srgbClr val="15181F"/>
+                </a:solidFill>
+                <a:latin typeface="Onest"/>
+                <a:ea typeface="Onest"/>
+                <a:cs typeface="Onest"/>
+              </a:defRPr>
+            </a:pPr>
+            <a:endParaRPr sz="1500" dirty="0">
+              <a:solidFill>
+                <a:srgbClr val="15181F"/>
+              </a:solidFill>
+              <a:latin typeface="Onest"/>
+              <a:ea typeface="Onest"/>
+              <a:cs typeface="Onest"/>
+            </a:endParaRPr>
+          </a:p>
+        </p:txBody>
+      </p:sp>
+      <p:sp>
+        <p:nvSpPr>
+          <p:cNvPr id="13" name="Прямоугольник 12">
+            <a:extLst>
+              <a:ext uri="{FF2B5EF4-FFF2-40B4-BE49-F238E27FC236}">
+                <a16:creationId xmlns:a16="http://schemas.microsoft.com/office/drawing/2014/main" id="{A585CC9A-C005-4240-A17F-003E5AB7254D}"/>
+              </a:ext>
+            </a:extLst>
+          </p:cNvPr>
+          <p:cNvSpPr>
+            <a:spLocks noGrp="1"/>
+          </p:cNvSpPr>
+          <p:nvPr/>
+        </p:nvSpPr>
+        <p:spPr>
+          <a:xfrm>
+            <a:off x="6477000" y="2709566"/>
+            <a:ext cx="4514850" cy="228600"/>
+          </a:xfrm>
+          <a:prstGeom prst="rect">
+            <a:avLst/>
+          </a:prstGeom>
+          <a:solidFill>
+            <a:srgbClr val="000000">
+              <a:alpha val="0"/>
+            </a:srgbClr>
+          </a:solidFill>
+          <a:ln w="0">
+            <a:solidFill>
+              <a:srgbClr val="000000">
+                <a:alpha val="0"/>
+              </a:srgbClr>
+            </a:solidFill>
+            <a:prstDash val="solid"/>
+          </a:ln>
+        </p:spPr>
+        <p:txBody>
+          <a:bodyPr wrap="square" lIns="0" tIns="0" rIns="0" bIns="0" anchor="t"/>
+          <a:lstStyle/>
+          <a:p>
+            <a:pPr algn="l">
+              <a:buNone/>
+              <a:defRPr sz="1800" b="1">
+                <a:solidFill>
+                  <a:srgbClr val="522878"/>
+                </a:solidFill>
+                <a:latin typeface="Onest"/>
+                <a:ea typeface="Onest"/>
+                <a:cs typeface="Onest"/>
+              </a:defRPr>
+            </a:pPr>
+            <a:r>
+              <a:rPr b="1">
+                <a:solidFill>
+                  <a:srgbClr val="522878"/>
+                </a:solidFill>
+                <a:latin typeface="Onest"/>
+                <a:ea typeface="Onest"/>
+                <a:cs typeface="Onest"/>
+              </a:rPr>
+              <a:t>Задача 2</a:t>
+            </a:r>
+          </a:p>
+        </p:txBody>
+      </p:sp>
+      <p:sp>
+        <p:nvSpPr>
+          <p:cNvPr id="14" name="Прямоугольник 13">
+            <a:extLst>
+              <a:ext uri="{FF2B5EF4-FFF2-40B4-BE49-F238E27FC236}">
+                <a16:creationId xmlns:a16="http://schemas.microsoft.com/office/drawing/2014/main" id="{50D9D933-4609-4B14-AA14-09FD5321DDCD}"/>
+              </a:ext>
+            </a:extLst>
+          </p:cNvPr>
+          <p:cNvSpPr>
+            <a:spLocks noGrp="1"/>
+          </p:cNvSpPr>
+          <p:nvPr/>
+        </p:nvSpPr>
+        <p:spPr>
+          <a:xfrm>
+            <a:off x="6477000" y="3314700"/>
+            <a:ext cx="4514850" cy="361950"/>
+          </a:xfrm>
+          <a:prstGeom prst="rect">
+            <a:avLst/>
+          </a:prstGeom>
+          <a:solidFill>
+            <a:srgbClr val="000000">
+              <a:alpha val="0"/>
+            </a:srgbClr>
+          </a:solidFill>
+          <a:ln w="0">
+            <a:solidFill>
+              <a:srgbClr val="000000">
+                <a:alpha val="0"/>
+              </a:srgbClr>
+            </a:solidFill>
+            <a:prstDash val="solid"/>
+          </a:ln>
+        </p:spPr>
+        <p:txBody>
+          <a:bodyPr wrap="square" lIns="0" tIns="0" rIns="0" bIns="0" anchor="t">
+            <a:normAutofit/>
+          </a:bodyPr>
+          <a:lstStyle/>
+          <a:p>
+            <a:pPr algn="l">
+              <a:buNone/>
+              <a:defRPr sz="1800" b="0">
+                <a:solidFill>
+                  <a:srgbClr val="15181F"/>
+                </a:solidFill>
+                <a:latin typeface="Onest"/>
+                <a:ea typeface="Onest"/>
+                <a:cs typeface="Onest"/>
+              </a:defRPr>
+            </a:pPr>
+            <a:endParaRPr/>
+          </a:p>
+        </p:txBody>
+      </p:sp>
+      <p:sp>
+        <p:nvSpPr>
+          <p:cNvPr id="19" name="Прямоугольник 18">
+            <a:extLst>
+              <a:ext uri="{FF2B5EF4-FFF2-40B4-BE49-F238E27FC236}">
+                <a16:creationId xmlns:a16="http://schemas.microsoft.com/office/drawing/2014/main" id="{63CED086-BC76-476D-9C25-42D09B51D971}"/>
+              </a:ext>
+            </a:extLst>
+          </p:cNvPr>
+          <p:cNvSpPr>
+            <a:spLocks noGrp="1"/>
+          </p:cNvSpPr>
+          <p:nvPr/>
+        </p:nvSpPr>
+        <p:spPr>
+          <a:xfrm>
+            <a:off x="6477000" y="3792512"/>
+            <a:ext cx="4514850" cy="228600"/>
+          </a:xfrm>
+          <a:prstGeom prst="rect">
+            <a:avLst/>
+          </a:prstGeom>
+          <a:solidFill>
+            <a:srgbClr val="000000">
+              <a:alpha val="0"/>
+            </a:srgbClr>
+          </a:solidFill>
+          <a:ln w="0">
+            <a:solidFill>
+              <a:srgbClr val="000000">
+                <a:alpha val="0"/>
+              </a:srgbClr>
+            </a:solidFill>
+            <a:prstDash val="solid"/>
+          </a:ln>
+        </p:spPr>
+        <p:txBody>
+          <a:bodyPr wrap="square" lIns="0" tIns="0" rIns="0" bIns="0" anchor="t"/>
+          <a:lstStyle/>
+          <a:p>
+            <a:pPr algn="l">
+              <a:buNone/>
+              <a:defRPr sz="1800" b="1">
+                <a:solidFill>
+                  <a:srgbClr val="522878"/>
+                </a:solidFill>
+                <a:latin typeface="Onest"/>
+                <a:ea typeface="Onest"/>
+                <a:cs typeface="Onest"/>
+              </a:defRPr>
+            </a:pPr>
+            <a:r>
+              <a:rPr b="1">
+                <a:solidFill>
+                  <a:srgbClr val="522878"/>
+                </a:solidFill>
+                <a:latin typeface="Onest"/>
+                <a:ea typeface="Onest"/>
+                <a:cs typeface="Onest"/>
+              </a:rPr>
+              <a:t>Задача 4</a:t>
+            </a:r>
+          </a:p>
+        </p:txBody>
+      </p:sp>
+      <p:sp>
+        <p:nvSpPr>
+          <p:cNvPr id="20" name="Прямоугольник 19">
+            <a:extLst>
+              <a:ext uri="{FF2B5EF4-FFF2-40B4-BE49-F238E27FC236}">
+                <a16:creationId xmlns:a16="http://schemas.microsoft.com/office/drawing/2014/main" id="{348098E7-8F7E-4285-A4D8-76AC2844EDBB}"/>
+              </a:ext>
+            </a:extLst>
+          </p:cNvPr>
+          <p:cNvSpPr>
+            <a:spLocks noGrp="1"/>
+          </p:cNvSpPr>
+          <p:nvPr/>
+        </p:nvSpPr>
+        <p:spPr>
+          <a:xfrm>
+            <a:off x="6477000" y="4324350"/>
+            <a:ext cx="4514850" cy="361950"/>
+          </a:xfrm>
+          <a:prstGeom prst="rect">
+            <a:avLst/>
+          </a:prstGeom>
+          <a:solidFill>
+            <a:srgbClr val="000000">
+              <a:alpha val="0"/>
+            </a:srgbClr>
+          </a:solidFill>
+          <a:ln w="0">
+            <a:solidFill>
+              <a:srgbClr val="000000">
+                <a:alpha val="0"/>
+              </a:srgbClr>
+            </a:solidFill>
+            <a:prstDash val="solid"/>
+          </a:ln>
+        </p:spPr>
+        <p:txBody>
+          <a:bodyPr wrap="square" lIns="0" tIns="0" rIns="0" bIns="0" anchor="t">
+            <a:normAutofit/>
+          </a:bodyPr>
+          <a:lstStyle/>
+          <a:p>
+            <a:pPr algn="l">
+              <a:buNone/>
+              <a:defRPr sz="1800" b="0">
+                <a:solidFill>
+                  <a:srgbClr val="15181F"/>
+                </a:solidFill>
+                <a:latin typeface="Onest"/>
+                <a:ea typeface="Onest"/>
+                <a:cs typeface="Onest"/>
+              </a:defRPr>
+            </a:pPr>
+            <a:endParaRPr/>
+          </a:p>
+        </p:txBody>
+      </p:sp>
+      <p:sp>
+        <p:nvSpPr>
+          <p:cNvPr id="22" name="Прямоугольник 21">
+            <a:extLst>
+              <a:ext uri="{FF2B5EF4-FFF2-40B4-BE49-F238E27FC236}">
+                <a16:creationId xmlns:a16="http://schemas.microsoft.com/office/drawing/2014/main" id="{F5DD6D70-0886-445C-B40D-F26C3BFF8618}"/>
+              </a:ext>
+            </a:extLst>
+          </p:cNvPr>
+          <p:cNvSpPr>
+            <a:spLocks noGrp="1"/>
+          </p:cNvSpPr>
+          <p:nvPr/>
+        </p:nvSpPr>
+        <p:spPr>
+          <a:xfrm>
+            <a:off x="948706" y="4894671"/>
+            <a:ext cx="4514850" cy="228600"/>
+          </a:xfrm>
+          <a:prstGeom prst="rect">
+            <a:avLst/>
+          </a:prstGeom>
+          <a:solidFill>
+            <a:srgbClr val="000000">
+              <a:alpha val="0"/>
+            </a:srgbClr>
+          </a:solidFill>
+          <a:ln w="0">
+            <a:solidFill>
+              <a:srgbClr val="000000">
+                <a:alpha val="0"/>
+              </a:srgbClr>
+            </a:solidFill>
+            <a:prstDash val="solid"/>
+          </a:ln>
+        </p:spPr>
+        <p:txBody>
+          <a:bodyPr wrap="square" lIns="0" tIns="0" rIns="0" bIns="0" anchor="t"/>
+          <a:lstStyle/>
+          <a:p>
+            <a:pPr algn="l">
+              <a:buNone/>
+              <a:defRPr sz="1800" b="1">
+                <a:solidFill>
+                  <a:srgbClr val="37B34A"/>
+                </a:solidFill>
+                <a:latin typeface="Onest"/>
+                <a:ea typeface="Onest"/>
+                <a:cs typeface="Onest"/>
+              </a:defRPr>
+            </a:pPr>
+            <a:r>
+              <a:rPr b="1">
+                <a:solidFill>
+                  <a:srgbClr val="37B34A"/>
+                </a:solidFill>
+                <a:latin typeface="Onest"/>
+                <a:ea typeface="Onest"/>
+                <a:cs typeface="Onest"/>
+              </a:rPr>
+              <a:t>Задача 5</a:t>
+            </a:r>
+          </a:p>
+        </p:txBody>
+      </p:sp>
+      <p:sp>
+        <p:nvSpPr>
+          <p:cNvPr id="25" name="Прямоугольник 24">
+            <a:extLst>
+              <a:ext uri="{FF2B5EF4-FFF2-40B4-BE49-F238E27FC236}">
+                <a16:creationId xmlns:a16="http://schemas.microsoft.com/office/drawing/2014/main" id="{6A4F78EE-10AD-41D1-8FDF-A122E131283E}"/>
+              </a:ext>
+            </a:extLst>
+          </p:cNvPr>
+          <p:cNvSpPr>
+            <a:spLocks noGrp="1"/>
+          </p:cNvSpPr>
+          <p:nvPr/>
+        </p:nvSpPr>
+        <p:spPr>
+          <a:xfrm>
+            <a:off x="6477000" y="4883104"/>
+            <a:ext cx="4514850" cy="228600"/>
+          </a:xfrm>
+          <a:prstGeom prst="rect">
+            <a:avLst/>
+          </a:prstGeom>
+          <a:solidFill>
+            <a:srgbClr val="000000">
+              <a:alpha val="0"/>
+            </a:srgbClr>
+          </a:solidFill>
+          <a:ln w="0">
+            <a:solidFill>
+              <a:srgbClr val="000000">
+                <a:alpha val="0"/>
+              </a:srgbClr>
+            </a:solidFill>
+            <a:prstDash val="solid"/>
+          </a:ln>
+        </p:spPr>
+        <p:txBody>
+          <a:bodyPr wrap="square" lIns="0" tIns="0" rIns="0" bIns="0" anchor="t"/>
+          <a:lstStyle/>
+          <a:p>
+            <a:pPr algn="l">
+              <a:buNone/>
+              <a:defRPr sz="1800" b="1">
+                <a:solidFill>
+                  <a:srgbClr val="522878"/>
+                </a:solidFill>
+                <a:latin typeface="Onest"/>
+                <a:ea typeface="Onest"/>
+                <a:cs typeface="Onest"/>
+              </a:defRPr>
+            </a:pPr>
+            <a:r>
+              <a:rPr b="1">
+                <a:solidFill>
+                  <a:srgbClr val="522878"/>
+                </a:solidFill>
+                <a:latin typeface="Onest"/>
+                <a:ea typeface="Onest"/>
+                <a:cs typeface="Onest"/>
+              </a:rPr>
+              <a:t>Задача 6</a:t>
+            </a:r>
+          </a:p>
+        </p:txBody>
+      </p:sp>
+      <p:sp>
+        <p:nvSpPr>
+          <p:cNvPr id="28" name="Прямоугольник 27">
+            <a:extLst>
+              <a:ext uri="{FF2B5EF4-FFF2-40B4-BE49-F238E27FC236}">
+                <a16:creationId xmlns:a16="http://schemas.microsoft.com/office/drawing/2014/main" id="{704909F7-6AF2-462A-976E-E9A22B8C022B}"/>
+              </a:ext>
+            </a:extLst>
+          </p:cNvPr>
+          <p:cNvSpPr>
+            <a:spLocks noGrp="1"/>
+          </p:cNvSpPr>
+          <p:nvPr/>
+        </p:nvSpPr>
+        <p:spPr>
+          <a:xfrm>
+            <a:off x="0" y="5905500"/>
+            <a:ext cx="2619375" cy="76200"/>
+          </a:xfrm>
+          <a:prstGeom prst="rect">
+            <a:avLst/>
+          </a:prstGeom>
+          <a:solidFill>
+            <a:srgbClr val="F39768"/>
+          </a:solidFill>
+          <a:ln w="0">
+            <a:solidFill>
+              <a:srgbClr val="F39768"/>
+            </a:solidFill>
+            <a:prstDash val="solid"/>
+          </a:ln>
+        </p:spPr>
+      </p:sp>
+      <p:sp>
+        <p:nvSpPr>
+          <p:cNvPr id="29" name="Прямоугольник 28">
+            <a:extLst>
+              <a:ext uri="{FF2B5EF4-FFF2-40B4-BE49-F238E27FC236}">
+                <a16:creationId xmlns:a16="http://schemas.microsoft.com/office/drawing/2014/main" id="{A48F7F9A-A5BD-48FB-9DF8-DC99EB26F43E}"/>
+              </a:ext>
+            </a:extLst>
+          </p:cNvPr>
+          <p:cNvSpPr>
+            <a:spLocks noGrp="1"/>
+          </p:cNvSpPr>
+          <p:nvPr/>
+        </p:nvSpPr>
+        <p:spPr>
+          <a:xfrm>
+            <a:off x="2619375" y="5905500"/>
+            <a:ext cx="3143250" cy="76200"/>
+          </a:xfrm>
+          <a:prstGeom prst="rect">
+            <a:avLst/>
+          </a:prstGeom>
+          <a:solidFill>
+            <a:srgbClr val="522878"/>
+          </a:solidFill>
+          <a:ln w="0">
+            <a:solidFill>
+              <a:srgbClr val="522878"/>
+            </a:solidFill>
+            <a:prstDash val="solid"/>
+          </a:ln>
+        </p:spPr>
+      </p:sp>
+      <p:sp>
+        <p:nvSpPr>
+          <p:cNvPr id="30" name="Прямоугольник 29">
+            <a:extLst>
+              <a:ext uri="{FF2B5EF4-FFF2-40B4-BE49-F238E27FC236}">
+                <a16:creationId xmlns:a16="http://schemas.microsoft.com/office/drawing/2014/main" id="{1D148A24-D46F-44F7-8CD6-6C752BACA339}"/>
+              </a:ext>
+            </a:extLst>
+          </p:cNvPr>
+          <p:cNvSpPr>
+            <a:spLocks noGrp="1"/>
+          </p:cNvSpPr>
+          <p:nvPr/>
+        </p:nvSpPr>
+        <p:spPr>
+          <a:xfrm>
+            <a:off x="5762625" y="5905500"/>
+            <a:ext cx="6429375" cy="76200"/>
+          </a:xfrm>
+          <a:prstGeom prst="rect">
+            <a:avLst/>
+          </a:prstGeom>
+          <a:solidFill>
+            <a:srgbClr val="37B34A"/>
+          </a:solidFill>
+          <a:ln w="0">
+            <a:solidFill>
+              <a:srgbClr val="37B34A"/>
+            </a:solidFill>
+            <a:prstDash val="solid"/>
+          </a:ln>
+        </p:spPr>
+      </p:sp>
+      <p:pic>
+        <p:nvPicPr>
+          <p:cNvPr id="61" name="Рисунок 33"/>
+          <p:cNvPicPr>
+            <a:picLocks noChangeAspect="1"/>
+          </p:cNvPicPr>
+          <p:nvPr/>
+        </p:nvPicPr>
+        <p:blipFill>
+          <a:blip r:embed="rId3"/>
+          <a:stretch/>
+        </p:blipFill>
+        <p:spPr>
+          <a:xfrm>
+            <a:off x="9572625" y="248984"/>
+            <a:ext cx="2095500" cy="787908"/>
+          </a:xfrm>
+          <a:prstGeom prst="rect">
+            <a:avLst/>
+          </a:prstGeom>
+        </p:spPr>
+      </p:pic>
+      <p:sp>
+        <p:nvSpPr>
+          <p:cNvPr id="36" name="Прямоугольник 35">
+            <a:extLst>
+              <a:ext uri="{FF2B5EF4-FFF2-40B4-BE49-F238E27FC236}">
+                <a16:creationId xmlns:a16="http://schemas.microsoft.com/office/drawing/2014/main" id="{A7E3FDB4-E0A7-4C73-B090-6104DE16E6E6}"/>
+              </a:ext>
+            </a:extLst>
+          </p:cNvPr>
+          <p:cNvSpPr>
+            <a:spLocks noGrp="1"/>
+          </p:cNvSpPr>
+          <p:nvPr/>
+        </p:nvSpPr>
+        <p:spPr>
+          <a:xfrm>
+            <a:off x="571500" y="819150"/>
+            <a:ext cx="8477250" cy="723900"/>
+          </a:xfrm>
+          <a:prstGeom prst="rect">
+            <a:avLst/>
+          </a:prstGeom>
+          <a:solidFill>
+            <a:srgbClr val="000000">
+              <a:alpha val="0"/>
+            </a:srgbClr>
+          </a:solidFill>
+          <a:ln w="0">
+            <a:solidFill>
+              <a:srgbClr val="000000">
+                <a:alpha val="0"/>
+              </a:srgbClr>
+            </a:solidFill>
+            <a:prstDash val="solid"/>
+          </a:ln>
+        </p:spPr>
+        <p:txBody>
+          <a:bodyPr lIns="0" tIns="0" rIns="0" bIns="0" anchor="t"/>
+          <a:lstStyle/>
+          <a:p>
+            <a:pPr>
+              <a:buNone/>
+              <a:defRPr sz="2325" b="1">
+                <a:solidFill>
+                  <a:srgbClr val="15181F"/>
+                </a:solidFill>
+                <a:latin typeface="Onest"/>
+                <a:ea typeface="Onest"/>
+                <a:cs typeface="Onest"/>
+              </a:defRPr>
+            </a:pPr>
+            <a:r>
+              <a:rPr sz="2325" b="1">
+                <a:solidFill>
+                  <a:srgbClr val="15181F"/>
+                </a:solidFill>
+                <a:latin typeface="Onest"/>
+                <a:ea typeface="Onest"/>
+                <a:cs typeface="Onest"/>
+              </a:rPr>
+              <a:t>Цель работы и ключевые этапы:</a:t>
+            </a:r>
+            <a:br/>
+            <a:r>
+              <a:rPr sz="2325" b="1">
+                <a:solidFill>
+                  <a:srgbClr val="15181F"/>
+                </a:solidFill>
+                <a:latin typeface="Onest"/>
+                <a:ea typeface="Onest"/>
+                <a:cs typeface="Onest"/>
+              </a:rPr>
+              <a:t>от анализа ECM до проверки найденных параметров</a:t>
+            </a:r>
+          </a:p>
+        </p:txBody>
+      </p:sp>
+      <p:sp>
+        <p:nvSpPr>
+          <p:cNvPr id="42" name="Прямоугольник 41">
+            <a:extLst>
+              <a:ext uri="{FF2B5EF4-FFF2-40B4-BE49-F238E27FC236}">
+                <a16:creationId xmlns:a16="http://schemas.microsoft.com/office/drawing/2014/main" id="{93C3D6E5-C277-43F9-85F9-6EA0BAABC636}"/>
+              </a:ext>
+            </a:extLst>
+          </p:cNvPr>
+          <p:cNvSpPr>
+            <a:spLocks noGrp="1"/>
+          </p:cNvSpPr>
+          <p:nvPr/>
+        </p:nvSpPr>
+        <p:spPr>
+          <a:xfrm>
+            <a:off x="948706" y="3798491"/>
+            <a:ext cx="4772120" cy="219382"/>
+          </a:xfrm>
+          <a:prstGeom prst="rect">
+            <a:avLst/>
+          </a:prstGeom>
+          <a:solidFill>
+            <a:srgbClr val="000000">
+              <a:alpha val="0"/>
+            </a:srgbClr>
+          </a:solidFill>
+          <a:ln w="0">
+            <a:solidFill>
+              <a:srgbClr val="000000">
+                <a:alpha val="0"/>
+              </a:srgbClr>
+            </a:solidFill>
+            <a:prstDash val="solid"/>
+          </a:ln>
+        </p:spPr>
+        <p:txBody>
+          <a:bodyPr wrap="square" lIns="0" tIns="0" rIns="0" bIns="0" anchor="t"/>
+          <a:lstStyle/>
+          <a:p>
+            <a:pPr algn="l">
+              <a:buNone/>
+              <a:defRPr sz="1800" b="1">
+                <a:solidFill>
+                  <a:srgbClr val="37B34A"/>
+                </a:solidFill>
+                <a:latin typeface="Onest"/>
+                <a:ea typeface="Onest"/>
+                <a:cs typeface="Onest"/>
+              </a:defRPr>
+            </a:pPr>
+            <a:r>
+              <a:rPr b="1">
+                <a:solidFill>
+                  <a:srgbClr val="37B34A"/>
+                </a:solidFill>
+                <a:latin typeface="Onest"/>
+                <a:ea typeface="Onest"/>
+                <a:cs typeface="Onest"/>
+              </a:rPr>
+              <a:t>Задача 3</a:t>
+            </a:r>
+          </a:p>
+        </p:txBody>
+      </p:sp>
+      <p:sp>
+        <p:nvSpPr>
+          <p:cNvPr id="44" name="Прямоугольник 43">
+            <a:extLst>
+              <a:ext uri="{FF2B5EF4-FFF2-40B4-BE49-F238E27FC236}">
+                <a16:creationId xmlns:a16="http://schemas.microsoft.com/office/drawing/2014/main" id="{8874CA52-DED8-4809-AD33-DDCA9F07EB41}"/>
+              </a:ext>
+            </a:extLst>
+          </p:cNvPr>
+          <p:cNvSpPr>
+            <a:spLocks noGrp="1"/>
+          </p:cNvSpPr>
+          <p:nvPr/>
+        </p:nvSpPr>
+        <p:spPr>
+          <a:xfrm>
+            <a:off x="949325" y="4149686"/>
+            <a:ext cx="4514232" cy="603454"/>
+          </a:xfrm>
+          <a:prstGeom prst="rect">
+            <a:avLst/>
+          </a:prstGeom>
+          <a:solidFill>
+            <a:srgbClr val="000000">
+              <a:alpha val="0"/>
+            </a:srgbClr>
+          </a:solidFill>
+          <a:ln w="0">
+            <a:solidFill>
+              <a:srgbClr val="000000">
+                <a:alpha val="0"/>
+              </a:srgbClr>
+            </a:solidFill>
+            <a:prstDash val="solid"/>
+          </a:ln>
+        </p:spPr>
+        <p:txBody>
+          <a:bodyPr wrap="square" lIns="0" tIns="0" rIns="0" bIns="0" anchor="t">
+            <a:normAutofit fontScale="92500" lnSpcReduction="10000"/>
+          </a:bodyPr>
+          <a:lstStyle/>
+          <a:p>
+            <a:pPr>
+              <a:buNone/>
+              <a:defRPr sz="1800" b="0">
+                <a:solidFill>
+                  <a:srgbClr val="15181F"/>
+                </a:solidFill>
+                <a:latin typeface="Onest"/>
+                <a:ea typeface="Onest"/>
+                <a:cs typeface="Onest"/>
+              </a:defRPr>
+            </a:pPr>
+            <a:r>
               <a:rPr sz="1500">
                 <a:solidFill>
                   <a:srgbClr val="15181F"/>
@@ -19041,7 +21045,7 @@
                 <a:ea typeface="Onest"/>
                 <a:cs typeface="Onest"/>
               </a:rPr>
-              <a:t>Провести аналитический обзор алгоритмов факторизации и определить место ECM среди специализированных и универсальных методов.</a:t>
+              <a:t>Проанализировать практические подходы к выбору параметров ECM и формализовать подбор B1/B2 как стохастическую оптимизацию «черного ящика».</a:t>
             </a:r>
           </a:p>
           <a:p>
@@ -19069,659 +21073,22 @@
       </p:sp>
       <p:sp>
         <p:nvSpPr>
-          <p:cNvPr id="13" name="Прямоугольник 12">
-            <a:extLst>
-              <a:ext uri="{FF2B5EF4-FFF2-40B4-BE49-F238E27FC236}">
-                <a16:creationId xmlns:a16="http://schemas.microsoft.com/office/drawing/2014/main" id="{A585CC9A-C005-4240-A17F-003E5AB7254D}"/>
-              </a:ext>
-            </a:extLst>
-          </p:cNvPr>
-          <p:cNvSpPr>
-            <a:spLocks noGrp="1"/>
-          </p:cNvSpPr>
-          <p:nvPr/>
-        </p:nvSpPr>
-        <p:spPr>
-          <a:xfrm>
-            <a:off x="6477000" y="2709566"/>
-            <a:ext cx="4514850" cy="228600"/>
-          </a:xfrm>
-          <a:prstGeom prst="rect">
-            <a:avLst/>
-          </a:prstGeom>
-          <a:solidFill>
-            <a:srgbClr val="000000">
-              <a:alpha val="0"/>
-            </a:srgbClr>
-          </a:solidFill>
-          <a:ln w="0">
-            <a:solidFill>
-              <a:srgbClr val="000000">
-                <a:alpha val="0"/>
-              </a:srgbClr>
-            </a:solidFill>
-            <a:prstDash val="solid"/>
-          </a:ln>
-        </p:spPr>
-        <p:txBody>
-          <a:bodyPr wrap="square" lIns="0" tIns="0" rIns="0" bIns="0" anchor="t"/>
-          <a:lstStyle/>
-          <a:p>
-            <a:pPr algn="l">
-              <a:buNone/>
-              <a:defRPr sz="1800" b="1">
-                <a:solidFill>
-                  <a:srgbClr val="522878"/>
-                </a:solidFill>
-                <a:latin typeface="Onest"/>
-                <a:ea typeface="Onest"/>
-                <a:cs typeface="Onest"/>
-              </a:defRPr>
-            </a:pPr>
-            <a:r>
-              <a:rPr b="1">
-                <a:solidFill>
-                  <a:srgbClr val="522878"/>
-                </a:solidFill>
-                <a:latin typeface="Onest"/>
-                <a:ea typeface="Onest"/>
-                <a:cs typeface="Onest"/>
-              </a:rPr>
-              <a:t>Задача 2</a:t>
-            </a:r>
-          </a:p>
-        </p:txBody>
-      </p:sp>
-      <p:sp>
-        <p:nvSpPr>
-          <p:cNvPr id="14" name="Прямоугольник 13">
-            <a:extLst>
-              <a:ext uri="{FF2B5EF4-FFF2-40B4-BE49-F238E27FC236}">
-                <a16:creationId xmlns:a16="http://schemas.microsoft.com/office/drawing/2014/main" id="{50D9D933-4609-4B14-AA14-09FD5321DDCD}"/>
-              </a:ext>
-            </a:extLst>
-          </p:cNvPr>
-          <p:cNvSpPr>
-            <a:spLocks noGrp="1"/>
-          </p:cNvSpPr>
-          <p:nvPr/>
-        </p:nvSpPr>
-        <p:spPr>
-          <a:xfrm>
-            <a:off x="6477000" y="3314700"/>
-            <a:ext cx="4514850" cy="361950"/>
-          </a:xfrm>
-          <a:prstGeom prst="rect">
-            <a:avLst/>
-          </a:prstGeom>
-          <a:solidFill>
-            <a:srgbClr val="000000">
-              <a:alpha val="0"/>
-            </a:srgbClr>
-          </a:solidFill>
-          <a:ln w="0">
-            <a:solidFill>
-              <a:srgbClr val="000000">
-                <a:alpha val="0"/>
-              </a:srgbClr>
-            </a:solidFill>
-            <a:prstDash val="solid"/>
-          </a:ln>
-        </p:spPr>
-        <p:txBody>
-          <a:bodyPr wrap="square" lIns="0" tIns="0" rIns="0" bIns="0" anchor="t">
-            <a:normAutofit/>
-          </a:bodyPr>
-          <a:lstStyle/>
-          <a:p>
-            <a:pPr algn="l">
-              <a:buNone/>
-              <a:defRPr sz="1800" b="0">
-                <a:solidFill>
-                  <a:srgbClr val="15181F"/>
-                </a:solidFill>
-                <a:latin typeface="Onest"/>
-                <a:ea typeface="Onest"/>
-                <a:cs typeface="Onest"/>
-              </a:defRPr>
-            </a:pPr>
-            <a:endParaRPr/>
-          </a:p>
-        </p:txBody>
-      </p:sp>
-      <p:sp>
-        <p:nvSpPr>
-          <p:cNvPr id="19" name="Прямоугольник 18">
-            <a:extLst>
-              <a:ext uri="{FF2B5EF4-FFF2-40B4-BE49-F238E27FC236}">
-                <a16:creationId xmlns:a16="http://schemas.microsoft.com/office/drawing/2014/main" id="{63CED086-BC76-476D-9C25-42D09B51D971}"/>
-              </a:ext>
-            </a:extLst>
-          </p:cNvPr>
-          <p:cNvSpPr>
-            <a:spLocks noGrp="1"/>
-          </p:cNvSpPr>
-          <p:nvPr/>
-        </p:nvSpPr>
-        <p:spPr>
-          <a:xfrm>
-            <a:off x="6477000" y="3792512"/>
-            <a:ext cx="4514850" cy="228600"/>
-          </a:xfrm>
-          <a:prstGeom prst="rect">
-            <a:avLst/>
-          </a:prstGeom>
-          <a:solidFill>
-            <a:srgbClr val="000000">
-              <a:alpha val="0"/>
-            </a:srgbClr>
-          </a:solidFill>
-          <a:ln w="0">
-            <a:solidFill>
-              <a:srgbClr val="000000">
-                <a:alpha val="0"/>
-              </a:srgbClr>
-            </a:solidFill>
-            <a:prstDash val="solid"/>
-          </a:ln>
-        </p:spPr>
-        <p:txBody>
-          <a:bodyPr wrap="square" lIns="0" tIns="0" rIns="0" bIns="0" anchor="t"/>
-          <a:lstStyle/>
-          <a:p>
-            <a:pPr algn="l">
-              <a:buNone/>
-              <a:defRPr sz="1800" b="1">
-                <a:solidFill>
-                  <a:srgbClr val="522878"/>
-                </a:solidFill>
-                <a:latin typeface="Onest"/>
-                <a:ea typeface="Onest"/>
-                <a:cs typeface="Onest"/>
-              </a:defRPr>
-            </a:pPr>
-            <a:r>
-              <a:rPr b="1">
-                <a:solidFill>
-                  <a:srgbClr val="522878"/>
-                </a:solidFill>
-                <a:latin typeface="Onest"/>
-                <a:ea typeface="Onest"/>
-                <a:cs typeface="Onest"/>
-              </a:rPr>
-              <a:t>Задача 4</a:t>
-            </a:r>
-          </a:p>
-        </p:txBody>
-      </p:sp>
-      <p:sp>
-        <p:nvSpPr>
-          <p:cNvPr id="20" name="Прямоугольник 19">
-            <a:extLst>
-              <a:ext uri="{FF2B5EF4-FFF2-40B4-BE49-F238E27FC236}">
-                <a16:creationId xmlns:a16="http://schemas.microsoft.com/office/drawing/2014/main" id="{348098E7-8F7E-4285-A4D8-76AC2844EDBB}"/>
-              </a:ext>
-            </a:extLst>
-          </p:cNvPr>
-          <p:cNvSpPr>
-            <a:spLocks noGrp="1"/>
-          </p:cNvSpPr>
-          <p:nvPr/>
-        </p:nvSpPr>
-        <p:spPr>
-          <a:xfrm>
-            <a:off x="6477000" y="4324350"/>
-            <a:ext cx="4514850" cy="361950"/>
-          </a:xfrm>
-          <a:prstGeom prst="rect">
-            <a:avLst/>
-          </a:prstGeom>
-          <a:solidFill>
-            <a:srgbClr val="000000">
-              <a:alpha val="0"/>
-            </a:srgbClr>
-          </a:solidFill>
-          <a:ln w="0">
-            <a:solidFill>
-              <a:srgbClr val="000000">
-                <a:alpha val="0"/>
-              </a:srgbClr>
-            </a:solidFill>
-            <a:prstDash val="solid"/>
-          </a:ln>
-        </p:spPr>
-        <p:txBody>
-          <a:bodyPr wrap="square" lIns="0" tIns="0" rIns="0" bIns="0" anchor="t">
-            <a:normAutofit/>
-          </a:bodyPr>
-          <a:lstStyle/>
-          <a:p>
-            <a:pPr algn="l">
-              <a:buNone/>
-              <a:defRPr sz="1800" b="0">
-                <a:solidFill>
-                  <a:srgbClr val="15181F"/>
-                </a:solidFill>
-                <a:latin typeface="Onest"/>
-                <a:ea typeface="Onest"/>
-                <a:cs typeface="Onest"/>
-              </a:defRPr>
-            </a:pPr>
-            <a:endParaRPr/>
-          </a:p>
-        </p:txBody>
-      </p:sp>
-      <p:sp>
-        <p:nvSpPr>
-          <p:cNvPr id="22" name="Прямоугольник 21">
-            <a:extLst>
-              <a:ext uri="{FF2B5EF4-FFF2-40B4-BE49-F238E27FC236}">
-                <a16:creationId xmlns:a16="http://schemas.microsoft.com/office/drawing/2014/main" id="{F5DD6D70-0886-445C-B40D-F26C3BFF8618}"/>
-              </a:ext>
-            </a:extLst>
-          </p:cNvPr>
-          <p:cNvSpPr>
-            <a:spLocks noGrp="1"/>
-          </p:cNvSpPr>
-          <p:nvPr/>
-        </p:nvSpPr>
-        <p:spPr>
-          <a:xfrm>
-            <a:off x="948706" y="4894671"/>
-            <a:ext cx="4514850" cy="228600"/>
-          </a:xfrm>
-          <a:prstGeom prst="rect">
-            <a:avLst/>
-          </a:prstGeom>
-          <a:solidFill>
-            <a:srgbClr val="000000">
-              <a:alpha val="0"/>
-            </a:srgbClr>
-          </a:solidFill>
-          <a:ln w="0">
-            <a:solidFill>
-              <a:srgbClr val="000000">
-                <a:alpha val="0"/>
-              </a:srgbClr>
-            </a:solidFill>
-            <a:prstDash val="solid"/>
-          </a:ln>
-        </p:spPr>
-        <p:txBody>
-          <a:bodyPr wrap="square" lIns="0" tIns="0" rIns="0" bIns="0" anchor="t"/>
-          <a:lstStyle/>
-          <a:p>
-            <a:pPr algn="l">
-              <a:buNone/>
-              <a:defRPr sz="1800" b="1">
-                <a:solidFill>
-                  <a:srgbClr val="37B34A"/>
-                </a:solidFill>
-                <a:latin typeface="Onest"/>
-                <a:ea typeface="Onest"/>
-                <a:cs typeface="Onest"/>
-              </a:defRPr>
-            </a:pPr>
-            <a:r>
-              <a:rPr b="1">
-                <a:solidFill>
-                  <a:srgbClr val="37B34A"/>
-                </a:solidFill>
-                <a:latin typeface="Onest"/>
-                <a:ea typeface="Onest"/>
-                <a:cs typeface="Onest"/>
-              </a:rPr>
-              <a:t>Задача 5</a:t>
-            </a:r>
-          </a:p>
-        </p:txBody>
-      </p:sp>
-      <p:sp>
-        <p:nvSpPr>
-          <p:cNvPr id="25" name="Прямоугольник 24">
-            <a:extLst>
-              <a:ext uri="{FF2B5EF4-FFF2-40B4-BE49-F238E27FC236}">
-                <a16:creationId xmlns:a16="http://schemas.microsoft.com/office/drawing/2014/main" id="{6A4F78EE-10AD-41D1-8FDF-A122E131283E}"/>
-              </a:ext>
-            </a:extLst>
-          </p:cNvPr>
-          <p:cNvSpPr>
-            <a:spLocks noGrp="1"/>
-          </p:cNvSpPr>
-          <p:nvPr/>
-        </p:nvSpPr>
-        <p:spPr>
-          <a:xfrm>
-            <a:off x="6477000" y="4883104"/>
-            <a:ext cx="4514850" cy="228600"/>
-          </a:xfrm>
-          <a:prstGeom prst="rect">
-            <a:avLst/>
-          </a:prstGeom>
-          <a:solidFill>
-            <a:srgbClr val="000000">
-              <a:alpha val="0"/>
-            </a:srgbClr>
-          </a:solidFill>
-          <a:ln w="0">
-            <a:solidFill>
-              <a:srgbClr val="000000">
-                <a:alpha val="0"/>
-              </a:srgbClr>
-            </a:solidFill>
-            <a:prstDash val="solid"/>
-          </a:ln>
-        </p:spPr>
-        <p:txBody>
-          <a:bodyPr wrap="square" lIns="0" tIns="0" rIns="0" bIns="0" anchor="t"/>
-          <a:lstStyle/>
-          <a:p>
-            <a:pPr algn="l">
-              <a:buNone/>
-              <a:defRPr sz="1800" b="1">
-                <a:solidFill>
-                  <a:srgbClr val="522878"/>
-                </a:solidFill>
-                <a:latin typeface="Onest"/>
-                <a:ea typeface="Onest"/>
-                <a:cs typeface="Onest"/>
-              </a:defRPr>
-            </a:pPr>
-            <a:r>
-              <a:rPr b="1">
-                <a:solidFill>
-                  <a:srgbClr val="522878"/>
-                </a:solidFill>
-                <a:latin typeface="Onest"/>
-                <a:ea typeface="Onest"/>
-                <a:cs typeface="Onest"/>
-              </a:rPr>
-              <a:t>Задача 6</a:t>
-            </a:r>
-          </a:p>
-        </p:txBody>
-      </p:sp>
-      <p:sp>
-        <p:nvSpPr>
-          <p:cNvPr id="28" name="Прямоугольник 27">
-            <a:extLst>
-              <a:ext uri="{FF2B5EF4-FFF2-40B4-BE49-F238E27FC236}">
-                <a16:creationId xmlns:a16="http://schemas.microsoft.com/office/drawing/2014/main" id="{704909F7-6AF2-462A-976E-E9A22B8C022B}"/>
-              </a:ext>
-            </a:extLst>
-          </p:cNvPr>
-          <p:cNvSpPr>
-            <a:spLocks noGrp="1"/>
-          </p:cNvSpPr>
-          <p:nvPr/>
-        </p:nvSpPr>
-        <p:spPr>
-          <a:xfrm>
-            <a:off x="0" y="5905500"/>
-            <a:ext cx="2619375" cy="76200"/>
-          </a:xfrm>
-          <a:prstGeom prst="rect">
-            <a:avLst/>
-          </a:prstGeom>
-          <a:solidFill>
-            <a:srgbClr val="F39768"/>
-          </a:solidFill>
-          <a:ln w="0">
-            <a:solidFill>
-              <a:srgbClr val="F39768"/>
-            </a:solidFill>
-            <a:prstDash val="solid"/>
-          </a:ln>
-        </p:spPr>
-      </p:sp>
-      <p:sp>
-        <p:nvSpPr>
-          <p:cNvPr id="29" name="Прямоугольник 28">
-            <a:extLst>
-              <a:ext uri="{FF2B5EF4-FFF2-40B4-BE49-F238E27FC236}">
-                <a16:creationId xmlns:a16="http://schemas.microsoft.com/office/drawing/2014/main" id="{A48F7F9A-A5BD-48FB-9DF8-DC99EB26F43E}"/>
-              </a:ext>
-            </a:extLst>
-          </p:cNvPr>
-          <p:cNvSpPr>
-            <a:spLocks noGrp="1"/>
-          </p:cNvSpPr>
-          <p:nvPr/>
-        </p:nvSpPr>
-        <p:spPr>
-          <a:xfrm>
-            <a:off x="2619375" y="5905500"/>
-            <a:ext cx="3143250" cy="76200"/>
-          </a:xfrm>
-          <a:prstGeom prst="rect">
-            <a:avLst/>
-          </a:prstGeom>
-          <a:solidFill>
-            <a:srgbClr val="522878"/>
-          </a:solidFill>
-          <a:ln w="0">
-            <a:solidFill>
-              <a:srgbClr val="522878"/>
-            </a:solidFill>
-            <a:prstDash val="solid"/>
-          </a:ln>
-        </p:spPr>
-      </p:sp>
-      <p:sp>
-        <p:nvSpPr>
-          <p:cNvPr id="30" name="Прямоугольник 29">
-            <a:extLst>
-              <a:ext uri="{FF2B5EF4-FFF2-40B4-BE49-F238E27FC236}">
-                <a16:creationId xmlns:a16="http://schemas.microsoft.com/office/drawing/2014/main" id="{1D148A24-D46F-44F7-8CD6-6C752BACA339}"/>
-              </a:ext>
-            </a:extLst>
-          </p:cNvPr>
-          <p:cNvSpPr>
-            <a:spLocks noGrp="1"/>
-          </p:cNvSpPr>
-          <p:nvPr/>
-        </p:nvSpPr>
-        <p:spPr>
-          <a:xfrm>
-            <a:off x="5762625" y="5905500"/>
-            <a:ext cx="6429375" cy="76200"/>
-          </a:xfrm>
-          <a:prstGeom prst="rect">
-            <a:avLst/>
-          </a:prstGeom>
-          <a:solidFill>
-            <a:srgbClr val="37B34A"/>
-          </a:solidFill>
-          <a:ln w="0">
-            <a:solidFill>
-              <a:srgbClr val="37B34A"/>
-            </a:solidFill>
-            <a:prstDash val="solid"/>
-          </a:ln>
-        </p:spPr>
-      </p:sp>
-      <p:pic>
-        <p:nvPicPr>
-          <p:cNvPr id="61" name="Рисунок 33"/>
-          <p:cNvPicPr>
-            <a:picLocks noChangeAspect="1"/>
-          </p:cNvPicPr>
-          <p:nvPr/>
-        </p:nvPicPr>
-        <p:blipFill>
-          <a:blip r:embed="rId3"/>
-          <a:stretch/>
-        </p:blipFill>
-        <p:spPr>
-          <a:xfrm>
-            <a:off x="9572625" y="248984"/>
-            <a:ext cx="2095500" cy="787908"/>
-          </a:xfrm>
-          <a:prstGeom prst="rect">
-            <a:avLst/>
-          </a:prstGeom>
-        </p:spPr>
-      </p:pic>
-      <p:sp>
-        <p:nvSpPr>
-          <p:cNvPr id="36" name="Прямоугольник 35">
-            <a:extLst>
-              <a:ext uri="{FF2B5EF4-FFF2-40B4-BE49-F238E27FC236}">
-                <a16:creationId xmlns:a16="http://schemas.microsoft.com/office/drawing/2014/main" id="{A7E3FDB4-E0A7-4C73-B090-6104DE16E6E6}"/>
-              </a:ext>
-            </a:extLst>
-          </p:cNvPr>
-          <p:cNvSpPr>
-            <a:spLocks noGrp="1"/>
-          </p:cNvSpPr>
-          <p:nvPr/>
-        </p:nvSpPr>
-        <p:spPr>
-          <a:xfrm>
-            <a:off x="571500" y="819150"/>
-            <a:ext cx="8477250" cy="723900"/>
-          </a:xfrm>
-          <a:prstGeom prst="rect">
-            <a:avLst/>
-          </a:prstGeom>
-          <a:solidFill>
-            <a:srgbClr val="000000">
-              <a:alpha val="0"/>
-            </a:srgbClr>
-          </a:solidFill>
-          <a:ln w="0">
-            <a:solidFill>
-              <a:srgbClr val="000000">
-                <a:alpha val="0"/>
-              </a:srgbClr>
-            </a:solidFill>
-            <a:prstDash val="solid"/>
-          </a:ln>
-        </p:spPr>
-        <p:txBody>
-          <a:bodyPr lIns="0" tIns="0" rIns="0" bIns="0" anchor="t"/>
-          <a:lstStyle/>
-          <a:p>
-            <a:pPr>
-              <a:buNone/>
-              <a:defRPr sz="2325" b="1">
-                <a:solidFill>
-                  <a:srgbClr val="15181F"/>
-                </a:solidFill>
-                <a:latin typeface="Onest"/>
-                <a:ea typeface="Onest"/>
-                <a:cs typeface="Onest"/>
-              </a:defRPr>
-            </a:pPr>
-            <a:r>
-              <a:rPr sz="2325" b="1">
-                <a:solidFill>
-                  <a:srgbClr val="15181F"/>
-                </a:solidFill>
-                <a:latin typeface="Onest"/>
-                <a:ea typeface="Onest"/>
-                <a:cs typeface="Onest"/>
-              </a:rPr>
-              <a:t>Цель работы и ключевые этапы:</a:t>
-            </a:r>
-            <a:br/>
-            <a:r>
-              <a:rPr sz="2325" b="1">
-                <a:solidFill>
-                  <a:srgbClr val="15181F"/>
-                </a:solidFill>
-                <a:latin typeface="Onest"/>
-                <a:ea typeface="Onest"/>
-                <a:cs typeface="Onest"/>
-              </a:rPr>
-              <a:t>от анализа ECM до проверки найденных параметров</a:t>
-            </a:r>
-          </a:p>
-        </p:txBody>
-      </p:sp>
-      <p:sp>
-        <p:nvSpPr>
-          <p:cNvPr id="42" name="Прямоугольник 41">
-            <a:extLst>
-              <a:ext uri="{FF2B5EF4-FFF2-40B4-BE49-F238E27FC236}">
-                <a16:creationId xmlns:a16="http://schemas.microsoft.com/office/drawing/2014/main" id="{93C3D6E5-C277-43F9-85F9-6EA0BAABC636}"/>
-              </a:ext>
-            </a:extLst>
-          </p:cNvPr>
-          <p:cNvSpPr>
-            <a:spLocks noGrp="1"/>
-          </p:cNvSpPr>
-          <p:nvPr/>
-        </p:nvSpPr>
-        <p:spPr>
-          <a:xfrm>
-            <a:off x="948706" y="3798491"/>
-            <a:ext cx="4772120" cy="219382"/>
-          </a:xfrm>
-          <a:prstGeom prst="rect">
-            <a:avLst/>
-          </a:prstGeom>
-          <a:solidFill>
-            <a:srgbClr val="000000">
-              <a:alpha val="0"/>
-            </a:srgbClr>
-          </a:solidFill>
-          <a:ln w="0">
-            <a:solidFill>
-              <a:srgbClr val="000000">
-                <a:alpha val="0"/>
-              </a:srgbClr>
-            </a:solidFill>
-            <a:prstDash val="solid"/>
-          </a:ln>
-        </p:spPr>
-        <p:txBody>
-          <a:bodyPr wrap="square" lIns="0" tIns="0" rIns="0" bIns="0" anchor="t"/>
-          <a:lstStyle/>
-          <a:p>
-            <a:pPr algn="l">
-              <a:buNone/>
-              <a:defRPr sz="1800" b="1">
-                <a:solidFill>
-                  <a:srgbClr val="37B34A"/>
-                </a:solidFill>
-                <a:latin typeface="Onest"/>
-                <a:ea typeface="Onest"/>
-                <a:cs typeface="Onest"/>
-              </a:defRPr>
-            </a:pPr>
-            <a:r>
-              <a:rPr b="1">
-                <a:solidFill>
-                  <a:srgbClr val="37B34A"/>
-                </a:solidFill>
-                <a:latin typeface="Onest"/>
-                <a:ea typeface="Onest"/>
-                <a:cs typeface="Onest"/>
-              </a:rPr>
-              <a:t>Задача 3</a:t>
-            </a:r>
-          </a:p>
-        </p:txBody>
-      </p:sp>
-      <p:sp>
-        <p:nvSpPr>
-          <p:cNvPr id="44" name="Прямоугольник 43">
-            <a:extLst>
-              <a:ext uri="{FF2B5EF4-FFF2-40B4-BE49-F238E27FC236}">
-                <a16:creationId xmlns:a16="http://schemas.microsoft.com/office/drawing/2014/main" id="{8874CA52-DED8-4809-AD33-DDCA9F07EB41}"/>
-              </a:ext>
-            </a:extLst>
-          </p:cNvPr>
-          <p:cNvSpPr>
-            <a:spLocks noGrp="1"/>
-          </p:cNvSpPr>
-          <p:nvPr/>
-        </p:nvSpPr>
-        <p:spPr>
-          <a:xfrm>
-            <a:off x="949325" y="4149686"/>
-            <a:ext cx="4514232" cy="603454"/>
+          <p:cNvPr id="45" name="Прямоугольник 44">
+            <a:extLst>
+              <a:ext uri="{FF2B5EF4-FFF2-40B4-BE49-F238E27FC236}">
+                <a16:creationId xmlns:a16="http://schemas.microsoft.com/office/drawing/2014/main" id="{F8A55C1A-87D4-4B8F-BC38-854AEA69862F}"/>
+              </a:ext>
+            </a:extLst>
+          </p:cNvPr>
+          <p:cNvSpPr>
+            <a:spLocks noGrp="1"/>
+          </p:cNvSpPr>
+          <p:nvPr/>
+        </p:nvSpPr>
+        <p:spPr>
+          <a:xfrm>
+            <a:off x="948707" y="5221176"/>
+            <a:ext cx="4514850" cy="603454"/>
           </a:xfrm>
           <a:prstGeom prst="rect">
             <a:avLst/>
@@ -19766,50 +21133,29 @@
                 <a:ea typeface="Onest"/>
                 <a:cs typeface="Onest"/>
               </a:rPr>
-              <a:t>Проанализировать практические подходы к выбору параметров ECM и формализовать подбор B1/B2 как стохастическую оптимизацию «черного ящика».</a:t>
-            </a:r>
-          </a:p>
-          <a:p>
-            <a:pPr>
-              <a:buNone/>
-              <a:defRPr sz="1800" b="0">
-                <a:solidFill>
-                  <a:srgbClr val="15181F"/>
-                </a:solidFill>
-                <a:latin typeface="Onest"/>
-                <a:ea typeface="Onest"/>
-                <a:cs typeface="Onest"/>
-              </a:defRPr>
-            </a:pPr>
-            <a:endParaRPr sz="1500">
-              <a:solidFill>
-                <a:srgbClr val="15181F"/>
-              </a:solidFill>
-              <a:latin typeface="Onest"/>
-              <a:ea typeface="Onest"/>
-              <a:cs typeface="Onest"/>
-            </a:endParaRPr>
+              <a:t>Разработать программную систему генерации датасетов, запуска GMP-ECM, оптимизации, валидации и анализа результатов.</a:t>
+            </a:r>
           </a:p>
         </p:txBody>
       </p:sp>
       <p:sp>
         <p:nvSpPr>
-          <p:cNvPr id="45" name="Прямоугольник 44">
-            <a:extLst>
-              <a:ext uri="{FF2B5EF4-FFF2-40B4-BE49-F238E27FC236}">
-                <a16:creationId xmlns:a16="http://schemas.microsoft.com/office/drawing/2014/main" id="{F8A55C1A-87D4-4B8F-BC38-854AEA69862F}"/>
-              </a:ext>
-            </a:extLst>
-          </p:cNvPr>
-          <p:cNvSpPr>
-            <a:spLocks noGrp="1"/>
-          </p:cNvSpPr>
-          <p:nvPr/>
-        </p:nvSpPr>
-        <p:spPr>
-          <a:xfrm>
-            <a:off x="948707" y="5221176"/>
-            <a:ext cx="4514850" cy="603454"/>
+          <p:cNvPr id="47" name="Прямоугольник 46">
+            <a:extLst>
+              <a:ext uri="{FF2B5EF4-FFF2-40B4-BE49-F238E27FC236}">
+                <a16:creationId xmlns:a16="http://schemas.microsoft.com/office/drawing/2014/main" id="{5718F03B-CF8C-412C-8EA5-A80ABA25A7C5}"/>
+              </a:ext>
+            </a:extLst>
+          </p:cNvPr>
+          <p:cNvSpPr>
+            <a:spLocks noGrp="1"/>
+          </p:cNvSpPr>
+          <p:nvPr/>
+        </p:nvSpPr>
+        <p:spPr>
+          <a:xfrm>
+            <a:off x="6459703" y="3009595"/>
+            <a:ext cx="4474997" cy="603454"/>
           </a:xfrm>
           <a:prstGeom prst="rect">
             <a:avLst/>
@@ -19846,82 +21192,224 @@
               </a:defRPr>
             </a:pPr>
             <a:r>
-              <a:rPr sz="1500">
-                <a:solidFill>
-                  <a:srgbClr val="15181F"/>
-                </a:solidFill>
-                <a:latin typeface="Onest"/>
-                <a:ea typeface="Onest"/>
-                <a:cs typeface="Onest"/>
-              </a:rPr>
-              <a:t>Разработать программную систему генерации датасетов, запуска GMP-ECM, оптимизации, валидации и анализа результатов.</a:t>
-            </a:r>
-          </a:p>
-        </p:txBody>
-      </p:sp>
-      <p:sp>
-        <p:nvSpPr>
-          <p:cNvPr id="47" name="Прямоугольник 46">
-            <a:extLst>
-              <a:ext uri="{FF2B5EF4-FFF2-40B4-BE49-F238E27FC236}">
-                <a16:creationId xmlns:a16="http://schemas.microsoft.com/office/drawing/2014/main" id="{5718F03B-CF8C-412C-8EA5-A80ABA25A7C5}"/>
-              </a:ext>
-            </a:extLst>
-          </p:cNvPr>
-          <p:cNvSpPr>
-            <a:spLocks noGrp="1"/>
-          </p:cNvSpPr>
-          <p:nvPr/>
-        </p:nvSpPr>
-        <p:spPr>
-          <a:xfrm>
-            <a:off x="6459703" y="3009595"/>
-            <a:ext cx="4474997" cy="603454"/>
-          </a:xfrm>
-          <a:prstGeom prst="rect">
-            <a:avLst/>
-          </a:prstGeom>
-          <a:solidFill>
-            <a:srgbClr val="000000">
-              <a:alpha val="0"/>
-            </a:srgbClr>
-          </a:solidFill>
-          <a:ln w="0">
-            <a:solidFill>
-              <a:srgbClr val="000000">
-                <a:alpha val="0"/>
-              </a:srgbClr>
-            </a:solidFill>
-            <a:prstDash val="solid"/>
-          </a:ln>
-        </p:spPr>
-        <p:txBody>
-          <a:bodyPr wrap="square" lIns="0" tIns="0" rIns="0" bIns="0" anchor="t">
-            <a:normAutofit fontScale="92500" lnSpcReduction="10000"/>
-          </a:bodyPr>
-          <a:lstStyle/>
-          <a:p>
-            <a:pPr>
-              <a:buNone/>
-              <a:defRPr sz="1800" b="0">
-                <a:solidFill>
-                  <a:srgbClr val="15181F"/>
-                </a:solidFill>
-                <a:latin typeface="Onest"/>
-                <a:ea typeface="Onest"/>
-                <a:cs typeface="Onest"/>
-              </a:defRPr>
-            </a:pPr>
-            <a:r>
-              <a:rPr sz="1500">
-                <a:solidFill>
-                  <a:srgbClr val="15181F"/>
-                </a:solidFill>
-                <a:latin typeface="Onest"/>
-                <a:ea typeface="Onest"/>
-                <a:cs typeface="Onest"/>
-              </a:rPr>
-              <a:t>Рассмотреть теоретические основы ECM и влияние параметров B1 и B2 на вероятность успеха и стоимость вычислений.</a:t>
+              <a:rPr sz="1500" dirty="0" err="1">
+                <a:solidFill>
+                  <a:srgbClr val="15181F"/>
+                </a:solidFill>
+                <a:latin typeface="Onest"/>
+                <a:ea typeface="Onest"/>
+                <a:cs typeface="Onest"/>
+              </a:rPr>
+              <a:t>Рассмотреть</a:t>
+            </a:r>
+            <a:r>
+              <a:rPr sz="1500" dirty="0">
+                <a:solidFill>
+                  <a:srgbClr val="15181F"/>
+                </a:solidFill>
+                <a:latin typeface="Onest"/>
+                <a:ea typeface="Onest"/>
+                <a:cs typeface="Onest"/>
+              </a:rPr>
+              <a:t> </a:t>
+            </a:r>
+            <a:r>
+              <a:rPr sz="1500" dirty="0" err="1">
+                <a:solidFill>
+                  <a:srgbClr val="15181F"/>
+                </a:solidFill>
+                <a:latin typeface="Onest"/>
+                <a:ea typeface="Onest"/>
+                <a:cs typeface="Onest"/>
+              </a:rPr>
+              <a:t>теоретические</a:t>
+            </a:r>
+            <a:r>
+              <a:rPr sz="1500" dirty="0">
+                <a:solidFill>
+                  <a:srgbClr val="15181F"/>
+                </a:solidFill>
+                <a:latin typeface="Onest"/>
+                <a:ea typeface="Onest"/>
+                <a:cs typeface="Onest"/>
+              </a:rPr>
+              <a:t> </a:t>
+            </a:r>
+            <a:r>
+              <a:rPr sz="1500" dirty="0" err="1">
+                <a:solidFill>
+                  <a:srgbClr val="15181F"/>
+                </a:solidFill>
+                <a:latin typeface="Onest"/>
+                <a:ea typeface="Onest"/>
+                <a:cs typeface="Onest"/>
+              </a:rPr>
+              <a:t>основы</a:t>
+            </a:r>
+            <a:r>
+              <a:rPr sz="1500" dirty="0">
+                <a:solidFill>
+                  <a:srgbClr val="15181F"/>
+                </a:solidFill>
+                <a:latin typeface="Onest"/>
+                <a:ea typeface="Onest"/>
+                <a:cs typeface="Onest"/>
+              </a:rPr>
+              <a:t> ECM и </a:t>
+            </a:r>
+            <a:r>
+              <a:rPr sz="1500" dirty="0" err="1">
+                <a:solidFill>
+                  <a:srgbClr val="15181F"/>
+                </a:solidFill>
+                <a:latin typeface="Onest"/>
+                <a:ea typeface="Onest"/>
+                <a:cs typeface="Onest"/>
+              </a:rPr>
+              <a:t>влияние</a:t>
+            </a:r>
+            <a:r>
+              <a:rPr sz="1500" dirty="0">
+                <a:solidFill>
+                  <a:srgbClr val="15181F"/>
+                </a:solidFill>
+                <a:latin typeface="Onest"/>
+                <a:ea typeface="Onest"/>
+                <a:cs typeface="Onest"/>
+              </a:rPr>
+              <a:t> </a:t>
+            </a:r>
+            <a:r>
+              <a:rPr sz="1500" dirty="0" err="1">
+                <a:solidFill>
+                  <a:srgbClr val="15181F"/>
+                </a:solidFill>
+                <a:latin typeface="Onest"/>
+                <a:ea typeface="Onest"/>
+                <a:cs typeface="Onest"/>
+              </a:rPr>
+              <a:t>параметров</a:t>
+            </a:r>
+            <a:r>
+              <a:rPr sz="1500" dirty="0">
+                <a:solidFill>
+                  <a:srgbClr val="15181F"/>
+                </a:solidFill>
+                <a:latin typeface="Onest"/>
+                <a:ea typeface="Onest"/>
+                <a:cs typeface="Onest"/>
+              </a:rPr>
+              <a:t> B1 и B2 </a:t>
+            </a:r>
+            <a:r>
+              <a:rPr sz="1500" dirty="0" err="1">
+                <a:solidFill>
+                  <a:srgbClr val="15181F"/>
+                </a:solidFill>
+                <a:latin typeface="Onest"/>
+                <a:ea typeface="Onest"/>
+                <a:cs typeface="Onest"/>
+              </a:rPr>
+              <a:t>на</a:t>
+            </a:r>
+            <a:r>
+              <a:rPr sz="1500" dirty="0">
+                <a:solidFill>
+                  <a:srgbClr val="15181F"/>
+                </a:solidFill>
+                <a:latin typeface="Onest"/>
+                <a:ea typeface="Onest"/>
+                <a:cs typeface="Onest"/>
+              </a:rPr>
+              <a:t> </a:t>
+            </a:r>
+            <a:r>
+              <a:rPr sz="1500" dirty="0" err="1">
+                <a:solidFill>
+                  <a:srgbClr val="15181F"/>
+                </a:solidFill>
+                <a:latin typeface="Onest"/>
+                <a:ea typeface="Onest"/>
+                <a:cs typeface="Onest"/>
+              </a:rPr>
+              <a:t>вероятность</a:t>
+            </a:r>
+            <a:r>
+              <a:rPr sz="1500" dirty="0">
+                <a:solidFill>
+                  <a:srgbClr val="15181F"/>
+                </a:solidFill>
+                <a:latin typeface="Onest"/>
+                <a:ea typeface="Onest"/>
+                <a:cs typeface="Onest"/>
+              </a:rPr>
+              <a:t> </a:t>
+            </a:r>
+            <a:r>
+              <a:rPr sz="1500" dirty="0" err="1">
+                <a:solidFill>
+                  <a:srgbClr val="15181F"/>
+                </a:solidFill>
+                <a:latin typeface="Onest"/>
+                <a:ea typeface="Onest"/>
+                <a:cs typeface="Onest"/>
+              </a:rPr>
+              <a:t>успеха</a:t>
+            </a:r>
+            <a:r>
+              <a:rPr sz="1500" dirty="0">
+                <a:solidFill>
+                  <a:srgbClr val="15181F"/>
+                </a:solidFill>
+                <a:latin typeface="Onest"/>
+                <a:ea typeface="Onest"/>
+                <a:cs typeface="Onest"/>
+              </a:rPr>
+              <a:t> и </a:t>
+            </a:r>
+            <a:r>
+              <a:rPr sz="1500" dirty="0" err="1">
+                <a:solidFill>
+                  <a:srgbClr val="15181F"/>
+                </a:solidFill>
+                <a:latin typeface="Onest"/>
+                <a:ea typeface="Onest"/>
+                <a:cs typeface="Onest"/>
+              </a:rPr>
+              <a:t>стоимость</a:t>
+            </a:r>
+            <a:r>
+              <a:rPr sz="1500" dirty="0">
+                <a:solidFill>
+                  <a:srgbClr val="15181F"/>
+                </a:solidFill>
+                <a:latin typeface="Onest"/>
+                <a:ea typeface="Onest"/>
+                <a:cs typeface="Onest"/>
+              </a:rPr>
+              <a:t> </a:t>
+            </a:r>
+            <a:r>
+              <a:rPr sz="1500" dirty="0" err="1">
+                <a:solidFill>
+                  <a:srgbClr val="15181F"/>
+                </a:solidFill>
+                <a:latin typeface="Onest"/>
+                <a:ea typeface="Onest"/>
+                <a:cs typeface="Onest"/>
+              </a:rPr>
+              <a:t>вычислений</a:t>
+            </a:r>
+            <a:r>
+              <a:rPr sz="1500" dirty="0">
+                <a:solidFill>
+                  <a:srgbClr val="15181F"/>
+                </a:solidFill>
+                <a:latin typeface="Onest"/>
+                <a:ea typeface="Onest"/>
+                <a:cs typeface="Onest"/>
+              </a:rPr>
+              <a:t>.</a:t>
             </a:r>
           </a:p>
         </p:txBody>
@@ -20882,7 +22370,7 @@
         </p:nvSpPr>
         <p:spPr>
           <a:xfrm>
-            <a:off x="781050" y="2032835"/>
+            <a:off x="781050" y="2113045"/>
             <a:ext cx="3000375" cy="2239496"/>
           </a:xfrm>
           <a:prstGeom prst="rect">
@@ -20915,7 +22403,7 @@
         </p:nvSpPr>
         <p:spPr>
           <a:xfrm>
-            <a:off x="781050" y="2032834"/>
+            <a:off x="781050" y="2113044"/>
             <a:ext cx="57150" cy="2239495"/>
           </a:xfrm>
           <a:prstGeom prst="rect">
@@ -20948,7 +22436,7 @@
         </p:nvSpPr>
         <p:spPr>
           <a:xfrm>
-            <a:off x="1009650" y="2223335"/>
+            <a:off x="1009650" y="2303545"/>
             <a:ext cx="2600325" cy="228600"/>
           </a:xfrm>
           <a:prstGeom prst="rect">
@@ -21013,7 +22501,7 @@
         </p:nvSpPr>
         <p:spPr>
           <a:xfrm>
-            <a:off x="1009650" y="2547185"/>
+            <a:off x="1009650" y="2627395"/>
             <a:ext cx="2600325" cy="1066800"/>
           </a:xfrm>
           <a:prstGeom prst="rect">
@@ -21078,7 +22566,7 @@
         </p:nvSpPr>
         <p:spPr>
           <a:xfrm>
-            <a:off x="4591050" y="2032834"/>
+            <a:off x="4591050" y="2113044"/>
             <a:ext cx="3000375" cy="2291243"/>
           </a:xfrm>
           <a:prstGeom prst="rect">
@@ -21111,7 +22599,7 @@
         </p:nvSpPr>
         <p:spPr>
           <a:xfrm>
-            <a:off x="4591050" y="2032835"/>
+            <a:off x="4591050" y="2113045"/>
             <a:ext cx="57150" cy="2291242"/>
           </a:xfrm>
           <a:prstGeom prst="rect">
@@ -21144,7 +22632,7 @@
         </p:nvSpPr>
         <p:spPr>
           <a:xfrm>
-            <a:off x="4819650" y="2223335"/>
+            <a:off x="4819650" y="2303545"/>
             <a:ext cx="2600325" cy="228600"/>
           </a:xfrm>
           <a:prstGeom prst="rect">
@@ -21209,7 +22697,7 @@
         </p:nvSpPr>
         <p:spPr>
           <a:xfrm>
-            <a:off x="4819650" y="2547185"/>
+            <a:off x="4819650" y="2627395"/>
             <a:ext cx="2600325" cy="1066800"/>
           </a:xfrm>
           <a:prstGeom prst="rect">
@@ -21274,7 +22762,7 @@
         </p:nvSpPr>
         <p:spPr>
           <a:xfrm>
-            <a:off x="8401050" y="2032835"/>
+            <a:off x="8401050" y="2113045"/>
             <a:ext cx="3000375" cy="2291242"/>
           </a:xfrm>
           <a:prstGeom prst="rect">
@@ -21307,7 +22795,7 @@
         </p:nvSpPr>
         <p:spPr>
           <a:xfrm>
-            <a:off x="8401050" y="2032835"/>
+            <a:off x="8401050" y="2113045"/>
             <a:ext cx="57150" cy="2291242"/>
           </a:xfrm>
           <a:prstGeom prst="rect">
@@ -21340,7 +22828,7 @@
         </p:nvSpPr>
         <p:spPr>
           <a:xfrm>
-            <a:off x="8629650" y="2223335"/>
+            <a:off x="8629650" y="2303545"/>
             <a:ext cx="2600325" cy="228600"/>
           </a:xfrm>
           <a:prstGeom prst="rect">
@@ -21405,7 +22893,7 @@
         </p:nvSpPr>
         <p:spPr>
           <a:xfrm>
-            <a:off x="8629650" y="2547185"/>
+            <a:off x="8629650" y="2627395"/>
             <a:ext cx="2600325" cy="1066800"/>
           </a:xfrm>
           <a:prstGeom prst="rect">
@@ -21470,7 +22958,7 @@
         </p:nvSpPr>
         <p:spPr>
           <a:xfrm>
-            <a:off x="2619375" y="4824331"/>
+            <a:off x="2619375" y="5081003"/>
             <a:ext cx="6546170" cy="552450"/>
           </a:xfrm>
           <a:prstGeom prst="rect">
@@ -21506,7 +22994,7 @@
               </a:defRPr>
             </a:pPr>
             <a:r>
-              <a:rPr sz="1800" b="1">
+              <a:rPr sz="1800" b="1" dirty="0" err="1">
                 <a:solidFill>
                   <a:srgbClr val="244128"/>
                 </a:solidFill>
@@ -21514,7 +23002,128 @@
                 <a:ea typeface="Onest"/>
                 <a:cs typeface="Onest"/>
               </a:rPr>
-              <a:t>Таблицы GMP-ECM используются как сильные базовые значения.</a:t>
+              <a:t>Таблицы</a:t>
+            </a:r>
+            <a:r>
+              <a:rPr sz="1800" b="1" dirty="0">
+                <a:solidFill>
+                  <a:srgbClr val="244128"/>
+                </a:solidFill>
+                <a:latin typeface="Onest"/>
+                <a:ea typeface="Onest"/>
+                <a:cs typeface="Onest"/>
+              </a:rPr>
+              <a:t> GMP-ECM </a:t>
+            </a:r>
+            <a:r>
+              <a:rPr sz="1800" b="1" dirty="0" err="1">
+                <a:solidFill>
+                  <a:srgbClr val="244128"/>
+                </a:solidFill>
+                <a:latin typeface="Onest"/>
+                <a:ea typeface="Onest"/>
+                <a:cs typeface="Onest"/>
+              </a:rPr>
+              <a:t>используются</a:t>
+            </a:r>
+            <a:r>
+              <a:rPr sz="1800" b="1" dirty="0">
+                <a:solidFill>
+                  <a:srgbClr val="244128"/>
+                </a:solidFill>
+                <a:latin typeface="Onest"/>
+                <a:ea typeface="Onest"/>
+                <a:cs typeface="Onest"/>
+              </a:rPr>
+              <a:t> </a:t>
+            </a:r>
+            <a:r>
+              <a:rPr sz="1800" b="1" dirty="0" err="1">
+                <a:solidFill>
+                  <a:srgbClr val="244128"/>
+                </a:solidFill>
+                <a:latin typeface="Onest"/>
+                <a:ea typeface="Onest"/>
+                <a:cs typeface="Onest"/>
+              </a:rPr>
+              <a:t>как</a:t>
+            </a:r>
+            <a:r>
+              <a:rPr sz="1800" b="1" dirty="0">
+                <a:solidFill>
+                  <a:srgbClr val="244128"/>
+                </a:solidFill>
+                <a:latin typeface="Onest"/>
+                <a:ea typeface="Onest"/>
+                <a:cs typeface="Onest"/>
+              </a:rPr>
+              <a:t> </a:t>
+            </a:r>
+            <a:r>
+              <a:rPr sz="1800" b="1" dirty="0" err="1">
+                <a:solidFill>
+                  <a:srgbClr val="244128"/>
+                </a:solidFill>
+                <a:latin typeface="Onest"/>
+                <a:ea typeface="Onest"/>
+                <a:cs typeface="Onest"/>
+              </a:rPr>
+              <a:t>сильные</a:t>
+            </a:r>
+            <a:r>
+              <a:rPr sz="1800" b="1" dirty="0">
+                <a:solidFill>
+                  <a:srgbClr val="244128"/>
+                </a:solidFill>
+                <a:latin typeface="Onest"/>
+                <a:ea typeface="Onest"/>
+                <a:cs typeface="Onest"/>
+              </a:rPr>
+              <a:t> </a:t>
+            </a:r>
+            <a:r>
+              <a:rPr sz="1800" b="1" dirty="0" err="1">
+                <a:solidFill>
+                  <a:srgbClr val="244128"/>
+                </a:solidFill>
+                <a:latin typeface="Onest"/>
+                <a:ea typeface="Onest"/>
+                <a:cs typeface="Onest"/>
+              </a:rPr>
+              <a:t>базовые</a:t>
+            </a:r>
+            <a:r>
+              <a:rPr sz="1800" b="1" dirty="0">
+                <a:solidFill>
+                  <a:srgbClr val="244128"/>
+                </a:solidFill>
+                <a:latin typeface="Onest"/>
+                <a:ea typeface="Onest"/>
+                <a:cs typeface="Onest"/>
+              </a:rPr>
+              <a:t> </a:t>
+            </a:r>
+            <a:r>
+              <a:rPr sz="1800" b="1" dirty="0" err="1">
+                <a:solidFill>
+                  <a:srgbClr val="244128"/>
+                </a:solidFill>
+                <a:latin typeface="Onest"/>
+                <a:ea typeface="Onest"/>
+                <a:cs typeface="Onest"/>
+              </a:rPr>
+              <a:t>значения</a:t>
+            </a:r>
+            <a:r>
+              <a:rPr sz="1800" b="1" dirty="0">
+                <a:solidFill>
+                  <a:srgbClr val="244128"/>
+                </a:solidFill>
+                <a:latin typeface="Onest"/>
+                <a:ea typeface="Onest"/>
+                <a:cs typeface="Onest"/>
+              </a:rPr>
+              <a:t>.</a:t>
             </a:r>
           </a:p>
         </p:txBody>
@@ -21917,7 +23526,7 @@
         </p:nvSpPr>
         <p:spPr>
           <a:xfrm>
-            <a:off x="1103898" y="2054560"/>
+            <a:off x="1122195" y="2088183"/>
             <a:ext cx="1428750" cy="1066800"/>
           </a:xfrm>
           <a:prstGeom prst="rect">
@@ -21950,7 +23559,7 @@
         </p:nvSpPr>
         <p:spPr>
           <a:xfrm>
-            <a:off x="1103898" y="3064210"/>
+            <a:off x="1122195" y="3097833"/>
             <a:ext cx="1428750" cy="57150"/>
           </a:xfrm>
           <a:prstGeom prst="rect">
@@ -21983,7 +23592,7 @@
         </p:nvSpPr>
         <p:spPr>
           <a:xfrm>
-            <a:off x="1237248" y="2187910"/>
+            <a:off x="1255545" y="2221533"/>
             <a:ext cx="1162050" cy="781050"/>
           </a:xfrm>
           <a:prstGeom prst="rect">
@@ -22048,7 +23657,7 @@
         </p:nvSpPr>
         <p:spPr>
           <a:xfrm>
-            <a:off x="2656974" y="2382174"/>
+            <a:off x="2675271" y="2415797"/>
             <a:ext cx="514350" cy="381000"/>
           </a:xfrm>
           <a:prstGeom prst="rect">
@@ -22113,7 +23722,7 @@
         </p:nvSpPr>
         <p:spPr>
           <a:xfrm>
-            <a:off x="3295650" y="2054560"/>
+            <a:off x="3313947" y="2088183"/>
             <a:ext cx="1428750" cy="1066800"/>
           </a:xfrm>
           <a:prstGeom prst="rect">
@@ -22146,7 +23755,7 @@
         </p:nvSpPr>
         <p:spPr>
           <a:xfrm>
-            <a:off x="3295650" y="3064210"/>
+            <a:off x="3313947" y="3097833"/>
             <a:ext cx="1428750" cy="57150"/>
           </a:xfrm>
           <a:prstGeom prst="rect">
@@ -22179,7 +23788,7 @@
         </p:nvSpPr>
         <p:spPr>
           <a:xfrm>
-            <a:off x="3429000" y="2187910"/>
+            <a:off x="3447297" y="2221533"/>
             <a:ext cx="1162050" cy="781050"/>
           </a:xfrm>
           <a:prstGeom prst="rect">
@@ -22279,7 +23888,7 @@
         </p:nvSpPr>
         <p:spPr>
           <a:xfrm>
-            <a:off x="4800600" y="2397460"/>
+            <a:off x="4818897" y="2431083"/>
             <a:ext cx="514350" cy="381000"/>
           </a:xfrm>
           <a:prstGeom prst="rect">
@@ -22344,7 +23953,7 @@
         </p:nvSpPr>
         <p:spPr>
           <a:xfrm>
-            <a:off x="5391150" y="2054560"/>
+            <a:off x="5409447" y="2088183"/>
             <a:ext cx="1428750" cy="1066800"/>
           </a:xfrm>
           <a:prstGeom prst="rect">
@@ -22377,7 +23986,7 @@
         </p:nvSpPr>
         <p:spPr>
           <a:xfrm>
-            <a:off x="5391150" y="3064210"/>
+            <a:off x="5409447" y="3097833"/>
             <a:ext cx="1428750" cy="57150"/>
           </a:xfrm>
           <a:prstGeom prst="rect">
@@ -22410,7 +24019,7 @@
         </p:nvSpPr>
         <p:spPr>
           <a:xfrm>
-            <a:off x="5524500" y="2187910"/>
+            <a:off x="5542797" y="2221533"/>
             <a:ext cx="1162050" cy="781050"/>
           </a:xfrm>
           <a:prstGeom prst="rect">
@@ -22510,7 +24119,7 @@
         </p:nvSpPr>
         <p:spPr>
           <a:xfrm>
-            <a:off x="6896100" y="2397460"/>
+            <a:off x="6914397" y="2431083"/>
             <a:ext cx="514350" cy="381000"/>
           </a:xfrm>
           <a:prstGeom prst="rect">
@@ -22575,7 +24184,7 @@
         </p:nvSpPr>
         <p:spPr>
           <a:xfrm>
-            <a:off x="7486650" y="2054560"/>
+            <a:off x="7504947" y="2088183"/>
             <a:ext cx="1428750" cy="1066800"/>
           </a:xfrm>
           <a:prstGeom prst="rect">
@@ -22608,7 +24217,7 @@
         </p:nvSpPr>
         <p:spPr>
           <a:xfrm>
-            <a:off x="7486650" y="3064210"/>
+            <a:off x="7504947" y="3097833"/>
             <a:ext cx="1428750" cy="57150"/>
           </a:xfrm>
           <a:prstGeom prst="rect">
@@ -22641,7 +24250,7 @@
         </p:nvSpPr>
         <p:spPr>
           <a:xfrm>
-            <a:off x="7620000" y="2187910"/>
+            <a:off x="7638297" y="2221533"/>
             <a:ext cx="1162050" cy="781050"/>
           </a:xfrm>
           <a:prstGeom prst="rect">
@@ -22741,7 +24350,7 @@
         </p:nvSpPr>
         <p:spPr>
           <a:xfrm>
-            <a:off x="9023684" y="2389690"/>
+            <a:off x="9041981" y="2423313"/>
             <a:ext cx="514350" cy="381000"/>
           </a:xfrm>
           <a:prstGeom prst="rect">
@@ -22806,7 +24415,7 @@
         </p:nvSpPr>
         <p:spPr>
           <a:xfrm>
-            <a:off x="9630276" y="2054560"/>
+            <a:off x="9648573" y="2088183"/>
             <a:ext cx="1428750" cy="1066800"/>
           </a:xfrm>
           <a:prstGeom prst="rect">
@@ -22839,7 +24448,7 @@
         </p:nvSpPr>
         <p:spPr>
           <a:xfrm>
-            <a:off x="9630276" y="3064210"/>
+            <a:off x="9648573" y="3097833"/>
             <a:ext cx="1428750" cy="57150"/>
           </a:xfrm>
           <a:prstGeom prst="rect">
@@ -22872,7 +24481,7 @@
         </p:nvSpPr>
         <p:spPr>
           <a:xfrm>
-            <a:off x="9763626" y="2187910"/>
+            <a:off x="9781923" y="2221533"/>
             <a:ext cx="1162050" cy="781050"/>
           </a:xfrm>
           <a:prstGeom prst="rect">
@@ -22908,15 +24517,26 @@
               </a:defRPr>
             </a:pPr>
             <a:r>
-              <a:rPr b="1">
-                <a:solidFill>
-                  <a:srgbClr val="15181F"/>
-                </a:solidFill>
-                <a:latin typeface="Onest"/>
-                <a:ea typeface="Onest"/>
-                <a:cs typeface="Onest"/>
-              </a:rPr>
-              <a:t>Делитель/</a:t>
+              <a:rPr b="1" dirty="0" err="1">
+                <a:solidFill>
+                  <a:srgbClr val="15181F"/>
+                </a:solidFill>
+                <a:latin typeface="Onest"/>
+                <a:ea typeface="Onest"/>
+                <a:cs typeface="Onest"/>
+              </a:rPr>
+              <a:t>Делитель</a:t>
+            </a:r>
+            <a:r>
+              <a:rPr b="1" dirty="0">
+                <a:solidFill>
+                  <a:srgbClr val="15181F"/>
+                </a:solidFill>
+                <a:latin typeface="Onest"/>
+                <a:ea typeface="Onest"/>
+                <a:cs typeface="Onest"/>
+              </a:rPr>
+              <a:t>/</a:t>
             </a:r>
           </a:p>
           <a:p>
@@ -22932,16 +24552,57 @@
               </a:defRPr>
             </a:pPr>
             <a:r>
-              <a:rPr b="1">
-                <a:solidFill>
-                  <a:srgbClr val="15181F"/>
-                </a:solidFill>
-                <a:latin typeface="Onest"/>
-                <a:ea typeface="Onest"/>
-                <a:cs typeface="Onest"/>
-              </a:rPr>
-              <a:t>новая кривая</a:t>
-            </a:r>
+              <a:rPr lang="ru-RU" b="1" dirty="0">
+                <a:solidFill>
+                  <a:srgbClr val="15181F"/>
+                </a:solidFill>
+                <a:latin typeface="Onest"/>
+                <a:ea typeface="Onest"/>
+                <a:cs typeface="Onest"/>
+              </a:rPr>
+              <a:t>н</a:t>
+            </a:r>
+            <a:r>
+              <a:rPr b="1" dirty="0" err="1">
+                <a:solidFill>
+                  <a:srgbClr val="15181F"/>
+                </a:solidFill>
+                <a:latin typeface="Onest"/>
+                <a:ea typeface="Onest"/>
+                <a:cs typeface="Onest"/>
+              </a:rPr>
+              <a:t>овая</a:t>
+            </a:r>
+            <a:r>
+              <a:rPr b="1" dirty="0">
+                <a:solidFill>
+                  <a:srgbClr val="15181F"/>
+                </a:solidFill>
+                <a:latin typeface="Onest"/>
+                <a:ea typeface="Onest"/>
+                <a:cs typeface="Onest"/>
+              </a:rPr>
+              <a:t> </a:t>
+            </a:r>
+            <a:r>
+              <a:rPr b="1" dirty="0" err="1">
+                <a:solidFill>
+                  <a:srgbClr val="15181F"/>
+                </a:solidFill>
+                <a:latin typeface="Onest"/>
+                <a:ea typeface="Onest"/>
+                <a:cs typeface="Onest"/>
+              </a:rPr>
+              <a:t>кривая</a:t>
+            </a:r>
+            <a:endParaRPr b="1" dirty="0">
+              <a:solidFill>
+                <a:srgbClr val="15181F"/>
+              </a:solidFill>
+              <a:latin typeface="Onest"/>
+              <a:ea typeface="Onest"/>
+              <a:cs typeface="Onest"/>
+            </a:endParaRPr>
           </a:p>
         </p:txBody>
       </p:sp>
@@ -23353,8 +25014,8 @@
         </p:nvSpPr>
         <p:spPr>
           <a:xfrm>
-            <a:off x="1418223" y="5127827"/>
-            <a:ext cx="9279354" cy="438150"/>
+            <a:off x="1158290" y="5176709"/>
+            <a:ext cx="9875419" cy="438150"/>
           </a:xfrm>
           <a:prstGeom prst="rect">
             <a:avLst/>
@@ -23389,7 +25050,7 @@
               </a:defRPr>
             </a:pPr>
             <a:r>
-              <a:rPr sz="1800" b="1">
+              <a:rPr sz="1800" b="1" dirty="0" err="1">
                 <a:solidFill>
                   <a:srgbClr val="244128"/>
                 </a:solidFill>
@@ -23397,7 +25058,216 @@
                 <a:ea typeface="Onest"/>
                 <a:cs typeface="Onest"/>
               </a:rPr>
-              <a:t>Оптимум находится между этими двумя режимами и зависит от практических требований.</a:t>
+              <a:t>Оптимум</a:t>
+            </a:r>
+            <a:r>
+              <a:rPr sz="1800" b="1" dirty="0">
+                <a:solidFill>
+                  <a:srgbClr val="244128"/>
+                </a:solidFill>
+                <a:latin typeface="Onest"/>
+                <a:ea typeface="Onest"/>
+                <a:cs typeface="Onest"/>
+              </a:rPr>
+              <a:t> </a:t>
+            </a:r>
+            <a:r>
+              <a:rPr sz="1800" b="1" dirty="0" err="1">
+                <a:solidFill>
+                  <a:srgbClr val="244128"/>
+                </a:solidFill>
+                <a:latin typeface="Onest"/>
+                <a:ea typeface="Onest"/>
+                <a:cs typeface="Onest"/>
+              </a:rPr>
+              <a:t>находится</a:t>
+            </a:r>
+            <a:r>
+              <a:rPr sz="1800" b="1" dirty="0">
+                <a:solidFill>
+                  <a:srgbClr val="244128"/>
+                </a:solidFill>
+                <a:latin typeface="Onest"/>
+                <a:ea typeface="Onest"/>
+                <a:cs typeface="Onest"/>
+              </a:rPr>
+              <a:t> </a:t>
+            </a:r>
+            <a:r>
+              <a:rPr sz="1800" b="1" dirty="0" err="1">
+                <a:solidFill>
+                  <a:srgbClr val="244128"/>
+                </a:solidFill>
+                <a:latin typeface="Onest"/>
+                <a:ea typeface="Onest"/>
+                <a:cs typeface="Onest"/>
+              </a:rPr>
+              <a:t>между</a:t>
+            </a:r>
+            <a:r>
+              <a:rPr sz="1800" b="1" dirty="0">
+                <a:solidFill>
+                  <a:srgbClr val="244128"/>
+                </a:solidFill>
+                <a:latin typeface="Onest"/>
+                <a:ea typeface="Onest"/>
+                <a:cs typeface="Onest"/>
+              </a:rPr>
+              <a:t> </a:t>
+            </a:r>
+            <a:r>
+              <a:rPr sz="1800" b="1" dirty="0" err="1">
+                <a:solidFill>
+                  <a:srgbClr val="244128"/>
+                </a:solidFill>
+                <a:latin typeface="Onest"/>
+                <a:ea typeface="Onest"/>
+                <a:cs typeface="Onest"/>
+              </a:rPr>
+              <a:t>этими</a:t>
+            </a:r>
+            <a:r>
+              <a:rPr sz="1800" b="1" dirty="0">
+                <a:solidFill>
+                  <a:srgbClr val="244128"/>
+                </a:solidFill>
+                <a:latin typeface="Onest"/>
+                <a:ea typeface="Onest"/>
+                <a:cs typeface="Onest"/>
+              </a:rPr>
+              <a:t> </a:t>
+            </a:r>
+            <a:r>
+              <a:rPr sz="1800" b="1" dirty="0" err="1">
+                <a:solidFill>
+                  <a:srgbClr val="244128"/>
+                </a:solidFill>
+                <a:latin typeface="Onest"/>
+                <a:ea typeface="Onest"/>
+                <a:cs typeface="Onest"/>
+              </a:rPr>
+              <a:t>двумя</a:t>
+            </a:r>
+            <a:r>
+              <a:rPr sz="1800" b="1" dirty="0">
+                <a:solidFill>
+                  <a:srgbClr val="244128"/>
+                </a:solidFill>
+                <a:latin typeface="Onest"/>
+                <a:ea typeface="Onest"/>
+                <a:cs typeface="Onest"/>
+              </a:rPr>
+              <a:t> </a:t>
+            </a:r>
+            <a:r>
+              <a:rPr lang="ru-RU" sz="1800" b="1" dirty="0">
+                <a:solidFill>
+                  <a:srgbClr val="244128"/>
+                </a:solidFill>
+                <a:latin typeface="Onest"/>
+                <a:ea typeface="Onest"/>
+                <a:cs typeface="Onest"/>
+              </a:rPr>
+              <a:t>альтернативами</a:t>
+            </a:r>
+            <a:r>
+              <a:rPr sz="1800" b="1" dirty="0">
+                <a:solidFill>
+                  <a:srgbClr val="244128"/>
+                </a:solidFill>
+                <a:latin typeface="Onest"/>
+                <a:ea typeface="Onest"/>
+                <a:cs typeface="Onest"/>
+              </a:rPr>
+              <a:t> и </a:t>
+            </a:r>
+            <a:r>
+              <a:rPr sz="1800" b="1" dirty="0" err="1">
+                <a:solidFill>
+                  <a:srgbClr val="244128"/>
+                </a:solidFill>
+                <a:latin typeface="Onest"/>
+                <a:ea typeface="Onest"/>
+                <a:cs typeface="Onest"/>
+              </a:rPr>
+              <a:t>зависит</a:t>
+            </a:r>
+            <a:r>
+              <a:rPr sz="1800" b="1" dirty="0">
+                <a:solidFill>
+                  <a:srgbClr val="244128"/>
+                </a:solidFill>
+                <a:latin typeface="Onest"/>
+                <a:ea typeface="Onest"/>
+                <a:cs typeface="Onest"/>
+              </a:rPr>
+              <a:t> </a:t>
+            </a:r>
+            <a:r>
+              <a:rPr sz="1800" b="1" dirty="0" err="1">
+                <a:solidFill>
+                  <a:srgbClr val="244128"/>
+                </a:solidFill>
+                <a:latin typeface="Onest"/>
+                <a:ea typeface="Onest"/>
+                <a:cs typeface="Onest"/>
+              </a:rPr>
+              <a:t>от</a:t>
+            </a:r>
+            <a:r>
+              <a:rPr sz="1800" b="1" dirty="0">
+                <a:solidFill>
+                  <a:srgbClr val="244128"/>
+                </a:solidFill>
+                <a:latin typeface="Onest"/>
+                <a:ea typeface="Onest"/>
+                <a:cs typeface="Onest"/>
+              </a:rPr>
+              <a:t> </a:t>
+            </a:r>
+            <a:r>
+              <a:rPr sz="1800" b="1" dirty="0" err="1">
+                <a:solidFill>
+                  <a:srgbClr val="244128"/>
+                </a:solidFill>
+                <a:latin typeface="Onest"/>
+                <a:ea typeface="Onest"/>
+                <a:cs typeface="Onest"/>
+              </a:rPr>
+              <a:t>практических</a:t>
+            </a:r>
+            <a:r>
+              <a:rPr sz="1800" b="1" dirty="0">
+                <a:solidFill>
+                  <a:srgbClr val="244128"/>
+                </a:solidFill>
+                <a:latin typeface="Onest"/>
+                <a:ea typeface="Onest"/>
+                <a:cs typeface="Onest"/>
+              </a:rPr>
+              <a:t> </a:t>
+            </a:r>
+            <a:r>
+              <a:rPr sz="1800" b="1" dirty="0" err="1">
+                <a:solidFill>
+                  <a:srgbClr val="244128"/>
+                </a:solidFill>
+                <a:latin typeface="Onest"/>
+                <a:ea typeface="Onest"/>
+                <a:cs typeface="Onest"/>
+              </a:rPr>
+              <a:t>требований</a:t>
+            </a:r>
+            <a:r>
+              <a:rPr sz="1800" b="1" dirty="0">
+                <a:solidFill>
+                  <a:srgbClr val="244128"/>
+                </a:solidFill>
+                <a:latin typeface="Onest"/>
+                <a:ea typeface="Onest"/>
+                <a:cs typeface="Onest"/>
+              </a:rPr>
+              <a:t>.</a:t>
             </a:r>
           </a:p>
         </p:txBody>
@@ -26128,16 +27998,46 @@
               </a:defRPr>
             </a:pPr>
             <a:r>
-              <a:rPr sz="1800" b="1">
-                <a:solidFill>
-                  <a:srgbClr val="15181F"/>
-                </a:solidFill>
-                <a:latin typeface="Onest"/>
-                <a:ea typeface="Onest"/>
-                <a:cs typeface="Onest"/>
-              </a:rPr>
-              <a:t>train-набор</a:t>
-            </a:r>
+              <a:rPr lang="en-US" sz="1800" b="1" dirty="0">
+                <a:solidFill>
+                  <a:srgbClr val="15181F"/>
+                </a:solidFill>
+                <a:latin typeface="Onest"/>
+                <a:ea typeface="Onest"/>
+                <a:cs typeface="Onest"/>
+              </a:rPr>
+              <a:t>T</a:t>
+            </a:r>
+            <a:r>
+              <a:rPr sz="1800" b="1" dirty="0">
+                <a:solidFill>
+                  <a:srgbClr val="15181F"/>
+                </a:solidFill>
+                <a:latin typeface="Onest"/>
+                <a:ea typeface="Onest"/>
+                <a:cs typeface="Onest"/>
+              </a:rPr>
+              <a:t>rain-</a:t>
+            </a:r>
+            <a:r>
+              <a:rPr sz="1800" b="1" dirty="0" err="1">
+                <a:solidFill>
+                  <a:srgbClr val="15181F"/>
+                </a:solidFill>
+                <a:latin typeface="Onest"/>
+                <a:ea typeface="Onest"/>
+                <a:cs typeface="Onest"/>
+              </a:rPr>
+              <a:t>набор</a:t>
+            </a:r>
+            <a:endParaRPr sz="1800" b="1" dirty="0">
+              <a:solidFill>
+                <a:srgbClr val="15181F"/>
+              </a:solidFill>
+              <a:latin typeface="Onest"/>
+              <a:ea typeface="Onest"/>
+              <a:cs typeface="Onest"/>
+            </a:endParaRPr>
           </a:p>
         </p:txBody>
       </p:sp>
@@ -26324,16 +28224,35 @@
               </a:defRPr>
             </a:pPr>
             <a:r>
-              <a:rPr sz="1800" b="1">
-                <a:solidFill>
-                  <a:srgbClr val="15181F"/>
-                </a:solidFill>
-                <a:latin typeface="Onest"/>
-                <a:ea typeface="Onest"/>
-                <a:cs typeface="Onest"/>
-              </a:rPr>
-              <a:t>оптимизатор</a:t>
-            </a:r>
+              <a:rPr lang="ru-RU" b="1" dirty="0">
+                <a:solidFill>
+                  <a:srgbClr val="15181F"/>
+                </a:solidFill>
+                <a:latin typeface="Onest"/>
+                <a:ea typeface="Onest"/>
+                <a:cs typeface="Onest"/>
+              </a:rPr>
+              <a:t>О</a:t>
+            </a:r>
+            <a:r>
+              <a:rPr sz="1800" b="1" dirty="0" err="1">
+                <a:solidFill>
+                  <a:srgbClr val="15181F"/>
+                </a:solidFill>
+                <a:latin typeface="Onest"/>
+                <a:ea typeface="Onest"/>
+                <a:cs typeface="Onest"/>
+              </a:rPr>
+              <a:t>птимизатор</a:t>
+            </a:r>
+            <a:endParaRPr sz="1800" b="1" dirty="0">
+              <a:solidFill>
+                <a:srgbClr val="15181F"/>
+              </a:solidFill>
+              <a:latin typeface="Onest"/>
+              <a:ea typeface="Onest"/>
+              <a:cs typeface="Onest"/>
+            </a:endParaRPr>
           </a:p>
           <a:p>
             <a:pPr algn="ctr">
@@ -26348,7 +28267,7 @@
               </a:defRPr>
             </a:pPr>
             <a:r>
-              <a:rPr sz="1800" b="1">
+              <a:rPr sz="1800" b="1" dirty="0">
                 <a:solidFill>
                   <a:srgbClr val="15181F"/>
                 </a:solidFill>
@@ -26544,16 +28463,35 @@
               </a:defRPr>
             </a:pPr>
             <a:r>
-              <a:rPr sz="1800" b="1">
-                <a:solidFill>
-                  <a:srgbClr val="15181F"/>
-                </a:solidFill>
-                <a:latin typeface="Onest"/>
-                <a:ea typeface="Onest"/>
-                <a:cs typeface="Onest"/>
-              </a:rPr>
-              <a:t>найденные</a:t>
-            </a:r>
+              <a:rPr lang="ru-RU" b="1" dirty="0">
+                <a:solidFill>
+                  <a:srgbClr val="15181F"/>
+                </a:solidFill>
+                <a:latin typeface="Onest"/>
+                <a:ea typeface="Onest"/>
+                <a:cs typeface="Onest"/>
+              </a:rPr>
+              <a:t>Н</a:t>
+            </a:r>
+            <a:r>
+              <a:rPr sz="1800" b="1" dirty="0" err="1">
+                <a:solidFill>
+                  <a:srgbClr val="15181F"/>
+                </a:solidFill>
+                <a:latin typeface="Onest"/>
+                <a:ea typeface="Onest"/>
+                <a:cs typeface="Onest"/>
+              </a:rPr>
+              <a:t>айденные</a:t>
+            </a:r>
+            <a:endParaRPr sz="1800" b="1" dirty="0">
+              <a:solidFill>
+                <a:srgbClr val="15181F"/>
+              </a:solidFill>
+              <a:latin typeface="Onest"/>
+              <a:ea typeface="Onest"/>
+              <a:cs typeface="Onest"/>
+            </a:endParaRPr>
           </a:p>
           <a:p>
             <a:pPr algn="ctr">
@@ -26568,7 +28506,7 @@
               </a:defRPr>
             </a:pPr>
             <a:r>
-              <a:rPr sz="1800" b="1">
+              <a:rPr sz="1800" b="1" dirty="0">
                 <a:solidFill>
                   <a:srgbClr val="15181F"/>
                 </a:solidFill>
@@ -26699,16 +28637,46 @@
               </a:defRPr>
             </a:pPr>
             <a:r>
-              <a:rPr sz="1800" b="1">
-                <a:solidFill>
-                  <a:srgbClr val="15181F"/>
-                </a:solidFill>
-                <a:latin typeface="Onest"/>
-                <a:ea typeface="Onest"/>
-                <a:cs typeface="Onest"/>
-              </a:rPr>
-              <a:t>control-набор</a:t>
-            </a:r>
+              <a:rPr lang="en-US" sz="1800" b="1" dirty="0">
+                <a:solidFill>
+                  <a:srgbClr val="15181F"/>
+                </a:solidFill>
+                <a:latin typeface="Onest"/>
+                <a:ea typeface="Onest"/>
+                <a:cs typeface="Onest"/>
+              </a:rPr>
+              <a:t>C</a:t>
+            </a:r>
+            <a:r>
+              <a:rPr sz="1800" b="1" dirty="0">
+                <a:solidFill>
+                  <a:srgbClr val="15181F"/>
+                </a:solidFill>
+                <a:latin typeface="Onest"/>
+                <a:ea typeface="Onest"/>
+                <a:cs typeface="Onest"/>
+              </a:rPr>
+              <a:t>ontrol-</a:t>
+            </a:r>
+            <a:r>
+              <a:rPr sz="1800" b="1" dirty="0" err="1">
+                <a:solidFill>
+                  <a:srgbClr val="15181F"/>
+                </a:solidFill>
+                <a:latin typeface="Onest"/>
+                <a:ea typeface="Onest"/>
+                <a:cs typeface="Onest"/>
+              </a:rPr>
+              <a:t>набор</a:t>
+            </a:r>
+            <a:endParaRPr sz="1800" b="1" dirty="0">
+              <a:solidFill>
+                <a:srgbClr val="15181F"/>
+              </a:solidFill>
+              <a:latin typeface="Onest"/>
+              <a:ea typeface="Onest"/>
+              <a:cs typeface="Onest"/>
+            </a:endParaRPr>
           </a:p>
         </p:txBody>
       </p:sp>
@@ -26895,16 +28863,35 @@
               </a:defRPr>
             </a:pPr>
             <a:r>
-              <a:rPr sz="1800" b="1">
-                <a:solidFill>
-                  <a:srgbClr val="15181F"/>
-                </a:solidFill>
-                <a:latin typeface="Onest"/>
-                <a:ea typeface="Onest"/>
-                <a:cs typeface="Onest"/>
-              </a:rPr>
-              <a:t>независимая</a:t>
-            </a:r>
+              <a:rPr lang="ru-RU" b="1" dirty="0">
+                <a:solidFill>
+                  <a:srgbClr val="15181F"/>
+                </a:solidFill>
+                <a:latin typeface="Onest"/>
+                <a:ea typeface="Onest"/>
+                <a:cs typeface="Onest"/>
+              </a:rPr>
+              <a:t>Н</a:t>
+            </a:r>
+            <a:r>
+              <a:rPr sz="1800" b="1" dirty="0" err="1">
+                <a:solidFill>
+                  <a:srgbClr val="15181F"/>
+                </a:solidFill>
+                <a:latin typeface="Onest"/>
+                <a:ea typeface="Onest"/>
+                <a:cs typeface="Onest"/>
+              </a:rPr>
+              <a:t>езависимая</a:t>
+            </a:r>
+            <a:endParaRPr sz="1800" b="1" dirty="0">
+              <a:solidFill>
+                <a:srgbClr val="15181F"/>
+              </a:solidFill>
+              <a:latin typeface="Onest"/>
+              <a:ea typeface="Onest"/>
+              <a:cs typeface="Onest"/>
+            </a:endParaRPr>
           </a:p>
           <a:p>
             <a:pPr algn="ctr">
@@ -26919,7 +28906,7 @@
               </a:defRPr>
             </a:pPr>
             <a:r>
-              <a:rPr sz="1800" b="1">
+              <a:rPr sz="1800" b="1" dirty="0" err="1">
                 <a:solidFill>
                   <a:srgbClr val="15181F"/>
                 </a:solidFill>
@@ -26929,6 +28916,14 @@
               </a:rPr>
               <a:t>валидация</a:t>
             </a:r>
+            <a:endParaRPr sz="1800" b="1" dirty="0">
+              <a:solidFill>
+                <a:srgbClr val="15181F"/>
+              </a:solidFill>
+              <a:latin typeface="Onest"/>
+              <a:ea typeface="Onest"/>
+              <a:cs typeface="Onest"/>
+            </a:endParaRPr>
           </a:p>
         </p:txBody>
       </p:sp>
@@ -27420,8 +29415,8 @@
           </a:prstGeom>
         </p:spPr>
       </p:pic>
-      <mc:AlternateContent xmlns:mc="http://schemas.openxmlformats.org/markup-compatibility/2006">
-        <mc:Choice xmlns:a14="http://schemas.microsoft.com/office/drawing/2010/main" Requires="a14">
+      <mc:AlternateContent xmlns:mc="http://schemas.openxmlformats.org/markup-compatibility/2006" xmlns:a14="http://schemas.microsoft.com/office/drawing/2010/main">
+        <mc:Choice Requires="a14">
           <p:sp>
             <p:nvSpPr>
               <p:cNvPr id="36" name="Прямоугольник 35">
@@ -27648,7 +29643,7 @@
             </p:txBody>
           </p:sp>
         </mc:Choice>
-        <mc:Fallback>
+        <mc:Fallback xmlns="">
           <p:sp>
             <p:nvSpPr>
               <p:cNvPr id="36" name="Прямоугольник 35">
@@ -28345,8 +30340,8 @@
           </a:fontRef>
         </p:style>
       </p:cxnSp>
-      <mc:AlternateContent xmlns:mc="http://schemas.openxmlformats.org/markup-compatibility/2006">
-        <mc:Choice xmlns:a14="http://schemas.microsoft.com/office/drawing/2010/main" Requires="a14">
+      <mc:AlternateContent xmlns:mc="http://schemas.openxmlformats.org/markup-compatibility/2006" xmlns:a14="http://schemas.microsoft.com/office/drawing/2010/main">
+        <mc:Choice Requires="a14">
           <p:sp>
             <p:nvSpPr>
               <p:cNvPr id="68" name="Прямоугольник 67">
@@ -28401,6 +30396,7 @@
                             <a:solidFill>
                               <a:srgbClr val="DA4927"/>
                             </a:solidFill>
+                            <a:latin typeface="Cambria Math" panose="02040503050406030204" pitchFamily="18" charset="0"/>
                           </a:rPr>
                         </m:ctrlPr>
                       </m:accPr>
@@ -28410,6 +30406,7 @@
                             <a:solidFill>
                               <a:srgbClr val="DA4927"/>
                             </a:solidFill>
+                            <a:latin typeface="Cambria Math" panose="02040503050406030204" pitchFamily="18" charset="0"/>
                           </a:rPr>
                           <m:t>𝒑</m:t>
                         </m:r>
@@ -28535,6 +30532,7 @@
                             <a:solidFill>
                               <a:srgbClr val="37B34A"/>
                             </a:solidFill>
+                            <a:latin typeface="Cambria Math" panose="02040503050406030204" pitchFamily="18" charset="0"/>
                           </a:rPr>
                         </m:ctrlPr>
                       </m:accPr>
@@ -28544,6 +30542,7 @@
                             <a:solidFill>
                               <a:srgbClr val="37B34A"/>
                             </a:solidFill>
+                            <a:latin typeface="Cambria Math" panose="02040503050406030204" pitchFamily="18" charset="0"/>
                           </a:rPr>
                           <m:t>𝒕</m:t>
                         </m:r>
@@ -28645,6 +30644,7 @@
                             <a:solidFill>
                               <a:srgbClr val="522878"/>
                             </a:solidFill>
+                            <a:latin typeface="Cambria Math" panose="02040503050406030204" pitchFamily="18" charset="0"/>
                           </a:rPr>
                         </m:ctrlPr>
                       </m:accPr>
@@ -28654,6 +30654,7 @@
                             <a:solidFill>
                               <a:srgbClr val="522878"/>
                             </a:solidFill>
+                            <a:latin typeface="Cambria Math" panose="02040503050406030204" pitchFamily="18" charset="0"/>
                           </a:rPr>
                           <m:t>𝒄</m:t>
                         </m:r>
@@ -28774,7 +30775,7 @@
             </p:txBody>
           </p:sp>
         </mc:Choice>
-        <mc:Fallback>
+        <mc:Fallback xmlns="">
           <p:sp>
             <p:nvSpPr>
               <p:cNvPr id="68" name="Прямоугольник 67">

--- a/REPORTS/06_thesis_defense_presentation/Plekhanov_thesis_defense_ECM_parameter_optimization_polytech.pptx
+++ b/REPORTS/06_thesis_defense_presentation/Plekhanov_thesis_defense_ECM_parameter_optimization_polytech.pptx
@@ -2079,16 +2079,321 @@
               </a:defRPr>
             </a:pPr>
             <a:r>
-              <a:rPr sz="3200" b="1">
-                <a:solidFill>
-                  <a:srgbClr val="15181F"/>
-                </a:solidFill>
-                <a:latin typeface="Onest"/>
-                <a:ea typeface="Onest"/>
-                <a:cs typeface="Onest"/>
-              </a:rPr>
-              <a:t>Автоматизация подбора параметров алгоритма факторизации больших чисел с применением эллиптических кривых на основе эвристических методов оптимизации</a:t>
-            </a:r>
+              <a:rPr sz="3200" b="1" dirty="0">
+                <a:solidFill>
+                  <a:srgbClr val="15181F"/>
+                </a:solidFill>
+                <a:latin typeface="Onest"/>
+                <a:ea typeface="Onest"/>
+                <a:cs typeface="Onest"/>
+              </a:rPr>
+              <a:t>Автоматизация </a:t>
+            </a:r>
+            <a:r>
+              <a:rPr sz="3200" b="1" dirty="0" err="1">
+                <a:solidFill>
+                  <a:srgbClr val="15181F"/>
+                </a:solidFill>
+                <a:latin typeface="Onest"/>
+                <a:ea typeface="Onest"/>
+                <a:cs typeface="Onest"/>
+              </a:rPr>
+              <a:t>подбора</a:t>
+            </a:r>
+            <a:r>
+              <a:rPr sz="3200" b="1" dirty="0">
+                <a:solidFill>
+                  <a:srgbClr val="15181F"/>
+                </a:solidFill>
+                <a:latin typeface="Onest"/>
+                <a:ea typeface="Onest"/>
+                <a:cs typeface="Onest"/>
+              </a:rPr>
+              <a:t> </a:t>
+            </a:r>
+            <a:r>
+              <a:rPr sz="3200" b="1" dirty="0" err="1">
+                <a:solidFill>
+                  <a:srgbClr val="15181F"/>
+                </a:solidFill>
+                <a:latin typeface="Onest"/>
+                <a:ea typeface="Onest"/>
+                <a:cs typeface="Onest"/>
+              </a:rPr>
+              <a:t>параметров</a:t>
+            </a:r>
+            <a:r>
+              <a:rPr sz="3200" b="1" dirty="0">
+                <a:solidFill>
+                  <a:srgbClr val="15181F"/>
+                </a:solidFill>
+                <a:latin typeface="Onest"/>
+                <a:ea typeface="Onest"/>
+                <a:cs typeface="Onest"/>
+              </a:rPr>
+              <a:t> </a:t>
+            </a:r>
+            <a:r>
+              <a:rPr sz="3200" b="1" dirty="0" err="1">
+                <a:solidFill>
+                  <a:srgbClr val="15181F"/>
+                </a:solidFill>
+                <a:latin typeface="Onest"/>
+                <a:ea typeface="Onest"/>
+                <a:cs typeface="Onest"/>
+              </a:rPr>
+              <a:t>алгоритма</a:t>
+            </a:r>
+            <a:r>
+              <a:rPr sz="3200" b="1" dirty="0">
+                <a:solidFill>
+                  <a:srgbClr val="15181F"/>
+                </a:solidFill>
+                <a:latin typeface="Onest"/>
+                <a:ea typeface="Onest"/>
+                <a:cs typeface="Onest"/>
+              </a:rPr>
+              <a:t> </a:t>
+            </a:r>
+            <a:r>
+              <a:rPr sz="3200" b="1" dirty="0" err="1">
+                <a:solidFill>
+                  <a:srgbClr val="15181F"/>
+                </a:solidFill>
+                <a:latin typeface="Onest"/>
+                <a:ea typeface="Onest"/>
+                <a:cs typeface="Onest"/>
+              </a:rPr>
+              <a:t>факторизации</a:t>
+            </a:r>
+            <a:r>
+              <a:rPr sz="3200" b="1" dirty="0">
+                <a:solidFill>
+                  <a:srgbClr val="15181F"/>
+                </a:solidFill>
+                <a:latin typeface="Onest"/>
+                <a:ea typeface="Onest"/>
+                <a:cs typeface="Onest"/>
+              </a:rPr>
+              <a:t> </a:t>
+            </a:r>
+            <a:r>
+              <a:rPr sz="3200" b="1" dirty="0" err="1">
+                <a:solidFill>
+                  <a:srgbClr val="15181F"/>
+                </a:solidFill>
+                <a:latin typeface="Onest"/>
+                <a:ea typeface="Onest"/>
+                <a:cs typeface="Onest"/>
+              </a:rPr>
+              <a:t>больших</a:t>
+            </a:r>
+            <a:r>
+              <a:rPr sz="3200" b="1" dirty="0">
+                <a:solidFill>
+                  <a:srgbClr val="15181F"/>
+                </a:solidFill>
+                <a:latin typeface="Onest"/>
+                <a:ea typeface="Onest"/>
+                <a:cs typeface="Onest"/>
+              </a:rPr>
+              <a:t> </a:t>
+            </a:r>
+            <a:r>
+              <a:rPr sz="3200" b="1" dirty="0" err="1">
+                <a:solidFill>
+                  <a:srgbClr val="15181F"/>
+                </a:solidFill>
+                <a:latin typeface="Onest"/>
+                <a:ea typeface="Onest"/>
+                <a:cs typeface="Onest"/>
+              </a:rPr>
+              <a:t>чисел</a:t>
+            </a:r>
+            <a:r>
+              <a:rPr sz="3200" b="1" dirty="0">
+                <a:solidFill>
+                  <a:srgbClr val="15181F"/>
+                </a:solidFill>
+                <a:latin typeface="Onest"/>
+                <a:ea typeface="Onest"/>
+                <a:cs typeface="Onest"/>
+              </a:rPr>
+              <a:t> с </a:t>
+            </a:r>
+            <a:r>
+              <a:rPr sz="3200" b="1" dirty="0" err="1">
+                <a:solidFill>
+                  <a:srgbClr val="15181F"/>
+                </a:solidFill>
+                <a:latin typeface="Onest"/>
+                <a:ea typeface="Onest"/>
+                <a:cs typeface="Onest"/>
+              </a:rPr>
+              <a:t>применением</a:t>
+            </a:r>
+            <a:r>
+              <a:rPr sz="3200" b="1" dirty="0">
+                <a:solidFill>
+                  <a:srgbClr val="15181F"/>
+                </a:solidFill>
+                <a:latin typeface="Onest"/>
+                <a:ea typeface="Onest"/>
+                <a:cs typeface="Onest"/>
+              </a:rPr>
+              <a:t> </a:t>
+            </a:r>
+            <a:r>
+              <a:rPr sz="3200" b="1" dirty="0" err="1">
+                <a:solidFill>
+                  <a:srgbClr val="15181F"/>
+                </a:solidFill>
+                <a:latin typeface="Onest"/>
+                <a:ea typeface="Onest"/>
+                <a:cs typeface="Onest"/>
+              </a:rPr>
+              <a:t>эллиптических</a:t>
+            </a:r>
+            <a:r>
+              <a:rPr sz="3200" b="1" dirty="0">
+                <a:solidFill>
+                  <a:srgbClr val="15181F"/>
+                </a:solidFill>
+                <a:latin typeface="Onest"/>
+                <a:ea typeface="Onest"/>
+                <a:cs typeface="Onest"/>
+              </a:rPr>
+              <a:t> </a:t>
+            </a:r>
+            <a:r>
+              <a:rPr sz="3200" b="1" dirty="0" err="1">
+                <a:solidFill>
+                  <a:srgbClr val="15181F"/>
+                </a:solidFill>
+                <a:latin typeface="Onest"/>
+                <a:ea typeface="Onest"/>
+                <a:cs typeface="Onest"/>
+              </a:rPr>
+              <a:t>кривых</a:t>
+            </a:r>
+            <a:r>
+              <a:rPr sz="3200" b="1" dirty="0">
+                <a:solidFill>
+                  <a:srgbClr val="15181F"/>
+                </a:solidFill>
+                <a:latin typeface="Onest"/>
+                <a:ea typeface="Onest"/>
+                <a:cs typeface="Onest"/>
+              </a:rPr>
+              <a:t> </a:t>
+            </a:r>
+            <a:r>
+              <a:rPr sz="3200" b="1" dirty="0" err="1">
+                <a:solidFill>
+                  <a:srgbClr val="15181F"/>
+                </a:solidFill>
+                <a:latin typeface="Onest"/>
+                <a:ea typeface="Onest"/>
+                <a:cs typeface="Onest"/>
+              </a:rPr>
+              <a:t>на</a:t>
+            </a:r>
+            <a:r>
+              <a:rPr sz="3200" b="1" dirty="0">
+                <a:solidFill>
+                  <a:srgbClr val="15181F"/>
+                </a:solidFill>
+                <a:latin typeface="Onest"/>
+                <a:ea typeface="Onest"/>
+                <a:cs typeface="Onest"/>
+              </a:rPr>
+              <a:t> </a:t>
+            </a:r>
+            <a:r>
+              <a:rPr sz="3200" b="1" dirty="0" err="1">
+                <a:solidFill>
+                  <a:srgbClr val="15181F"/>
+                </a:solidFill>
+                <a:latin typeface="Onest"/>
+                <a:ea typeface="Onest"/>
+                <a:cs typeface="Onest"/>
+              </a:rPr>
+              <a:t>основе</a:t>
+            </a:r>
+            <a:r>
+              <a:rPr sz="3200" b="1" dirty="0">
+                <a:solidFill>
+                  <a:srgbClr val="15181F"/>
+                </a:solidFill>
+                <a:latin typeface="Onest"/>
+                <a:ea typeface="Onest"/>
+                <a:cs typeface="Onest"/>
+              </a:rPr>
+              <a:t> </a:t>
+            </a:r>
+            <a:r>
+              <a:rPr sz="3200" b="1" dirty="0" err="1">
+                <a:solidFill>
+                  <a:srgbClr val="15181F"/>
+                </a:solidFill>
+                <a:latin typeface="Onest"/>
+                <a:ea typeface="Onest"/>
+                <a:cs typeface="Onest"/>
+              </a:rPr>
+              <a:t>эвристических</a:t>
+            </a:r>
+            <a:r>
+              <a:rPr sz="3200" b="1" dirty="0">
+                <a:solidFill>
+                  <a:srgbClr val="15181F"/>
+                </a:solidFill>
+                <a:latin typeface="Onest"/>
+                <a:ea typeface="Onest"/>
+                <a:cs typeface="Onest"/>
+              </a:rPr>
+              <a:t> </a:t>
+            </a:r>
+            <a:r>
+              <a:rPr sz="3200" b="1" dirty="0" err="1">
+                <a:solidFill>
+                  <a:srgbClr val="15181F"/>
+                </a:solidFill>
+                <a:latin typeface="Onest"/>
+                <a:ea typeface="Onest"/>
+                <a:cs typeface="Onest"/>
+              </a:rPr>
+              <a:t>методов</a:t>
+            </a:r>
+            <a:r>
+              <a:rPr sz="3200" b="1" dirty="0">
+                <a:solidFill>
+                  <a:srgbClr val="15181F"/>
+                </a:solidFill>
+                <a:latin typeface="Onest"/>
+                <a:ea typeface="Onest"/>
+                <a:cs typeface="Onest"/>
+              </a:rPr>
+              <a:t> </a:t>
+            </a:r>
+            <a:r>
+              <a:rPr sz="3200" b="1" dirty="0" err="1">
+                <a:solidFill>
+                  <a:srgbClr val="15181F"/>
+                </a:solidFill>
+                <a:latin typeface="Onest"/>
+                <a:ea typeface="Onest"/>
+                <a:cs typeface="Onest"/>
+              </a:rPr>
+              <a:t>оптимизации</a:t>
+            </a:r>
+            <a:endParaRPr sz="3200" b="1" dirty="0">
+              <a:solidFill>
+                <a:srgbClr val="15181F"/>
+              </a:solidFill>
+              <a:latin typeface="Onest"/>
+              <a:ea typeface="Onest"/>
+              <a:cs typeface="Onest"/>
+            </a:endParaRPr>
           </a:p>
         </p:txBody>
       </p:sp>
@@ -17245,7 +17550,7 @@
               <a:t>специальные</a:t>
             </a:r>
             <a:r>
-              <a:rPr sz="1400" b="0" dirty="0">
+              <a:rPr lang="ru-RU" sz="1400" dirty="0">
                 <a:solidFill>
                   <a:srgbClr val="15181F"/>
                 </a:solidFill>
@@ -17267,7 +17572,7 @@
               <a:t>классы</a:t>
             </a:r>
             <a:r>
-              <a:rPr sz="1400" b="0" dirty="0">
+              <a:rPr lang="ru-RU" sz="1400" dirty="0">
                 <a:solidFill>
                   <a:srgbClr val="15181F"/>
                 </a:solidFill>
@@ -29548,23 +29853,7 @@
                                   <a:ea typeface="Cambria Math"/>
                                   <a:cs typeface="Cambria Math"/>
                                 </a:rPr>
-                                <m:t>𝑚𝑒𝑡</m:t>
-                              </m:r>
-                              <m:r>
-                                <a:rPr lang="ru-RU" sz="1600" b="1" i="1">
-                                  <a:latin typeface="Cambria Math"/>
-                                  <a:ea typeface="Cambria Math"/>
-                                  <a:cs typeface="Cambria Math"/>
-                                </a:rPr>
-                                <m:t>h</m:t>
-                              </m:r>
-                              <m:r>
-                                <a:rPr lang="ru-RU" sz="1600" b="1" i="1">
-                                  <a:latin typeface="Cambria Math"/>
-                                  <a:ea typeface="Cambria Math"/>
-                                  <a:cs typeface="Cambria Math"/>
-                                </a:rPr>
-                                <m:t>𝑜𝑑</m:t>
+                                <m:t>𝑚𝑒𝑡h𝑜𝑑</m:t>
                               </m:r>
                             </m:sub>
                           </m:sSub>

--- a/REPORTS/06_thesis_defense_presentation/Plekhanov_thesis_defense_ECM_parameter_optimization_polytech.pptx
+++ b/REPORTS/06_thesis_defense_presentation/Plekhanov_thesis_defense_ECM_parameter_optimization_polytech.pptx
@@ -14851,7 +14851,7 @@
               </a:defRPr>
             </a:pPr>
             <a:r>
-              <a:rPr sz="2025" b="1" dirty="0">
+              <a:rPr sz="2025" b="1">
                 <a:solidFill>
                   <a:srgbClr val="37B34A"/>
                 </a:solidFill>
@@ -14859,8 +14859,16 @@
                 <a:ea typeface="Onest"/>
                 <a:cs typeface="Onest"/>
               </a:rPr>
-              <a:t>-25,14%</a:t>
-            </a:r>
+              <a:t>-25%</a:t>
+            </a:r>
+            <a:endParaRPr sz="2025" b="1" dirty="0">
+              <a:solidFill>
+                <a:srgbClr val="37B34A"/>
+              </a:solidFill>
+              <a:latin typeface="Onest"/>
+              <a:ea typeface="Onest"/>
+              <a:cs typeface="Onest"/>
+            </a:endParaRPr>
           </a:p>
         </p:txBody>
       </p:sp>
@@ -15100,7 +15108,7 @@
               </a:defRPr>
             </a:pPr>
             <a:r>
-              <a:rPr sz="2025" b="1">
+              <a:rPr sz="2025" b="1" dirty="0">
                 <a:solidFill>
                   <a:srgbClr val="DA4927"/>
                 </a:solidFill>
@@ -15108,7 +15116,7 @@
                 <a:ea typeface="Onest"/>
                 <a:cs typeface="Onest"/>
               </a:rPr>
-              <a:t>-21,04%</a:t>
+              <a:t>-21%</a:t>
             </a:r>
           </a:p>
         </p:txBody>
@@ -15349,7 +15357,7 @@
               </a:defRPr>
             </a:pPr>
             <a:r>
-              <a:rPr sz="2025" b="1">
+              <a:rPr sz="2025" b="1" dirty="0">
                 <a:solidFill>
                   <a:srgbClr val="522878"/>
                 </a:solidFill>
@@ -15357,7 +15365,7 @@
                 <a:ea typeface="Onest"/>
                 <a:cs typeface="Onest"/>
               </a:rPr>
-              <a:t>-62,42%</a:t>
+              <a:t>-62%</a:t>
             </a:r>
           </a:p>
         </p:txBody>
@@ -16217,7 +16225,7 @@
                 <a:ea typeface="Onest"/>
                 <a:cs typeface="Times New Roman" panose="02020603050405020304" pitchFamily="18" charset="0"/>
               </a:rPr>
-              <a:t> black-box </a:t>
+              <a:t> </a:t>
             </a:r>
             <a:r>
               <a:rPr sz="1400" b="0" dirty="0" err="1">
@@ -16229,6 +16237,17 @@
                 <a:cs typeface="Times New Roman" panose="02020603050405020304" pitchFamily="18" charset="0"/>
               </a:rPr>
               <a:t>задача</a:t>
+            </a:r>
+            <a:r>
+              <a:rPr lang="ru-RU" sz="1400" b="0" dirty="0">
+                <a:solidFill>
+                  <a:srgbClr val="15181F"/>
+                </a:solidFill>
+                <a:latin typeface="Onest"/>
+                <a:ea typeface="Onest"/>
+                <a:cs typeface="Times New Roman" panose="02020603050405020304" pitchFamily="18" charset="0"/>
+              </a:rPr>
+              <a:t> «черного-ящика»</a:t>
             </a:r>
             <a:r>
               <a:rPr sz="1400" b="0" dirty="0">

--- a/REPORTS/06_thesis_defense_presentation/Plekhanov_thesis_defense_ECM_parameter_optimization_polytech.pptx
+++ b/REPORTS/06_thesis_defense_presentation/Plekhanov_thesis_defense_ECM_parameter_optimization_polytech.pptx
@@ -8732,7 +8732,7 @@
               </a:defRPr>
             </a:pPr>
             <a:r>
-              <a:rPr sz="1600" b="0">
+              <a:rPr sz="1600" b="0" dirty="0" err="1">
                 <a:solidFill>
                   <a:srgbClr val="58606B"/>
                 </a:solidFill>
@@ -8740,8 +8740,126 @@
                 <a:ea typeface="Onest"/>
                 <a:cs typeface="Onest"/>
               </a:rPr>
-              <a:t>Рис. 6. Компромисс между временем оптимизации и выигрышем</a:t>
-            </a:r>
+              <a:t>Рис</a:t>
+            </a:r>
+            <a:r>
+              <a:rPr sz="1600" b="0" dirty="0">
+                <a:solidFill>
+                  <a:srgbClr val="58606B"/>
+                </a:solidFill>
+                <a:latin typeface="Onest"/>
+                <a:ea typeface="Onest"/>
+                <a:cs typeface="Onest"/>
+              </a:rPr>
+              <a:t>. 6. </a:t>
+            </a:r>
+            <a:r>
+              <a:rPr sz="1600" b="0" dirty="0" err="1">
+                <a:solidFill>
+                  <a:srgbClr val="58606B"/>
+                </a:solidFill>
+                <a:latin typeface="Onest"/>
+                <a:ea typeface="Onest"/>
+                <a:cs typeface="Onest"/>
+              </a:rPr>
+              <a:t>Компромисс</a:t>
+            </a:r>
+            <a:r>
+              <a:rPr sz="1600" b="0" dirty="0">
+                <a:solidFill>
+                  <a:srgbClr val="58606B"/>
+                </a:solidFill>
+                <a:latin typeface="Onest"/>
+                <a:ea typeface="Onest"/>
+                <a:cs typeface="Onest"/>
+              </a:rPr>
+              <a:t> </a:t>
+            </a:r>
+            <a:r>
+              <a:rPr sz="1600" b="0" dirty="0" err="1">
+                <a:solidFill>
+                  <a:srgbClr val="58606B"/>
+                </a:solidFill>
+                <a:latin typeface="Onest"/>
+                <a:ea typeface="Onest"/>
+                <a:cs typeface="Onest"/>
+              </a:rPr>
+              <a:t>между</a:t>
+            </a:r>
+            <a:r>
+              <a:rPr sz="1600" b="0" dirty="0">
+                <a:solidFill>
+                  <a:srgbClr val="58606B"/>
+                </a:solidFill>
+                <a:latin typeface="Onest"/>
+                <a:ea typeface="Onest"/>
+                <a:cs typeface="Onest"/>
+              </a:rPr>
+              <a:t> </a:t>
+            </a:r>
+            <a:r>
+              <a:rPr sz="1600" b="0" dirty="0" err="1">
+                <a:solidFill>
+                  <a:srgbClr val="58606B"/>
+                </a:solidFill>
+                <a:latin typeface="Onest"/>
+                <a:ea typeface="Onest"/>
+                <a:cs typeface="Onest"/>
+              </a:rPr>
+              <a:t>временем</a:t>
+            </a:r>
+            <a:r>
+              <a:rPr sz="1600" b="0" dirty="0">
+                <a:solidFill>
+                  <a:srgbClr val="58606B"/>
+                </a:solidFill>
+                <a:latin typeface="Onest"/>
+                <a:ea typeface="Onest"/>
+                <a:cs typeface="Onest"/>
+              </a:rPr>
+              <a:t> </a:t>
+            </a:r>
+            <a:r>
+              <a:rPr sz="1600" b="0" dirty="0" err="1">
+                <a:solidFill>
+                  <a:srgbClr val="58606B"/>
+                </a:solidFill>
+                <a:latin typeface="Onest"/>
+                <a:ea typeface="Onest"/>
+                <a:cs typeface="Onest"/>
+              </a:rPr>
+              <a:t>оптимизации</a:t>
+            </a:r>
+            <a:r>
+              <a:rPr sz="1600" b="0" dirty="0">
+                <a:solidFill>
+                  <a:srgbClr val="58606B"/>
+                </a:solidFill>
+                <a:latin typeface="Onest"/>
+                <a:ea typeface="Onest"/>
+                <a:cs typeface="Onest"/>
+              </a:rPr>
+              <a:t> и </a:t>
+            </a:r>
+            <a:r>
+              <a:rPr sz="1600" b="0" dirty="0" err="1">
+                <a:solidFill>
+                  <a:srgbClr val="58606B"/>
+                </a:solidFill>
+                <a:latin typeface="Onest"/>
+                <a:ea typeface="Onest"/>
+                <a:cs typeface="Onest"/>
+              </a:rPr>
+              <a:t>выигрышем</a:t>
+            </a:r>
+            <a:endParaRPr sz="1600" b="0" dirty="0">
+              <a:solidFill>
+                <a:srgbClr val="58606B"/>
+              </a:solidFill>
+              <a:latin typeface="Onest"/>
+              <a:ea typeface="Onest"/>
+              <a:cs typeface="Onest"/>
+            </a:endParaRPr>
           </a:p>
         </p:txBody>
       </p:sp>
@@ -10428,15 +10546,158 @@
               </a:defRPr>
             </a:pPr>
             <a:r>
-              <a:rPr sz="1800" b="0">
-                <a:solidFill>
-                  <a:srgbClr val="15181F"/>
-                </a:solidFill>
-                <a:latin typeface="Onest"/>
-                <a:ea typeface="Onest"/>
-                <a:cs typeface="Onest"/>
-              </a:rPr>
-              <a:t>Пять эвристических методов сопоставлены в едином воспроизводимом pipeline.</a:t>
+              <a:rPr sz="1800" b="0" dirty="0" err="1">
+                <a:solidFill>
+                  <a:srgbClr val="15181F"/>
+                </a:solidFill>
+                <a:latin typeface="Onest"/>
+                <a:ea typeface="Onest"/>
+                <a:cs typeface="Onest"/>
+              </a:rPr>
+              <a:t>Пять</a:t>
+            </a:r>
+            <a:r>
+              <a:rPr sz="1800" b="0" dirty="0">
+                <a:solidFill>
+                  <a:srgbClr val="15181F"/>
+                </a:solidFill>
+                <a:latin typeface="Onest"/>
+                <a:ea typeface="Onest"/>
+                <a:cs typeface="Onest"/>
+              </a:rPr>
+              <a:t> </a:t>
+            </a:r>
+            <a:r>
+              <a:rPr sz="1800" b="0" dirty="0" err="1">
+                <a:solidFill>
+                  <a:srgbClr val="15181F"/>
+                </a:solidFill>
+                <a:latin typeface="Onest"/>
+                <a:ea typeface="Onest"/>
+                <a:cs typeface="Onest"/>
+              </a:rPr>
+              <a:t>эвристических</a:t>
+            </a:r>
+            <a:r>
+              <a:rPr sz="1800" b="0" dirty="0">
+                <a:solidFill>
+                  <a:srgbClr val="15181F"/>
+                </a:solidFill>
+                <a:latin typeface="Onest"/>
+                <a:ea typeface="Onest"/>
+                <a:cs typeface="Onest"/>
+              </a:rPr>
+              <a:t> </a:t>
+            </a:r>
+            <a:r>
+              <a:rPr sz="1800" b="0" dirty="0" err="1">
+                <a:solidFill>
+                  <a:srgbClr val="15181F"/>
+                </a:solidFill>
+                <a:latin typeface="Onest"/>
+                <a:ea typeface="Onest"/>
+                <a:cs typeface="Onest"/>
+              </a:rPr>
+              <a:t>методов</a:t>
+            </a:r>
+            <a:r>
+              <a:rPr sz="1800" b="0" dirty="0">
+                <a:solidFill>
+                  <a:srgbClr val="15181F"/>
+                </a:solidFill>
+                <a:latin typeface="Onest"/>
+                <a:ea typeface="Onest"/>
+                <a:cs typeface="Onest"/>
+              </a:rPr>
+              <a:t> </a:t>
+            </a:r>
+            <a:r>
+              <a:rPr sz="1800" b="0" dirty="0" err="1">
+                <a:solidFill>
+                  <a:srgbClr val="15181F"/>
+                </a:solidFill>
+                <a:latin typeface="Onest"/>
+                <a:ea typeface="Onest"/>
+                <a:cs typeface="Onest"/>
+              </a:rPr>
+              <a:t>сопоставлены</a:t>
+            </a:r>
+            <a:r>
+              <a:rPr sz="1800" b="0" dirty="0">
+                <a:solidFill>
+                  <a:srgbClr val="15181F"/>
+                </a:solidFill>
+                <a:latin typeface="Onest"/>
+                <a:ea typeface="Onest"/>
+                <a:cs typeface="Onest"/>
+              </a:rPr>
+              <a:t> в </a:t>
+            </a:r>
+            <a:r>
+              <a:rPr sz="1800" b="0" dirty="0" err="1">
+                <a:solidFill>
+                  <a:srgbClr val="15181F"/>
+                </a:solidFill>
+                <a:latin typeface="Onest"/>
+                <a:ea typeface="Onest"/>
+                <a:cs typeface="Onest"/>
+              </a:rPr>
+              <a:t>едином</a:t>
+            </a:r>
+            <a:r>
+              <a:rPr sz="1800" b="0" dirty="0">
+                <a:solidFill>
+                  <a:srgbClr val="15181F"/>
+                </a:solidFill>
+                <a:latin typeface="Onest"/>
+                <a:ea typeface="Onest"/>
+                <a:cs typeface="Onest"/>
+              </a:rPr>
+              <a:t> </a:t>
+            </a:r>
+            <a:r>
+              <a:rPr sz="1800" b="0" dirty="0" err="1">
+                <a:solidFill>
+                  <a:srgbClr val="15181F"/>
+                </a:solidFill>
+                <a:latin typeface="Onest"/>
+                <a:ea typeface="Onest"/>
+                <a:cs typeface="Onest"/>
+              </a:rPr>
+              <a:t>воспроизводимом</a:t>
+            </a:r>
+            <a:r>
+              <a:rPr sz="1800" b="0" dirty="0">
+                <a:solidFill>
+                  <a:srgbClr val="15181F"/>
+                </a:solidFill>
+                <a:latin typeface="Onest"/>
+                <a:ea typeface="Onest"/>
+                <a:cs typeface="Onest"/>
+              </a:rPr>
+              <a:t> </a:t>
+            </a:r>
+            <a:r>
+              <a:rPr lang="ru-RU" sz="1800" b="0" dirty="0" err="1">
+                <a:solidFill>
+                  <a:srgbClr val="15181F"/>
+                </a:solidFill>
+                <a:latin typeface="Onest"/>
+                <a:ea typeface="Onest"/>
+                <a:cs typeface="Onest"/>
+              </a:rPr>
+              <a:t>конвеере</a:t>
+            </a:r>
+            <a:r>
+              <a:rPr sz="1800" b="0" dirty="0">
+                <a:solidFill>
+                  <a:srgbClr val="15181F"/>
+                </a:solidFill>
+                <a:latin typeface="Onest"/>
+                <a:ea typeface="Onest"/>
+                <a:cs typeface="Onest"/>
+              </a:rPr>
+              <a:t>.</a:t>
             </a:r>
           </a:p>
         </p:txBody>

--- a/REPORTS/06_thesis_defense_presentation/Plekhanov_thesis_defense_ECM_parameter_optimization_polytech.pptx
+++ b/REPORTS/06_thesis_defense_presentation/Plekhanov_thesis_defense_ECM_parameter_optimization_polytech.pptx
@@ -3403,6 +3403,17 @@
               <a:t>офактор</a:t>
             </a:r>
             <a:r>
+              <a:rPr lang="ru-RU" sz="1800" b="0" dirty="0">
+                <a:solidFill>
+                  <a:srgbClr val="58606B"/>
+                </a:solidFill>
+                <a:latin typeface="Onest"/>
+                <a:ea typeface="Onest"/>
+                <a:cs typeface="Onest"/>
+              </a:rPr>
+              <a:t>, простой</a:t>
+            </a:r>
+            <a:r>
               <a:rPr sz="1800" b="0" dirty="0">
                 <a:solidFill>
                   <a:srgbClr val="58606B"/>
@@ -6529,7 +6540,7 @@
               </a:defRPr>
             </a:pPr>
             <a:r>
-              <a:rPr sz="2175" b="1">
+              <a:rPr sz="2175" b="1" dirty="0">
                 <a:solidFill>
                   <a:srgbClr val="37B34A"/>
                 </a:solidFill>
@@ -6537,7 +6548,7 @@
                 <a:ea typeface="Onest"/>
                 <a:cs typeface="Onest"/>
               </a:rPr>
-              <a:t>-25,14%</a:t>
+              <a:t>-25%</a:t>
             </a:r>
           </a:p>
         </p:txBody>
@@ -6703,7 +6714,7 @@
               </a:defRPr>
             </a:pPr>
             <a:r>
-              <a:rPr sz="2175" b="1">
+              <a:rPr sz="2175" b="1" dirty="0">
                 <a:solidFill>
                   <a:srgbClr val="522878"/>
                 </a:solidFill>
@@ -6711,7 +6722,7 @@
                 <a:ea typeface="Onest"/>
                 <a:cs typeface="Onest"/>
               </a:rPr>
-              <a:t>-62,42%</a:t>
+              <a:t>-62%</a:t>
             </a:r>
           </a:p>
         </p:txBody>

--- a/REPORTS/06_thesis_defense_presentation/Plekhanov_thesis_defense_ECM_parameter_optimization_polytech.pptx
+++ b/REPORTS/06_thesis_defense_presentation/Plekhanov_thesis_defense_ECM_parameter_optimization_polytech.pptx
@@ -30144,7 +30144,23 @@
                                   <a:ea typeface="Cambria Math"/>
                                   <a:cs typeface="Cambria Math"/>
                                 </a:rPr>
-                                <m:t>𝑚𝑒𝑡h𝑜𝑑</m:t>
+                                <m:t>𝑚𝑒𝑡</m:t>
+                              </m:r>
+                              <m:r>
+                                <a:rPr lang="ru-RU" sz="1600" b="1" i="1">
+                                  <a:latin typeface="Cambria Math"/>
+                                  <a:ea typeface="Cambria Math"/>
+                                  <a:cs typeface="Cambria Math"/>
+                                </a:rPr>
+                                <m:t>h</m:t>
+                              </m:r>
+                              <m:r>
+                                <a:rPr lang="ru-RU" sz="1600" b="1" i="1">
+                                  <a:latin typeface="Cambria Math"/>
+                                  <a:ea typeface="Cambria Math"/>
+                                  <a:cs typeface="Cambria Math"/>
+                                </a:rPr>
+                                <m:t>𝑜𝑑</m:t>
                               </m:r>
                             </m:sub>
                           </m:sSub>
